--- a/Eesti_kinnisvaraturu_ja_ostujõu_analüüs_esitlus.pptx
+++ b/Eesti_kinnisvaraturu_ja_ostujõu_analüüs_esitlus.pptx
@@ -2,26 +2,28 @@
 <file path=ppt/presentation.xml><?xml version="1.0" encoding="utf-8"?>
 <p:presentation xmlns:a="http://schemas.openxmlformats.org/drawingml/2006/main" xmlns:r="http://schemas.openxmlformats.org/officeDocument/2006/relationships" xmlns:p="http://schemas.openxmlformats.org/presentationml/2006/main" saveSubsetFonts="1" autoCompressPictures="0">
   <p:sldMasterIdLst>
-    <p:sldMasterId id="2147483648" r:id="rId1"/>
+    <p:sldMasterId id="2147483864" r:id="rId1"/>
   </p:sldMasterIdLst>
   <p:notesMasterIdLst>
-    <p:notesMasterId r:id="rId11"/>
+    <p:notesMasterId r:id="rId10"/>
   </p:notesMasterIdLst>
   <p:sldIdLst>
     <p:sldId id="256" r:id="rId2"/>
     <p:sldId id="257" r:id="rId3"/>
-    <p:sldId id="258" r:id="rId4"/>
-    <p:sldId id="259" r:id="rId5"/>
-    <p:sldId id="260" r:id="rId6"/>
-    <p:sldId id="261" r:id="rId7"/>
-    <p:sldId id="262" r:id="rId8"/>
-    <p:sldId id="263" r:id="rId9"/>
-    <p:sldId id="264" r:id="rId10"/>
+    <p:sldId id="265" r:id="rId4"/>
+    <p:sldId id="258" r:id="rId5"/>
+    <p:sldId id="259" r:id="rId6"/>
+    <p:sldId id="262" r:id="rId7"/>
+    <p:sldId id="263" r:id="rId8"/>
+    <p:sldId id="264" r:id="rId9"/>
   </p:sldIdLst>
   <p:sldSz cx="9144000" cy="5143500" type="screen16x9"/>
   <p:notesSz cx="5143500" cy="9144000"/>
   <p:defaultTextStyle>
-    <a:lvl1pPr marL="0" algn="l" defTabSz="914400" rtl="0" eaLnBrk="1" latinLnBrk="0" hangingPunct="1">
+    <a:defPPr>
+      <a:defRPr lang="en-US"/>
+    </a:defPPr>
+    <a:lvl1pPr marL="0" algn="l" defTabSz="457200" rtl="0" eaLnBrk="1" latinLnBrk="0" hangingPunct="1">
       <a:defRPr sz="1800" kern="1200">
         <a:solidFill>
           <a:schemeClr val="tx1"/>
@@ -31,7 +33,7 @@
         <a:cs typeface="+mn-cs"/>
       </a:defRPr>
     </a:lvl1pPr>
-    <a:lvl2pPr marL="457200" algn="l" defTabSz="914400" rtl="0" eaLnBrk="1" latinLnBrk="0" hangingPunct="1">
+    <a:lvl2pPr marL="457200" algn="l" defTabSz="457200" rtl="0" eaLnBrk="1" latinLnBrk="0" hangingPunct="1">
       <a:defRPr sz="1800" kern="1200">
         <a:solidFill>
           <a:schemeClr val="tx1"/>
@@ -41,7 +43,7 @@
         <a:cs typeface="+mn-cs"/>
       </a:defRPr>
     </a:lvl2pPr>
-    <a:lvl3pPr marL="914400" algn="l" defTabSz="914400" rtl="0" eaLnBrk="1" latinLnBrk="0" hangingPunct="1">
+    <a:lvl3pPr marL="914400" algn="l" defTabSz="457200" rtl="0" eaLnBrk="1" latinLnBrk="0" hangingPunct="1">
       <a:defRPr sz="1800" kern="1200">
         <a:solidFill>
           <a:schemeClr val="tx1"/>
@@ -51,7 +53,7 @@
         <a:cs typeface="+mn-cs"/>
       </a:defRPr>
     </a:lvl3pPr>
-    <a:lvl4pPr marL="1371600" algn="l" defTabSz="914400" rtl="0" eaLnBrk="1" latinLnBrk="0" hangingPunct="1">
+    <a:lvl4pPr marL="1371600" algn="l" defTabSz="457200" rtl="0" eaLnBrk="1" latinLnBrk="0" hangingPunct="1">
       <a:defRPr sz="1800" kern="1200">
         <a:solidFill>
           <a:schemeClr val="tx1"/>
@@ -61,7 +63,7 @@
         <a:cs typeface="+mn-cs"/>
       </a:defRPr>
     </a:lvl4pPr>
-    <a:lvl5pPr marL="1828800" algn="l" defTabSz="914400" rtl="0" eaLnBrk="1" latinLnBrk="0" hangingPunct="1">
+    <a:lvl5pPr marL="1828800" algn="l" defTabSz="457200" rtl="0" eaLnBrk="1" latinLnBrk="0" hangingPunct="1">
       <a:defRPr sz="1800" kern="1200">
         <a:solidFill>
           <a:schemeClr val="tx1"/>
@@ -71,7 +73,7 @@
         <a:cs typeface="+mn-cs"/>
       </a:defRPr>
     </a:lvl5pPr>
-    <a:lvl6pPr marL="2286000" algn="l" defTabSz="914400" rtl="0" eaLnBrk="1" latinLnBrk="0" hangingPunct="1">
+    <a:lvl6pPr marL="2286000" algn="l" defTabSz="457200" rtl="0" eaLnBrk="1" latinLnBrk="0" hangingPunct="1">
       <a:defRPr sz="1800" kern="1200">
         <a:solidFill>
           <a:schemeClr val="tx1"/>
@@ -81,7 +83,7 @@
         <a:cs typeface="+mn-cs"/>
       </a:defRPr>
     </a:lvl6pPr>
-    <a:lvl7pPr marL="2743200" algn="l" defTabSz="914400" rtl="0" eaLnBrk="1" latinLnBrk="0" hangingPunct="1">
+    <a:lvl7pPr marL="2743200" algn="l" defTabSz="457200" rtl="0" eaLnBrk="1" latinLnBrk="0" hangingPunct="1">
       <a:defRPr sz="1800" kern="1200">
         <a:solidFill>
           <a:schemeClr val="tx1"/>
@@ -91,7 +93,7 @@
         <a:cs typeface="+mn-cs"/>
       </a:defRPr>
     </a:lvl7pPr>
-    <a:lvl8pPr marL="3200400" algn="l" defTabSz="914400" rtl="0" eaLnBrk="1" latinLnBrk="0" hangingPunct="1">
+    <a:lvl8pPr marL="3200400" algn="l" defTabSz="457200" rtl="0" eaLnBrk="1" latinLnBrk="0" hangingPunct="1">
       <a:defRPr sz="1800" kern="1200">
         <a:solidFill>
           <a:schemeClr val="tx1"/>
@@ -101,7 +103,7 @@
         <a:cs typeface="+mn-cs"/>
       </a:defRPr>
     </a:lvl8pPr>
-    <a:lvl9pPr marL="3657600" algn="l" defTabSz="914400" rtl="0" eaLnBrk="1" latinLnBrk="0" hangingPunct="1">
+    <a:lvl9pPr marL="3657600" algn="l" defTabSz="457200" rtl="0" eaLnBrk="1" latinLnBrk="0" hangingPunct="1">
       <a:defRPr sz="1800" kern="1200">
         <a:solidFill>
           <a:schemeClr val="tx1"/>
@@ -119,10 +121,8 @@
           <p14:sldIdLst>
             <p14:sldId id="256"/>
             <p14:sldId id="257"/>
+            <p14:sldId id="265"/>
           </p14:sldIdLst>
-        </p14:section>
-        <p14:section name="Tutvustus" id="{4D529A0A-A9F6-AC32-EC38-0F39539BE704}">
-          <p14:sldIdLst/>
         </p14:section>
         <p14:section name="Andmevoog ja puhastus" id="{17FDB3FA-4C09-DCB6-A168-0578690AAFAD}">
           <p14:sldIdLst>
@@ -130,16 +130,7 @@
             <p14:sldId id="259"/>
           </p14:sldIdLst>
         </p14:section>
-        <p14:section name="Andmevoog ja puhastus" id="{4E4C4534-18D6-4A26-919C-0CC25B49CE7D}">
-          <p14:sldIdLst/>
-        </p14:section>
         <p14:section name="Lahendus ja aruanne" id="{4EA0CA45-EA3C-13A1-EF8C-9E327BC38E20}">
-          <p14:sldIdLst>
-            <p14:sldId id="260"/>
-            <p14:sldId id="261"/>
-          </p14:sldIdLst>
-        </p14:section>
-        <p14:section name="Lahendus ja aruanne" id="{50293F0F-EA48-351D-3E25-64AD468C1D6A}">
           <p14:sldIdLst/>
         </p14:section>
         <p14:section name="Dokumentatsioon ja tiim" id="{12C37D27-26F4-1E52-AD9E-B740780AEE98}">
@@ -533,7 +524,7 @@
           <a:p>
             <a:fld id="{F7021451-1387-4CA6-816F-3879F97B5CBC}" type="slidenum">
               <a:rPr lang="en-US"/>
-              <a:t>3</a:t>
+              <a:t>4</a:t>
             </a:fld>
             <a:endParaRPr lang="en-US"/>
           </a:p>
@@ -620,7 +611,7 @@
           <a:p>
             <a:fld id="{F7021451-1387-4CA6-816F-3879F97B5CBC}" type="slidenum">
               <a:rPr lang="en-US"/>
-              <a:t>4</a:t>
+              <a:t>5</a:t>
             </a:fld>
             <a:endParaRPr lang="en-US"/>
           </a:p>
@@ -685,7 +676,7 @@
           <a:p>
             <a:r>
               <a:rPr lang="en-US" dirty="0"/>
-              <a:t>Kasutuslugu 1 (Power BI): koduostja valib maakonna ja näeb, kuidas keskmine brutopalk ja korterite m² hind aastate jooksul liiguvad ning kus käärid kõige suuremaks muutuvad. Näita 2–3 maakonda (nt Harju vs Ida-Viru).</a:t>
+              <a:t>Näita kiirelt README-d ja koodikommentaare GitHubis. Siis üks lause iga liikme kohta: kes mille eest vastutas. Asenda kohatäited päris nimede ja rollidega.</a:t>
             </a:r>
           </a:p>
         </p:txBody>
@@ -707,7 +698,7 @@
           <a:p>
             <a:fld id="{F7021451-1387-4CA6-816F-3879F97B5CBC}" type="slidenum">
               <a:rPr lang="en-US"/>
-              <a:t>5</a:t>
+              <a:t>6</a:t>
             </a:fld>
             <a:endParaRPr lang="en-US"/>
           </a:p>
@@ -772,7 +763,7 @@
           <a:p>
             <a:r>
               <a:rPr lang="en-US" dirty="0"/>
-              <a:t>Kasutuslugu 2 (R-skript Power BI-s): trajektoori kõrvalekalded näitavad, kus kinnisvara kallines palgast kiiremini. Mulli suurus on tehinguaktiivsus; vaikimisi 5 aktiivseimat maakonda. Lõpuks mainige 3 äppi: m² hinna prognoos, Ostujõu Kompass ja „Mitu m² saad ühe kuupalgaga?“.</a:t>
+              <a:t>Hästi / keeruline on võetud projekti dokumentatsioonist. Veerg „Järgmisel korral“ on ettepanek – kohanda see oma grupi päris kogemusega.</a:t>
             </a:r>
           </a:p>
         </p:txBody>
@@ -794,7 +785,7 @@
           <a:p>
             <a:fld id="{F7021451-1387-4CA6-816F-3879F97B5CBC}" type="slidenum">
               <a:rPr lang="en-US"/>
-              <a:t>6</a:t>
+              <a:t>7</a:t>
             </a:fld>
             <a:endParaRPr lang="en-US"/>
           </a:p>
@@ -859,7 +850,7 @@
           <a:p>
             <a:r>
               <a:rPr lang="en-US" dirty="0"/>
-              <a:t>Näita kiirelt README-d ja koodikommentaare GitHubis. Siis üks lause iga liikme kohta: kes mille eest vastutas. Asenda kohatäited päris nimede ja rollidega.</a:t>
+              <a:t>Näita GitHubi linki ja QR-koodi, täname kuulajaid, küsimused.</a:t>
             </a:r>
           </a:p>
         </p:txBody>
@@ -881,7 +872,7 @@
           <a:p>
             <a:fld id="{F7021451-1387-4CA6-816F-3879F97B5CBC}" type="slidenum">
               <a:rPr lang="en-US"/>
-              <a:t>7</a:t>
+              <a:t>8</a:t>
             </a:fld>
             <a:endParaRPr lang="en-US"/>
           </a:p>
@@ -900,9 +891,9 @@
 </p:notes>
 </file>
 
-<file path=ppt/notesSlides/notesSlide8.xml><?xml version="1.0" encoding="utf-8"?>
-<p:notes xmlns:a="http://schemas.openxmlformats.org/drawingml/2006/main" xmlns:r="http://schemas.openxmlformats.org/officeDocument/2006/relationships" xmlns:p="http://schemas.openxmlformats.org/presentationml/2006/main">
-  <p:cSld>
+<file path=ppt/slideLayouts/slideLayout1.xml><?xml version="1.0" encoding="utf-8"?>
+<p:sldLayout xmlns:a="http://schemas.openxmlformats.org/drawingml/2006/main" xmlns:r="http://schemas.openxmlformats.org/officeDocument/2006/relationships" xmlns:p="http://schemas.openxmlformats.org/presentationml/2006/main" showMasterSp="0" type="title" preserve="1">
+  <p:cSld name="Title Slide">
     <p:spTree>
       <p:nvGrpSpPr>
         <p:cNvPr id="1" name=""/>
@@ -919,24 +910,192 @@
       </p:grpSpPr>
       <p:sp>
         <p:nvSpPr>
-          <p:cNvPr id="2" name="Slide Image Placeholder 1"/>
-          <p:cNvSpPr>
-            <a:spLocks noGrp="1" noRot="1" noChangeAspect="1"/>
-          </p:cNvSpPr>
-          <p:nvPr>
-            <p:ph type="sldImg"/>
+          <p:cNvPr id="2" name="Title 1"/>
+          <p:cNvSpPr>
+            <a:spLocks noGrp="1"/>
+          </p:cNvSpPr>
+          <p:nvPr>
+            <p:ph type="ctrTitle"/>
+          </p:nvPr>
+        </p:nvSpPr>
+        <p:spPr>
+          <a:xfrm>
+            <a:off x="513159" y="514350"/>
+            <a:ext cx="6000750" cy="2228851"/>
+          </a:xfrm>
+        </p:spPr>
+        <p:txBody>
+          <a:bodyPr anchor="b">
+            <a:normAutofit/>
+          </a:bodyPr>
+          <a:lstStyle>
+            <a:lvl1pPr algn="l">
+              <a:defRPr sz="3600">
+                <a:effectLst/>
+              </a:defRPr>
+            </a:lvl1pPr>
+          </a:lstStyle>
+          <a:p>
+            <a:r>
+              <a:rPr lang="en-US"/>
+              <a:t>Click to edit Master title style</a:t>
+            </a:r>
+            <a:endParaRPr lang="en-US" dirty="0"/>
+          </a:p>
+        </p:txBody>
+      </p:sp>
+      <p:sp>
+        <p:nvSpPr>
+          <p:cNvPr id="3" name="Subtitle 2"/>
+          <p:cNvSpPr>
+            <a:spLocks noGrp="1"/>
+          </p:cNvSpPr>
+          <p:nvPr>
+            <p:ph type="subTitle" idx="1"/>
+          </p:nvPr>
+        </p:nvSpPr>
+        <p:spPr>
+          <a:xfrm>
+            <a:off x="513159" y="2882900"/>
+            <a:ext cx="4800600" cy="1460500"/>
+          </a:xfrm>
+        </p:spPr>
+        <p:txBody>
+          <a:bodyPr anchor="t">
+            <a:normAutofit/>
+          </a:bodyPr>
+          <a:lstStyle>
+            <a:lvl1pPr marL="0" indent="0" algn="l">
+              <a:buNone/>
+              <a:defRPr sz="1575">
+                <a:solidFill>
+                  <a:schemeClr val="bg2">
+                    <a:lumMod val="75000"/>
+                  </a:schemeClr>
+                </a:solidFill>
+              </a:defRPr>
+            </a:lvl1pPr>
+            <a:lvl2pPr marL="342900" indent="0" algn="ctr">
+              <a:buNone/>
+              <a:defRPr>
+                <a:solidFill>
+                  <a:schemeClr val="tx1">
+                    <a:tint val="75000"/>
+                  </a:schemeClr>
+                </a:solidFill>
+              </a:defRPr>
+            </a:lvl2pPr>
+            <a:lvl3pPr marL="685800" indent="0" algn="ctr">
+              <a:buNone/>
+              <a:defRPr>
+                <a:solidFill>
+                  <a:schemeClr val="tx1">
+                    <a:tint val="75000"/>
+                  </a:schemeClr>
+                </a:solidFill>
+              </a:defRPr>
+            </a:lvl3pPr>
+            <a:lvl4pPr marL="1028700" indent="0" algn="ctr">
+              <a:buNone/>
+              <a:defRPr>
+                <a:solidFill>
+                  <a:schemeClr val="tx1">
+                    <a:tint val="75000"/>
+                  </a:schemeClr>
+                </a:solidFill>
+              </a:defRPr>
+            </a:lvl4pPr>
+            <a:lvl5pPr marL="1371600" indent="0" algn="ctr">
+              <a:buNone/>
+              <a:defRPr>
+                <a:solidFill>
+                  <a:schemeClr val="tx1">
+                    <a:tint val="75000"/>
+                  </a:schemeClr>
+                </a:solidFill>
+              </a:defRPr>
+            </a:lvl5pPr>
+            <a:lvl6pPr marL="1714500" indent="0" algn="ctr">
+              <a:buNone/>
+              <a:defRPr>
+                <a:solidFill>
+                  <a:schemeClr val="tx1">
+                    <a:tint val="75000"/>
+                  </a:schemeClr>
+                </a:solidFill>
+              </a:defRPr>
+            </a:lvl6pPr>
+            <a:lvl7pPr marL="2057400" indent="0" algn="ctr">
+              <a:buNone/>
+              <a:defRPr>
+                <a:solidFill>
+                  <a:schemeClr val="tx1">
+                    <a:tint val="75000"/>
+                  </a:schemeClr>
+                </a:solidFill>
+              </a:defRPr>
+            </a:lvl7pPr>
+            <a:lvl8pPr marL="2400300" indent="0" algn="ctr">
+              <a:buNone/>
+              <a:defRPr>
+                <a:solidFill>
+                  <a:schemeClr val="tx1">
+                    <a:tint val="75000"/>
+                  </a:schemeClr>
+                </a:solidFill>
+              </a:defRPr>
+            </a:lvl8pPr>
+            <a:lvl9pPr marL="2743200" indent="0" algn="ctr">
+              <a:buNone/>
+              <a:defRPr>
+                <a:solidFill>
+                  <a:schemeClr val="tx1">
+                    <a:tint val="75000"/>
+                  </a:schemeClr>
+                </a:solidFill>
+              </a:defRPr>
+            </a:lvl9pPr>
+          </a:lstStyle>
+          <a:p>
+            <a:r>
+              <a:rPr lang="en-US"/>
+              <a:t>Click to edit Master subtitle style</a:t>
+            </a:r>
+            <a:endParaRPr lang="en-US" dirty="0"/>
+          </a:p>
+        </p:txBody>
+      </p:sp>
+      <p:sp>
+        <p:nvSpPr>
+          <p:cNvPr id="4" name="Date Placeholder 3"/>
+          <p:cNvSpPr>
+            <a:spLocks noGrp="1"/>
+          </p:cNvSpPr>
+          <p:nvPr>
+            <p:ph type="dt" sz="half" idx="10"/>
           </p:nvPr>
         </p:nvSpPr>
         <p:spPr/>
-      </p:sp>
-      <p:sp>
-        <p:nvSpPr>
-          <p:cNvPr id="3" name="Notes Placeholder 2"/>
-          <p:cNvSpPr>
-            <a:spLocks noGrp="1"/>
-          </p:cNvSpPr>
-          <p:nvPr>
-            <p:ph type="body" idx="1"/>
+        <p:txBody>
+          <a:bodyPr/>
+          <a:lstStyle/>
+          <a:p>
+            <a:fld id="{6AD6EE87-EBD5-4F12-A48A-63ACA297AC8F}" type="datetimeFigureOut">
+              <a:rPr lang="en-US" smtClean="0"/>
+              <a:t>10/6/2026</a:t>
+            </a:fld>
+            <a:endParaRPr lang="en-US" dirty="0"/>
+          </a:p>
+        </p:txBody>
+      </p:sp>
+      <p:sp>
+        <p:nvSpPr>
+          <p:cNvPr id="5" name="Footer Placeholder 4"/>
+          <p:cNvSpPr>
+            <a:spLocks noGrp="1"/>
+          </p:cNvSpPr>
+          <p:nvPr>
+            <p:ph type="ftr" sz="quarter" idx="11"/>
           </p:nvPr>
         </p:nvSpPr>
         <p:spPr/>
@@ -944,21 +1103,18 @@
           <a:bodyPr/>
           <a:lstStyle/>
           <a:p>
-            <a:r>
-              <a:rPr lang="en-US" dirty="0"/>
-              <a:t>Hästi / keeruline on võetud projekti dokumentatsioonist. Veerg „Järgmisel korral“ on ettepanek – kohanda see oma grupi päris kogemusega.</a:t>
-            </a:r>
-          </a:p>
-        </p:txBody>
-      </p:sp>
-      <p:sp>
-        <p:nvSpPr>
-          <p:cNvPr id="4" name="Slide Number Placeholder 3"/>
-          <p:cNvSpPr>
-            <a:spLocks noGrp="1"/>
-          </p:cNvSpPr>
-          <p:nvPr>
-            <p:ph type="sldNum" sz="quarter" idx="10"/>
+            <a:endParaRPr lang="en-US" dirty="0"/>
+          </a:p>
+        </p:txBody>
+      </p:sp>
+      <p:sp>
+        <p:nvSpPr>
+          <p:cNvPr id="6" name="Slide Number Placeholder 5"/>
+          <p:cNvSpPr>
+            <a:spLocks noGrp="1"/>
+          </p:cNvSpPr>
+          <p:nvPr>
+            <p:ph type="sldNum" sz="quarter" idx="12"/>
           </p:nvPr>
         </p:nvSpPr>
         <p:spPr/>
@@ -966,30 +1122,207 @@
           <a:bodyPr/>
           <a:lstStyle/>
           <a:p>
+            <a:pPr algn="r"/>
             <a:fld id="{F7021451-1387-4CA6-816F-3879F97B5CBC}" type="slidenum">
-              <a:rPr lang="en-US"/>
-              <a:t>8</a:t>
+              <a:rPr lang="en-US" b="0" smtClean="0"/>
+              <a:t>‹#›</a:t>
             </a:fld>
             <a:endParaRPr lang="en-US"/>
           </a:p>
         </p:txBody>
       </p:sp>
+      <p:cxnSp>
+        <p:nvCxnSpPr>
+          <p:cNvPr id="16" name="Straight Connector 15"/>
+          <p:cNvCxnSpPr/>
+          <p:nvPr/>
+        </p:nvCxnSpPr>
+        <p:spPr>
+          <a:xfrm flipH="1">
+            <a:off x="6171009" y="6350"/>
+            <a:ext cx="2857500" cy="2857500"/>
+          </a:xfrm>
+          <a:prstGeom prst="line">
+            <a:avLst/>
+          </a:prstGeom>
+          <a:ln w="12700">
+            <a:solidFill>
+              <a:schemeClr val="tx1"/>
+            </a:solidFill>
+          </a:ln>
+        </p:spPr>
+        <p:style>
+          <a:lnRef idx="2">
+            <a:schemeClr val="accent1"/>
+          </a:lnRef>
+          <a:fillRef idx="0">
+            <a:schemeClr val="accent1"/>
+          </a:fillRef>
+          <a:effectRef idx="1">
+            <a:schemeClr val="accent1"/>
+          </a:effectRef>
+          <a:fontRef idx="minor">
+            <a:schemeClr val="tx1"/>
+          </a:fontRef>
+        </p:style>
+      </p:cxnSp>
+      <p:cxnSp>
+        <p:nvCxnSpPr>
+          <p:cNvPr id="17" name="Straight Connector 16"/>
+          <p:cNvCxnSpPr/>
+          <p:nvPr/>
+        </p:nvCxnSpPr>
+        <p:spPr>
+          <a:xfrm flipH="1">
+            <a:off x="4581128" y="68659"/>
+            <a:ext cx="4560491" cy="4560491"/>
+          </a:xfrm>
+          <a:prstGeom prst="line">
+            <a:avLst/>
+          </a:prstGeom>
+          <a:ln w="12700">
+            <a:solidFill>
+              <a:schemeClr val="tx1"/>
+            </a:solidFill>
+          </a:ln>
+        </p:spPr>
+        <p:style>
+          <a:lnRef idx="2">
+            <a:schemeClr val="accent1"/>
+          </a:lnRef>
+          <a:fillRef idx="0">
+            <a:schemeClr val="accent1"/>
+          </a:fillRef>
+          <a:effectRef idx="1">
+            <a:schemeClr val="accent1"/>
+          </a:effectRef>
+          <a:fontRef idx="minor">
+            <a:schemeClr val="tx1"/>
+          </a:fontRef>
+        </p:style>
+      </p:cxnSp>
+      <p:cxnSp>
+        <p:nvCxnSpPr>
+          <p:cNvPr id="19" name="Straight Connector 18"/>
+          <p:cNvCxnSpPr/>
+          <p:nvPr/>
+        </p:nvCxnSpPr>
+        <p:spPr>
+          <a:xfrm flipH="1">
+            <a:off x="5426869" y="171450"/>
+            <a:ext cx="3714750" cy="3714750"/>
+          </a:xfrm>
+          <a:prstGeom prst="line">
+            <a:avLst/>
+          </a:prstGeom>
+          <a:ln w="12700">
+            <a:solidFill>
+              <a:schemeClr val="tx1"/>
+            </a:solidFill>
+          </a:ln>
+        </p:spPr>
+        <p:style>
+          <a:lnRef idx="2">
+            <a:schemeClr val="accent1"/>
+          </a:lnRef>
+          <a:fillRef idx="0">
+            <a:schemeClr val="accent1"/>
+          </a:fillRef>
+          <a:effectRef idx="1">
+            <a:schemeClr val="accent1"/>
+          </a:effectRef>
+          <a:fontRef idx="minor">
+            <a:schemeClr val="tx1"/>
+          </a:fontRef>
+        </p:style>
+      </p:cxnSp>
+      <p:cxnSp>
+        <p:nvCxnSpPr>
+          <p:cNvPr id="21" name="Straight Connector 20"/>
+          <p:cNvCxnSpPr/>
+          <p:nvPr/>
+        </p:nvCxnSpPr>
+        <p:spPr>
+          <a:xfrm flipH="1">
+            <a:off x="5501878" y="24209"/>
+            <a:ext cx="3639742" cy="3639742"/>
+          </a:xfrm>
+          <a:prstGeom prst="line">
+            <a:avLst/>
+          </a:prstGeom>
+          <a:ln w="31750">
+            <a:solidFill>
+              <a:schemeClr val="tx1"/>
+            </a:solidFill>
+          </a:ln>
+        </p:spPr>
+        <p:style>
+          <a:lnRef idx="2">
+            <a:schemeClr val="accent1"/>
+          </a:lnRef>
+          <a:fillRef idx="0">
+            <a:schemeClr val="accent1"/>
+          </a:fillRef>
+          <a:effectRef idx="1">
+            <a:schemeClr val="accent1"/>
+          </a:effectRef>
+          <a:fontRef idx="minor">
+            <a:schemeClr val="tx1"/>
+          </a:fontRef>
+        </p:style>
+      </p:cxnSp>
+      <p:cxnSp>
+        <p:nvCxnSpPr>
+          <p:cNvPr id="23" name="Straight Connector 22"/>
+          <p:cNvCxnSpPr/>
+          <p:nvPr/>
+        </p:nvCxnSpPr>
+        <p:spPr>
+          <a:xfrm flipH="1">
+            <a:off x="5884070" y="457201"/>
+            <a:ext cx="3257549" cy="3257549"/>
+          </a:xfrm>
+          <a:prstGeom prst="line">
+            <a:avLst/>
+          </a:prstGeom>
+          <a:ln w="31750">
+            <a:solidFill>
+              <a:schemeClr val="tx1"/>
+            </a:solidFill>
+          </a:ln>
+        </p:spPr>
+        <p:style>
+          <a:lnRef idx="2">
+            <a:schemeClr val="accent1"/>
+          </a:lnRef>
+          <a:fillRef idx="0">
+            <a:schemeClr val="accent1"/>
+          </a:fillRef>
+          <a:effectRef idx="1">
+            <a:schemeClr val="accent1"/>
+          </a:effectRef>
+          <a:fontRef idx="minor">
+            <a:schemeClr val="tx1"/>
+          </a:fontRef>
+        </p:style>
+      </p:cxnSp>
     </p:spTree>
     <p:extLst>
       <p:ext uri="{BB962C8B-B14F-4D97-AF65-F5344CB8AC3E}">
-        <p14:creationId xmlns:p14="http://schemas.microsoft.com/office/powerpoint/2010/main" val="1024086991"/>
+        <p14:creationId xmlns:p14="http://schemas.microsoft.com/office/powerpoint/2010/main" val="1071080699"/>
       </p:ext>
     </p:extLst>
   </p:cSld>
   <p:clrMapOvr>
     <a:masterClrMapping/>
   </p:clrMapOvr>
-</p:notes>
+  <p:hf sldNum="0" hdr="0" ftr="0" dt="0"/>
+</p:sldLayout>
 </file>
 
-<file path=ppt/notesSlides/notesSlide9.xml><?xml version="1.0" encoding="utf-8"?>
-<p:notes xmlns:a="http://schemas.openxmlformats.org/drawingml/2006/main" xmlns:r="http://schemas.openxmlformats.org/officeDocument/2006/relationships" xmlns:p="http://schemas.openxmlformats.org/presentationml/2006/main">
-  <p:cSld>
+<file path=ppt/slideLayouts/slideLayout10.xml><?xml version="1.0" encoding="utf-8"?>
+<p:sldLayout xmlns:a="http://schemas.openxmlformats.org/drawingml/2006/main" xmlns:r="http://schemas.openxmlformats.org/officeDocument/2006/relationships" xmlns:p="http://schemas.openxmlformats.org/presentationml/2006/main" preserve="1">
+  <p:cSld name="Panoramic Picture with Caption">
     <p:spTree>
       <p:nvGrpSpPr>
         <p:cNvPr id="1" name=""/>
@@ -1006,24 +1339,178 @@
       </p:grpSpPr>
       <p:sp>
         <p:nvSpPr>
-          <p:cNvPr id="2" name="Slide Image Placeholder 1"/>
-          <p:cNvSpPr>
-            <a:spLocks noGrp="1" noRot="1" noChangeAspect="1"/>
-          </p:cNvSpPr>
-          <p:nvPr>
-            <p:ph type="sldImg"/>
+          <p:cNvPr id="2" name="Title 1"/>
+          <p:cNvSpPr>
+            <a:spLocks noGrp="1"/>
+          </p:cNvSpPr>
+          <p:nvPr>
+            <p:ph type="title"/>
           </p:nvPr>
         </p:nvSpPr>
         <p:spPr/>
-      </p:sp>
-      <p:sp>
-        <p:nvSpPr>
-          <p:cNvPr id="3" name="Notes Placeholder 2"/>
-          <p:cNvSpPr>
-            <a:spLocks noGrp="1"/>
-          </p:cNvSpPr>
-          <p:nvPr>
-            <p:ph type="body" idx="1"/>
+        <p:txBody>
+          <a:bodyPr/>
+          <a:lstStyle/>
+          <a:p>
+            <a:r>
+              <a:rPr lang="en-US"/>
+              <a:t>Click to edit Master title style</a:t>
+            </a:r>
+            <a:endParaRPr lang="en-US" dirty="0"/>
+          </a:p>
+        </p:txBody>
+      </p:sp>
+      <p:sp>
+        <p:nvSpPr>
+          <p:cNvPr id="17" name="Picture Placeholder 2"/>
+          <p:cNvSpPr>
+            <a:spLocks noGrp="1" noChangeAspect="1"/>
+          </p:cNvSpPr>
+          <p:nvPr>
+            <p:ph type="pic" idx="13"/>
+          </p:nvPr>
+        </p:nvSpPr>
+        <p:spPr>
+          <a:xfrm>
+            <a:off x="514350" y="400050"/>
+            <a:ext cx="8114109" cy="2343150"/>
+          </a:xfrm>
+          <a:prstGeom prst="snip2DiagRect">
+            <a:avLst>
+              <a:gd name="adj1" fmla="val 10815"/>
+              <a:gd name="adj2" fmla="val 0"/>
+            </a:avLst>
+          </a:prstGeom>
+          <a:ln w="15875">
+            <a:solidFill>
+              <a:schemeClr val="tx1">
+                <a:alpha val="40000"/>
+              </a:schemeClr>
+            </a:solidFill>
+          </a:ln>
+          <a:effectLst>
+            <a:innerShdw blurRad="57150" dist="38100" dir="14460000">
+              <a:srgbClr val="000000">
+                <a:alpha val="70000"/>
+              </a:srgbClr>
+            </a:innerShdw>
+          </a:effectLst>
+        </p:spPr>
+        <p:txBody>
+          <a:bodyPr anchor="t">
+            <a:normAutofit/>
+          </a:bodyPr>
+          <a:lstStyle>
+            <a:lvl1pPr marL="0" indent="0" algn="ctr">
+              <a:buNone/>
+              <a:defRPr sz="1200"/>
+            </a:lvl1pPr>
+            <a:lvl2pPr marL="342900" indent="0">
+              <a:buNone/>
+              <a:defRPr sz="1200"/>
+            </a:lvl2pPr>
+            <a:lvl3pPr marL="685800" indent="0">
+              <a:buNone/>
+              <a:defRPr sz="1200"/>
+            </a:lvl3pPr>
+            <a:lvl4pPr marL="1028700" indent="0">
+              <a:buNone/>
+              <a:defRPr sz="1200"/>
+            </a:lvl4pPr>
+            <a:lvl5pPr marL="1371600" indent="0">
+              <a:buNone/>
+              <a:defRPr sz="1200"/>
+            </a:lvl5pPr>
+            <a:lvl6pPr marL="1714500" indent="0">
+              <a:buNone/>
+              <a:defRPr sz="1200"/>
+            </a:lvl6pPr>
+            <a:lvl7pPr marL="2057400" indent="0">
+              <a:buNone/>
+              <a:defRPr sz="1200"/>
+            </a:lvl7pPr>
+            <a:lvl8pPr marL="2400300" indent="0">
+              <a:buNone/>
+              <a:defRPr sz="1200"/>
+            </a:lvl8pPr>
+            <a:lvl9pPr marL="2743200" indent="0">
+              <a:buNone/>
+              <a:defRPr sz="1200"/>
+            </a:lvl9pPr>
+          </a:lstStyle>
+          <a:p>
+            <a:r>
+              <a:rPr lang="en-US"/>
+              <a:t>Click icon to add picture</a:t>
+            </a:r>
+            <a:endParaRPr lang="en-US" dirty="0"/>
+          </a:p>
+        </p:txBody>
+      </p:sp>
+      <p:sp>
+        <p:nvSpPr>
+          <p:cNvPr id="16" name="Text Placeholder 9"/>
+          <p:cNvSpPr>
+            <a:spLocks noGrp="1"/>
+          </p:cNvSpPr>
+          <p:nvPr>
+            <p:ph type="body" sz="quarter" idx="14"/>
+          </p:nvPr>
+        </p:nvSpPr>
+        <p:spPr>
+          <a:xfrm>
+            <a:off x="685801" y="2882900"/>
+            <a:ext cx="6228158" cy="342900"/>
+          </a:xfrm>
+        </p:spPr>
+        <p:txBody>
+          <a:bodyPr anchor="t">
+            <a:normAutofit/>
+          </a:bodyPr>
+          <a:lstStyle>
+            <a:lvl1pPr marL="0" indent="0">
+              <a:buFontTx/>
+              <a:buNone/>
+              <a:defRPr sz="1200"/>
+            </a:lvl1pPr>
+            <a:lvl2pPr marL="342900" indent="0">
+              <a:buFontTx/>
+              <a:buNone/>
+              <a:defRPr/>
+            </a:lvl2pPr>
+            <a:lvl3pPr marL="685800" indent="0">
+              <a:buFontTx/>
+              <a:buNone/>
+              <a:defRPr/>
+            </a:lvl3pPr>
+            <a:lvl4pPr marL="1028700" indent="0">
+              <a:buFontTx/>
+              <a:buNone/>
+              <a:defRPr/>
+            </a:lvl4pPr>
+            <a:lvl5pPr marL="1371600" indent="0">
+              <a:buFontTx/>
+              <a:buNone/>
+              <a:defRPr/>
+            </a:lvl5pPr>
+          </a:lstStyle>
+          <a:p>
+            <a:pPr lvl="0"/>
+            <a:r>
+              <a:rPr lang="en-US"/>
+              <a:t>Click to edit Master text styles</a:t>
+            </a:r>
+          </a:p>
+        </p:txBody>
+      </p:sp>
+      <p:sp>
+        <p:nvSpPr>
+          <p:cNvPr id="3" name="Date Placeholder 2"/>
+          <p:cNvSpPr>
+            <a:spLocks noGrp="1"/>
+          </p:cNvSpPr>
+          <p:nvPr>
+            <p:ph type="dt" sz="half" idx="10"/>
           </p:nvPr>
         </p:nvSpPr>
         <p:spPr/>
@@ -1031,21 +1518,23 @@
           <a:bodyPr/>
           <a:lstStyle/>
           <a:p>
-            <a:r>
-              <a:rPr lang="en-US" dirty="0"/>
-              <a:t>Näita GitHubi linki ja QR-koodi, täname kuulajaid, küsimused.</a:t>
-            </a:r>
-          </a:p>
-        </p:txBody>
-      </p:sp>
-      <p:sp>
-        <p:nvSpPr>
-          <p:cNvPr id="4" name="Slide Number Placeholder 3"/>
-          <p:cNvSpPr>
-            <a:spLocks noGrp="1"/>
-          </p:cNvSpPr>
-          <p:nvPr>
-            <p:ph type="sldNum" sz="quarter" idx="10"/>
+            <a:fld id="{90298CD5-6C1E-4009-B41F-6DF62E31D3BE}" type="datetimeFigureOut">
+              <a:rPr lang="en-US" smtClean="0"/>
+              <a:pPr/>
+              <a:t>10/6/2026</a:t>
+            </a:fld>
+            <a:endParaRPr lang="en-US" dirty="0"/>
+          </a:p>
+        </p:txBody>
+      </p:sp>
+      <p:sp>
+        <p:nvSpPr>
+          <p:cNvPr id="4" name="Footer Placeholder 3"/>
+          <p:cNvSpPr>
+            <a:spLocks noGrp="1"/>
+          </p:cNvSpPr>
+          <p:nvPr>
+            <p:ph type="ftr" sz="quarter" idx="11"/>
           </p:nvPr>
         </p:nvSpPr>
         <p:spPr/>
@@ -1053,9 +1542,29 @@
           <a:bodyPr/>
           <a:lstStyle/>
           <a:p>
+            <a:endParaRPr lang="en-US" dirty="0"/>
+          </a:p>
+        </p:txBody>
+      </p:sp>
+      <p:sp>
+        <p:nvSpPr>
+          <p:cNvPr id="5" name="Slide Number Placeholder 4"/>
+          <p:cNvSpPr>
+            <a:spLocks noGrp="1"/>
+          </p:cNvSpPr>
+          <p:nvPr>
+            <p:ph type="sldNum" sz="quarter" idx="12"/>
+          </p:nvPr>
+        </p:nvSpPr>
+        <p:spPr/>
+        <p:txBody>
+          <a:bodyPr/>
+          <a:lstStyle/>
+          <a:p>
+            <a:pPr algn="r"/>
             <a:fld id="{F7021451-1387-4CA6-816F-3879F97B5CBC}" type="slidenum">
-              <a:rPr lang="en-US"/>
-              <a:t>9</a:t>
+              <a:rPr lang="en-US" b="0" smtClean="0"/>
+              <a:t>‹#›</a:t>
             </a:fld>
             <a:endParaRPr lang="en-US"/>
           </a:p>
@@ -1064,23 +1573,1947 @@
     </p:spTree>
     <p:extLst>
       <p:ext uri="{BB962C8B-B14F-4D97-AF65-F5344CB8AC3E}">
-        <p14:creationId xmlns:p14="http://schemas.microsoft.com/office/powerpoint/2010/main" val="1024086991"/>
+        <p14:creationId xmlns:p14="http://schemas.microsoft.com/office/powerpoint/2010/main" val="1229295113"/>
       </p:ext>
     </p:extLst>
   </p:cSld>
   <p:clrMapOvr>
     <a:masterClrMapping/>
   </p:clrMapOvr>
-</p:notes>
+  <p:hf sldNum="0" hdr="0" ftr="0" dt="0"/>
+</p:sldLayout>
 </file>
 
-<file path=ppt/slideLayouts/slideLayout1.xml><?xml version="1.0" encoding="utf-8"?>
+<file path=ppt/slideLayouts/slideLayout11.xml><?xml version="1.0" encoding="utf-8"?>
 <p:sldLayout xmlns:a="http://schemas.openxmlformats.org/drawingml/2006/main" xmlns:r="http://schemas.openxmlformats.org/officeDocument/2006/relationships" xmlns:p="http://schemas.openxmlformats.org/presentationml/2006/main" preserve="1">
-  <p:cSld name="DEFAULT">
+  <p:cSld name="Title and Caption">
+    <p:spTree>
+      <p:nvGrpSpPr>
+        <p:cNvPr id="1" name=""/>
+        <p:cNvGrpSpPr/>
+        <p:nvPr/>
+      </p:nvGrpSpPr>
+      <p:grpSpPr>
+        <a:xfrm>
+          <a:off x="0" y="0"/>
+          <a:ext cx="0" cy="0"/>
+          <a:chOff x="0" y="0"/>
+          <a:chExt cx="0" cy="0"/>
+        </a:xfrm>
+      </p:grpSpPr>
+      <p:sp>
+        <p:nvSpPr>
+          <p:cNvPr id="2" name="Title 1"/>
+          <p:cNvSpPr>
+            <a:spLocks noGrp="1"/>
+          </p:cNvSpPr>
+          <p:nvPr>
+            <p:ph type="title"/>
+          </p:nvPr>
+        </p:nvSpPr>
+        <p:spPr>
+          <a:xfrm>
+            <a:off x="513160" y="514350"/>
+            <a:ext cx="7543800" cy="2057400"/>
+          </a:xfrm>
+        </p:spPr>
+        <p:txBody>
+          <a:bodyPr anchor="ctr">
+            <a:normAutofit/>
+          </a:bodyPr>
+          <a:lstStyle>
+            <a:lvl1pPr algn="l">
+              <a:defRPr sz="2400" b="0" cap="all"/>
+            </a:lvl1pPr>
+          </a:lstStyle>
+          <a:p>
+            <a:r>
+              <a:rPr lang="en-US"/>
+              <a:t>Click to edit Master title style</a:t>
+            </a:r>
+            <a:endParaRPr lang="en-US" dirty="0"/>
+          </a:p>
+        </p:txBody>
+      </p:sp>
+      <p:sp>
+        <p:nvSpPr>
+          <p:cNvPr id="3" name="Text Placeholder 2"/>
+          <p:cNvSpPr>
+            <a:spLocks noGrp="1"/>
+          </p:cNvSpPr>
+          <p:nvPr>
+            <p:ph type="body" idx="1"/>
+          </p:nvPr>
+        </p:nvSpPr>
+        <p:spPr>
+          <a:xfrm>
+            <a:off x="513159" y="3086100"/>
+            <a:ext cx="6401991" cy="1409700"/>
+          </a:xfrm>
+        </p:spPr>
+        <p:txBody>
+          <a:bodyPr anchor="ctr">
+            <a:normAutofit/>
+          </a:bodyPr>
+          <a:lstStyle>
+            <a:lvl1pPr marL="0" indent="0" algn="l">
+              <a:buNone/>
+              <a:defRPr sz="1500">
+                <a:solidFill>
+                  <a:schemeClr val="bg2">
+                    <a:lumMod val="75000"/>
+                  </a:schemeClr>
+                </a:solidFill>
+              </a:defRPr>
+            </a:lvl1pPr>
+            <a:lvl2pPr marL="342900" indent="0">
+              <a:buNone/>
+              <a:defRPr sz="1350">
+                <a:solidFill>
+                  <a:schemeClr val="tx1">
+                    <a:tint val="75000"/>
+                  </a:schemeClr>
+                </a:solidFill>
+              </a:defRPr>
+            </a:lvl2pPr>
+            <a:lvl3pPr marL="685800" indent="0">
+              <a:buNone/>
+              <a:defRPr sz="1200">
+                <a:solidFill>
+                  <a:schemeClr val="tx1">
+                    <a:tint val="75000"/>
+                  </a:schemeClr>
+                </a:solidFill>
+              </a:defRPr>
+            </a:lvl3pPr>
+            <a:lvl4pPr marL="1028700" indent="0">
+              <a:buNone/>
+              <a:defRPr sz="1050">
+                <a:solidFill>
+                  <a:schemeClr val="tx1">
+                    <a:tint val="75000"/>
+                  </a:schemeClr>
+                </a:solidFill>
+              </a:defRPr>
+            </a:lvl4pPr>
+            <a:lvl5pPr marL="1371600" indent="0">
+              <a:buNone/>
+              <a:defRPr sz="1050">
+                <a:solidFill>
+                  <a:schemeClr val="tx1">
+                    <a:tint val="75000"/>
+                  </a:schemeClr>
+                </a:solidFill>
+              </a:defRPr>
+            </a:lvl5pPr>
+            <a:lvl6pPr marL="1714500" indent="0">
+              <a:buNone/>
+              <a:defRPr sz="1050">
+                <a:solidFill>
+                  <a:schemeClr val="tx1">
+                    <a:tint val="75000"/>
+                  </a:schemeClr>
+                </a:solidFill>
+              </a:defRPr>
+            </a:lvl6pPr>
+            <a:lvl7pPr marL="2057400" indent="0">
+              <a:buNone/>
+              <a:defRPr sz="1050">
+                <a:solidFill>
+                  <a:schemeClr val="tx1">
+                    <a:tint val="75000"/>
+                  </a:schemeClr>
+                </a:solidFill>
+              </a:defRPr>
+            </a:lvl7pPr>
+            <a:lvl8pPr marL="2400300" indent="0">
+              <a:buNone/>
+              <a:defRPr sz="1050">
+                <a:solidFill>
+                  <a:schemeClr val="tx1">
+                    <a:tint val="75000"/>
+                  </a:schemeClr>
+                </a:solidFill>
+              </a:defRPr>
+            </a:lvl8pPr>
+            <a:lvl9pPr marL="2743200" indent="0">
+              <a:buNone/>
+              <a:defRPr sz="1050">
+                <a:solidFill>
+                  <a:schemeClr val="tx1">
+                    <a:tint val="75000"/>
+                  </a:schemeClr>
+                </a:solidFill>
+              </a:defRPr>
+            </a:lvl9pPr>
+          </a:lstStyle>
+          <a:p>
+            <a:pPr lvl="0"/>
+            <a:r>
+              <a:rPr lang="en-US"/>
+              <a:t>Click to edit Master text styles</a:t>
+            </a:r>
+          </a:p>
+        </p:txBody>
+      </p:sp>
+      <p:sp>
+        <p:nvSpPr>
+          <p:cNvPr id="4" name="Date Placeholder 3"/>
+          <p:cNvSpPr>
+            <a:spLocks noGrp="1"/>
+          </p:cNvSpPr>
+          <p:nvPr>
+            <p:ph type="dt" sz="half" idx="10"/>
+          </p:nvPr>
+        </p:nvSpPr>
+        <p:spPr/>
+        <p:txBody>
+          <a:bodyPr/>
+          <a:lstStyle/>
+          <a:p>
+            <a:fld id="{90298CD5-6C1E-4009-B41F-6DF62E31D3BE}" type="datetimeFigureOut">
+              <a:rPr lang="en-US" smtClean="0"/>
+              <a:pPr/>
+              <a:t>10/6/2026</a:t>
+            </a:fld>
+            <a:endParaRPr lang="en-US" dirty="0"/>
+          </a:p>
+        </p:txBody>
+      </p:sp>
+      <p:sp>
+        <p:nvSpPr>
+          <p:cNvPr id="5" name="Footer Placeholder 4"/>
+          <p:cNvSpPr>
+            <a:spLocks noGrp="1"/>
+          </p:cNvSpPr>
+          <p:nvPr>
+            <p:ph type="ftr" sz="quarter" idx="11"/>
+          </p:nvPr>
+        </p:nvSpPr>
+        <p:spPr/>
+        <p:txBody>
+          <a:bodyPr/>
+          <a:lstStyle/>
+          <a:p>
+            <a:endParaRPr lang="en-US" dirty="0"/>
+          </a:p>
+        </p:txBody>
+      </p:sp>
+      <p:sp>
+        <p:nvSpPr>
+          <p:cNvPr id="6" name="Slide Number Placeholder 5"/>
+          <p:cNvSpPr>
+            <a:spLocks noGrp="1"/>
+          </p:cNvSpPr>
+          <p:nvPr>
+            <p:ph type="sldNum" sz="quarter" idx="12"/>
+          </p:nvPr>
+        </p:nvSpPr>
+        <p:spPr/>
+        <p:txBody>
+          <a:bodyPr/>
+          <a:lstStyle/>
+          <a:p>
+            <a:pPr algn="r"/>
+            <a:fld id="{F7021451-1387-4CA6-816F-3879F97B5CBC}" type="slidenum">
+              <a:rPr lang="en-US" b="0" smtClean="0"/>
+              <a:t>‹#›</a:t>
+            </a:fld>
+            <a:endParaRPr lang="en-US"/>
+          </a:p>
+        </p:txBody>
+      </p:sp>
+    </p:spTree>
+    <p:extLst>
+      <p:ext uri="{BB962C8B-B14F-4D97-AF65-F5344CB8AC3E}">
+        <p14:creationId xmlns:p14="http://schemas.microsoft.com/office/powerpoint/2010/main" val="1681823548"/>
+      </p:ext>
+    </p:extLst>
+  </p:cSld>
+  <p:clrMapOvr>
+    <a:masterClrMapping/>
+  </p:clrMapOvr>
+  <p:hf sldNum="0" hdr="0" ftr="0" dt="0"/>
+</p:sldLayout>
+</file>
+
+<file path=ppt/slideLayouts/slideLayout12.xml><?xml version="1.0" encoding="utf-8"?>
+<p:sldLayout xmlns:a="http://schemas.openxmlformats.org/drawingml/2006/main" xmlns:r="http://schemas.openxmlformats.org/officeDocument/2006/relationships" xmlns:p="http://schemas.openxmlformats.org/presentationml/2006/main" preserve="1">
+  <p:cSld name="Quote with Caption">
+    <p:spTree>
+      <p:nvGrpSpPr>
+        <p:cNvPr id="1" name=""/>
+        <p:cNvGrpSpPr/>
+        <p:nvPr/>
+      </p:nvGrpSpPr>
+      <p:grpSpPr>
+        <a:xfrm>
+          <a:off x="0" y="0"/>
+          <a:ext cx="0" cy="0"/>
+          <a:chOff x="0" y="0"/>
+          <a:chExt cx="0" cy="0"/>
+        </a:xfrm>
+      </p:grpSpPr>
+      <p:sp>
+        <p:nvSpPr>
+          <p:cNvPr id="2" name="Title 1"/>
+          <p:cNvSpPr>
+            <a:spLocks noGrp="1"/>
+          </p:cNvSpPr>
+          <p:nvPr>
+            <p:ph type="title"/>
+          </p:nvPr>
+        </p:nvSpPr>
+        <p:spPr>
+          <a:xfrm>
+            <a:off x="856059" y="514350"/>
+            <a:ext cx="6858001" cy="2057400"/>
+          </a:xfrm>
+        </p:spPr>
+        <p:txBody>
+          <a:bodyPr anchor="ctr">
+            <a:normAutofit/>
+          </a:bodyPr>
+          <a:lstStyle>
+            <a:lvl1pPr algn="l">
+              <a:defRPr sz="2400" b="0" cap="all">
+                <a:solidFill>
+                  <a:schemeClr val="tx1"/>
+                </a:solidFill>
+              </a:defRPr>
+            </a:lvl1pPr>
+          </a:lstStyle>
+          <a:p>
+            <a:r>
+              <a:rPr lang="en-US"/>
+              <a:t>Click to edit Master title style</a:t>
+            </a:r>
+            <a:endParaRPr lang="en-US" dirty="0"/>
+          </a:p>
+        </p:txBody>
+      </p:sp>
+      <p:sp>
+        <p:nvSpPr>
+          <p:cNvPr id="10" name="Text Placeholder 9"/>
+          <p:cNvSpPr>
+            <a:spLocks noGrp="1"/>
+          </p:cNvSpPr>
+          <p:nvPr>
+            <p:ph type="body" sz="quarter" idx="13"/>
+          </p:nvPr>
+        </p:nvSpPr>
+        <p:spPr>
+          <a:xfrm>
+            <a:off x="1084659" y="2571750"/>
+            <a:ext cx="6400800" cy="285750"/>
+          </a:xfrm>
+        </p:spPr>
+        <p:txBody>
+          <a:bodyPr anchor="ctr"/>
+          <a:lstStyle>
+            <a:lvl1pPr marL="0" indent="0">
+              <a:buFontTx/>
+              <a:buNone/>
+              <a:defRPr/>
+            </a:lvl1pPr>
+            <a:lvl2pPr marL="342900" indent="0">
+              <a:buFontTx/>
+              <a:buNone/>
+              <a:defRPr/>
+            </a:lvl2pPr>
+            <a:lvl3pPr marL="685800" indent="0">
+              <a:buFontTx/>
+              <a:buNone/>
+              <a:defRPr/>
+            </a:lvl3pPr>
+            <a:lvl4pPr marL="1028700" indent="0">
+              <a:buFontTx/>
+              <a:buNone/>
+              <a:defRPr/>
+            </a:lvl4pPr>
+            <a:lvl5pPr marL="1371600" indent="0">
+              <a:buFontTx/>
+              <a:buNone/>
+              <a:defRPr/>
+            </a:lvl5pPr>
+          </a:lstStyle>
+          <a:p>
+            <a:pPr lvl="0"/>
+            <a:r>
+              <a:rPr lang="en-US"/>
+              <a:t>Click to edit Master text styles</a:t>
+            </a:r>
+          </a:p>
+        </p:txBody>
+      </p:sp>
+      <p:sp>
+        <p:nvSpPr>
+          <p:cNvPr id="3" name="Text Placeholder 2"/>
+          <p:cNvSpPr>
+            <a:spLocks noGrp="1"/>
+          </p:cNvSpPr>
+          <p:nvPr>
+            <p:ph type="body" idx="1"/>
+          </p:nvPr>
+        </p:nvSpPr>
+        <p:spPr>
+          <a:xfrm>
+            <a:off x="513160" y="3225801"/>
+            <a:ext cx="6400800" cy="1263649"/>
+          </a:xfrm>
+        </p:spPr>
+        <p:txBody>
+          <a:bodyPr anchor="ctr">
+            <a:normAutofit/>
+          </a:bodyPr>
+          <a:lstStyle>
+            <a:lvl1pPr marL="0" indent="0" algn="l">
+              <a:buNone/>
+              <a:defRPr sz="1500">
+                <a:solidFill>
+                  <a:schemeClr val="bg2">
+                    <a:lumMod val="75000"/>
+                  </a:schemeClr>
+                </a:solidFill>
+              </a:defRPr>
+            </a:lvl1pPr>
+            <a:lvl2pPr marL="342900" indent="0">
+              <a:buNone/>
+              <a:defRPr sz="1350">
+                <a:solidFill>
+                  <a:schemeClr val="tx1">
+                    <a:tint val="75000"/>
+                  </a:schemeClr>
+                </a:solidFill>
+              </a:defRPr>
+            </a:lvl2pPr>
+            <a:lvl3pPr marL="685800" indent="0">
+              <a:buNone/>
+              <a:defRPr sz="1200">
+                <a:solidFill>
+                  <a:schemeClr val="tx1">
+                    <a:tint val="75000"/>
+                  </a:schemeClr>
+                </a:solidFill>
+              </a:defRPr>
+            </a:lvl3pPr>
+            <a:lvl4pPr marL="1028700" indent="0">
+              <a:buNone/>
+              <a:defRPr sz="1050">
+                <a:solidFill>
+                  <a:schemeClr val="tx1">
+                    <a:tint val="75000"/>
+                  </a:schemeClr>
+                </a:solidFill>
+              </a:defRPr>
+            </a:lvl4pPr>
+            <a:lvl5pPr marL="1371600" indent="0">
+              <a:buNone/>
+              <a:defRPr sz="1050">
+                <a:solidFill>
+                  <a:schemeClr val="tx1">
+                    <a:tint val="75000"/>
+                  </a:schemeClr>
+                </a:solidFill>
+              </a:defRPr>
+            </a:lvl5pPr>
+            <a:lvl6pPr marL="1714500" indent="0">
+              <a:buNone/>
+              <a:defRPr sz="1050">
+                <a:solidFill>
+                  <a:schemeClr val="tx1">
+                    <a:tint val="75000"/>
+                  </a:schemeClr>
+                </a:solidFill>
+              </a:defRPr>
+            </a:lvl6pPr>
+            <a:lvl7pPr marL="2057400" indent="0">
+              <a:buNone/>
+              <a:defRPr sz="1050">
+                <a:solidFill>
+                  <a:schemeClr val="tx1">
+                    <a:tint val="75000"/>
+                  </a:schemeClr>
+                </a:solidFill>
+              </a:defRPr>
+            </a:lvl7pPr>
+            <a:lvl8pPr marL="2400300" indent="0">
+              <a:buNone/>
+              <a:defRPr sz="1050">
+                <a:solidFill>
+                  <a:schemeClr val="tx1">
+                    <a:tint val="75000"/>
+                  </a:schemeClr>
+                </a:solidFill>
+              </a:defRPr>
+            </a:lvl8pPr>
+            <a:lvl9pPr marL="2743200" indent="0">
+              <a:buNone/>
+              <a:defRPr sz="1050">
+                <a:solidFill>
+                  <a:schemeClr val="tx1">
+                    <a:tint val="75000"/>
+                  </a:schemeClr>
+                </a:solidFill>
+              </a:defRPr>
+            </a:lvl9pPr>
+          </a:lstStyle>
+          <a:p>
+            <a:pPr lvl="0"/>
+            <a:r>
+              <a:rPr lang="en-US"/>
+              <a:t>Click to edit Master text styles</a:t>
+            </a:r>
+          </a:p>
+        </p:txBody>
+      </p:sp>
+      <p:sp>
+        <p:nvSpPr>
+          <p:cNvPr id="4" name="Date Placeholder 3"/>
+          <p:cNvSpPr>
+            <a:spLocks noGrp="1"/>
+          </p:cNvSpPr>
+          <p:nvPr>
+            <p:ph type="dt" sz="half" idx="10"/>
+          </p:nvPr>
+        </p:nvSpPr>
+        <p:spPr/>
+        <p:txBody>
+          <a:bodyPr/>
+          <a:lstStyle/>
+          <a:p>
+            <a:fld id="{90298CD5-6C1E-4009-B41F-6DF62E31D3BE}" type="datetimeFigureOut">
+              <a:rPr lang="en-US" smtClean="0"/>
+              <a:pPr/>
+              <a:t>10/6/2026</a:t>
+            </a:fld>
+            <a:endParaRPr lang="en-US" dirty="0"/>
+          </a:p>
+        </p:txBody>
+      </p:sp>
+      <p:sp>
+        <p:nvSpPr>
+          <p:cNvPr id="5" name="Footer Placeholder 4"/>
+          <p:cNvSpPr>
+            <a:spLocks noGrp="1"/>
+          </p:cNvSpPr>
+          <p:nvPr>
+            <p:ph type="ftr" sz="quarter" idx="11"/>
+          </p:nvPr>
+        </p:nvSpPr>
+        <p:spPr/>
+        <p:txBody>
+          <a:bodyPr/>
+          <a:lstStyle/>
+          <a:p>
+            <a:endParaRPr lang="en-US" dirty="0"/>
+          </a:p>
+        </p:txBody>
+      </p:sp>
+      <p:sp>
+        <p:nvSpPr>
+          <p:cNvPr id="6" name="Slide Number Placeholder 5"/>
+          <p:cNvSpPr>
+            <a:spLocks noGrp="1"/>
+          </p:cNvSpPr>
+          <p:nvPr>
+            <p:ph type="sldNum" sz="quarter" idx="12"/>
+          </p:nvPr>
+        </p:nvSpPr>
+        <p:spPr/>
+        <p:txBody>
+          <a:bodyPr/>
+          <a:lstStyle/>
+          <a:p>
+            <a:pPr algn="r"/>
+            <a:fld id="{F7021451-1387-4CA6-816F-3879F97B5CBC}" type="slidenum">
+              <a:rPr lang="en-US" b="0" smtClean="0"/>
+              <a:t>‹#›</a:t>
+            </a:fld>
+            <a:endParaRPr lang="en-US"/>
+          </a:p>
+        </p:txBody>
+      </p:sp>
+      <p:sp>
+        <p:nvSpPr>
+          <p:cNvPr id="14" name="TextBox 13"/>
+          <p:cNvSpPr txBox="1"/>
+          <p:nvPr/>
+        </p:nvSpPr>
+        <p:spPr>
+          <a:xfrm>
+            <a:off x="398859" y="609167"/>
+            <a:ext cx="457200" cy="438582"/>
+          </a:xfrm>
+          <a:prstGeom prst="rect">
+            <a:avLst/>
+          </a:prstGeom>
+        </p:spPr>
+        <p:txBody>
+          <a:bodyPr vert="horz" lIns="68580" tIns="34290" rIns="68580" bIns="34290" rtlCol="0" anchor="ctr">
+            <a:noAutofit/>
+          </a:bodyPr>
+          <a:lstStyle/>
+          <a:p>
+            <a:pPr lvl="0"/>
+            <a:r>
+              <a:rPr lang="en-US" sz="6000" dirty="0">
+                <a:solidFill>
+                  <a:schemeClr val="tx1"/>
+                </a:solidFill>
+                <a:effectLst/>
+              </a:rPr>
+              <a:t>“</a:t>
+            </a:r>
+          </a:p>
+        </p:txBody>
+      </p:sp>
+      <p:sp>
+        <p:nvSpPr>
+          <p:cNvPr id="15" name="TextBox 14"/>
+          <p:cNvSpPr txBox="1"/>
+          <p:nvPr/>
+        </p:nvSpPr>
+        <p:spPr>
+          <a:xfrm>
+            <a:off x="7714059" y="2076451"/>
+            <a:ext cx="457200" cy="438582"/>
+          </a:xfrm>
+          <a:prstGeom prst="rect">
+            <a:avLst/>
+          </a:prstGeom>
+        </p:spPr>
+        <p:txBody>
+          <a:bodyPr vert="horz" lIns="68580" tIns="34290" rIns="68580" bIns="34290" rtlCol="0" anchor="ctr">
+            <a:noAutofit/>
+          </a:bodyPr>
+          <a:lstStyle/>
+          <a:p>
+            <a:pPr lvl="0" algn="r"/>
+            <a:r>
+              <a:rPr lang="en-US" sz="6000" dirty="0">
+                <a:solidFill>
+                  <a:schemeClr val="tx1"/>
+                </a:solidFill>
+                <a:effectLst/>
+              </a:rPr>
+              <a:t>”</a:t>
+            </a:r>
+          </a:p>
+        </p:txBody>
+      </p:sp>
+    </p:spTree>
+    <p:extLst>
+      <p:ext uri="{BB962C8B-B14F-4D97-AF65-F5344CB8AC3E}">
+        <p14:creationId xmlns:p14="http://schemas.microsoft.com/office/powerpoint/2010/main" val="1147852615"/>
+      </p:ext>
+    </p:extLst>
+  </p:cSld>
+  <p:clrMapOvr>
+    <a:masterClrMapping/>
+  </p:clrMapOvr>
+  <p:hf sldNum="0" hdr="0" ftr="0" dt="0"/>
+</p:sldLayout>
+</file>
+
+<file path=ppt/slideLayouts/slideLayout13.xml><?xml version="1.0" encoding="utf-8"?>
+<p:sldLayout xmlns:a="http://schemas.openxmlformats.org/drawingml/2006/main" xmlns:r="http://schemas.openxmlformats.org/officeDocument/2006/relationships" xmlns:p="http://schemas.openxmlformats.org/presentationml/2006/main" preserve="1">
+  <p:cSld name="Name Card">
+    <p:spTree>
+      <p:nvGrpSpPr>
+        <p:cNvPr id="1" name=""/>
+        <p:cNvGrpSpPr/>
+        <p:nvPr/>
+      </p:nvGrpSpPr>
+      <p:grpSpPr>
+        <a:xfrm>
+          <a:off x="0" y="0"/>
+          <a:ext cx="0" cy="0"/>
+          <a:chOff x="0" y="0"/>
+          <a:chExt cx="0" cy="0"/>
+        </a:xfrm>
+      </p:grpSpPr>
+      <p:sp>
+        <p:nvSpPr>
+          <p:cNvPr id="2" name="Title 1"/>
+          <p:cNvSpPr>
+            <a:spLocks noGrp="1"/>
+          </p:cNvSpPr>
+          <p:nvPr>
+            <p:ph type="title"/>
+          </p:nvPr>
+        </p:nvSpPr>
+        <p:spPr>
+          <a:xfrm>
+            <a:off x="513159" y="2571750"/>
+            <a:ext cx="6400800" cy="1273050"/>
+          </a:xfrm>
+        </p:spPr>
+        <p:txBody>
+          <a:bodyPr anchor="b">
+            <a:normAutofit/>
+          </a:bodyPr>
+          <a:lstStyle>
+            <a:lvl1pPr algn="l">
+              <a:defRPr sz="2400" b="0" cap="all"/>
+            </a:lvl1pPr>
+          </a:lstStyle>
+          <a:p>
+            <a:r>
+              <a:rPr lang="en-US"/>
+              <a:t>Click to edit Master title style</a:t>
+            </a:r>
+            <a:endParaRPr lang="en-US" dirty="0"/>
+          </a:p>
+        </p:txBody>
+      </p:sp>
+      <p:sp>
+        <p:nvSpPr>
+          <p:cNvPr id="3" name="Text Placeholder 2"/>
+          <p:cNvSpPr>
+            <a:spLocks noGrp="1"/>
+          </p:cNvSpPr>
+          <p:nvPr>
+            <p:ph type="body" idx="1"/>
+          </p:nvPr>
+        </p:nvSpPr>
+        <p:spPr>
+          <a:xfrm>
+            <a:off x="513158" y="3849736"/>
+            <a:ext cx="6401993" cy="645300"/>
+          </a:xfrm>
+        </p:spPr>
+        <p:txBody>
+          <a:bodyPr anchor="t">
+            <a:normAutofit/>
+          </a:bodyPr>
+          <a:lstStyle>
+            <a:lvl1pPr marL="0" indent="0" algn="l">
+              <a:buNone/>
+              <a:defRPr sz="1500">
+                <a:solidFill>
+                  <a:schemeClr val="bg2">
+                    <a:lumMod val="75000"/>
+                  </a:schemeClr>
+                </a:solidFill>
+              </a:defRPr>
+            </a:lvl1pPr>
+            <a:lvl2pPr marL="342900" indent="0">
+              <a:buNone/>
+              <a:defRPr sz="1350">
+                <a:solidFill>
+                  <a:schemeClr val="tx1">
+                    <a:tint val="75000"/>
+                  </a:schemeClr>
+                </a:solidFill>
+              </a:defRPr>
+            </a:lvl2pPr>
+            <a:lvl3pPr marL="685800" indent="0">
+              <a:buNone/>
+              <a:defRPr sz="1200">
+                <a:solidFill>
+                  <a:schemeClr val="tx1">
+                    <a:tint val="75000"/>
+                  </a:schemeClr>
+                </a:solidFill>
+              </a:defRPr>
+            </a:lvl3pPr>
+            <a:lvl4pPr marL="1028700" indent="0">
+              <a:buNone/>
+              <a:defRPr sz="1050">
+                <a:solidFill>
+                  <a:schemeClr val="tx1">
+                    <a:tint val="75000"/>
+                  </a:schemeClr>
+                </a:solidFill>
+              </a:defRPr>
+            </a:lvl4pPr>
+            <a:lvl5pPr marL="1371600" indent="0">
+              <a:buNone/>
+              <a:defRPr sz="1050">
+                <a:solidFill>
+                  <a:schemeClr val="tx1">
+                    <a:tint val="75000"/>
+                  </a:schemeClr>
+                </a:solidFill>
+              </a:defRPr>
+            </a:lvl5pPr>
+            <a:lvl6pPr marL="1714500" indent="0">
+              <a:buNone/>
+              <a:defRPr sz="1050">
+                <a:solidFill>
+                  <a:schemeClr val="tx1">
+                    <a:tint val="75000"/>
+                  </a:schemeClr>
+                </a:solidFill>
+              </a:defRPr>
+            </a:lvl6pPr>
+            <a:lvl7pPr marL="2057400" indent="0">
+              <a:buNone/>
+              <a:defRPr sz="1050">
+                <a:solidFill>
+                  <a:schemeClr val="tx1">
+                    <a:tint val="75000"/>
+                  </a:schemeClr>
+                </a:solidFill>
+              </a:defRPr>
+            </a:lvl7pPr>
+            <a:lvl8pPr marL="2400300" indent="0">
+              <a:buNone/>
+              <a:defRPr sz="1050">
+                <a:solidFill>
+                  <a:schemeClr val="tx1">
+                    <a:tint val="75000"/>
+                  </a:schemeClr>
+                </a:solidFill>
+              </a:defRPr>
+            </a:lvl8pPr>
+            <a:lvl9pPr marL="2743200" indent="0">
+              <a:buNone/>
+              <a:defRPr sz="1050">
+                <a:solidFill>
+                  <a:schemeClr val="tx1">
+                    <a:tint val="75000"/>
+                  </a:schemeClr>
+                </a:solidFill>
+              </a:defRPr>
+            </a:lvl9pPr>
+          </a:lstStyle>
+          <a:p>
+            <a:pPr lvl="0"/>
+            <a:r>
+              <a:rPr lang="en-US"/>
+              <a:t>Click to edit Master text styles</a:t>
+            </a:r>
+          </a:p>
+        </p:txBody>
+      </p:sp>
+      <p:sp>
+        <p:nvSpPr>
+          <p:cNvPr id="4" name="Date Placeholder 3"/>
+          <p:cNvSpPr>
+            <a:spLocks noGrp="1"/>
+          </p:cNvSpPr>
+          <p:nvPr>
+            <p:ph type="dt" sz="half" idx="10"/>
+          </p:nvPr>
+        </p:nvSpPr>
+        <p:spPr/>
+        <p:txBody>
+          <a:bodyPr/>
+          <a:lstStyle/>
+          <a:p>
+            <a:fld id="{90298CD5-6C1E-4009-B41F-6DF62E31D3BE}" type="datetimeFigureOut">
+              <a:rPr lang="en-US" smtClean="0"/>
+              <a:pPr/>
+              <a:t>10/6/2026</a:t>
+            </a:fld>
+            <a:endParaRPr lang="en-US" dirty="0"/>
+          </a:p>
+        </p:txBody>
+      </p:sp>
+      <p:sp>
+        <p:nvSpPr>
+          <p:cNvPr id="5" name="Footer Placeholder 4"/>
+          <p:cNvSpPr>
+            <a:spLocks noGrp="1"/>
+          </p:cNvSpPr>
+          <p:nvPr>
+            <p:ph type="ftr" sz="quarter" idx="11"/>
+          </p:nvPr>
+        </p:nvSpPr>
+        <p:spPr/>
+        <p:txBody>
+          <a:bodyPr/>
+          <a:lstStyle/>
+          <a:p>
+            <a:endParaRPr lang="en-US" dirty="0"/>
+          </a:p>
+        </p:txBody>
+      </p:sp>
+      <p:sp>
+        <p:nvSpPr>
+          <p:cNvPr id="6" name="Slide Number Placeholder 5"/>
+          <p:cNvSpPr>
+            <a:spLocks noGrp="1"/>
+          </p:cNvSpPr>
+          <p:nvPr>
+            <p:ph type="sldNum" sz="quarter" idx="12"/>
+          </p:nvPr>
+        </p:nvSpPr>
+        <p:spPr/>
+        <p:txBody>
+          <a:bodyPr/>
+          <a:lstStyle/>
+          <a:p>
+            <a:pPr algn="r"/>
+            <a:fld id="{F7021451-1387-4CA6-816F-3879F97B5CBC}" type="slidenum">
+              <a:rPr lang="en-US" b="0" smtClean="0"/>
+              <a:t>‹#›</a:t>
+            </a:fld>
+            <a:endParaRPr lang="en-US"/>
+          </a:p>
+        </p:txBody>
+      </p:sp>
+    </p:spTree>
+    <p:extLst>
+      <p:ext uri="{BB962C8B-B14F-4D97-AF65-F5344CB8AC3E}">
+        <p14:creationId xmlns:p14="http://schemas.microsoft.com/office/powerpoint/2010/main" val="2204470493"/>
+      </p:ext>
+    </p:extLst>
+  </p:cSld>
+  <p:clrMapOvr>
+    <a:masterClrMapping/>
+  </p:clrMapOvr>
+  <p:hf sldNum="0" hdr="0" ftr="0" dt="0"/>
+</p:sldLayout>
+</file>
+
+<file path=ppt/slideLayouts/slideLayout14.xml><?xml version="1.0" encoding="utf-8"?>
+<p:sldLayout xmlns:a="http://schemas.openxmlformats.org/drawingml/2006/main" xmlns:r="http://schemas.openxmlformats.org/officeDocument/2006/relationships" xmlns:p="http://schemas.openxmlformats.org/presentationml/2006/main" preserve="1">
+  <p:cSld name="Quote Name Card">
+    <p:spTree>
+      <p:nvGrpSpPr>
+        <p:cNvPr id="1" name=""/>
+        <p:cNvGrpSpPr/>
+        <p:nvPr/>
+      </p:nvGrpSpPr>
+      <p:grpSpPr>
+        <a:xfrm>
+          <a:off x="0" y="0"/>
+          <a:ext cx="0" cy="0"/>
+          <a:chOff x="0" y="0"/>
+          <a:chExt cx="0" cy="0"/>
+        </a:xfrm>
+      </p:grpSpPr>
+      <p:sp>
+        <p:nvSpPr>
+          <p:cNvPr id="2" name="Title 1"/>
+          <p:cNvSpPr>
+            <a:spLocks noGrp="1"/>
+          </p:cNvSpPr>
+          <p:nvPr>
+            <p:ph type="title"/>
+          </p:nvPr>
+        </p:nvSpPr>
+        <p:spPr>
+          <a:xfrm>
+            <a:off x="856060" y="514350"/>
+            <a:ext cx="6858000" cy="2057400"/>
+          </a:xfrm>
+        </p:spPr>
+        <p:txBody>
+          <a:bodyPr anchor="ctr">
+            <a:normAutofit/>
+          </a:bodyPr>
+          <a:lstStyle>
+            <a:lvl1pPr algn="l">
+              <a:defRPr sz="2400" b="0" cap="all">
+                <a:solidFill>
+                  <a:schemeClr val="tx1"/>
+                </a:solidFill>
+              </a:defRPr>
+            </a:lvl1pPr>
+          </a:lstStyle>
+          <a:p>
+            <a:r>
+              <a:rPr lang="en-US"/>
+              <a:t>Click to edit Master title style</a:t>
+            </a:r>
+            <a:endParaRPr lang="en-US" dirty="0"/>
+          </a:p>
+        </p:txBody>
+      </p:sp>
+      <p:sp>
+        <p:nvSpPr>
+          <p:cNvPr id="10" name="Text Placeholder 9"/>
+          <p:cNvSpPr>
+            <a:spLocks noGrp="1"/>
+          </p:cNvSpPr>
+          <p:nvPr>
+            <p:ph type="body" sz="quarter" idx="13"/>
+          </p:nvPr>
+        </p:nvSpPr>
+        <p:spPr>
+          <a:xfrm>
+            <a:off x="513159" y="2946400"/>
+            <a:ext cx="6400801" cy="787400"/>
+          </a:xfrm>
+        </p:spPr>
+        <p:txBody>
+          <a:bodyPr vert="horz" lIns="91440" tIns="45720" rIns="91440" bIns="45720" rtlCol="0" anchor="b">
+            <a:normAutofit/>
+          </a:bodyPr>
+          <a:lstStyle>
+            <a:lvl1pPr>
+              <a:buNone/>
+              <a:defRPr lang="en-US" sz="1800" b="0" cap="all" dirty="0">
+                <a:ln w="3175" cmpd="sng">
+                  <a:noFill/>
+                </a:ln>
+                <a:solidFill>
+                  <a:schemeClr val="tx1"/>
+                </a:solidFill>
+                <a:effectLst/>
+              </a:defRPr>
+            </a:lvl1pPr>
+          </a:lstStyle>
+          <a:p>
+            <a:pPr marL="0" lvl="0">
+              <a:spcBef>
+                <a:spcPct val="0"/>
+              </a:spcBef>
+              <a:buNone/>
+            </a:pPr>
+            <a:r>
+              <a:rPr lang="en-US"/>
+              <a:t>Click to edit Master text styles</a:t>
+            </a:r>
+          </a:p>
+        </p:txBody>
+      </p:sp>
+      <p:sp>
+        <p:nvSpPr>
+          <p:cNvPr id="3" name="Text Placeholder 2"/>
+          <p:cNvSpPr>
+            <a:spLocks noGrp="1"/>
+          </p:cNvSpPr>
+          <p:nvPr>
+            <p:ph type="body" idx="1"/>
+          </p:nvPr>
+        </p:nvSpPr>
+        <p:spPr>
+          <a:xfrm>
+            <a:off x="513159" y="3733800"/>
+            <a:ext cx="6400801" cy="762000"/>
+          </a:xfrm>
+        </p:spPr>
+        <p:txBody>
+          <a:bodyPr anchor="t">
+            <a:normAutofit/>
+          </a:bodyPr>
+          <a:lstStyle>
+            <a:lvl1pPr marL="0" indent="0" algn="l">
+              <a:buNone/>
+              <a:defRPr sz="1350">
+                <a:solidFill>
+                  <a:schemeClr val="bg2">
+                    <a:lumMod val="75000"/>
+                  </a:schemeClr>
+                </a:solidFill>
+              </a:defRPr>
+            </a:lvl1pPr>
+            <a:lvl2pPr marL="342900" indent="0">
+              <a:buNone/>
+              <a:defRPr sz="1350">
+                <a:solidFill>
+                  <a:schemeClr val="tx1">
+                    <a:tint val="75000"/>
+                  </a:schemeClr>
+                </a:solidFill>
+              </a:defRPr>
+            </a:lvl2pPr>
+            <a:lvl3pPr marL="685800" indent="0">
+              <a:buNone/>
+              <a:defRPr sz="1200">
+                <a:solidFill>
+                  <a:schemeClr val="tx1">
+                    <a:tint val="75000"/>
+                  </a:schemeClr>
+                </a:solidFill>
+              </a:defRPr>
+            </a:lvl3pPr>
+            <a:lvl4pPr marL="1028700" indent="0">
+              <a:buNone/>
+              <a:defRPr sz="1050">
+                <a:solidFill>
+                  <a:schemeClr val="tx1">
+                    <a:tint val="75000"/>
+                  </a:schemeClr>
+                </a:solidFill>
+              </a:defRPr>
+            </a:lvl4pPr>
+            <a:lvl5pPr marL="1371600" indent="0">
+              <a:buNone/>
+              <a:defRPr sz="1050">
+                <a:solidFill>
+                  <a:schemeClr val="tx1">
+                    <a:tint val="75000"/>
+                  </a:schemeClr>
+                </a:solidFill>
+              </a:defRPr>
+            </a:lvl5pPr>
+            <a:lvl6pPr marL="1714500" indent="0">
+              <a:buNone/>
+              <a:defRPr sz="1050">
+                <a:solidFill>
+                  <a:schemeClr val="tx1">
+                    <a:tint val="75000"/>
+                  </a:schemeClr>
+                </a:solidFill>
+              </a:defRPr>
+            </a:lvl6pPr>
+            <a:lvl7pPr marL="2057400" indent="0">
+              <a:buNone/>
+              <a:defRPr sz="1050">
+                <a:solidFill>
+                  <a:schemeClr val="tx1">
+                    <a:tint val="75000"/>
+                  </a:schemeClr>
+                </a:solidFill>
+              </a:defRPr>
+            </a:lvl7pPr>
+            <a:lvl8pPr marL="2400300" indent="0">
+              <a:buNone/>
+              <a:defRPr sz="1050">
+                <a:solidFill>
+                  <a:schemeClr val="tx1">
+                    <a:tint val="75000"/>
+                  </a:schemeClr>
+                </a:solidFill>
+              </a:defRPr>
+            </a:lvl8pPr>
+            <a:lvl9pPr marL="2743200" indent="0">
+              <a:buNone/>
+              <a:defRPr sz="1050">
+                <a:solidFill>
+                  <a:schemeClr val="tx1">
+                    <a:tint val="75000"/>
+                  </a:schemeClr>
+                </a:solidFill>
+              </a:defRPr>
+            </a:lvl9pPr>
+          </a:lstStyle>
+          <a:p>
+            <a:pPr lvl="0"/>
+            <a:r>
+              <a:rPr lang="en-US"/>
+              <a:t>Click to edit Master text styles</a:t>
+            </a:r>
+          </a:p>
+        </p:txBody>
+      </p:sp>
+      <p:sp>
+        <p:nvSpPr>
+          <p:cNvPr id="4" name="Date Placeholder 3"/>
+          <p:cNvSpPr>
+            <a:spLocks noGrp="1"/>
+          </p:cNvSpPr>
+          <p:nvPr>
+            <p:ph type="dt" sz="half" idx="10"/>
+          </p:nvPr>
+        </p:nvSpPr>
+        <p:spPr/>
+        <p:txBody>
+          <a:bodyPr/>
+          <a:lstStyle/>
+          <a:p>
+            <a:fld id="{90298CD5-6C1E-4009-B41F-6DF62E31D3BE}" type="datetimeFigureOut">
+              <a:rPr lang="en-US" smtClean="0"/>
+              <a:pPr/>
+              <a:t>10/6/2026</a:t>
+            </a:fld>
+            <a:endParaRPr lang="en-US" dirty="0"/>
+          </a:p>
+        </p:txBody>
+      </p:sp>
+      <p:sp>
+        <p:nvSpPr>
+          <p:cNvPr id="5" name="Footer Placeholder 4"/>
+          <p:cNvSpPr>
+            <a:spLocks noGrp="1"/>
+          </p:cNvSpPr>
+          <p:nvPr>
+            <p:ph type="ftr" sz="quarter" idx="11"/>
+          </p:nvPr>
+        </p:nvSpPr>
+        <p:spPr/>
+        <p:txBody>
+          <a:bodyPr/>
+          <a:lstStyle/>
+          <a:p>
+            <a:endParaRPr lang="en-US" dirty="0"/>
+          </a:p>
+        </p:txBody>
+      </p:sp>
+      <p:sp>
+        <p:nvSpPr>
+          <p:cNvPr id="6" name="Slide Number Placeholder 5"/>
+          <p:cNvSpPr>
+            <a:spLocks noGrp="1"/>
+          </p:cNvSpPr>
+          <p:nvPr>
+            <p:ph type="sldNum" sz="quarter" idx="12"/>
+          </p:nvPr>
+        </p:nvSpPr>
+        <p:spPr/>
+        <p:txBody>
+          <a:bodyPr/>
+          <a:lstStyle/>
+          <a:p>
+            <a:pPr algn="r"/>
+            <a:fld id="{F7021451-1387-4CA6-816F-3879F97B5CBC}" type="slidenum">
+              <a:rPr lang="en-US" b="0" smtClean="0"/>
+              <a:t>‹#›</a:t>
+            </a:fld>
+            <a:endParaRPr lang="en-US"/>
+          </a:p>
+        </p:txBody>
+      </p:sp>
+      <p:sp>
+        <p:nvSpPr>
+          <p:cNvPr id="11" name="TextBox 10"/>
+          <p:cNvSpPr txBox="1"/>
+          <p:nvPr/>
+        </p:nvSpPr>
+        <p:spPr>
+          <a:xfrm>
+            <a:off x="398859" y="609167"/>
+            <a:ext cx="457200" cy="438582"/>
+          </a:xfrm>
+          <a:prstGeom prst="rect">
+            <a:avLst/>
+          </a:prstGeom>
+        </p:spPr>
+        <p:txBody>
+          <a:bodyPr vert="horz" lIns="68580" tIns="34290" rIns="68580" bIns="34290" rtlCol="0" anchor="ctr">
+            <a:noAutofit/>
+          </a:bodyPr>
+          <a:lstStyle/>
+          <a:p>
+            <a:pPr lvl="0"/>
+            <a:r>
+              <a:rPr lang="en-US" sz="6000" dirty="0">
+                <a:solidFill>
+                  <a:schemeClr val="tx1"/>
+                </a:solidFill>
+                <a:effectLst/>
+              </a:rPr>
+              <a:t>“</a:t>
+            </a:r>
+          </a:p>
+        </p:txBody>
+      </p:sp>
+      <p:sp>
+        <p:nvSpPr>
+          <p:cNvPr id="12" name="TextBox 11"/>
+          <p:cNvSpPr txBox="1"/>
+          <p:nvPr/>
+        </p:nvSpPr>
+        <p:spPr>
+          <a:xfrm>
+            <a:off x="7714059" y="2076451"/>
+            <a:ext cx="457200" cy="438582"/>
+          </a:xfrm>
+          <a:prstGeom prst="rect">
+            <a:avLst/>
+          </a:prstGeom>
+        </p:spPr>
+        <p:txBody>
+          <a:bodyPr vert="horz" lIns="68580" tIns="34290" rIns="68580" bIns="34290" rtlCol="0" anchor="ctr">
+            <a:noAutofit/>
+          </a:bodyPr>
+          <a:lstStyle/>
+          <a:p>
+            <a:pPr lvl="0" algn="r"/>
+            <a:r>
+              <a:rPr lang="en-US" sz="6000" dirty="0">
+                <a:solidFill>
+                  <a:schemeClr val="tx1"/>
+                </a:solidFill>
+                <a:effectLst/>
+              </a:rPr>
+              <a:t>”</a:t>
+            </a:r>
+          </a:p>
+        </p:txBody>
+      </p:sp>
+    </p:spTree>
+    <p:extLst>
+      <p:ext uri="{BB962C8B-B14F-4D97-AF65-F5344CB8AC3E}">
+        <p14:creationId xmlns:p14="http://schemas.microsoft.com/office/powerpoint/2010/main" val="2208220632"/>
+      </p:ext>
+    </p:extLst>
+  </p:cSld>
+  <p:clrMapOvr>
+    <a:masterClrMapping/>
+  </p:clrMapOvr>
+  <p:hf sldNum="0" hdr="0" ftr="0" dt="0"/>
+</p:sldLayout>
+</file>
+
+<file path=ppt/slideLayouts/slideLayout15.xml><?xml version="1.0" encoding="utf-8"?>
+<p:sldLayout xmlns:a="http://schemas.openxmlformats.org/drawingml/2006/main" xmlns:r="http://schemas.openxmlformats.org/officeDocument/2006/relationships" xmlns:p="http://schemas.openxmlformats.org/presentationml/2006/main" preserve="1">
+  <p:cSld name="True or False">
+    <p:spTree>
+      <p:nvGrpSpPr>
+        <p:cNvPr id="1" name=""/>
+        <p:cNvGrpSpPr/>
+        <p:nvPr/>
+      </p:nvGrpSpPr>
+      <p:grpSpPr>
+        <a:xfrm>
+          <a:off x="0" y="0"/>
+          <a:ext cx="0" cy="0"/>
+          <a:chOff x="0" y="0"/>
+          <a:chExt cx="0" cy="0"/>
+        </a:xfrm>
+      </p:grpSpPr>
+      <p:sp>
+        <p:nvSpPr>
+          <p:cNvPr id="2" name="Title 1"/>
+          <p:cNvSpPr>
+            <a:spLocks noGrp="1"/>
+          </p:cNvSpPr>
+          <p:nvPr>
+            <p:ph type="title"/>
+          </p:nvPr>
+        </p:nvSpPr>
+        <p:spPr>
+          <a:xfrm>
+            <a:off x="513160" y="514350"/>
+            <a:ext cx="7543800" cy="2057400"/>
+          </a:xfrm>
+        </p:spPr>
+        <p:txBody>
+          <a:bodyPr vert="horz" lIns="91440" tIns="45720" rIns="91440" bIns="45720" rtlCol="0" anchor="ctr">
+            <a:normAutofit/>
+          </a:bodyPr>
+          <a:lstStyle>
+            <a:lvl1pPr>
+              <a:defRPr lang="en-US" b="0" dirty="0"/>
+            </a:lvl1pPr>
+          </a:lstStyle>
+          <a:p>
+            <a:pPr marL="0" lvl="0"/>
+            <a:r>
+              <a:rPr lang="en-US"/>
+              <a:t>Click to edit Master title style</a:t>
+            </a:r>
+            <a:endParaRPr lang="en-US" dirty="0"/>
+          </a:p>
+        </p:txBody>
+      </p:sp>
+      <p:sp>
+        <p:nvSpPr>
+          <p:cNvPr id="10" name="Text Placeholder 9"/>
+          <p:cNvSpPr>
+            <a:spLocks noGrp="1"/>
+          </p:cNvSpPr>
+          <p:nvPr>
+            <p:ph type="body" sz="quarter" idx="13"/>
+          </p:nvPr>
+        </p:nvSpPr>
+        <p:spPr>
+          <a:xfrm>
+            <a:off x="513159" y="2946401"/>
+            <a:ext cx="6400800" cy="628650"/>
+          </a:xfrm>
+        </p:spPr>
+        <p:txBody>
+          <a:bodyPr vert="horz" lIns="91440" tIns="45720" rIns="91440" bIns="45720" rtlCol="0" anchor="b">
+            <a:normAutofit/>
+          </a:bodyPr>
+          <a:lstStyle>
+            <a:lvl1pPr>
+              <a:buNone/>
+              <a:defRPr lang="en-US" sz="1800" b="0" cap="all" dirty="0">
+                <a:ln w="3175" cmpd="sng">
+                  <a:noFill/>
+                </a:ln>
+                <a:solidFill>
+                  <a:schemeClr val="tx1"/>
+                </a:solidFill>
+                <a:effectLst/>
+              </a:defRPr>
+            </a:lvl1pPr>
+          </a:lstStyle>
+          <a:p>
+            <a:pPr marL="0" lvl="0">
+              <a:spcBef>
+                <a:spcPct val="0"/>
+              </a:spcBef>
+              <a:buNone/>
+            </a:pPr>
+            <a:r>
+              <a:rPr lang="en-US"/>
+              <a:t>Click to edit Master text styles</a:t>
+            </a:r>
+          </a:p>
+        </p:txBody>
+      </p:sp>
+      <p:sp>
+        <p:nvSpPr>
+          <p:cNvPr id="3" name="Text Placeholder 2"/>
+          <p:cNvSpPr>
+            <a:spLocks noGrp="1"/>
+          </p:cNvSpPr>
+          <p:nvPr>
+            <p:ph type="body" idx="1"/>
+          </p:nvPr>
+        </p:nvSpPr>
+        <p:spPr>
+          <a:xfrm>
+            <a:off x="513159" y="3575049"/>
+            <a:ext cx="6400801" cy="920750"/>
+          </a:xfrm>
+        </p:spPr>
+        <p:txBody>
+          <a:bodyPr anchor="t">
+            <a:normAutofit/>
+          </a:bodyPr>
+          <a:lstStyle>
+            <a:lvl1pPr marL="0" indent="0" algn="l">
+              <a:buNone/>
+              <a:defRPr sz="1350">
+                <a:solidFill>
+                  <a:schemeClr val="bg2">
+                    <a:lumMod val="75000"/>
+                  </a:schemeClr>
+                </a:solidFill>
+              </a:defRPr>
+            </a:lvl1pPr>
+            <a:lvl2pPr marL="342900" indent="0">
+              <a:buNone/>
+              <a:defRPr sz="1350">
+                <a:solidFill>
+                  <a:schemeClr val="tx1">
+                    <a:tint val="75000"/>
+                  </a:schemeClr>
+                </a:solidFill>
+              </a:defRPr>
+            </a:lvl2pPr>
+            <a:lvl3pPr marL="685800" indent="0">
+              <a:buNone/>
+              <a:defRPr sz="1200">
+                <a:solidFill>
+                  <a:schemeClr val="tx1">
+                    <a:tint val="75000"/>
+                  </a:schemeClr>
+                </a:solidFill>
+              </a:defRPr>
+            </a:lvl3pPr>
+            <a:lvl4pPr marL="1028700" indent="0">
+              <a:buNone/>
+              <a:defRPr sz="1050">
+                <a:solidFill>
+                  <a:schemeClr val="tx1">
+                    <a:tint val="75000"/>
+                  </a:schemeClr>
+                </a:solidFill>
+              </a:defRPr>
+            </a:lvl4pPr>
+            <a:lvl5pPr marL="1371600" indent="0">
+              <a:buNone/>
+              <a:defRPr sz="1050">
+                <a:solidFill>
+                  <a:schemeClr val="tx1">
+                    <a:tint val="75000"/>
+                  </a:schemeClr>
+                </a:solidFill>
+              </a:defRPr>
+            </a:lvl5pPr>
+            <a:lvl6pPr marL="1714500" indent="0">
+              <a:buNone/>
+              <a:defRPr sz="1050">
+                <a:solidFill>
+                  <a:schemeClr val="tx1">
+                    <a:tint val="75000"/>
+                  </a:schemeClr>
+                </a:solidFill>
+              </a:defRPr>
+            </a:lvl6pPr>
+            <a:lvl7pPr marL="2057400" indent="0">
+              <a:buNone/>
+              <a:defRPr sz="1050">
+                <a:solidFill>
+                  <a:schemeClr val="tx1">
+                    <a:tint val="75000"/>
+                  </a:schemeClr>
+                </a:solidFill>
+              </a:defRPr>
+            </a:lvl7pPr>
+            <a:lvl8pPr marL="2400300" indent="0">
+              <a:buNone/>
+              <a:defRPr sz="1050">
+                <a:solidFill>
+                  <a:schemeClr val="tx1">
+                    <a:tint val="75000"/>
+                  </a:schemeClr>
+                </a:solidFill>
+              </a:defRPr>
+            </a:lvl8pPr>
+            <a:lvl9pPr marL="2743200" indent="0">
+              <a:buNone/>
+              <a:defRPr sz="1050">
+                <a:solidFill>
+                  <a:schemeClr val="tx1">
+                    <a:tint val="75000"/>
+                  </a:schemeClr>
+                </a:solidFill>
+              </a:defRPr>
+            </a:lvl9pPr>
+          </a:lstStyle>
+          <a:p>
+            <a:pPr lvl="0"/>
+            <a:r>
+              <a:rPr lang="en-US"/>
+              <a:t>Click to edit Master text styles</a:t>
+            </a:r>
+          </a:p>
+        </p:txBody>
+      </p:sp>
+      <p:sp>
+        <p:nvSpPr>
+          <p:cNvPr id="4" name="Date Placeholder 3"/>
+          <p:cNvSpPr>
+            <a:spLocks noGrp="1"/>
+          </p:cNvSpPr>
+          <p:nvPr>
+            <p:ph type="dt" sz="half" idx="10"/>
+          </p:nvPr>
+        </p:nvSpPr>
+        <p:spPr/>
+        <p:txBody>
+          <a:bodyPr/>
+          <a:lstStyle/>
+          <a:p>
+            <a:fld id="{90298CD5-6C1E-4009-B41F-6DF62E31D3BE}" type="datetimeFigureOut">
+              <a:rPr lang="en-US" smtClean="0"/>
+              <a:pPr/>
+              <a:t>10/6/2026</a:t>
+            </a:fld>
+            <a:endParaRPr lang="en-US" dirty="0"/>
+          </a:p>
+        </p:txBody>
+      </p:sp>
+      <p:sp>
+        <p:nvSpPr>
+          <p:cNvPr id="5" name="Footer Placeholder 4"/>
+          <p:cNvSpPr>
+            <a:spLocks noGrp="1"/>
+          </p:cNvSpPr>
+          <p:nvPr>
+            <p:ph type="ftr" sz="quarter" idx="11"/>
+          </p:nvPr>
+        </p:nvSpPr>
+        <p:spPr/>
+        <p:txBody>
+          <a:bodyPr/>
+          <a:lstStyle/>
+          <a:p>
+            <a:endParaRPr lang="en-US" dirty="0"/>
+          </a:p>
+        </p:txBody>
+      </p:sp>
+      <p:sp>
+        <p:nvSpPr>
+          <p:cNvPr id="6" name="Slide Number Placeholder 5"/>
+          <p:cNvSpPr>
+            <a:spLocks noGrp="1"/>
+          </p:cNvSpPr>
+          <p:nvPr>
+            <p:ph type="sldNum" sz="quarter" idx="12"/>
+          </p:nvPr>
+        </p:nvSpPr>
+        <p:spPr/>
+        <p:txBody>
+          <a:bodyPr/>
+          <a:lstStyle/>
+          <a:p>
+            <a:pPr algn="r"/>
+            <a:fld id="{F7021451-1387-4CA6-816F-3879F97B5CBC}" type="slidenum">
+              <a:rPr lang="en-US" b="0" smtClean="0"/>
+              <a:t>‹#›</a:t>
+            </a:fld>
+            <a:endParaRPr lang="en-US"/>
+          </a:p>
+        </p:txBody>
+      </p:sp>
+    </p:spTree>
+    <p:extLst>
+      <p:ext uri="{BB962C8B-B14F-4D97-AF65-F5344CB8AC3E}">
+        <p14:creationId xmlns:p14="http://schemas.microsoft.com/office/powerpoint/2010/main" val="3893805811"/>
+      </p:ext>
+    </p:extLst>
+  </p:cSld>
+  <p:clrMapOvr>
+    <a:masterClrMapping/>
+  </p:clrMapOvr>
+  <p:hf sldNum="0" hdr="0" ftr="0" dt="0"/>
+</p:sldLayout>
+</file>
+
+<file path=ppt/slideLayouts/slideLayout16.xml><?xml version="1.0" encoding="utf-8"?>
+<p:sldLayout xmlns:a="http://schemas.openxmlformats.org/drawingml/2006/main" xmlns:r="http://schemas.openxmlformats.org/officeDocument/2006/relationships" xmlns:p="http://schemas.openxmlformats.org/presentationml/2006/main" type="vertTx" preserve="1">
+  <p:cSld name="Title and Vertical Text">
+    <p:spTree>
+      <p:nvGrpSpPr>
+        <p:cNvPr id="1" name=""/>
+        <p:cNvGrpSpPr/>
+        <p:nvPr/>
+      </p:nvGrpSpPr>
+      <p:grpSpPr>
+        <a:xfrm>
+          <a:off x="0" y="0"/>
+          <a:ext cx="0" cy="0"/>
+          <a:chOff x="0" y="0"/>
+          <a:chExt cx="0" cy="0"/>
+        </a:xfrm>
+      </p:grpSpPr>
+      <p:sp>
+        <p:nvSpPr>
+          <p:cNvPr id="2" name="Title 1"/>
+          <p:cNvSpPr>
+            <a:spLocks noGrp="1"/>
+          </p:cNvSpPr>
+          <p:nvPr>
+            <p:ph type="title"/>
+          </p:nvPr>
+        </p:nvSpPr>
+        <p:spPr/>
+        <p:txBody>
+          <a:bodyPr/>
+          <a:lstStyle>
+            <a:lvl1pPr algn="l">
+              <a:defRPr/>
+            </a:lvl1pPr>
+          </a:lstStyle>
+          <a:p>
+            <a:r>
+              <a:rPr lang="en-US"/>
+              <a:t>Click to edit Master title style</a:t>
+            </a:r>
+            <a:endParaRPr lang="en-US" dirty="0"/>
+          </a:p>
+        </p:txBody>
+      </p:sp>
+      <p:sp>
+        <p:nvSpPr>
+          <p:cNvPr id="3" name="Vertical Text Placeholder 2"/>
+          <p:cNvSpPr>
+            <a:spLocks noGrp="1"/>
+          </p:cNvSpPr>
+          <p:nvPr>
+            <p:ph type="body" orient="vert" idx="1"/>
+          </p:nvPr>
+        </p:nvSpPr>
+        <p:spPr/>
+        <p:txBody>
+          <a:bodyPr vert="eaVert" anchor="t"/>
+          <a:lstStyle/>
+          <a:p>
+            <a:pPr lvl="0"/>
+            <a:r>
+              <a:rPr lang="en-US"/>
+              <a:t>Click to edit Master text styles</a:t>
+            </a:r>
+          </a:p>
+          <a:p>
+            <a:pPr lvl="1"/>
+            <a:r>
+              <a:rPr lang="en-US"/>
+              <a:t>Second level</a:t>
+            </a:r>
+          </a:p>
+          <a:p>
+            <a:pPr lvl="2"/>
+            <a:r>
+              <a:rPr lang="en-US"/>
+              <a:t>Third level</a:t>
+            </a:r>
+          </a:p>
+          <a:p>
+            <a:pPr lvl="3"/>
+            <a:r>
+              <a:rPr lang="en-US"/>
+              <a:t>Fourth level</a:t>
+            </a:r>
+          </a:p>
+          <a:p>
+            <a:pPr lvl="4"/>
+            <a:r>
+              <a:rPr lang="en-US"/>
+              <a:t>Fifth level</a:t>
+            </a:r>
+            <a:endParaRPr lang="en-US" dirty="0"/>
+          </a:p>
+        </p:txBody>
+      </p:sp>
+      <p:sp>
+        <p:nvSpPr>
+          <p:cNvPr id="4" name="Date Placeholder 3"/>
+          <p:cNvSpPr>
+            <a:spLocks noGrp="1"/>
+          </p:cNvSpPr>
+          <p:nvPr>
+            <p:ph type="dt" sz="half" idx="10"/>
+          </p:nvPr>
+        </p:nvSpPr>
+        <p:spPr/>
+        <p:txBody>
+          <a:bodyPr/>
+          <a:lstStyle/>
+          <a:p>
+            <a:fld id="{90298CD5-6C1E-4009-B41F-6DF62E31D3BE}" type="datetimeFigureOut">
+              <a:rPr lang="en-US" smtClean="0"/>
+              <a:pPr/>
+              <a:t>10/6/2026</a:t>
+            </a:fld>
+            <a:endParaRPr lang="en-US" dirty="0"/>
+          </a:p>
+        </p:txBody>
+      </p:sp>
+      <p:sp>
+        <p:nvSpPr>
+          <p:cNvPr id="5" name="Footer Placeholder 4"/>
+          <p:cNvSpPr>
+            <a:spLocks noGrp="1"/>
+          </p:cNvSpPr>
+          <p:nvPr>
+            <p:ph type="ftr" sz="quarter" idx="11"/>
+          </p:nvPr>
+        </p:nvSpPr>
+        <p:spPr/>
+        <p:txBody>
+          <a:bodyPr/>
+          <a:lstStyle/>
+          <a:p>
+            <a:endParaRPr lang="en-US" dirty="0"/>
+          </a:p>
+        </p:txBody>
+      </p:sp>
+      <p:sp>
+        <p:nvSpPr>
+          <p:cNvPr id="6" name="Slide Number Placeholder 5"/>
+          <p:cNvSpPr>
+            <a:spLocks noGrp="1"/>
+          </p:cNvSpPr>
+          <p:nvPr>
+            <p:ph type="sldNum" sz="quarter" idx="12"/>
+          </p:nvPr>
+        </p:nvSpPr>
+        <p:spPr/>
+        <p:txBody>
+          <a:bodyPr/>
+          <a:lstStyle/>
+          <a:p>
+            <a:pPr algn="r"/>
+            <a:fld id="{F7021451-1387-4CA6-816F-3879F97B5CBC}" type="slidenum">
+              <a:rPr lang="en-US" b="0" smtClean="0"/>
+              <a:t>‹#›</a:t>
+            </a:fld>
+            <a:endParaRPr lang="en-US"/>
+          </a:p>
+        </p:txBody>
+      </p:sp>
+    </p:spTree>
+    <p:extLst>
+      <p:ext uri="{BB962C8B-B14F-4D97-AF65-F5344CB8AC3E}">
+        <p14:creationId xmlns:p14="http://schemas.microsoft.com/office/powerpoint/2010/main" val="994276522"/>
+      </p:ext>
+    </p:extLst>
+  </p:cSld>
+  <p:clrMapOvr>
+    <a:masterClrMapping/>
+  </p:clrMapOvr>
+  <p:hf sldNum="0" hdr="0" ftr="0" dt="0"/>
+</p:sldLayout>
+</file>
+
+<file path=ppt/slideLayouts/slideLayout17.xml><?xml version="1.0" encoding="utf-8"?>
+<p:sldLayout xmlns:a="http://schemas.openxmlformats.org/drawingml/2006/main" xmlns:r="http://schemas.openxmlformats.org/officeDocument/2006/relationships" xmlns:p="http://schemas.openxmlformats.org/presentationml/2006/main" type="vertTitleAndTx" preserve="1">
+  <p:cSld name="Vertical Title and Text">
+    <p:spTree>
+      <p:nvGrpSpPr>
+        <p:cNvPr id="1" name=""/>
+        <p:cNvGrpSpPr/>
+        <p:nvPr/>
+      </p:nvGrpSpPr>
+      <p:grpSpPr>
+        <a:xfrm>
+          <a:off x="0" y="0"/>
+          <a:ext cx="0" cy="0"/>
+          <a:chOff x="0" y="0"/>
+          <a:chExt cx="0" cy="0"/>
+        </a:xfrm>
+      </p:grpSpPr>
+      <p:sp>
+        <p:nvSpPr>
+          <p:cNvPr id="2" name="Vertical Title 1"/>
+          <p:cNvSpPr>
+            <a:spLocks noGrp="1"/>
+          </p:cNvSpPr>
+          <p:nvPr>
+            <p:ph type="title" orient="vert"/>
+          </p:nvPr>
+        </p:nvSpPr>
+        <p:spPr>
+          <a:xfrm>
+            <a:off x="6513909" y="514350"/>
+            <a:ext cx="1543050" cy="3429000"/>
+          </a:xfrm>
+        </p:spPr>
+        <p:txBody>
+          <a:bodyPr vert="eaVert"/>
+          <a:lstStyle/>
+          <a:p>
+            <a:r>
+              <a:rPr lang="en-US"/>
+              <a:t>Click to edit Master title style</a:t>
+            </a:r>
+            <a:endParaRPr lang="en-US" dirty="0"/>
+          </a:p>
+        </p:txBody>
+      </p:sp>
+      <p:sp>
+        <p:nvSpPr>
+          <p:cNvPr id="3" name="Vertical Text Placeholder 2"/>
+          <p:cNvSpPr>
+            <a:spLocks noGrp="1"/>
+          </p:cNvSpPr>
+          <p:nvPr>
+            <p:ph type="body" orient="vert" idx="1"/>
+          </p:nvPr>
+        </p:nvSpPr>
+        <p:spPr>
+          <a:xfrm>
+            <a:off x="514350" y="514350"/>
+            <a:ext cx="5867400" cy="3981450"/>
+          </a:xfrm>
+        </p:spPr>
+        <p:txBody>
+          <a:bodyPr vert="eaVert" anchor="t"/>
+          <a:lstStyle/>
+          <a:p>
+            <a:pPr lvl="0"/>
+            <a:r>
+              <a:rPr lang="en-US"/>
+              <a:t>Click to edit Master text styles</a:t>
+            </a:r>
+          </a:p>
+          <a:p>
+            <a:pPr lvl="1"/>
+            <a:r>
+              <a:rPr lang="en-US"/>
+              <a:t>Second level</a:t>
+            </a:r>
+          </a:p>
+          <a:p>
+            <a:pPr lvl="2"/>
+            <a:r>
+              <a:rPr lang="en-US"/>
+              <a:t>Third level</a:t>
+            </a:r>
+          </a:p>
+          <a:p>
+            <a:pPr lvl="3"/>
+            <a:r>
+              <a:rPr lang="en-US"/>
+              <a:t>Fourth level</a:t>
+            </a:r>
+          </a:p>
+          <a:p>
+            <a:pPr lvl="4"/>
+            <a:r>
+              <a:rPr lang="en-US"/>
+              <a:t>Fifth level</a:t>
+            </a:r>
+            <a:endParaRPr lang="en-US" dirty="0"/>
+          </a:p>
+        </p:txBody>
+      </p:sp>
+      <p:sp>
+        <p:nvSpPr>
+          <p:cNvPr id="4" name="Date Placeholder 3"/>
+          <p:cNvSpPr>
+            <a:spLocks noGrp="1"/>
+          </p:cNvSpPr>
+          <p:nvPr>
+            <p:ph type="dt" sz="half" idx="10"/>
+          </p:nvPr>
+        </p:nvSpPr>
+        <p:spPr/>
+        <p:txBody>
+          <a:bodyPr/>
+          <a:lstStyle/>
+          <a:p>
+            <a:fld id="{90298CD5-6C1E-4009-B41F-6DF62E31D3BE}" type="datetimeFigureOut">
+              <a:rPr lang="en-US" smtClean="0"/>
+              <a:pPr/>
+              <a:t>10/6/2026</a:t>
+            </a:fld>
+            <a:endParaRPr lang="en-US" dirty="0"/>
+          </a:p>
+        </p:txBody>
+      </p:sp>
+      <p:sp>
+        <p:nvSpPr>
+          <p:cNvPr id="5" name="Footer Placeholder 4"/>
+          <p:cNvSpPr>
+            <a:spLocks noGrp="1"/>
+          </p:cNvSpPr>
+          <p:nvPr>
+            <p:ph type="ftr" sz="quarter" idx="11"/>
+          </p:nvPr>
+        </p:nvSpPr>
+        <p:spPr/>
+        <p:txBody>
+          <a:bodyPr/>
+          <a:lstStyle/>
+          <a:p>
+            <a:endParaRPr lang="en-US" dirty="0"/>
+          </a:p>
+        </p:txBody>
+      </p:sp>
+      <p:sp>
+        <p:nvSpPr>
+          <p:cNvPr id="6" name="Slide Number Placeholder 5"/>
+          <p:cNvSpPr>
+            <a:spLocks noGrp="1"/>
+          </p:cNvSpPr>
+          <p:nvPr>
+            <p:ph type="sldNum" sz="quarter" idx="12"/>
+          </p:nvPr>
+        </p:nvSpPr>
+        <p:spPr/>
+        <p:txBody>
+          <a:bodyPr/>
+          <a:lstStyle/>
+          <a:p>
+            <a:pPr algn="r"/>
+            <a:fld id="{F7021451-1387-4CA6-816F-3879F97B5CBC}" type="slidenum">
+              <a:rPr lang="en-US" b="0" smtClean="0"/>
+              <a:t>‹#›</a:t>
+            </a:fld>
+            <a:endParaRPr lang="en-US"/>
+          </a:p>
+        </p:txBody>
+      </p:sp>
+    </p:spTree>
+    <p:extLst>
+      <p:ext uri="{BB962C8B-B14F-4D97-AF65-F5344CB8AC3E}">
+        <p14:creationId xmlns:p14="http://schemas.microsoft.com/office/powerpoint/2010/main" val="2307443476"/>
+      </p:ext>
+    </p:extLst>
+  </p:cSld>
+  <p:clrMapOvr>
+    <a:masterClrMapping/>
+  </p:clrMapOvr>
+  <p:hf sldNum="0" hdr="0" ftr="0" dt="0"/>
+</p:sldLayout>
+</file>
+
+<file path=ppt/slideLayouts/slideLayout18.xml><?xml version="1.0" encoding="utf-8"?>
+<p:sldLayout xmlns:a="http://schemas.openxmlformats.org/drawingml/2006/main" xmlns:r="http://schemas.openxmlformats.org/officeDocument/2006/relationships" xmlns:p="http://schemas.openxmlformats.org/presentationml/2006/main">
+  <p:cSld name="DARK">
     <p:bg>
-      <p:bgRef idx="1001">
-        <a:schemeClr val="bg1"/>
-      </p:bgRef>
+      <p:bgPr>
+        <a:solidFill>
+          <a:schemeClr val="tx2"/>
+        </a:solidFill>
+        <a:effectLst/>
+      </p:bgPr>
     </p:bg>
     <p:spTree>
       <p:nvGrpSpPr>
@@ -1096,7 +3529,53 @@
           <a:chExt cx="0" cy="0"/>
         </a:xfrm>
       </p:grpSpPr>
+      <p:sp>
+        <p:nvSpPr>
+          <p:cNvPr id="2" name="Text 0"/>
+          <p:cNvSpPr>
+            <a:spLocks noGrp="1"/>
+          </p:cNvSpPr>
+          <p:nvPr>
+            <p:ph type="title" idx="102" hasCustomPrompt="1"/>
+          </p:nvPr>
+        </p:nvSpPr>
+        <p:spPr>
+          <a:xfrm>
+            <a:off x="548640" y="1280160"/>
+            <a:ext cx="6035040" cy="1554480"/>
+          </a:xfrm>
+          <a:prstGeom prst="rect">
+            <a:avLst/>
+          </a:prstGeom>
+          <a:noFill/>
+          <a:ln/>
+        </p:spPr>
+        <p:txBody>
+          <a:bodyPr wrap="square" rtlCol="0"/>
+          <a:lstStyle>
+            <a:lvl1pPr marL="0" indent="0" algn="l">
+              <a:buNone/>
+              <a:defRPr lang="en-US" sz="3800" b="1" dirty="0">
+                <a:solidFill>
+                  <a:schemeClr val="bg1"/>
+                </a:solidFill>
+              </a:defRPr>
+            </a:lvl1pPr>
+          </a:lstStyle>
+          <a:p>
+            <a:pPr marL="0" indent="0" algn="l">
+              <a:buNone/>
+            </a:pPr>
+            <a:endParaRPr lang="en-US" sz="3800" dirty="0"/>
+          </a:p>
+        </p:txBody>
+      </p:sp>
     </p:spTree>
+    <p:extLst>
+      <p:ext uri="{BB962C8B-B14F-4D97-AF65-F5344CB8AC3E}">
+        <p14:creationId xmlns:p14="http://schemas.microsoft.com/office/powerpoint/2010/main" val="609465797"/>
+      </p:ext>
+    </p:extLst>
   </p:cSld>
   <p:clrMapOvr>
     <a:masterClrMapping/>
@@ -1104,8 +3583,8 @@
 </p:sldLayout>
 </file>
 
-<file path=ppt/slideLayouts/slideLayout2.xml><?xml version="1.0" encoding="utf-8"?>
-<p:sldLayout xmlns:a="http://schemas.openxmlformats.org/drawingml/2006/main" xmlns:r="http://schemas.openxmlformats.org/officeDocument/2006/relationships" xmlns:p="http://schemas.openxmlformats.org/presentationml/2006/main" preserve="1">
+<file path=ppt/slideLayouts/slideLayout19.xml><?xml version="1.0" encoding="utf-8"?>
+<p:sldLayout xmlns:a="http://schemas.openxmlformats.org/drawingml/2006/main" xmlns:r="http://schemas.openxmlformats.org/officeDocument/2006/relationships" xmlns:p="http://schemas.openxmlformats.org/presentationml/2006/main">
   <p:cSld name="LIGHT">
     <p:bg>
       <p:bgPr>
@@ -1190,7 +3669,7 @@
           </a:prstGeom>
           <a:extLst>
             <a:ext uri="{C572A759-6A51-4108-AA02-DFA0A04FC94B}">
-              <ma14:wrappingTextBoxFlag xmlns="" xmlns:ma14="http://schemas.microsoft.com/office/mac/drawingml/2011/main" val="0"/>
+              <ma14:wrappingTextBoxFlag xmlns:ma14="http://schemas.microsoft.com/office/mac/drawingml/2011/main" xmlns="" val="0"/>
             </a:ext>
           </a:extLst>
         </p:spPr>
@@ -1216,6 +3695,11 @@
         </p:txBody>
       </p:sp>
     </p:spTree>
+    <p:extLst>
+      <p:ext uri="{BB962C8B-B14F-4D97-AF65-F5344CB8AC3E}">
+        <p14:creationId xmlns:p14="http://schemas.microsoft.com/office/powerpoint/2010/main" val="3957689169"/>
+      </p:ext>
+    </p:extLst>
   </p:cSld>
   <p:clrMapOvr>
     <a:masterClrMapping/>
@@ -1223,17 +3707,9 @@
 </p:sldLayout>
 </file>
 
-<file path=ppt/slideLayouts/slideLayout3.xml><?xml version="1.0" encoding="utf-8"?>
-<p:sldLayout xmlns:a="http://schemas.openxmlformats.org/drawingml/2006/main" xmlns:r="http://schemas.openxmlformats.org/officeDocument/2006/relationships" xmlns:p="http://schemas.openxmlformats.org/presentationml/2006/main" preserve="1">
-  <p:cSld name="DARK">
-    <p:bg>
-      <p:bgPr>
-        <a:solidFill>
-          <a:schemeClr val="tx2"/>
-        </a:solidFill>
-        <a:effectLst/>
-      </p:bgPr>
-    </p:bg>
+<file path=ppt/slideLayouts/slideLayout2.xml><?xml version="1.0" encoding="utf-8"?>
+<p:sldLayout xmlns:a="http://schemas.openxmlformats.org/drawingml/2006/main" xmlns:r="http://schemas.openxmlformats.org/officeDocument/2006/relationships" xmlns:p="http://schemas.openxmlformats.org/presentationml/2006/main" type="obj" preserve="1">
+  <p:cSld name="Title and Content">
     <p:spTree>
       <p:nvGrpSpPr>
         <p:cNvPr id="1" name=""/>
@@ -1250,50 +3726,1793 @@
       </p:grpSpPr>
       <p:sp>
         <p:nvSpPr>
-          <p:cNvPr id="2" name="Text 0"/>
-          <p:cNvSpPr>
-            <a:spLocks noGrp="1"/>
-          </p:cNvSpPr>
-          <p:nvPr>
-            <p:ph type="title" idx="102" hasCustomPrompt="1"/>
-          </p:nvPr>
-        </p:nvSpPr>
-        <p:spPr>
-          <a:xfrm>
-            <a:off x="548640" y="1280160"/>
-            <a:ext cx="6035040" cy="1554480"/>
-          </a:xfrm>
-          <a:prstGeom prst="rect">
-            <a:avLst/>
-          </a:prstGeom>
-          <a:noFill/>
-          <a:ln/>
-        </p:spPr>
-        <p:txBody>
-          <a:bodyPr wrap="square" rtlCol="0"/>
-          <a:lstStyle>
-            <a:lvl1pPr marL="0" indent="0" algn="l">
-              <a:buNone/>
-              <a:defRPr lang="en-US" sz="3800" b="1" dirty="0">
-                <a:solidFill>
-                  <a:schemeClr val="bg1"/>
-                </a:solidFill>
-              </a:defRPr>
-            </a:lvl1pPr>
-          </a:lstStyle>
-          <a:p>
-            <a:pPr marL="0" indent="0" algn="l">
-              <a:buNone/>
-            </a:pPr>
-            <a:endParaRPr lang="en-US" sz="3800" dirty="0"/>
+          <p:cNvPr id="2" name="Title 1"/>
+          <p:cNvSpPr>
+            <a:spLocks noGrp="1"/>
+          </p:cNvSpPr>
+          <p:nvPr>
+            <p:ph type="title"/>
+          </p:nvPr>
+        </p:nvSpPr>
+        <p:spPr/>
+        <p:txBody>
+          <a:bodyPr/>
+          <a:lstStyle/>
+          <a:p>
+            <a:r>
+              <a:rPr lang="en-US"/>
+              <a:t>Click to edit Master title style</a:t>
+            </a:r>
+            <a:endParaRPr lang="en-US" dirty="0"/>
+          </a:p>
+        </p:txBody>
+      </p:sp>
+      <p:sp>
+        <p:nvSpPr>
+          <p:cNvPr id="3" name="Content Placeholder 2"/>
+          <p:cNvSpPr>
+            <a:spLocks noGrp="1"/>
+          </p:cNvSpPr>
+          <p:nvPr>
+            <p:ph idx="1"/>
+          </p:nvPr>
+        </p:nvSpPr>
+        <p:spPr/>
+        <p:txBody>
+          <a:bodyPr anchor="ctr"/>
+          <a:lstStyle/>
+          <a:p>
+            <a:pPr lvl="0"/>
+            <a:r>
+              <a:rPr lang="en-US"/>
+              <a:t>Click to edit Master text styles</a:t>
+            </a:r>
+          </a:p>
+          <a:p>
+            <a:pPr lvl="1"/>
+            <a:r>
+              <a:rPr lang="en-US"/>
+              <a:t>Second level</a:t>
+            </a:r>
+          </a:p>
+          <a:p>
+            <a:pPr lvl="2"/>
+            <a:r>
+              <a:rPr lang="en-US"/>
+              <a:t>Third level</a:t>
+            </a:r>
+          </a:p>
+          <a:p>
+            <a:pPr lvl="3"/>
+            <a:r>
+              <a:rPr lang="en-US"/>
+              <a:t>Fourth level</a:t>
+            </a:r>
+          </a:p>
+          <a:p>
+            <a:pPr lvl="4"/>
+            <a:r>
+              <a:rPr lang="en-US"/>
+              <a:t>Fifth level</a:t>
+            </a:r>
+            <a:endParaRPr lang="en-US" dirty="0"/>
+          </a:p>
+        </p:txBody>
+      </p:sp>
+      <p:sp>
+        <p:nvSpPr>
+          <p:cNvPr id="4" name="Date Placeholder 3"/>
+          <p:cNvSpPr>
+            <a:spLocks noGrp="1"/>
+          </p:cNvSpPr>
+          <p:nvPr>
+            <p:ph type="dt" sz="half" idx="10"/>
+          </p:nvPr>
+        </p:nvSpPr>
+        <p:spPr/>
+        <p:txBody>
+          <a:bodyPr/>
+          <a:lstStyle/>
+          <a:p>
+            <a:fld id="{90298CD5-6C1E-4009-B41F-6DF62E31D3BE}" type="datetimeFigureOut">
+              <a:rPr lang="en-US" smtClean="0"/>
+              <a:pPr/>
+              <a:t>10/6/2026</a:t>
+            </a:fld>
+            <a:endParaRPr lang="en-US" dirty="0"/>
+          </a:p>
+        </p:txBody>
+      </p:sp>
+      <p:sp>
+        <p:nvSpPr>
+          <p:cNvPr id="5" name="Footer Placeholder 4"/>
+          <p:cNvSpPr>
+            <a:spLocks noGrp="1"/>
+          </p:cNvSpPr>
+          <p:nvPr>
+            <p:ph type="ftr" sz="quarter" idx="11"/>
+          </p:nvPr>
+        </p:nvSpPr>
+        <p:spPr/>
+        <p:txBody>
+          <a:bodyPr/>
+          <a:lstStyle/>
+          <a:p>
+            <a:endParaRPr lang="en-US" dirty="0"/>
+          </a:p>
+        </p:txBody>
+      </p:sp>
+      <p:sp>
+        <p:nvSpPr>
+          <p:cNvPr id="6" name="Slide Number Placeholder 5"/>
+          <p:cNvSpPr>
+            <a:spLocks noGrp="1"/>
+          </p:cNvSpPr>
+          <p:nvPr>
+            <p:ph type="sldNum" sz="quarter" idx="12"/>
+          </p:nvPr>
+        </p:nvSpPr>
+        <p:spPr/>
+        <p:txBody>
+          <a:bodyPr/>
+          <a:lstStyle/>
+          <a:p>
+            <a:pPr algn="r"/>
+            <a:fld id="{F7021451-1387-4CA6-816F-3879F97B5CBC}" type="slidenum">
+              <a:rPr lang="en-US" b="0" smtClean="0"/>
+              <a:t>‹#›</a:t>
+            </a:fld>
+            <a:endParaRPr lang="en-US"/>
           </a:p>
         </p:txBody>
       </p:sp>
     </p:spTree>
+    <p:extLst>
+      <p:ext uri="{BB962C8B-B14F-4D97-AF65-F5344CB8AC3E}">
+        <p14:creationId xmlns:p14="http://schemas.microsoft.com/office/powerpoint/2010/main" val="4068815314"/>
+      </p:ext>
+    </p:extLst>
   </p:cSld>
   <p:clrMapOvr>
     <a:masterClrMapping/>
   </p:clrMapOvr>
+  <p:hf sldNum="0" hdr="0" ftr="0" dt="0"/>
+</p:sldLayout>
+</file>
+
+<file path=ppt/slideLayouts/slideLayout3.xml><?xml version="1.0" encoding="utf-8"?>
+<p:sldLayout xmlns:a="http://schemas.openxmlformats.org/drawingml/2006/main" xmlns:r="http://schemas.openxmlformats.org/officeDocument/2006/relationships" xmlns:p="http://schemas.openxmlformats.org/presentationml/2006/main" type="secHead" preserve="1">
+  <p:cSld name="Section Header">
+    <p:spTree>
+      <p:nvGrpSpPr>
+        <p:cNvPr id="1" name=""/>
+        <p:cNvGrpSpPr/>
+        <p:nvPr/>
+      </p:nvGrpSpPr>
+      <p:grpSpPr>
+        <a:xfrm>
+          <a:off x="0" y="0"/>
+          <a:ext cx="0" cy="0"/>
+          <a:chOff x="0" y="0"/>
+          <a:chExt cx="0" cy="0"/>
+        </a:xfrm>
+      </p:grpSpPr>
+      <p:sp>
+        <p:nvSpPr>
+          <p:cNvPr id="2" name="Title 1"/>
+          <p:cNvSpPr>
+            <a:spLocks noGrp="1"/>
+          </p:cNvSpPr>
+          <p:nvPr>
+            <p:ph type="title"/>
+          </p:nvPr>
+        </p:nvSpPr>
+        <p:spPr>
+          <a:xfrm>
+            <a:off x="513159" y="1504950"/>
+            <a:ext cx="6400801" cy="1711200"/>
+          </a:xfrm>
+        </p:spPr>
+        <p:txBody>
+          <a:bodyPr anchor="b">
+            <a:normAutofit/>
+          </a:bodyPr>
+          <a:lstStyle>
+            <a:lvl1pPr algn="l">
+              <a:defRPr sz="2700" b="0" cap="all"/>
+            </a:lvl1pPr>
+          </a:lstStyle>
+          <a:p>
+            <a:r>
+              <a:rPr lang="en-US"/>
+              <a:t>Click to edit Master title style</a:t>
+            </a:r>
+            <a:endParaRPr lang="en-US" dirty="0"/>
+          </a:p>
+        </p:txBody>
+      </p:sp>
+      <p:sp>
+        <p:nvSpPr>
+          <p:cNvPr id="3" name="Text Placeholder 2"/>
+          <p:cNvSpPr>
+            <a:spLocks noGrp="1"/>
+          </p:cNvSpPr>
+          <p:nvPr>
+            <p:ph type="body" idx="1"/>
+          </p:nvPr>
+        </p:nvSpPr>
+        <p:spPr>
+          <a:xfrm>
+            <a:off x="513160" y="3371850"/>
+            <a:ext cx="6400800" cy="1123950"/>
+          </a:xfrm>
+        </p:spPr>
+        <p:txBody>
+          <a:bodyPr anchor="t">
+            <a:normAutofit/>
+          </a:bodyPr>
+          <a:lstStyle>
+            <a:lvl1pPr marL="0" indent="0" algn="l">
+              <a:buNone/>
+              <a:defRPr sz="1350">
+                <a:solidFill>
+                  <a:schemeClr val="bg2">
+                    <a:lumMod val="75000"/>
+                  </a:schemeClr>
+                </a:solidFill>
+              </a:defRPr>
+            </a:lvl1pPr>
+            <a:lvl2pPr marL="342900" indent="0">
+              <a:buNone/>
+              <a:defRPr sz="1350">
+                <a:solidFill>
+                  <a:schemeClr val="tx1">
+                    <a:tint val="75000"/>
+                  </a:schemeClr>
+                </a:solidFill>
+              </a:defRPr>
+            </a:lvl2pPr>
+            <a:lvl3pPr marL="685800" indent="0">
+              <a:buNone/>
+              <a:defRPr sz="1200">
+                <a:solidFill>
+                  <a:schemeClr val="tx1">
+                    <a:tint val="75000"/>
+                  </a:schemeClr>
+                </a:solidFill>
+              </a:defRPr>
+            </a:lvl3pPr>
+            <a:lvl4pPr marL="1028700" indent="0">
+              <a:buNone/>
+              <a:defRPr sz="1050">
+                <a:solidFill>
+                  <a:schemeClr val="tx1">
+                    <a:tint val="75000"/>
+                  </a:schemeClr>
+                </a:solidFill>
+              </a:defRPr>
+            </a:lvl4pPr>
+            <a:lvl5pPr marL="1371600" indent="0">
+              <a:buNone/>
+              <a:defRPr sz="1050">
+                <a:solidFill>
+                  <a:schemeClr val="tx1">
+                    <a:tint val="75000"/>
+                  </a:schemeClr>
+                </a:solidFill>
+              </a:defRPr>
+            </a:lvl5pPr>
+            <a:lvl6pPr marL="1714500" indent="0">
+              <a:buNone/>
+              <a:defRPr sz="1050">
+                <a:solidFill>
+                  <a:schemeClr val="tx1">
+                    <a:tint val="75000"/>
+                  </a:schemeClr>
+                </a:solidFill>
+              </a:defRPr>
+            </a:lvl6pPr>
+            <a:lvl7pPr marL="2057400" indent="0">
+              <a:buNone/>
+              <a:defRPr sz="1050">
+                <a:solidFill>
+                  <a:schemeClr val="tx1">
+                    <a:tint val="75000"/>
+                  </a:schemeClr>
+                </a:solidFill>
+              </a:defRPr>
+            </a:lvl7pPr>
+            <a:lvl8pPr marL="2400300" indent="0">
+              <a:buNone/>
+              <a:defRPr sz="1050">
+                <a:solidFill>
+                  <a:schemeClr val="tx1">
+                    <a:tint val="75000"/>
+                  </a:schemeClr>
+                </a:solidFill>
+              </a:defRPr>
+            </a:lvl8pPr>
+            <a:lvl9pPr marL="2743200" indent="0">
+              <a:buNone/>
+              <a:defRPr sz="1050">
+                <a:solidFill>
+                  <a:schemeClr val="tx1">
+                    <a:tint val="75000"/>
+                  </a:schemeClr>
+                </a:solidFill>
+              </a:defRPr>
+            </a:lvl9pPr>
+          </a:lstStyle>
+          <a:p>
+            <a:pPr lvl="0"/>
+            <a:r>
+              <a:rPr lang="en-US"/>
+              <a:t>Click to edit Master text styles</a:t>
+            </a:r>
+          </a:p>
+        </p:txBody>
+      </p:sp>
+      <p:sp>
+        <p:nvSpPr>
+          <p:cNvPr id="4" name="Date Placeholder 3"/>
+          <p:cNvSpPr>
+            <a:spLocks noGrp="1"/>
+          </p:cNvSpPr>
+          <p:nvPr>
+            <p:ph type="dt" sz="half" idx="10"/>
+          </p:nvPr>
+        </p:nvSpPr>
+        <p:spPr/>
+        <p:txBody>
+          <a:bodyPr/>
+          <a:lstStyle/>
+          <a:p>
+            <a:fld id="{5A61015F-7CC6-4D0A-9D87-873EA4C304CC}" type="datetimeFigureOut">
+              <a:rPr lang="en-US" smtClean="0"/>
+              <a:t>10/6/2026</a:t>
+            </a:fld>
+            <a:endParaRPr lang="en-US" dirty="0"/>
+          </a:p>
+        </p:txBody>
+      </p:sp>
+      <p:sp>
+        <p:nvSpPr>
+          <p:cNvPr id="5" name="Footer Placeholder 4"/>
+          <p:cNvSpPr>
+            <a:spLocks noGrp="1"/>
+          </p:cNvSpPr>
+          <p:nvPr>
+            <p:ph type="ftr" sz="quarter" idx="11"/>
+          </p:nvPr>
+        </p:nvSpPr>
+        <p:spPr/>
+        <p:txBody>
+          <a:bodyPr/>
+          <a:lstStyle/>
+          <a:p>
+            <a:endParaRPr lang="en-US" dirty="0"/>
+          </a:p>
+        </p:txBody>
+      </p:sp>
+      <p:sp>
+        <p:nvSpPr>
+          <p:cNvPr id="6" name="Slide Number Placeholder 5"/>
+          <p:cNvSpPr>
+            <a:spLocks noGrp="1"/>
+          </p:cNvSpPr>
+          <p:nvPr>
+            <p:ph type="sldNum" sz="quarter" idx="12"/>
+          </p:nvPr>
+        </p:nvSpPr>
+        <p:spPr/>
+        <p:txBody>
+          <a:bodyPr/>
+          <a:lstStyle/>
+          <a:p>
+            <a:pPr algn="r"/>
+            <a:fld id="{F7021451-1387-4CA6-816F-3879F97B5CBC}" type="slidenum">
+              <a:rPr lang="en-US" b="0" smtClean="0"/>
+              <a:t>‹#›</a:t>
+            </a:fld>
+            <a:endParaRPr lang="en-US"/>
+          </a:p>
+        </p:txBody>
+      </p:sp>
+    </p:spTree>
+    <p:extLst>
+      <p:ext uri="{BB962C8B-B14F-4D97-AF65-F5344CB8AC3E}">
+        <p14:creationId xmlns:p14="http://schemas.microsoft.com/office/powerpoint/2010/main" val="2168693889"/>
+      </p:ext>
+    </p:extLst>
+  </p:cSld>
+  <p:clrMapOvr>
+    <a:masterClrMapping/>
+  </p:clrMapOvr>
+  <p:hf sldNum="0" hdr="0" ftr="0" dt="0"/>
+</p:sldLayout>
+</file>
+
+<file path=ppt/slideLayouts/slideLayout4.xml><?xml version="1.0" encoding="utf-8"?>
+<p:sldLayout xmlns:a="http://schemas.openxmlformats.org/drawingml/2006/main" xmlns:r="http://schemas.openxmlformats.org/officeDocument/2006/relationships" xmlns:p="http://schemas.openxmlformats.org/presentationml/2006/main" type="twoObj" preserve="1">
+  <p:cSld name="Two Content">
+    <p:spTree>
+      <p:nvGrpSpPr>
+        <p:cNvPr id="1" name=""/>
+        <p:cNvGrpSpPr/>
+        <p:nvPr/>
+      </p:nvGrpSpPr>
+      <p:grpSpPr>
+        <a:xfrm>
+          <a:off x="0" y="0"/>
+          <a:ext cx="0" cy="0"/>
+          <a:chOff x="0" y="0"/>
+          <a:chExt cx="0" cy="0"/>
+        </a:xfrm>
+      </p:grpSpPr>
+      <p:sp>
+        <p:nvSpPr>
+          <p:cNvPr id="2" name="Title 1"/>
+          <p:cNvSpPr>
+            <a:spLocks noGrp="1"/>
+          </p:cNvSpPr>
+          <p:nvPr>
+            <p:ph type="title"/>
+          </p:nvPr>
+        </p:nvSpPr>
+        <p:spPr/>
+        <p:txBody>
+          <a:bodyPr/>
+          <a:lstStyle/>
+          <a:p>
+            <a:r>
+              <a:rPr lang="en-US"/>
+              <a:t>Click to edit Master title style</a:t>
+            </a:r>
+            <a:endParaRPr lang="en-US" dirty="0"/>
+          </a:p>
+        </p:txBody>
+      </p:sp>
+      <p:sp>
+        <p:nvSpPr>
+          <p:cNvPr id="3" name="Content Placeholder 2"/>
+          <p:cNvSpPr>
+            <a:spLocks noGrp="1"/>
+          </p:cNvSpPr>
+          <p:nvPr>
+            <p:ph sz="half" idx="1"/>
+          </p:nvPr>
+        </p:nvSpPr>
+        <p:spPr>
+          <a:xfrm>
+            <a:off x="513159" y="514351"/>
+            <a:ext cx="3703241" cy="2711450"/>
+          </a:xfrm>
+        </p:spPr>
+        <p:txBody>
+          <a:bodyPr>
+            <a:normAutofit/>
+          </a:bodyPr>
+          <a:lstStyle/>
+          <a:p>
+            <a:pPr lvl="0"/>
+            <a:r>
+              <a:rPr lang="en-US"/>
+              <a:t>Click to edit Master text styles</a:t>
+            </a:r>
+          </a:p>
+          <a:p>
+            <a:pPr lvl="1"/>
+            <a:r>
+              <a:rPr lang="en-US"/>
+              <a:t>Second level</a:t>
+            </a:r>
+          </a:p>
+          <a:p>
+            <a:pPr lvl="2"/>
+            <a:r>
+              <a:rPr lang="en-US"/>
+              <a:t>Third level</a:t>
+            </a:r>
+          </a:p>
+          <a:p>
+            <a:pPr lvl="3"/>
+            <a:r>
+              <a:rPr lang="en-US"/>
+              <a:t>Fourth level</a:t>
+            </a:r>
+          </a:p>
+          <a:p>
+            <a:pPr lvl="4"/>
+            <a:r>
+              <a:rPr lang="en-US"/>
+              <a:t>Fifth level</a:t>
+            </a:r>
+            <a:endParaRPr lang="en-US" dirty="0"/>
+          </a:p>
+        </p:txBody>
+      </p:sp>
+      <p:sp>
+        <p:nvSpPr>
+          <p:cNvPr id="4" name="Content Placeholder 3"/>
+          <p:cNvSpPr>
+            <a:spLocks noGrp="1"/>
+          </p:cNvSpPr>
+          <p:nvPr>
+            <p:ph sz="half" idx="2"/>
+          </p:nvPr>
+        </p:nvSpPr>
+        <p:spPr>
+          <a:xfrm>
+            <a:off x="4356100" y="514351"/>
+            <a:ext cx="3700859" cy="2711450"/>
+          </a:xfrm>
+        </p:spPr>
+        <p:txBody>
+          <a:bodyPr>
+            <a:normAutofit/>
+          </a:bodyPr>
+          <a:lstStyle/>
+          <a:p>
+            <a:pPr lvl="0"/>
+            <a:r>
+              <a:rPr lang="en-US"/>
+              <a:t>Click to edit Master text styles</a:t>
+            </a:r>
+          </a:p>
+          <a:p>
+            <a:pPr lvl="1"/>
+            <a:r>
+              <a:rPr lang="en-US"/>
+              <a:t>Second level</a:t>
+            </a:r>
+          </a:p>
+          <a:p>
+            <a:pPr lvl="2"/>
+            <a:r>
+              <a:rPr lang="en-US"/>
+              <a:t>Third level</a:t>
+            </a:r>
+          </a:p>
+          <a:p>
+            <a:pPr lvl="3"/>
+            <a:r>
+              <a:rPr lang="en-US"/>
+              <a:t>Fourth level</a:t>
+            </a:r>
+          </a:p>
+          <a:p>
+            <a:pPr lvl="4"/>
+            <a:r>
+              <a:rPr lang="en-US"/>
+              <a:t>Fifth level</a:t>
+            </a:r>
+            <a:endParaRPr lang="en-US" dirty="0"/>
+          </a:p>
+        </p:txBody>
+      </p:sp>
+      <p:sp>
+        <p:nvSpPr>
+          <p:cNvPr id="5" name="Date Placeholder 4"/>
+          <p:cNvSpPr>
+            <a:spLocks noGrp="1"/>
+          </p:cNvSpPr>
+          <p:nvPr>
+            <p:ph type="dt" sz="half" idx="10"/>
+          </p:nvPr>
+        </p:nvSpPr>
+        <p:spPr/>
+        <p:txBody>
+          <a:bodyPr/>
+          <a:lstStyle/>
+          <a:p>
+            <a:fld id="{90298CD5-6C1E-4009-B41F-6DF62E31D3BE}" type="datetimeFigureOut">
+              <a:rPr lang="en-US" smtClean="0"/>
+              <a:pPr/>
+              <a:t>10/6/2026</a:t>
+            </a:fld>
+            <a:endParaRPr lang="en-US" dirty="0"/>
+          </a:p>
+        </p:txBody>
+      </p:sp>
+      <p:sp>
+        <p:nvSpPr>
+          <p:cNvPr id="6" name="Footer Placeholder 5"/>
+          <p:cNvSpPr>
+            <a:spLocks noGrp="1"/>
+          </p:cNvSpPr>
+          <p:nvPr>
+            <p:ph type="ftr" sz="quarter" idx="11"/>
+          </p:nvPr>
+        </p:nvSpPr>
+        <p:spPr/>
+        <p:txBody>
+          <a:bodyPr/>
+          <a:lstStyle/>
+          <a:p>
+            <a:endParaRPr lang="en-US" dirty="0"/>
+          </a:p>
+        </p:txBody>
+      </p:sp>
+      <p:sp>
+        <p:nvSpPr>
+          <p:cNvPr id="7" name="Slide Number Placeholder 6"/>
+          <p:cNvSpPr>
+            <a:spLocks noGrp="1"/>
+          </p:cNvSpPr>
+          <p:nvPr>
+            <p:ph type="sldNum" sz="quarter" idx="12"/>
+          </p:nvPr>
+        </p:nvSpPr>
+        <p:spPr/>
+        <p:txBody>
+          <a:bodyPr/>
+          <a:lstStyle/>
+          <a:p>
+            <a:pPr algn="r"/>
+            <a:fld id="{F7021451-1387-4CA6-816F-3879F97B5CBC}" type="slidenum">
+              <a:rPr lang="en-US" b="0" smtClean="0"/>
+              <a:t>‹#›</a:t>
+            </a:fld>
+            <a:endParaRPr lang="en-US"/>
+          </a:p>
+        </p:txBody>
+      </p:sp>
+    </p:spTree>
+    <p:extLst>
+      <p:ext uri="{BB962C8B-B14F-4D97-AF65-F5344CB8AC3E}">
+        <p14:creationId xmlns:p14="http://schemas.microsoft.com/office/powerpoint/2010/main" val="1766469770"/>
+      </p:ext>
+    </p:extLst>
+  </p:cSld>
+  <p:clrMapOvr>
+    <a:masterClrMapping/>
+  </p:clrMapOvr>
+  <p:hf sldNum="0" hdr="0" ftr="0" dt="0"/>
+</p:sldLayout>
+</file>
+
+<file path=ppt/slideLayouts/slideLayout5.xml><?xml version="1.0" encoding="utf-8"?>
+<p:sldLayout xmlns:a="http://schemas.openxmlformats.org/drawingml/2006/main" xmlns:r="http://schemas.openxmlformats.org/officeDocument/2006/relationships" xmlns:p="http://schemas.openxmlformats.org/presentationml/2006/main" type="twoTxTwoObj" preserve="1">
+  <p:cSld name="Comparison">
+    <p:spTree>
+      <p:nvGrpSpPr>
+        <p:cNvPr id="1" name=""/>
+        <p:cNvGrpSpPr/>
+        <p:nvPr/>
+      </p:nvGrpSpPr>
+      <p:grpSpPr>
+        <a:xfrm>
+          <a:off x="0" y="0"/>
+          <a:ext cx="0" cy="0"/>
+          <a:chOff x="0" y="0"/>
+          <a:chExt cx="0" cy="0"/>
+        </a:xfrm>
+      </p:grpSpPr>
+      <p:sp>
+        <p:nvSpPr>
+          <p:cNvPr id="2" name="Title 1"/>
+          <p:cNvSpPr>
+            <a:spLocks noGrp="1"/>
+          </p:cNvSpPr>
+          <p:nvPr>
+            <p:ph type="title"/>
+          </p:nvPr>
+        </p:nvSpPr>
+        <p:spPr/>
+        <p:txBody>
+          <a:bodyPr/>
+          <a:lstStyle>
+            <a:lvl1pPr>
+              <a:defRPr/>
+            </a:lvl1pPr>
+          </a:lstStyle>
+          <a:p>
+            <a:r>
+              <a:rPr lang="en-US"/>
+              <a:t>Click to edit Master title style</a:t>
+            </a:r>
+            <a:endParaRPr lang="en-US" dirty="0"/>
+          </a:p>
+        </p:txBody>
+      </p:sp>
+      <p:sp>
+        <p:nvSpPr>
+          <p:cNvPr id="3" name="Text Placeholder 2"/>
+          <p:cNvSpPr>
+            <a:spLocks noGrp="1"/>
+          </p:cNvSpPr>
+          <p:nvPr>
+            <p:ph type="body" idx="1"/>
+          </p:nvPr>
+        </p:nvSpPr>
+        <p:spPr>
+          <a:xfrm>
+            <a:off x="729061" y="514350"/>
+            <a:ext cx="3487340" cy="432197"/>
+          </a:xfrm>
+        </p:spPr>
+        <p:txBody>
+          <a:bodyPr anchor="b">
+            <a:noAutofit/>
+          </a:bodyPr>
+          <a:lstStyle>
+            <a:lvl1pPr marL="0" indent="0">
+              <a:buNone/>
+              <a:defRPr sz="2100" b="0">
+                <a:solidFill>
+                  <a:schemeClr val="tx1"/>
+                </a:solidFill>
+              </a:defRPr>
+            </a:lvl1pPr>
+            <a:lvl2pPr marL="342900" indent="0">
+              <a:buNone/>
+              <a:defRPr sz="1500" b="1"/>
+            </a:lvl2pPr>
+            <a:lvl3pPr marL="685800" indent="0">
+              <a:buNone/>
+              <a:defRPr sz="1350" b="1"/>
+            </a:lvl3pPr>
+            <a:lvl4pPr marL="1028700" indent="0">
+              <a:buNone/>
+              <a:defRPr sz="1200" b="1"/>
+            </a:lvl4pPr>
+            <a:lvl5pPr marL="1371600" indent="0">
+              <a:buNone/>
+              <a:defRPr sz="1200" b="1"/>
+            </a:lvl5pPr>
+            <a:lvl6pPr marL="1714500" indent="0">
+              <a:buNone/>
+              <a:defRPr sz="1200" b="1"/>
+            </a:lvl6pPr>
+            <a:lvl7pPr marL="2057400" indent="0">
+              <a:buNone/>
+              <a:defRPr sz="1200" b="1"/>
+            </a:lvl7pPr>
+            <a:lvl8pPr marL="2400300" indent="0">
+              <a:buNone/>
+              <a:defRPr sz="1200" b="1"/>
+            </a:lvl8pPr>
+            <a:lvl9pPr marL="2743200" indent="0">
+              <a:buNone/>
+              <a:defRPr sz="1200" b="1"/>
+            </a:lvl9pPr>
+          </a:lstStyle>
+          <a:p>
+            <a:pPr lvl="0"/>
+            <a:r>
+              <a:rPr lang="en-US"/>
+              <a:t>Click to edit Master text styles</a:t>
+            </a:r>
+          </a:p>
+        </p:txBody>
+      </p:sp>
+      <p:sp>
+        <p:nvSpPr>
+          <p:cNvPr id="4" name="Content Placeholder 3"/>
+          <p:cNvSpPr>
+            <a:spLocks noGrp="1"/>
+          </p:cNvSpPr>
+          <p:nvPr>
+            <p:ph sz="half" idx="2"/>
+          </p:nvPr>
+        </p:nvSpPr>
+        <p:spPr>
+          <a:xfrm>
+            <a:off x="513159" y="952897"/>
+            <a:ext cx="3703241" cy="2272904"/>
+          </a:xfrm>
+        </p:spPr>
+        <p:txBody>
+          <a:bodyPr anchor="t">
+            <a:normAutofit/>
+          </a:bodyPr>
+          <a:lstStyle/>
+          <a:p>
+            <a:pPr lvl="0"/>
+            <a:r>
+              <a:rPr lang="en-US"/>
+              <a:t>Click to edit Master text styles</a:t>
+            </a:r>
+          </a:p>
+          <a:p>
+            <a:pPr lvl="1"/>
+            <a:r>
+              <a:rPr lang="en-US"/>
+              <a:t>Second level</a:t>
+            </a:r>
+          </a:p>
+          <a:p>
+            <a:pPr lvl="2"/>
+            <a:r>
+              <a:rPr lang="en-US"/>
+              <a:t>Third level</a:t>
+            </a:r>
+          </a:p>
+          <a:p>
+            <a:pPr lvl="3"/>
+            <a:r>
+              <a:rPr lang="en-US"/>
+              <a:t>Fourth level</a:t>
+            </a:r>
+          </a:p>
+          <a:p>
+            <a:pPr lvl="4"/>
+            <a:r>
+              <a:rPr lang="en-US"/>
+              <a:t>Fifth level</a:t>
+            </a:r>
+            <a:endParaRPr lang="en-US" dirty="0"/>
+          </a:p>
+        </p:txBody>
+      </p:sp>
+      <p:sp>
+        <p:nvSpPr>
+          <p:cNvPr id="5" name="Text Placeholder 4"/>
+          <p:cNvSpPr>
+            <a:spLocks noGrp="1"/>
+          </p:cNvSpPr>
+          <p:nvPr>
+            <p:ph type="body" sz="quarter" idx="3"/>
+          </p:nvPr>
+        </p:nvSpPr>
+        <p:spPr>
+          <a:xfrm>
+            <a:off x="4559299" y="514350"/>
+            <a:ext cx="3498851" cy="432197"/>
+          </a:xfrm>
+        </p:spPr>
+        <p:txBody>
+          <a:bodyPr anchor="b">
+            <a:noAutofit/>
+          </a:bodyPr>
+          <a:lstStyle>
+            <a:lvl1pPr marL="0" indent="0">
+              <a:buNone/>
+              <a:defRPr sz="2100" b="0">
+                <a:solidFill>
+                  <a:schemeClr val="tx1"/>
+                </a:solidFill>
+              </a:defRPr>
+            </a:lvl1pPr>
+            <a:lvl2pPr marL="342900" indent="0">
+              <a:buNone/>
+              <a:defRPr sz="1500" b="1"/>
+            </a:lvl2pPr>
+            <a:lvl3pPr marL="685800" indent="0">
+              <a:buNone/>
+              <a:defRPr sz="1350" b="1"/>
+            </a:lvl3pPr>
+            <a:lvl4pPr marL="1028700" indent="0">
+              <a:buNone/>
+              <a:defRPr sz="1200" b="1"/>
+            </a:lvl4pPr>
+            <a:lvl5pPr marL="1371600" indent="0">
+              <a:buNone/>
+              <a:defRPr sz="1200" b="1"/>
+            </a:lvl5pPr>
+            <a:lvl6pPr marL="1714500" indent="0">
+              <a:buNone/>
+              <a:defRPr sz="1200" b="1"/>
+            </a:lvl6pPr>
+            <a:lvl7pPr marL="2057400" indent="0">
+              <a:buNone/>
+              <a:defRPr sz="1200" b="1"/>
+            </a:lvl7pPr>
+            <a:lvl8pPr marL="2400300" indent="0">
+              <a:buNone/>
+              <a:defRPr sz="1200" b="1"/>
+            </a:lvl8pPr>
+            <a:lvl9pPr marL="2743200" indent="0">
+              <a:buNone/>
+              <a:defRPr sz="1200" b="1"/>
+            </a:lvl9pPr>
+          </a:lstStyle>
+          <a:p>
+            <a:pPr lvl="0"/>
+            <a:r>
+              <a:rPr lang="en-US"/>
+              <a:t>Click to edit Master text styles</a:t>
+            </a:r>
+          </a:p>
+        </p:txBody>
+      </p:sp>
+      <p:sp>
+        <p:nvSpPr>
+          <p:cNvPr id="6" name="Content Placeholder 5"/>
+          <p:cNvSpPr>
+            <a:spLocks noGrp="1"/>
+          </p:cNvSpPr>
+          <p:nvPr>
+            <p:ph sz="quarter" idx="4"/>
+          </p:nvPr>
+        </p:nvSpPr>
+        <p:spPr>
+          <a:xfrm>
+            <a:off x="4354909" y="946546"/>
+            <a:ext cx="3696891" cy="2272904"/>
+          </a:xfrm>
+        </p:spPr>
+        <p:txBody>
+          <a:bodyPr anchor="t">
+            <a:normAutofit/>
+          </a:bodyPr>
+          <a:lstStyle/>
+          <a:p>
+            <a:pPr lvl="0"/>
+            <a:r>
+              <a:rPr lang="en-US"/>
+              <a:t>Click to edit Master text styles</a:t>
+            </a:r>
+          </a:p>
+          <a:p>
+            <a:pPr lvl="1"/>
+            <a:r>
+              <a:rPr lang="en-US"/>
+              <a:t>Second level</a:t>
+            </a:r>
+          </a:p>
+          <a:p>
+            <a:pPr lvl="2"/>
+            <a:r>
+              <a:rPr lang="en-US"/>
+              <a:t>Third level</a:t>
+            </a:r>
+          </a:p>
+          <a:p>
+            <a:pPr lvl="3"/>
+            <a:r>
+              <a:rPr lang="en-US"/>
+              <a:t>Fourth level</a:t>
+            </a:r>
+          </a:p>
+          <a:p>
+            <a:pPr lvl="4"/>
+            <a:r>
+              <a:rPr lang="en-US"/>
+              <a:t>Fifth level</a:t>
+            </a:r>
+            <a:endParaRPr lang="en-US" dirty="0"/>
+          </a:p>
+        </p:txBody>
+      </p:sp>
+      <p:sp>
+        <p:nvSpPr>
+          <p:cNvPr id="7" name="Date Placeholder 6"/>
+          <p:cNvSpPr>
+            <a:spLocks noGrp="1"/>
+          </p:cNvSpPr>
+          <p:nvPr>
+            <p:ph type="dt" sz="half" idx="10"/>
+          </p:nvPr>
+        </p:nvSpPr>
+        <p:spPr/>
+        <p:txBody>
+          <a:bodyPr/>
+          <a:lstStyle/>
+          <a:p>
+            <a:fld id="{90298CD5-6C1E-4009-B41F-6DF62E31D3BE}" type="datetimeFigureOut">
+              <a:rPr lang="en-US" smtClean="0"/>
+              <a:pPr/>
+              <a:t>10/6/2026</a:t>
+            </a:fld>
+            <a:endParaRPr lang="en-US" dirty="0"/>
+          </a:p>
+        </p:txBody>
+      </p:sp>
+      <p:sp>
+        <p:nvSpPr>
+          <p:cNvPr id="8" name="Footer Placeholder 7"/>
+          <p:cNvSpPr>
+            <a:spLocks noGrp="1"/>
+          </p:cNvSpPr>
+          <p:nvPr>
+            <p:ph type="ftr" sz="quarter" idx="11"/>
+          </p:nvPr>
+        </p:nvSpPr>
+        <p:spPr/>
+        <p:txBody>
+          <a:bodyPr/>
+          <a:lstStyle/>
+          <a:p>
+            <a:endParaRPr lang="en-US" dirty="0"/>
+          </a:p>
+        </p:txBody>
+      </p:sp>
+      <p:sp>
+        <p:nvSpPr>
+          <p:cNvPr id="9" name="Slide Number Placeholder 8"/>
+          <p:cNvSpPr>
+            <a:spLocks noGrp="1"/>
+          </p:cNvSpPr>
+          <p:nvPr>
+            <p:ph type="sldNum" sz="quarter" idx="12"/>
+          </p:nvPr>
+        </p:nvSpPr>
+        <p:spPr/>
+        <p:txBody>
+          <a:bodyPr/>
+          <a:lstStyle/>
+          <a:p>
+            <a:pPr algn="r"/>
+            <a:fld id="{F7021451-1387-4CA6-816F-3879F97B5CBC}" type="slidenum">
+              <a:rPr lang="en-US" b="0" smtClean="0"/>
+              <a:t>‹#›</a:t>
+            </a:fld>
+            <a:endParaRPr lang="en-US"/>
+          </a:p>
+        </p:txBody>
+      </p:sp>
+    </p:spTree>
+    <p:extLst>
+      <p:ext uri="{BB962C8B-B14F-4D97-AF65-F5344CB8AC3E}">
+        <p14:creationId xmlns:p14="http://schemas.microsoft.com/office/powerpoint/2010/main" val="3563546900"/>
+      </p:ext>
+    </p:extLst>
+  </p:cSld>
+  <p:clrMapOvr>
+    <a:masterClrMapping/>
+  </p:clrMapOvr>
+  <p:hf sldNum="0" hdr="0" ftr="0" dt="0"/>
+</p:sldLayout>
+</file>
+
+<file path=ppt/slideLayouts/slideLayout6.xml><?xml version="1.0" encoding="utf-8"?>
+<p:sldLayout xmlns:a="http://schemas.openxmlformats.org/drawingml/2006/main" xmlns:r="http://schemas.openxmlformats.org/officeDocument/2006/relationships" xmlns:p="http://schemas.openxmlformats.org/presentationml/2006/main" type="titleOnly" preserve="1">
+  <p:cSld name="Title Only">
+    <p:spTree>
+      <p:nvGrpSpPr>
+        <p:cNvPr id="1" name=""/>
+        <p:cNvGrpSpPr/>
+        <p:nvPr/>
+      </p:nvGrpSpPr>
+      <p:grpSpPr>
+        <a:xfrm>
+          <a:off x="0" y="0"/>
+          <a:ext cx="0" cy="0"/>
+          <a:chOff x="0" y="0"/>
+          <a:chExt cx="0" cy="0"/>
+        </a:xfrm>
+      </p:grpSpPr>
+      <p:sp>
+        <p:nvSpPr>
+          <p:cNvPr id="2" name="Title 1"/>
+          <p:cNvSpPr>
+            <a:spLocks noGrp="1"/>
+          </p:cNvSpPr>
+          <p:nvPr>
+            <p:ph type="title"/>
+          </p:nvPr>
+        </p:nvSpPr>
+        <p:spPr/>
+        <p:txBody>
+          <a:bodyPr/>
+          <a:lstStyle/>
+          <a:p>
+            <a:r>
+              <a:rPr lang="en-US"/>
+              <a:t>Click to edit Master title style</a:t>
+            </a:r>
+            <a:endParaRPr lang="en-US" dirty="0"/>
+          </a:p>
+        </p:txBody>
+      </p:sp>
+      <p:sp>
+        <p:nvSpPr>
+          <p:cNvPr id="3" name="Date Placeholder 2"/>
+          <p:cNvSpPr>
+            <a:spLocks noGrp="1"/>
+          </p:cNvSpPr>
+          <p:nvPr>
+            <p:ph type="dt" sz="half" idx="10"/>
+          </p:nvPr>
+        </p:nvSpPr>
+        <p:spPr/>
+        <p:txBody>
+          <a:bodyPr/>
+          <a:lstStyle/>
+          <a:p>
+            <a:fld id="{67EF4D4C-5367-4C26-9E2B-D8088D7FCA81}" type="datetimeFigureOut">
+              <a:rPr lang="en-US" smtClean="0"/>
+              <a:t>10/6/2026</a:t>
+            </a:fld>
+            <a:endParaRPr lang="en-US" dirty="0"/>
+          </a:p>
+        </p:txBody>
+      </p:sp>
+      <p:sp>
+        <p:nvSpPr>
+          <p:cNvPr id="4" name="Footer Placeholder 3"/>
+          <p:cNvSpPr>
+            <a:spLocks noGrp="1"/>
+          </p:cNvSpPr>
+          <p:nvPr>
+            <p:ph type="ftr" sz="quarter" idx="11"/>
+          </p:nvPr>
+        </p:nvSpPr>
+        <p:spPr/>
+        <p:txBody>
+          <a:bodyPr/>
+          <a:lstStyle/>
+          <a:p>
+            <a:endParaRPr lang="en-US" dirty="0"/>
+          </a:p>
+        </p:txBody>
+      </p:sp>
+      <p:sp>
+        <p:nvSpPr>
+          <p:cNvPr id="5" name="Slide Number Placeholder 4"/>
+          <p:cNvSpPr>
+            <a:spLocks noGrp="1"/>
+          </p:cNvSpPr>
+          <p:nvPr>
+            <p:ph type="sldNum" sz="quarter" idx="12"/>
+          </p:nvPr>
+        </p:nvSpPr>
+        <p:spPr/>
+        <p:txBody>
+          <a:bodyPr/>
+          <a:lstStyle/>
+          <a:p>
+            <a:pPr algn="r"/>
+            <a:fld id="{F7021451-1387-4CA6-816F-3879F97B5CBC}" type="slidenum">
+              <a:rPr lang="en-US" b="0" smtClean="0"/>
+              <a:t>‹#›</a:t>
+            </a:fld>
+            <a:endParaRPr lang="en-US"/>
+          </a:p>
+        </p:txBody>
+      </p:sp>
+    </p:spTree>
+    <p:extLst>
+      <p:ext uri="{BB962C8B-B14F-4D97-AF65-F5344CB8AC3E}">
+        <p14:creationId xmlns:p14="http://schemas.microsoft.com/office/powerpoint/2010/main" val="3462525406"/>
+      </p:ext>
+    </p:extLst>
+  </p:cSld>
+  <p:clrMapOvr>
+    <a:masterClrMapping/>
+  </p:clrMapOvr>
+  <p:hf sldNum="0" hdr="0" ftr="0" dt="0"/>
+</p:sldLayout>
+</file>
+
+<file path=ppt/slideLayouts/slideLayout7.xml><?xml version="1.0" encoding="utf-8"?>
+<p:sldLayout xmlns:a="http://schemas.openxmlformats.org/drawingml/2006/main" xmlns:r="http://schemas.openxmlformats.org/officeDocument/2006/relationships" xmlns:p="http://schemas.openxmlformats.org/presentationml/2006/main" type="blank" preserve="1">
+  <p:cSld name="Blank">
+    <p:spTree>
+      <p:nvGrpSpPr>
+        <p:cNvPr id="1" name=""/>
+        <p:cNvGrpSpPr/>
+        <p:nvPr/>
+      </p:nvGrpSpPr>
+      <p:grpSpPr>
+        <a:xfrm>
+          <a:off x="0" y="0"/>
+          <a:ext cx="0" cy="0"/>
+          <a:chOff x="0" y="0"/>
+          <a:chExt cx="0" cy="0"/>
+        </a:xfrm>
+      </p:grpSpPr>
+      <p:sp>
+        <p:nvSpPr>
+          <p:cNvPr id="2" name="Date Placeholder 1"/>
+          <p:cNvSpPr>
+            <a:spLocks noGrp="1"/>
+          </p:cNvSpPr>
+          <p:nvPr>
+            <p:ph type="dt" sz="half" idx="10"/>
+          </p:nvPr>
+        </p:nvSpPr>
+        <p:spPr/>
+        <p:txBody>
+          <a:bodyPr/>
+          <a:lstStyle/>
+          <a:p>
+            <a:fld id="{56E91E96-98B0-4413-9547-46F3504108EF}" type="datetimeFigureOut">
+              <a:rPr lang="en-US" smtClean="0"/>
+              <a:t>10/6/2026</a:t>
+            </a:fld>
+            <a:endParaRPr lang="en-US" dirty="0"/>
+          </a:p>
+        </p:txBody>
+      </p:sp>
+      <p:sp>
+        <p:nvSpPr>
+          <p:cNvPr id="3" name="Footer Placeholder 2"/>
+          <p:cNvSpPr>
+            <a:spLocks noGrp="1"/>
+          </p:cNvSpPr>
+          <p:nvPr>
+            <p:ph type="ftr" sz="quarter" idx="11"/>
+          </p:nvPr>
+        </p:nvSpPr>
+        <p:spPr/>
+        <p:txBody>
+          <a:bodyPr/>
+          <a:lstStyle/>
+          <a:p>
+            <a:endParaRPr lang="en-US" dirty="0"/>
+          </a:p>
+        </p:txBody>
+      </p:sp>
+      <p:sp>
+        <p:nvSpPr>
+          <p:cNvPr id="4" name="Slide Number Placeholder 3"/>
+          <p:cNvSpPr>
+            <a:spLocks noGrp="1"/>
+          </p:cNvSpPr>
+          <p:nvPr>
+            <p:ph type="sldNum" sz="quarter" idx="12"/>
+          </p:nvPr>
+        </p:nvSpPr>
+        <p:spPr/>
+        <p:txBody>
+          <a:bodyPr/>
+          <a:lstStyle/>
+          <a:p>
+            <a:pPr algn="r"/>
+            <a:fld id="{F7021451-1387-4CA6-816F-3879F97B5CBC}" type="slidenum">
+              <a:rPr lang="en-US" b="0" smtClean="0"/>
+              <a:t>‹#›</a:t>
+            </a:fld>
+            <a:endParaRPr lang="en-US"/>
+          </a:p>
+        </p:txBody>
+      </p:sp>
+    </p:spTree>
+    <p:extLst>
+      <p:ext uri="{BB962C8B-B14F-4D97-AF65-F5344CB8AC3E}">
+        <p14:creationId xmlns:p14="http://schemas.microsoft.com/office/powerpoint/2010/main" val="799557816"/>
+      </p:ext>
+    </p:extLst>
+  </p:cSld>
+  <p:clrMapOvr>
+    <a:masterClrMapping/>
+  </p:clrMapOvr>
+  <p:hf sldNum="0" hdr="0" ftr="0" dt="0"/>
+</p:sldLayout>
+</file>
+
+<file path=ppt/slideLayouts/slideLayout8.xml><?xml version="1.0" encoding="utf-8"?>
+<p:sldLayout xmlns:a="http://schemas.openxmlformats.org/drawingml/2006/main" xmlns:r="http://schemas.openxmlformats.org/officeDocument/2006/relationships" xmlns:p="http://schemas.openxmlformats.org/presentationml/2006/main" type="objTx" preserve="1">
+  <p:cSld name="Content with Caption">
+    <p:spTree>
+      <p:nvGrpSpPr>
+        <p:cNvPr id="1" name=""/>
+        <p:cNvGrpSpPr/>
+        <p:nvPr/>
+      </p:nvGrpSpPr>
+      <p:grpSpPr>
+        <a:xfrm>
+          <a:off x="0" y="0"/>
+          <a:ext cx="0" cy="0"/>
+          <a:chOff x="0" y="0"/>
+          <a:chExt cx="0" cy="0"/>
+        </a:xfrm>
+      </p:grpSpPr>
+      <p:sp>
+        <p:nvSpPr>
+          <p:cNvPr id="2" name="Title 1"/>
+          <p:cNvSpPr>
+            <a:spLocks noGrp="1"/>
+          </p:cNvSpPr>
+          <p:nvPr>
+            <p:ph type="title"/>
+          </p:nvPr>
+        </p:nvSpPr>
+        <p:spPr>
+          <a:xfrm>
+            <a:off x="5313759" y="514350"/>
+            <a:ext cx="2743200" cy="1028700"/>
+          </a:xfrm>
+        </p:spPr>
+        <p:txBody>
+          <a:bodyPr anchor="b">
+            <a:normAutofit/>
+          </a:bodyPr>
+          <a:lstStyle>
+            <a:lvl1pPr algn="l">
+              <a:defRPr sz="1800" b="0"/>
+            </a:lvl1pPr>
+          </a:lstStyle>
+          <a:p>
+            <a:r>
+              <a:rPr lang="en-US"/>
+              <a:t>Click to edit Master title style</a:t>
+            </a:r>
+            <a:endParaRPr lang="en-US" dirty="0"/>
+          </a:p>
+        </p:txBody>
+      </p:sp>
+      <p:sp>
+        <p:nvSpPr>
+          <p:cNvPr id="3" name="Content Placeholder 2"/>
+          <p:cNvSpPr>
+            <a:spLocks noGrp="1"/>
+          </p:cNvSpPr>
+          <p:nvPr>
+            <p:ph idx="1"/>
+          </p:nvPr>
+        </p:nvSpPr>
+        <p:spPr>
+          <a:xfrm>
+            <a:off x="513159" y="514350"/>
+            <a:ext cx="4457701" cy="3981450"/>
+          </a:xfrm>
+        </p:spPr>
+        <p:txBody>
+          <a:bodyPr anchor="ctr">
+            <a:normAutofit/>
+          </a:bodyPr>
+          <a:lstStyle/>
+          <a:p>
+            <a:pPr lvl="0"/>
+            <a:r>
+              <a:rPr lang="en-US"/>
+              <a:t>Click to edit Master text styles</a:t>
+            </a:r>
+          </a:p>
+          <a:p>
+            <a:pPr lvl="1"/>
+            <a:r>
+              <a:rPr lang="en-US"/>
+              <a:t>Second level</a:t>
+            </a:r>
+          </a:p>
+          <a:p>
+            <a:pPr lvl="2"/>
+            <a:r>
+              <a:rPr lang="en-US"/>
+              <a:t>Third level</a:t>
+            </a:r>
+          </a:p>
+          <a:p>
+            <a:pPr lvl="3"/>
+            <a:r>
+              <a:rPr lang="en-US"/>
+              <a:t>Fourth level</a:t>
+            </a:r>
+          </a:p>
+          <a:p>
+            <a:pPr lvl="4"/>
+            <a:r>
+              <a:rPr lang="en-US"/>
+              <a:t>Fifth level</a:t>
+            </a:r>
+            <a:endParaRPr lang="en-US" dirty="0"/>
+          </a:p>
+        </p:txBody>
+      </p:sp>
+      <p:sp>
+        <p:nvSpPr>
+          <p:cNvPr id="4" name="Text Placeholder 3"/>
+          <p:cNvSpPr>
+            <a:spLocks noGrp="1"/>
+          </p:cNvSpPr>
+          <p:nvPr>
+            <p:ph type="body" sz="half" idx="2"/>
+          </p:nvPr>
+        </p:nvSpPr>
+        <p:spPr>
+          <a:xfrm>
+            <a:off x="5313759" y="1657350"/>
+            <a:ext cx="2743200" cy="1568450"/>
+          </a:xfrm>
+        </p:spPr>
+        <p:txBody>
+          <a:bodyPr anchor="t">
+            <a:normAutofit/>
+          </a:bodyPr>
+          <a:lstStyle>
+            <a:lvl1pPr marL="0" indent="0">
+              <a:buNone/>
+              <a:defRPr sz="1200"/>
+            </a:lvl1pPr>
+            <a:lvl2pPr marL="342900" indent="0">
+              <a:buNone/>
+              <a:defRPr sz="900"/>
+            </a:lvl2pPr>
+            <a:lvl3pPr marL="685800" indent="0">
+              <a:buNone/>
+              <a:defRPr sz="750"/>
+            </a:lvl3pPr>
+            <a:lvl4pPr marL="1028700" indent="0">
+              <a:buNone/>
+              <a:defRPr sz="675"/>
+            </a:lvl4pPr>
+            <a:lvl5pPr marL="1371600" indent="0">
+              <a:buNone/>
+              <a:defRPr sz="675"/>
+            </a:lvl5pPr>
+            <a:lvl6pPr marL="1714500" indent="0">
+              <a:buNone/>
+              <a:defRPr sz="675"/>
+            </a:lvl6pPr>
+            <a:lvl7pPr marL="2057400" indent="0">
+              <a:buNone/>
+              <a:defRPr sz="675"/>
+            </a:lvl7pPr>
+            <a:lvl8pPr marL="2400300" indent="0">
+              <a:buNone/>
+              <a:defRPr sz="675"/>
+            </a:lvl8pPr>
+            <a:lvl9pPr marL="2743200" indent="0">
+              <a:buNone/>
+              <a:defRPr sz="675"/>
+            </a:lvl9pPr>
+          </a:lstStyle>
+          <a:p>
+            <a:pPr lvl="0"/>
+            <a:r>
+              <a:rPr lang="en-US"/>
+              <a:t>Click to edit Master text styles</a:t>
+            </a:r>
+          </a:p>
+        </p:txBody>
+      </p:sp>
+      <p:sp>
+        <p:nvSpPr>
+          <p:cNvPr id="5" name="Date Placeholder 4"/>
+          <p:cNvSpPr>
+            <a:spLocks noGrp="1"/>
+          </p:cNvSpPr>
+          <p:nvPr>
+            <p:ph type="dt" sz="half" idx="10"/>
+          </p:nvPr>
+        </p:nvSpPr>
+        <p:spPr/>
+        <p:txBody>
+          <a:bodyPr/>
+          <a:lstStyle/>
+          <a:p>
+            <a:fld id="{90298CD5-6C1E-4009-B41F-6DF62E31D3BE}" type="datetimeFigureOut">
+              <a:rPr lang="en-US" smtClean="0"/>
+              <a:pPr/>
+              <a:t>10/6/2026</a:t>
+            </a:fld>
+            <a:endParaRPr lang="en-US" dirty="0"/>
+          </a:p>
+        </p:txBody>
+      </p:sp>
+      <p:sp>
+        <p:nvSpPr>
+          <p:cNvPr id="6" name="Footer Placeholder 5"/>
+          <p:cNvSpPr>
+            <a:spLocks noGrp="1"/>
+          </p:cNvSpPr>
+          <p:nvPr>
+            <p:ph type="ftr" sz="quarter" idx="11"/>
+          </p:nvPr>
+        </p:nvSpPr>
+        <p:spPr/>
+        <p:txBody>
+          <a:bodyPr/>
+          <a:lstStyle/>
+          <a:p>
+            <a:endParaRPr lang="en-US" dirty="0"/>
+          </a:p>
+        </p:txBody>
+      </p:sp>
+      <p:sp>
+        <p:nvSpPr>
+          <p:cNvPr id="7" name="Slide Number Placeholder 6"/>
+          <p:cNvSpPr>
+            <a:spLocks noGrp="1"/>
+          </p:cNvSpPr>
+          <p:nvPr>
+            <p:ph type="sldNum" sz="quarter" idx="12"/>
+          </p:nvPr>
+        </p:nvSpPr>
+        <p:spPr/>
+        <p:txBody>
+          <a:bodyPr/>
+          <a:lstStyle/>
+          <a:p>
+            <a:pPr algn="r"/>
+            <a:fld id="{F7021451-1387-4CA6-816F-3879F97B5CBC}" type="slidenum">
+              <a:rPr lang="en-US" b="0" smtClean="0"/>
+              <a:t>‹#›</a:t>
+            </a:fld>
+            <a:endParaRPr lang="en-US"/>
+          </a:p>
+        </p:txBody>
+      </p:sp>
+    </p:spTree>
+    <p:extLst>
+      <p:ext uri="{BB962C8B-B14F-4D97-AF65-F5344CB8AC3E}">
+        <p14:creationId xmlns:p14="http://schemas.microsoft.com/office/powerpoint/2010/main" val="2356389080"/>
+      </p:ext>
+    </p:extLst>
+  </p:cSld>
+  <p:clrMapOvr>
+    <a:masterClrMapping/>
+  </p:clrMapOvr>
+  <p:hf sldNum="0" hdr="0" ftr="0" dt="0"/>
+</p:sldLayout>
+</file>
+
+<file path=ppt/slideLayouts/slideLayout9.xml><?xml version="1.0" encoding="utf-8"?>
+<p:sldLayout xmlns:a="http://schemas.openxmlformats.org/drawingml/2006/main" xmlns:r="http://schemas.openxmlformats.org/officeDocument/2006/relationships" xmlns:p="http://schemas.openxmlformats.org/presentationml/2006/main" type="picTx" preserve="1">
+  <p:cSld name="Picture with Caption">
+    <p:spTree>
+      <p:nvGrpSpPr>
+        <p:cNvPr id="1" name=""/>
+        <p:cNvGrpSpPr/>
+        <p:nvPr/>
+      </p:nvGrpSpPr>
+      <p:grpSpPr>
+        <a:xfrm>
+          <a:off x="0" y="0"/>
+          <a:ext cx="0" cy="0"/>
+          <a:chOff x="0" y="0"/>
+          <a:chExt cx="0" cy="0"/>
+        </a:xfrm>
+      </p:grpSpPr>
+      <p:sp>
+        <p:nvSpPr>
+          <p:cNvPr id="2" name="Title 1"/>
+          <p:cNvSpPr>
+            <a:spLocks noGrp="1"/>
+          </p:cNvSpPr>
+          <p:nvPr>
+            <p:ph type="title"/>
+          </p:nvPr>
+        </p:nvSpPr>
+        <p:spPr>
+          <a:xfrm>
+            <a:off x="3542109" y="1085850"/>
+            <a:ext cx="4514850" cy="857250"/>
+          </a:xfrm>
+        </p:spPr>
+        <p:txBody>
+          <a:bodyPr anchor="b">
+            <a:normAutofit/>
+          </a:bodyPr>
+          <a:lstStyle>
+            <a:lvl1pPr algn="l">
+              <a:defRPr sz="2100" b="0"/>
+            </a:lvl1pPr>
+          </a:lstStyle>
+          <a:p>
+            <a:r>
+              <a:rPr lang="en-US"/>
+              <a:t>Click to edit Master title style</a:t>
+            </a:r>
+            <a:endParaRPr lang="en-US" dirty="0"/>
+          </a:p>
+        </p:txBody>
+      </p:sp>
+      <p:sp>
+        <p:nvSpPr>
+          <p:cNvPr id="14" name="Picture Placeholder 2"/>
+          <p:cNvSpPr>
+            <a:spLocks noGrp="1" noChangeAspect="1"/>
+          </p:cNvSpPr>
+          <p:nvPr>
+            <p:ph type="pic" idx="1"/>
+          </p:nvPr>
+        </p:nvSpPr>
+        <p:spPr>
+          <a:xfrm>
+            <a:off x="741759" y="685800"/>
+            <a:ext cx="2460731" cy="3429000"/>
+          </a:xfrm>
+          <a:prstGeom prst="snip2DiagRect">
+            <a:avLst>
+              <a:gd name="adj1" fmla="val 10815"/>
+              <a:gd name="adj2" fmla="val 0"/>
+            </a:avLst>
+          </a:prstGeom>
+          <a:ln w="15875">
+            <a:solidFill>
+              <a:schemeClr val="tx1">
+                <a:alpha val="40000"/>
+              </a:schemeClr>
+            </a:solidFill>
+          </a:ln>
+          <a:effectLst>
+            <a:innerShdw blurRad="57150" dist="38100" dir="14460000">
+              <a:srgbClr val="000000">
+                <a:alpha val="70000"/>
+              </a:srgbClr>
+            </a:innerShdw>
+          </a:effectLst>
+        </p:spPr>
+        <p:txBody>
+          <a:bodyPr anchor="t">
+            <a:normAutofit/>
+          </a:bodyPr>
+          <a:lstStyle>
+            <a:lvl1pPr marL="0" indent="0" algn="ctr">
+              <a:buNone/>
+              <a:defRPr sz="1200"/>
+            </a:lvl1pPr>
+            <a:lvl2pPr marL="342900" indent="0">
+              <a:buNone/>
+              <a:defRPr sz="1200"/>
+            </a:lvl2pPr>
+            <a:lvl3pPr marL="685800" indent="0">
+              <a:buNone/>
+              <a:defRPr sz="1200"/>
+            </a:lvl3pPr>
+            <a:lvl4pPr marL="1028700" indent="0">
+              <a:buNone/>
+              <a:defRPr sz="1200"/>
+            </a:lvl4pPr>
+            <a:lvl5pPr marL="1371600" indent="0">
+              <a:buNone/>
+              <a:defRPr sz="1200"/>
+            </a:lvl5pPr>
+            <a:lvl6pPr marL="1714500" indent="0">
+              <a:buNone/>
+              <a:defRPr sz="1200"/>
+            </a:lvl6pPr>
+            <a:lvl7pPr marL="2057400" indent="0">
+              <a:buNone/>
+              <a:defRPr sz="1200"/>
+            </a:lvl7pPr>
+            <a:lvl8pPr marL="2400300" indent="0">
+              <a:buNone/>
+              <a:defRPr sz="1200"/>
+            </a:lvl8pPr>
+            <a:lvl9pPr marL="2743200" indent="0">
+              <a:buNone/>
+              <a:defRPr sz="1200"/>
+            </a:lvl9pPr>
+          </a:lstStyle>
+          <a:p>
+            <a:r>
+              <a:rPr lang="en-US"/>
+              <a:t>Click icon to add picture</a:t>
+            </a:r>
+            <a:endParaRPr lang="en-US" dirty="0"/>
+          </a:p>
+        </p:txBody>
+      </p:sp>
+      <p:sp>
+        <p:nvSpPr>
+          <p:cNvPr id="4" name="Text Placeholder 3"/>
+          <p:cNvSpPr>
+            <a:spLocks noGrp="1"/>
+          </p:cNvSpPr>
+          <p:nvPr>
+            <p:ph type="body" sz="half" idx="2"/>
+          </p:nvPr>
+        </p:nvSpPr>
+        <p:spPr>
+          <a:xfrm>
+            <a:off x="3542109" y="2082800"/>
+            <a:ext cx="4516041" cy="1536700"/>
+          </a:xfrm>
+        </p:spPr>
+        <p:txBody>
+          <a:bodyPr anchor="t">
+            <a:normAutofit/>
+          </a:bodyPr>
+          <a:lstStyle>
+            <a:lvl1pPr marL="0" indent="0">
+              <a:buNone/>
+              <a:defRPr sz="1350"/>
+            </a:lvl1pPr>
+            <a:lvl2pPr marL="342900" indent="0">
+              <a:buNone/>
+              <a:defRPr sz="900"/>
+            </a:lvl2pPr>
+            <a:lvl3pPr marL="685800" indent="0">
+              <a:buNone/>
+              <a:defRPr sz="750"/>
+            </a:lvl3pPr>
+            <a:lvl4pPr marL="1028700" indent="0">
+              <a:buNone/>
+              <a:defRPr sz="675"/>
+            </a:lvl4pPr>
+            <a:lvl5pPr marL="1371600" indent="0">
+              <a:buNone/>
+              <a:defRPr sz="675"/>
+            </a:lvl5pPr>
+            <a:lvl6pPr marL="1714500" indent="0">
+              <a:buNone/>
+              <a:defRPr sz="675"/>
+            </a:lvl6pPr>
+            <a:lvl7pPr marL="2057400" indent="0">
+              <a:buNone/>
+              <a:defRPr sz="675"/>
+            </a:lvl7pPr>
+            <a:lvl8pPr marL="2400300" indent="0">
+              <a:buNone/>
+              <a:defRPr sz="675"/>
+            </a:lvl8pPr>
+            <a:lvl9pPr marL="2743200" indent="0">
+              <a:buNone/>
+              <a:defRPr sz="675"/>
+            </a:lvl9pPr>
+          </a:lstStyle>
+          <a:p>
+            <a:pPr lvl="0"/>
+            <a:r>
+              <a:rPr lang="en-US"/>
+              <a:t>Click to edit Master text styles</a:t>
+            </a:r>
+          </a:p>
+        </p:txBody>
+      </p:sp>
+      <p:sp>
+        <p:nvSpPr>
+          <p:cNvPr id="5" name="Date Placeholder 4"/>
+          <p:cNvSpPr>
+            <a:spLocks noGrp="1"/>
+          </p:cNvSpPr>
+          <p:nvPr>
+            <p:ph type="dt" sz="half" idx="10"/>
+          </p:nvPr>
+        </p:nvSpPr>
+        <p:spPr/>
+        <p:txBody>
+          <a:bodyPr/>
+          <a:lstStyle/>
+          <a:p>
+            <a:fld id="{C7616CA0-919D-4A49-9C8A-62FDFB3A5183}" type="datetimeFigureOut">
+              <a:rPr lang="en-US" smtClean="0"/>
+              <a:t>10/6/2026</a:t>
+            </a:fld>
+            <a:endParaRPr lang="en-US" dirty="0"/>
+          </a:p>
+        </p:txBody>
+      </p:sp>
+      <p:sp>
+        <p:nvSpPr>
+          <p:cNvPr id="6" name="Footer Placeholder 5"/>
+          <p:cNvSpPr>
+            <a:spLocks noGrp="1"/>
+          </p:cNvSpPr>
+          <p:nvPr>
+            <p:ph type="ftr" sz="quarter" idx="11"/>
+          </p:nvPr>
+        </p:nvSpPr>
+        <p:spPr/>
+        <p:txBody>
+          <a:bodyPr/>
+          <a:lstStyle/>
+          <a:p>
+            <a:endParaRPr lang="en-US" dirty="0"/>
+          </a:p>
+        </p:txBody>
+      </p:sp>
+      <p:sp>
+        <p:nvSpPr>
+          <p:cNvPr id="7" name="Slide Number Placeholder 6"/>
+          <p:cNvSpPr>
+            <a:spLocks noGrp="1"/>
+          </p:cNvSpPr>
+          <p:nvPr>
+            <p:ph type="sldNum" sz="quarter" idx="12"/>
+          </p:nvPr>
+        </p:nvSpPr>
+        <p:spPr/>
+        <p:txBody>
+          <a:bodyPr/>
+          <a:lstStyle/>
+          <a:p>
+            <a:pPr algn="r"/>
+            <a:fld id="{F7021451-1387-4CA6-816F-3879F97B5CBC}" type="slidenum">
+              <a:rPr lang="en-US" b="0" smtClean="0"/>
+              <a:t>‹#›</a:t>
+            </a:fld>
+            <a:endParaRPr lang="en-US"/>
+          </a:p>
+        </p:txBody>
+      </p:sp>
+    </p:spTree>
+    <p:extLst>
+      <p:ext uri="{BB962C8B-B14F-4D97-AF65-F5344CB8AC3E}">
+        <p14:creationId xmlns:p14="http://schemas.microsoft.com/office/powerpoint/2010/main" val="2279664027"/>
+      </p:ext>
+    </p:extLst>
+  </p:cSld>
+  <p:clrMapOvr>
+    <a:masterClrMapping/>
+  </p:clrMapOvr>
+  <p:hf sldNum="0" hdr="0" ftr="0" dt="0"/>
 </p:sldLayout>
 </file>
 
@@ -1301,8 +5520,8 @@
 <p:sldMaster xmlns:a="http://schemas.openxmlformats.org/drawingml/2006/main" xmlns:r="http://schemas.openxmlformats.org/officeDocument/2006/relationships" xmlns:p="http://schemas.openxmlformats.org/presentationml/2006/main">
   <p:cSld>
     <p:bg>
-      <p:bgRef idx="1001">
-        <a:schemeClr val="bg1"/>
+      <p:bgRef idx="1002">
+        <a:schemeClr val="bg2"/>
       </p:bgRef>
     </p:bg>
     <p:spTree>
@@ -1319,45 +5538,413 @@
           <a:chExt cx="0" cy="0"/>
         </a:xfrm>
       </p:grpSpPr>
-      <p:sp>
-        <p:nvSpPr>
-          <p:cNvPr id="25" name="Slide Number Placeholder 0"/>
-          <p:cNvSpPr>
-            <a:spLocks noGrp="1"/>
-          </p:cNvSpPr>
-          <p:nvPr>
-            <p:ph type="sldNum" sz="quarter" idx="4294967295"/>
-          </p:nvPr>
-        </p:nvSpPr>
-        <p:spPr>
-          <a:xfrm>
-            <a:off x="8321040" y="4754880"/>
-            <a:ext cx="457200" cy="274320"/>
+      <p:grpSp>
+        <p:nvGrpSpPr>
+          <p:cNvPr id="7" name="Group 6"/>
+          <p:cNvGrpSpPr/>
+          <p:nvPr/>
+        </p:nvGrpSpPr>
+        <p:grpSpPr>
+          <a:xfrm>
+            <a:off x="6905227" y="2222500"/>
+            <a:ext cx="2236394" cy="2406650"/>
+            <a:chOff x="9206969" y="2963333"/>
+            <a:chExt cx="2981858" cy="3208867"/>
+          </a:xfrm>
+        </p:grpSpPr>
+        <p:cxnSp>
+          <p:nvCxnSpPr>
+            <p:cNvPr id="8" name="Straight Connector 7"/>
+            <p:cNvCxnSpPr/>
+            <p:nvPr/>
+          </p:nvCxnSpPr>
+          <p:spPr>
+            <a:xfrm flipH="1">
+              <a:off x="11276012" y="2963333"/>
+              <a:ext cx="912814" cy="912812"/>
+            </a:xfrm>
+            <a:prstGeom prst="line">
+              <a:avLst/>
+            </a:prstGeom>
+            <a:ln w="9525">
+              <a:solidFill>
+                <a:schemeClr val="tx1"/>
+              </a:solidFill>
+            </a:ln>
+          </p:spPr>
+          <p:style>
+            <a:lnRef idx="2">
+              <a:schemeClr val="accent1"/>
+            </a:lnRef>
+            <a:fillRef idx="0">
+              <a:schemeClr val="accent1"/>
+            </a:fillRef>
+            <a:effectRef idx="1">
+              <a:schemeClr val="accent1"/>
+            </a:effectRef>
+            <a:fontRef idx="minor">
+              <a:schemeClr val="tx1"/>
+            </a:fontRef>
+          </p:style>
+        </p:cxnSp>
+        <p:cxnSp>
+          <p:nvCxnSpPr>
+            <p:cNvPr id="9" name="Straight Connector 8"/>
+            <p:cNvCxnSpPr/>
+            <p:nvPr/>
+          </p:nvCxnSpPr>
+          <p:spPr>
+            <a:xfrm flipH="1">
+              <a:off x="9206969" y="3190344"/>
+              <a:ext cx="2981857" cy="2981856"/>
+            </a:xfrm>
+            <a:prstGeom prst="line">
+              <a:avLst/>
+            </a:prstGeom>
+            <a:ln w="9525">
+              <a:solidFill>
+                <a:schemeClr val="tx1"/>
+              </a:solidFill>
+            </a:ln>
+          </p:spPr>
+          <p:style>
+            <a:lnRef idx="2">
+              <a:schemeClr val="accent1"/>
+            </a:lnRef>
+            <a:fillRef idx="0">
+              <a:schemeClr val="accent1"/>
+            </a:fillRef>
+            <a:effectRef idx="1">
+              <a:schemeClr val="accent1"/>
+            </a:effectRef>
+            <a:fontRef idx="minor">
+              <a:schemeClr val="tx1"/>
+            </a:fontRef>
+          </p:style>
+        </p:cxnSp>
+        <p:cxnSp>
+          <p:nvCxnSpPr>
+            <p:cNvPr id="10" name="Straight Connector 9"/>
+            <p:cNvCxnSpPr/>
+            <p:nvPr/>
+          </p:nvCxnSpPr>
+          <p:spPr>
+            <a:xfrm flipH="1">
+              <a:off x="10292292" y="3285067"/>
+              <a:ext cx="1896534" cy="1896533"/>
+            </a:xfrm>
+            <a:prstGeom prst="line">
+              <a:avLst/>
+            </a:prstGeom>
+            <a:ln w="9525">
+              <a:solidFill>
+                <a:schemeClr val="tx1"/>
+              </a:solidFill>
+            </a:ln>
+          </p:spPr>
+          <p:style>
+            <a:lnRef idx="2">
+              <a:schemeClr val="accent1"/>
+            </a:lnRef>
+            <a:fillRef idx="0">
+              <a:schemeClr val="accent1"/>
+            </a:fillRef>
+            <a:effectRef idx="1">
+              <a:schemeClr val="accent1"/>
+            </a:effectRef>
+            <a:fontRef idx="minor">
+              <a:schemeClr val="tx1"/>
+            </a:fontRef>
+          </p:style>
+        </p:cxnSp>
+        <p:cxnSp>
+          <p:nvCxnSpPr>
+            <p:cNvPr id="11" name="Straight Connector 10"/>
+            <p:cNvCxnSpPr/>
+            <p:nvPr/>
+          </p:nvCxnSpPr>
+          <p:spPr>
+            <a:xfrm flipH="1">
+              <a:off x="10443103" y="3131080"/>
+              <a:ext cx="1745722" cy="1745720"/>
+            </a:xfrm>
+            <a:prstGeom prst="line">
+              <a:avLst/>
+            </a:prstGeom>
+            <a:ln w="28575">
+              <a:solidFill>
+                <a:schemeClr val="tx1"/>
+              </a:solidFill>
+            </a:ln>
+          </p:spPr>
+          <p:style>
+            <a:lnRef idx="2">
+              <a:schemeClr val="accent1"/>
+            </a:lnRef>
+            <a:fillRef idx="0">
+              <a:schemeClr val="accent1"/>
+            </a:fillRef>
+            <a:effectRef idx="1">
+              <a:schemeClr val="accent1"/>
+            </a:effectRef>
+            <a:fontRef idx="minor">
+              <a:schemeClr val="tx1"/>
+            </a:fontRef>
+          </p:style>
+        </p:cxnSp>
+        <p:cxnSp>
+          <p:nvCxnSpPr>
+            <p:cNvPr id="12" name="Straight Connector 11"/>
+            <p:cNvCxnSpPr/>
+            <p:nvPr/>
+          </p:nvCxnSpPr>
+          <p:spPr>
+            <a:xfrm flipH="1">
+              <a:off x="10918826" y="3683001"/>
+              <a:ext cx="1270001" cy="1269999"/>
+            </a:xfrm>
+            <a:prstGeom prst="line">
+              <a:avLst/>
+            </a:prstGeom>
+            <a:ln w="28575">
+              <a:solidFill>
+                <a:schemeClr val="tx1"/>
+              </a:solidFill>
+            </a:ln>
+          </p:spPr>
+          <p:style>
+            <a:lnRef idx="2">
+              <a:schemeClr val="accent1"/>
+            </a:lnRef>
+            <a:fillRef idx="0">
+              <a:schemeClr val="accent1"/>
+            </a:fillRef>
+            <a:effectRef idx="1">
+              <a:schemeClr val="accent1"/>
+            </a:effectRef>
+            <a:fontRef idx="minor">
+              <a:schemeClr val="tx1"/>
+            </a:fontRef>
+          </p:style>
+        </p:cxnSp>
+      </p:grpSp>
+      <p:sp>
+        <p:nvSpPr>
+          <p:cNvPr id="2" name="Title Placeholder 1"/>
+          <p:cNvSpPr>
+            <a:spLocks noGrp="1"/>
+          </p:cNvSpPr>
+          <p:nvPr>
+            <p:ph type="title"/>
+          </p:nvPr>
+        </p:nvSpPr>
+        <p:spPr>
+          <a:xfrm>
+            <a:off x="513159" y="3365499"/>
+            <a:ext cx="6400800" cy="1130300"/>
           </a:xfrm>
           <a:prstGeom prst="rect">
             <a:avLst/>
           </a:prstGeom>
-          <a:extLst>
-            <a:ext uri="{C572A759-6A51-4108-AA02-DFA0A04FC94B}">
-              <ma14:wrappingTextBoxFlag xmlns="" xmlns:ma14="http://schemas.microsoft.com/office/mac/drawingml/2011/main" val="0"/>
-            </a:ext>
-          </a:extLst>
-        </p:spPr>
-        <p:txBody>
-          <a:bodyPr/>
+          <a:effectLst/>
+        </p:spPr>
+        <p:txBody>
+          <a:bodyPr vert="horz" lIns="91440" tIns="45720" rIns="91440" bIns="45720" rtlCol="0" anchor="ctr">
+            <a:normAutofit/>
+          </a:bodyPr>
+          <a:lstStyle/>
+          <a:p>
+            <a:r>
+              <a:rPr lang="en-US"/>
+              <a:t>Click to edit Master title style</a:t>
+            </a:r>
+            <a:endParaRPr lang="en-US" dirty="0"/>
+          </a:p>
+        </p:txBody>
+      </p:sp>
+      <p:sp>
+        <p:nvSpPr>
+          <p:cNvPr id="3" name="Text Placeholder 2"/>
+          <p:cNvSpPr>
+            <a:spLocks noGrp="1"/>
+          </p:cNvSpPr>
+          <p:nvPr>
+            <p:ph type="body" idx="1"/>
+          </p:nvPr>
+        </p:nvSpPr>
+        <p:spPr>
+          <a:xfrm>
+            <a:off x="513159" y="514351"/>
+            <a:ext cx="6400800" cy="2711450"/>
+          </a:xfrm>
+          <a:prstGeom prst="rect">
+            <a:avLst/>
+          </a:prstGeom>
+        </p:spPr>
+        <p:txBody>
+          <a:bodyPr vert="horz" lIns="91440" tIns="45720" rIns="91440" bIns="45720" rtlCol="0" anchor="ctr">
+            <a:normAutofit/>
+          </a:bodyPr>
+          <a:lstStyle/>
+          <a:p>
+            <a:pPr lvl="0"/>
+            <a:r>
+              <a:rPr lang="en-US"/>
+              <a:t>Click to edit Master text styles</a:t>
+            </a:r>
+          </a:p>
+          <a:p>
+            <a:pPr lvl="1"/>
+            <a:r>
+              <a:rPr lang="en-US"/>
+              <a:t>Second level</a:t>
+            </a:r>
+          </a:p>
+          <a:p>
+            <a:pPr lvl="2"/>
+            <a:r>
+              <a:rPr lang="en-US"/>
+              <a:t>Third level</a:t>
+            </a:r>
+          </a:p>
+          <a:p>
+            <a:pPr lvl="3"/>
+            <a:r>
+              <a:rPr lang="en-US"/>
+              <a:t>Fourth level</a:t>
+            </a:r>
+          </a:p>
+          <a:p>
+            <a:pPr lvl="4"/>
+            <a:r>
+              <a:rPr lang="en-US"/>
+              <a:t>Fifth level</a:t>
+            </a:r>
+            <a:endParaRPr lang="en-US" dirty="0"/>
+          </a:p>
+        </p:txBody>
+      </p:sp>
+      <p:sp>
+        <p:nvSpPr>
+          <p:cNvPr id="4" name="Date Placeholder 3"/>
+          <p:cNvSpPr>
+            <a:spLocks noGrp="1"/>
+          </p:cNvSpPr>
+          <p:nvPr>
+            <p:ph type="dt" sz="half" idx="2"/>
+          </p:nvPr>
+        </p:nvSpPr>
+        <p:spPr>
+          <a:xfrm>
+            <a:off x="7428309" y="4629150"/>
+            <a:ext cx="1200150" cy="273844"/>
+          </a:xfrm>
+          <a:prstGeom prst="rect">
+            <a:avLst/>
+          </a:prstGeom>
+        </p:spPr>
+        <p:txBody>
+          <a:bodyPr vert="horz" lIns="91440" tIns="45720" rIns="91440" bIns="45720" rtlCol="0" anchor="t"/>
           <a:lstStyle>
-            <a:lvl1pPr>
-              <a:defRPr sz="1000">
-                <a:solidFill>
-                  <a:schemeClr val="accent5"/>
-                </a:solidFill>
+            <a:lvl1pPr algn="r">
+              <a:defRPr sz="750" b="0" i="0">
+                <a:solidFill>
+                  <a:schemeClr val="bg2">
+                    <a:lumMod val="50000"/>
+                  </a:schemeClr>
+                </a:solidFill>
+                <a:effectLst/>
+                <a:latin typeface="+mn-lt"/>
               </a:defRPr>
             </a:lvl1pPr>
           </a:lstStyle>
           <a:p>
+            <a:fld id="{90298CD5-6C1E-4009-B41F-6DF62E31D3BE}" type="datetimeFigureOut">
+              <a:rPr lang="en-US" smtClean="0"/>
+              <a:pPr/>
+              <a:t>10/6/2026</a:t>
+            </a:fld>
+            <a:endParaRPr lang="en-US" dirty="0"/>
+          </a:p>
+        </p:txBody>
+      </p:sp>
+      <p:sp>
+        <p:nvSpPr>
+          <p:cNvPr id="5" name="Footer Placeholder 4"/>
+          <p:cNvSpPr>
+            <a:spLocks noGrp="1"/>
+          </p:cNvSpPr>
+          <p:nvPr>
+            <p:ph type="ftr" sz="quarter" idx="3"/>
+          </p:nvPr>
+        </p:nvSpPr>
+        <p:spPr>
+          <a:xfrm>
+            <a:off x="513159" y="4629150"/>
+            <a:ext cx="5657850" cy="273844"/>
+          </a:xfrm>
+          <a:prstGeom prst="rect">
+            <a:avLst/>
+          </a:prstGeom>
+        </p:spPr>
+        <p:txBody>
+          <a:bodyPr vert="horz" lIns="91440" tIns="45720" rIns="91440" bIns="45720" rtlCol="0" anchor="t"/>
+          <a:lstStyle>
+            <a:lvl1pPr algn="l">
+              <a:defRPr sz="750" b="0" i="0">
+                <a:solidFill>
+                  <a:schemeClr val="bg2">
+                    <a:lumMod val="50000"/>
+                  </a:schemeClr>
+                </a:solidFill>
+                <a:effectLst/>
+                <a:latin typeface="+mn-lt"/>
+              </a:defRPr>
+            </a:lvl1pPr>
+          </a:lstStyle>
+          <a:p>
+            <a:endParaRPr lang="en-US" dirty="0"/>
+          </a:p>
+        </p:txBody>
+      </p:sp>
+      <p:sp>
+        <p:nvSpPr>
+          <p:cNvPr id="6" name="Slide Number Placeholder 5"/>
+          <p:cNvSpPr>
+            <a:spLocks noGrp="1"/>
+          </p:cNvSpPr>
+          <p:nvPr>
+            <p:ph type="sldNum" sz="quarter" idx="4"/>
+          </p:nvPr>
+        </p:nvSpPr>
+        <p:spPr>
+          <a:xfrm>
+            <a:off x="7772400" y="4183857"/>
+            <a:ext cx="856684" cy="502444"/>
+          </a:xfrm>
+          <a:prstGeom prst="rect">
+            <a:avLst/>
+          </a:prstGeom>
+        </p:spPr>
+        <p:txBody>
+          <a:bodyPr vert="horz" lIns="91440" tIns="45720" rIns="91440" bIns="45720" rtlCol="0" anchor="b"/>
+          <a:lstStyle>
+            <a:lvl1pPr algn="r">
+              <a:defRPr sz="2400" b="0" i="0">
+                <a:solidFill>
+                  <a:schemeClr val="bg2">
+                    <a:lumMod val="50000"/>
+                  </a:schemeClr>
+                </a:solidFill>
+                <a:effectLst/>
+                <a:latin typeface="+mn-lt"/>
+              </a:defRPr>
+            </a:lvl1pPr>
+          </a:lstStyle>
+          <a:p>
             <a:pPr algn="r"/>
             <a:fld id="{F7021451-1387-4CA6-816F-3879F97B5CBC}" type="slidenum">
-              <a:rPr lang="en-US" b="0"/>
+              <a:rPr lang="en-US" b="0" smtClean="0"/>
               <a:t>‹#›</a:t>
             </a:fld>
             <a:endParaRPr lang="en-US"/>
@@ -1365,162 +5952,333 @@
         </p:txBody>
       </p:sp>
     </p:spTree>
+    <p:extLst>
+      <p:ext uri="{BB962C8B-B14F-4D97-AF65-F5344CB8AC3E}">
+        <p14:creationId xmlns:p14="http://schemas.microsoft.com/office/powerpoint/2010/main" val="2996658809"/>
+      </p:ext>
+    </p:extLst>
   </p:cSld>
-  <p:clrMap bg1="lt1" tx1="dk1" bg2="lt2" tx2="dk2" accent1="accent1" accent2="accent2" accent3="accent3" accent4="accent4" accent5="accent5" accent6="accent6" hlink="hlink" folHlink="folHlink"/>
+  <p:clrMap bg1="dk1" tx1="lt1" bg2="dk2" tx2="lt2" accent1="accent1" accent2="accent2" accent3="accent3" accent4="accent4" accent5="accent5" accent6="accent6" hlink="hlink" folHlink="folHlink"/>
   <p:sldLayoutIdLst>
-    <p:sldLayoutId id="2147483649" r:id="rId1"/>
-    <p:sldLayoutId id="2147483650" r:id="rId2"/>
-    <p:sldLayoutId id="2147483651" r:id="rId3"/>
+    <p:sldLayoutId id="2147483865" r:id="rId1"/>
+    <p:sldLayoutId id="2147483866" r:id="rId2"/>
+    <p:sldLayoutId id="2147483867" r:id="rId3"/>
+    <p:sldLayoutId id="2147483868" r:id="rId4"/>
+    <p:sldLayoutId id="2147483869" r:id="rId5"/>
+    <p:sldLayoutId id="2147483870" r:id="rId6"/>
+    <p:sldLayoutId id="2147483871" r:id="rId7"/>
+    <p:sldLayoutId id="2147483872" r:id="rId8"/>
+    <p:sldLayoutId id="2147483873" r:id="rId9"/>
+    <p:sldLayoutId id="2147483874" r:id="rId10"/>
+    <p:sldLayoutId id="2147483875" r:id="rId11"/>
+    <p:sldLayoutId id="2147483876" r:id="rId12"/>
+    <p:sldLayoutId id="2147483877" r:id="rId13"/>
+    <p:sldLayoutId id="2147483878" r:id="rId14"/>
+    <p:sldLayoutId id="2147483879" r:id="rId15"/>
+    <p:sldLayoutId id="2147483880" r:id="rId16"/>
+    <p:sldLayoutId id="2147483881" r:id="rId17"/>
+    <p:sldLayoutId id="2147483882" r:id="rId18"/>
+    <p:sldLayoutId id="2147483883" r:id="rId19"/>
   </p:sldLayoutIdLst>
   <p:hf sldNum="0" hdr="0" ftr="0" dt="0"/>
   <p:txStyles>
     <p:titleStyle>
-      <a:lvl1pPr algn="ctr" defTabSz="914400" rtl="0" eaLnBrk="1" latinLnBrk="0" hangingPunct="1">
+      <a:lvl1pPr algn="l" defTabSz="342900" rtl="0" eaLnBrk="1" latinLnBrk="0" hangingPunct="1">
         <a:spcBef>
           <a:spcPct val="0"/>
         </a:spcBef>
         <a:buNone/>
-        <a:defRPr sz="4400" kern="1200">
+        <a:defRPr sz="2700" kern="1200" cap="all">
+          <a:ln w="3175" cmpd="sng">
+            <a:noFill/>
+          </a:ln>
           <a:solidFill>
             <a:schemeClr val="tx1"/>
           </a:solidFill>
+          <a:effectLst/>
           <a:latin typeface="+mj-lt"/>
           <a:ea typeface="+mj-ea"/>
           <a:cs typeface="+mj-cs"/>
         </a:defRPr>
       </a:lvl1pPr>
+      <a:lvl2pPr eaLnBrk="1" hangingPunct="1">
+        <a:defRPr>
+          <a:solidFill>
+            <a:schemeClr val="tx2"/>
+          </a:solidFill>
+        </a:defRPr>
+      </a:lvl2pPr>
+      <a:lvl3pPr eaLnBrk="1" hangingPunct="1">
+        <a:defRPr>
+          <a:solidFill>
+            <a:schemeClr val="tx2"/>
+          </a:solidFill>
+        </a:defRPr>
+      </a:lvl3pPr>
+      <a:lvl4pPr eaLnBrk="1" hangingPunct="1">
+        <a:defRPr>
+          <a:solidFill>
+            <a:schemeClr val="tx2"/>
+          </a:solidFill>
+        </a:defRPr>
+      </a:lvl4pPr>
+      <a:lvl5pPr eaLnBrk="1" hangingPunct="1">
+        <a:defRPr>
+          <a:solidFill>
+            <a:schemeClr val="tx2"/>
+          </a:solidFill>
+        </a:defRPr>
+      </a:lvl5pPr>
+      <a:lvl6pPr eaLnBrk="1" hangingPunct="1">
+        <a:defRPr>
+          <a:solidFill>
+            <a:schemeClr val="tx2"/>
+          </a:solidFill>
+        </a:defRPr>
+      </a:lvl6pPr>
+      <a:lvl7pPr eaLnBrk="1" hangingPunct="1">
+        <a:defRPr>
+          <a:solidFill>
+            <a:schemeClr val="tx2"/>
+          </a:solidFill>
+        </a:defRPr>
+      </a:lvl7pPr>
+      <a:lvl8pPr eaLnBrk="1" hangingPunct="1">
+        <a:defRPr>
+          <a:solidFill>
+            <a:schemeClr val="tx2"/>
+          </a:solidFill>
+        </a:defRPr>
+      </a:lvl8pPr>
+      <a:lvl9pPr eaLnBrk="1" hangingPunct="1">
+        <a:defRPr>
+          <a:solidFill>
+            <a:schemeClr val="tx2"/>
+          </a:solidFill>
+        </a:defRPr>
+      </a:lvl9pPr>
     </p:titleStyle>
     <p:bodyStyle>
-      <a:lvl1pPr marL="342900" indent="-342900" algn="l" defTabSz="914400" rtl="0" eaLnBrk="1" latinLnBrk="0" hangingPunct="1">
+      <a:lvl1pPr marL="214313" indent="-214313" algn="l" defTabSz="342900" rtl="0" eaLnBrk="1" latinLnBrk="0" hangingPunct="1">
         <a:spcBef>
           <a:spcPct val="20000"/>
         </a:spcBef>
-        <a:buFont typeface="Arial" pitchFamily="34" charset="0"/>
-        <a:buChar char="•"/>
-        <a:defRPr sz="3200" kern="1200">
+        <a:spcAft>
+          <a:spcPts val="450"/>
+        </a:spcAft>
+        <a:buClr>
+          <a:schemeClr val="tx1"/>
+        </a:buClr>
+        <a:buSzPct val="80000"/>
+        <a:buFont typeface="Wingdings 3" panose="05040102010807070707" pitchFamily="18" charset="2"/>
+        <a:buChar char=""/>
+        <a:defRPr sz="1500" kern="1200" cap="none">
           <a:solidFill>
-            <a:schemeClr val="tx1"/>
+            <a:schemeClr val="bg2">
+              <a:lumMod val="75000"/>
+            </a:schemeClr>
           </a:solidFill>
+          <a:effectLst/>
           <a:latin typeface="+mn-lt"/>
           <a:ea typeface="+mn-ea"/>
           <a:cs typeface="+mn-cs"/>
         </a:defRPr>
       </a:lvl1pPr>
-      <a:lvl2pPr marL="742950" indent="-285750" algn="l" defTabSz="914400" rtl="0" eaLnBrk="1" latinLnBrk="0" hangingPunct="1">
+      <a:lvl2pPr marL="557213" indent="-214313" algn="l" defTabSz="342900" rtl="0" eaLnBrk="1" latinLnBrk="0" hangingPunct="1">
         <a:spcBef>
           <a:spcPct val="20000"/>
         </a:spcBef>
-        <a:buFont typeface="Arial" pitchFamily="34" charset="0"/>
-        <a:buChar char="–"/>
-        <a:defRPr sz="2800" kern="1200">
+        <a:spcAft>
+          <a:spcPts val="450"/>
+        </a:spcAft>
+        <a:buClr>
+          <a:schemeClr val="tx1"/>
+        </a:buClr>
+        <a:buSzPct val="80000"/>
+        <a:buFont typeface="Wingdings 3" panose="05040102010807070707" pitchFamily="18" charset="2"/>
+        <a:buChar char=""/>
+        <a:defRPr sz="1350" kern="1200" cap="none">
           <a:solidFill>
-            <a:schemeClr val="tx1"/>
+            <a:schemeClr val="bg2">
+              <a:lumMod val="75000"/>
+            </a:schemeClr>
           </a:solidFill>
+          <a:effectLst/>
           <a:latin typeface="+mn-lt"/>
           <a:ea typeface="+mn-ea"/>
           <a:cs typeface="+mn-cs"/>
         </a:defRPr>
       </a:lvl2pPr>
-      <a:lvl3pPr marL="1143000" indent="-228600" algn="l" defTabSz="914400" rtl="0" eaLnBrk="1" latinLnBrk="0" hangingPunct="1">
+      <a:lvl3pPr marL="900113" indent="-214313" algn="l" defTabSz="342900" rtl="0" eaLnBrk="1" latinLnBrk="0" hangingPunct="1">
         <a:spcBef>
           <a:spcPct val="20000"/>
         </a:spcBef>
-        <a:buFont typeface="Arial" pitchFamily="34" charset="0"/>
-        <a:buChar char="•"/>
-        <a:defRPr sz="2400" kern="1200">
+        <a:spcAft>
+          <a:spcPts val="450"/>
+        </a:spcAft>
+        <a:buClr>
+          <a:schemeClr val="tx1"/>
+        </a:buClr>
+        <a:buSzPct val="80000"/>
+        <a:buFont typeface="Wingdings 3" panose="05040102010807070707" pitchFamily="18" charset="2"/>
+        <a:buChar char=""/>
+        <a:defRPr sz="1200" kern="1200" cap="none">
           <a:solidFill>
-            <a:schemeClr val="tx1"/>
+            <a:schemeClr val="bg2">
+              <a:lumMod val="75000"/>
+            </a:schemeClr>
           </a:solidFill>
+          <a:effectLst/>
           <a:latin typeface="+mn-lt"/>
           <a:ea typeface="+mn-ea"/>
           <a:cs typeface="+mn-cs"/>
         </a:defRPr>
       </a:lvl3pPr>
-      <a:lvl4pPr marL="1600200" indent="-228600" algn="l" defTabSz="914400" rtl="0" eaLnBrk="1" latinLnBrk="0" hangingPunct="1">
+      <a:lvl4pPr marL="1157288" indent="-128588" algn="l" defTabSz="342900" rtl="0" eaLnBrk="1" latinLnBrk="0" hangingPunct="1">
         <a:spcBef>
           <a:spcPct val="20000"/>
         </a:spcBef>
-        <a:buFont typeface="Arial" pitchFamily="34" charset="0"/>
-        <a:buChar char="–"/>
-        <a:defRPr sz="2000" kern="1200">
+        <a:spcAft>
+          <a:spcPts val="450"/>
+        </a:spcAft>
+        <a:buClr>
+          <a:schemeClr val="tx1"/>
+        </a:buClr>
+        <a:buSzPct val="80000"/>
+        <a:buFont typeface="Wingdings 3" panose="05040102010807070707" pitchFamily="18" charset="2"/>
+        <a:buChar char=""/>
+        <a:defRPr sz="1050" kern="1200" cap="none">
           <a:solidFill>
-            <a:schemeClr val="tx1"/>
+            <a:schemeClr val="bg2">
+              <a:lumMod val="75000"/>
+            </a:schemeClr>
           </a:solidFill>
+          <a:effectLst/>
           <a:latin typeface="+mn-lt"/>
           <a:ea typeface="+mn-ea"/>
           <a:cs typeface="+mn-cs"/>
         </a:defRPr>
       </a:lvl4pPr>
-      <a:lvl5pPr marL="2057400" indent="-228600" algn="l" defTabSz="914400" rtl="0" eaLnBrk="1" latinLnBrk="0" hangingPunct="1">
+      <a:lvl5pPr marL="1500188" indent="-128588" algn="l" defTabSz="342900" rtl="0" eaLnBrk="1" latinLnBrk="0" hangingPunct="1">
         <a:spcBef>
           <a:spcPct val="20000"/>
         </a:spcBef>
-        <a:buFont typeface="Arial" pitchFamily="34" charset="0"/>
-        <a:buChar char="»"/>
-        <a:defRPr sz="2000" kern="1200">
+        <a:spcAft>
+          <a:spcPts val="450"/>
+        </a:spcAft>
+        <a:buClr>
+          <a:schemeClr val="tx1"/>
+        </a:buClr>
+        <a:buSzPct val="80000"/>
+        <a:buFont typeface="Wingdings 3" panose="05040102010807070707" pitchFamily="18" charset="2"/>
+        <a:buChar char=""/>
+        <a:defRPr sz="1050" kern="1200" cap="none">
           <a:solidFill>
-            <a:schemeClr val="tx1"/>
+            <a:schemeClr val="bg2">
+              <a:lumMod val="75000"/>
+            </a:schemeClr>
           </a:solidFill>
+          <a:effectLst/>
           <a:latin typeface="+mn-lt"/>
           <a:ea typeface="+mn-ea"/>
           <a:cs typeface="+mn-cs"/>
         </a:defRPr>
       </a:lvl5pPr>
-      <a:lvl6pPr marL="2514600" indent="-228600" algn="l" defTabSz="914400" rtl="0" eaLnBrk="1" latinLnBrk="0" hangingPunct="1">
+      <a:lvl6pPr marL="1885950" indent="-171450" algn="l" defTabSz="342900" rtl="0" eaLnBrk="1" latinLnBrk="0" hangingPunct="1">
         <a:spcBef>
           <a:spcPct val="20000"/>
         </a:spcBef>
-        <a:buFont typeface="Arial" pitchFamily="34" charset="0"/>
-        <a:buChar char="•"/>
-        <a:defRPr sz="2000" kern="1200">
+        <a:spcAft>
+          <a:spcPts val="450"/>
+        </a:spcAft>
+        <a:buClr>
+          <a:schemeClr val="tx1"/>
+        </a:buClr>
+        <a:buSzPct val="80000"/>
+        <a:buFont typeface="Wingdings 3" panose="05040102010807070707" pitchFamily="18" charset="2"/>
+        <a:buChar char=""/>
+        <a:defRPr sz="1050" kern="1200" cap="none">
           <a:solidFill>
-            <a:schemeClr val="tx1"/>
+            <a:schemeClr val="bg2">
+              <a:lumMod val="75000"/>
+            </a:schemeClr>
           </a:solidFill>
+          <a:effectLst/>
           <a:latin typeface="+mn-lt"/>
           <a:ea typeface="+mn-ea"/>
           <a:cs typeface="+mn-cs"/>
         </a:defRPr>
       </a:lvl6pPr>
-      <a:lvl7pPr marL="2971800" indent="-228600" algn="l" defTabSz="914400" rtl="0" eaLnBrk="1" latinLnBrk="0" hangingPunct="1">
+      <a:lvl7pPr marL="2228850" indent="-171450" algn="l" defTabSz="342900" rtl="0" eaLnBrk="1" latinLnBrk="0" hangingPunct="1">
         <a:spcBef>
           <a:spcPct val="20000"/>
         </a:spcBef>
-        <a:buFont typeface="Arial" pitchFamily="34" charset="0"/>
-        <a:buChar char="•"/>
-        <a:defRPr sz="2000" kern="1200">
+        <a:spcAft>
+          <a:spcPts val="450"/>
+        </a:spcAft>
+        <a:buClr>
+          <a:schemeClr val="tx1"/>
+        </a:buClr>
+        <a:buSzPct val="80000"/>
+        <a:buFont typeface="Wingdings 3" panose="05040102010807070707" pitchFamily="18" charset="2"/>
+        <a:buChar char=""/>
+        <a:defRPr sz="1050" kern="1200" cap="none">
           <a:solidFill>
-            <a:schemeClr val="tx1"/>
+            <a:schemeClr val="bg2">
+              <a:lumMod val="75000"/>
+            </a:schemeClr>
           </a:solidFill>
+          <a:effectLst/>
           <a:latin typeface="+mn-lt"/>
           <a:ea typeface="+mn-ea"/>
           <a:cs typeface="+mn-cs"/>
         </a:defRPr>
       </a:lvl7pPr>
-      <a:lvl8pPr marL="3429000" indent="-228600" algn="l" defTabSz="914400" rtl="0" eaLnBrk="1" latinLnBrk="0" hangingPunct="1">
+      <a:lvl8pPr marL="2571750" indent="-171450" algn="l" defTabSz="342900" rtl="0" eaLnBrk="1" latinLnBrk="0" hangingPunct="1">
         <a:spcBef>
           <a:spcPct val="20000"/>
         </a:spcBef>
-        <a:buFont typeface="Arial" pitchFamily="34" charset="0"/>
-        <a:buChar char="•"/>
-        <a:defRPr sz="2000" kern="1200">
+        <a:spcAft>
+          <a:spcPts val="450"/>
+        </a:spcAft>
+        <a:buClr>
+          <a:schemeClr val="tx1"/>
+        </a:buClr>
+        <a:buSzPct val="80000"/>
+        <a:buFont typeface="Wingdings 3" panose="05040102010807070707" pitchFamily="18" charset="2"/>
+        <a:buChar char=""/>
+        <a:defRPr sz="1050" kern="1200" cap="none">
           <a:solidFill>
-            <a:schemeClr val="tx1"/>
+            <a:schemeClr val="bg2">
+              <a:lumMod val="75000"/>
+            </a:schemeClr>
           </a:solidFill>
+          <a:effectLst/>
           <a:latin typeface="+mn-lt"/>
           <a:ea typeface="+mn-ea"/>
           <a:cs typeface="+mn-cs"/>
         </a:defRPr>
       </a:lvl8pPr>
-      <a:lvl9pPr marL="3886200" indent="-228600" algn="l" defTabSz="914400" rtl="0" eaLnBrk="1" latinLnBrk="0" hangingPunct="1">
+      <a:lvl9pPr marL="2914650" indent="-171450" algn="l" defTabSz="342900" rtl="0" eaLnBrk="1" latinLnBrk="0" hangingPunct="1">
         <a:spcBef>
           <a:spcPct val="20000"/>
         </a:spcBef>
-        <a:buFont typeface="Arial" pitchFamily="34" charset="0"/>
-        <a:buChar char="•"/>
-        <a:defRPr sz="2000" kern="1200">
+        <a:spcAft>
+          <a:spcPts val="450"/>
+        </a:spcAft>
+        <a:buClr>
+          <a:schemeClr val="tx1"/>
+        </a:buClr>
+        <a:buSzPct val="80000"/>
+        <a:buFont typeface="Wingdings 3" panose="05040102010807070707" pitchFamily="18" charset="2"/>
+        <a:buChar char=""/>
+        <a:defRPr sz="1050" kern="1200" cap="none">
           <a:solidFill>
-            <a:schemeClr val="tx1"/>
+            <a:schemeClr val="bg2">
+              <a:lumMod val="75000"/>
+            </a:schemeClr>
           </a:solidFill>
+          <a:effectLst/>
           <a:latin typeface="+mn-lt"/>
           <a:ea typeface="+mn-ea"/>
           <a:cs typeface="+mn-cs"/>
@@ -1531,8 +6289,8 @@
       <a:defPPr>
         <a:defRPr lang="en-US"/>
       </a:defPPr>
-      <a:lvl1pPr marL="0" algn="l" defTabSz="914400" rtl="0" eaLnBrk="1" latinLnBrk="0" hangingPunct="1">
-        <a:defRPr sz="1800" kern="1200">
+      <a:lvl1pPr marL="0" algn="l" defTabSz="342900" rtl="0" eaLnBrk="1" latinLnBrk="0" hangingPunct="1">
+        <a:defRPr sz="1350" kern="1200">
           <a:solidFill>
             <a:schemeClr val="tx1"/>
           </a:solidFill>
@@ -1541,8 +6299,8 @@
           <a:cs typeface="+mn-cs"/>
         </a:defRPr>
       </a:lvl1pPr>
-      <a:lvl2pPr marL="457200" algn="l" defTabSz="914400" rtl="0" eaLnBrk="1" latinLnBrk="0" hangingPunct="1">
-        <a:defRPr sz="1800" kern="1200">
+      <a:lvl2pPr marL="342900" algn="l" defTabSz="342900" rtl="0" eaLnBrk="1" latinLnBrk="0" hangingPunct="1">
+        <a:defRPr sz="1350" kern="1200">
           <a:solidFill>
             <a:schemeClr val="tx1"/>
           </a:solidFill>
@@ -1551,8 +6309,8 @@
           <a:cs typeface="+mn-cs"/>
         </a:defRPr>
       </a:lvl2pPr>
-      <a:lvl3pPr marL="914400" algn="l" defTabSz="914400" rtl="0" eaLnBrk="1" latinLnBrk="0" hangingPunct="1">
-        <a:defRPr sz="1800" kern="1200">
+      <a:lvl3pPr marL="685800" algn="l" defTabSz="342900" rtl="0" eaLnBrk="1" latinLnBrk="0" hangingPunct="1">
+        <a:defRPr sz="1350" kern="1200">
           <a:solidFill>
             <a:schemeClr val="tx1"/>
           </a:solidFill>
@@ -1561,8 +6319,8 @@
           <a:cs typeface="+mn-cs"/>
         </a:defRPr>
       </a:lvl3pPr>
-      <a:lvl4pPr marL="1371600" algn="l" defTabSz="914400" rtl="0" eaLnBrk="1" latinLnBrk="0" hangingPunct="1">
-        <a:defRPr sz="1800" kern="1200">
+      <a:lvl4pPr marL="1028700" algn="l" defTabSz="342900" rtl="0" eaLnBrk="1" latinLnBrk="0" hangingPunct="1">
+        <a:defRPr sz="1350" kern="1200">
           <a:solidFill>
             <a:schemeClr val="tx1"/>
           </a:solidFill>
@@ -1571,8 +6329,8 @@
           <a:cs typeface="+mn-cs"/>
         </a:defRPr>
       </a:lvl4pPr>
-      <a:lvl5pPr marL="1828800" algn="l" defTabSz="914400" rtl="0" eaLnBrk="1" latinLnBrk="0" hangingPunct="1">
-        <a:defRPr sz="1800" kern="1200">
+      <a:lvl5pPr marL="1371600" algn="l" defTabSz="342900" rtl="0" eaLnBrk="1" latinLnBrk="0" hangingPunct="1">
+        <a:defRPr sz="1350" kern="1200">
           <a:solidFill>
             <a:schemeClr val="tx1"/>
           </a:solidFill>
@@ -1581,8 +6339,8 @@
           <a:cs typeface="+mn-cs"/>
         </a:defRPr>
       </a:lvl5pPr>
-      <a:lvl6pPr marL="2286000" algn="l" defTabSz="914400" rtl="0" eaLnBrk="1" latinLnBrk="0" hangingPunct="1">
-        <a:defRPr sz="1800" kern="1200">
+      <a:lvl6pPr marL="1714500" algn="l" defTabSz="342900" rtl="0" eaLnBrk="1" latinLnBrk="0" hangingPunct="1">
+        <a:defRPr sz="1350" kern="1200">
           <a:solidFill>
             <a:schemeClr val="tx1"/>
           </a:solidFill>
@@ -1591,8 +6349,8 @@
           <a:cs typeface="+mn-cs"/>
         </a:defRPr>
       </a:lvl6pPr>
-      <a:lvl7pPr marL="2743200" algn="l" defTabSz="914400" rtl="0" eaLnBrk="1" latinLnBrk="0" hangingPunct="1">
-        <a:defRPr sz="1800" kern="1200">
+      <a:lvl7pPr marL="2057400" algn="l" defTabSz="342900" rtl="0" eaLnBrk="1" latinLnBrk="0" hangingPunct="1">
+        <a:defRPr sz="1350" kern="1200">
           <a:solidFill>
             <a:schemeClr val="tx1"/>
           </a:solidFill>
@@ -1601,8 +6359,8 @@
           <a:cs typeface="+mn-cs"/>
         </a:defRPr>
       </a:lvl7pPr>
-      <a:lvl8pPr marL="3200400" algn="l" defTabSz="914400" rtl="0" eaLnBrk="1" latinLnBrk="0" hangingPunct="1">
-        <a:defRPr sz="1800" kern="1200">
+      <a:lvl8pPr marL="2400300" algn="l" defTabSz="342900" rtl="0" eaLnBrk="1" latinLnBrk="0" hangingPunct="1">
+        <a:defRPr sz="1350" kern="1200">
           <a:solidFill>
             <a:schemeClr val="tx1"/>
           </a:solidFill>
@@ -1611,8 +6369,8 @@
           <a:cs typeface="+mn-cs"/>
         </a:defRPr>
       </a:lvl8pPr>
-      <a:lvl9pPr marL="3657600" algn="l" defTabSz="914400" rtl="0" eaLnBrk="1" latinLnBrk="0" hangingPunct="1">
-        <a:defRPr sz="1800" kern="1200">
+      <a:lvl9pPr marL="2743200" algn="l" defTabSz="342900" rtl="0" eaLnBrk="1" latinLnBrk="0" hangingPunct="1">
+        <a:defRPr sz="1350" kern="1200">
           <a:solidFill>
             <a:schemeClr val="tx1"/>
           </a:solidFill>
@@ -1650,7 +6408,7 @@
             <a:spLocks noGrp="1"/>
           </p:cNvSpPr>
           <p:nvPr>
-            <p:ph type="title" idx="102" hasCustomPrompt="1"/>
+            <p:ph type="title" idx="102"/>
           </p:nvPr>
         </p:nvSpPr>
         <p:spPr>
@@ -1721,23 +6479,7 @@
                   <a:schemeClr val="bg1"/>
                 </a:solidFill>
               </a:rPr>
-              <a:t>Kaidi </a:t>
-            </a:r>
-            <a:r>
-              <a:rPr lang="et-EE" sz="1400" dirty="0" err="1">
-                <a:solidFill>
-                  <a:schemeClr val="bg1"/>
-                </a:solidFill>
-              </a:rPr>
-              <a:t>Soiela</a:t>
-            </a:r>
-            <a:r>
-              <a:rPr lang="et-EE" sz="1400" dirty="0">
-                <a:solidFill>
-                  <a:schemeClr val="bg1"/>
-                </a:solidFill>
-              </a:rPr>
-              <a:t>, Siret Laaneoks, Merje Nõmmik, Kristel Kuusik</a:t>
+              <a:t>Kaidi Soiela, Siret Laaneoks, Merje Nõmmik, Kristel Kuusik</a:t>
             </a:r>
             <a:r>
               <a:rPr lang="en-US" sz="1400" dirty="0">
@@ -1783,14 +6525,10 @@
             <a:spLocks noGrp="1"/>
           </p:cNvSpPr>
           <p:nvPr>
-            <p:ph type="title" idx="100" hasCustomPrompt="1"/>
-          </p:nvPr>
-        </p:nvSpPr>
-        <p:spPr>
-          <a:xfrm>
-            <a:off x="457200" y="274320"/>
-            <a:ext cx="6949440" cy="731520"/>
-          </a:xfrm>
+            <p:ph type="title" idx="100"/>
+          </p:nvPr>
+        </p:nvSpPr>
+        <p:spPr>
           <a:prstGeom prst="rect">
             <a:avLst/>
           </a:prstGeom>
@@ -1818,797 +6556,21 @@
       </p:sp>
       <p:sp>
         <p:nvSpPr>
-          <p:cNvPr id="6" name="Kaart Probleem"/>
-          <p:cNvSpPr/>
-          <p:nvPr/>
-        </p:nvSpPr>
-        <p:spPr>
-          <a:xfrm>
-            <a:off x="457200" y="1234440"/>
-            <a:ext cx="4846320" cy="960120"/>
-          </a:xfrm>
-          <a:prstGeom prst="roundRect">
-            <a:avLst>
-              <a:gd name="adj" fmla="val 9524"/>
-            </a:avLst>
-          </a:prstGeom>
-          <a:solidFill>
-            <a:schemeClr val="bg2"/>
-          </a:solidFill>
-          <a:ln/>
-        </p:spPr>
-      </p:sp>
-      <p:sp>
-        <p:nvSpPr>
-          <p:cNvPr id="7" name="Shape 4"/>
-          <p:cNvSpPr/>
-          <p:nvPr/>
-        </p:nvSpPr>
-        <p:spPr>
-          <a:xfrm>
-            <a:off x="640080" y="1485900"/>
-            <a:ext cx="457200" cy="457200"/>
-          </a:xfrm>
-          <a:prstGeom prst="ellipse">
-            <a:avLst/>
-          </a:prstGeom>
-          <a:solidFill>
-            <a:schemeClr val="accent1"/>
-          </a:solidFill>
-          <a:ln/>
-        </p:spPr>
-      </p:sp>
-      <p:sp>
-        <p:nvSpPr>
-          <p:cNvPr id="8" name="Text 5"/>
-          <p:cNvSpPr txBox="1"/>
-          <p:nvPr/>
-        </p:nvSpPr>
-        <p:spPr>
-          <a:xfrm>
-            <a:off x="640080" y="1485900"/>
-            <a:ext cx="457200" cy="457200"/>
-          </a:xfrm>
+          <p:cNvPr id="5" name="Slide Number Placeholder 0"/>
+          <p:cNvSpPr>
+            <a:spLocks noGrp="1"/>
+          </p:cNvSpPr>
+          <p:nvPr>
+            <p:ph type="sldNum" sz="quarter" idx="4294967295"/>
+          </p:nvPr>
+        </p:nvSpPr>
+        <p:spPr>
           <a:prstGeom prst="rect">
             <a:avLst/>
           </a:prstGeom>
-          <a:noFill/>
-          <a:ln/>
-        </p:spPr>
-        <p:txBody>
-          <a:bodyPr wrap="square" lIns="0" tIns="0" rIns="0" bIns="0" rtlCol="0" anchor="ctr"/>
-          <a:lstStyle/>
-          <a:p>
-            <a:pPr marL="0" indent="0" algn="ctr">
-              <a:buNone/>
-            </a:pPr>
-            <a:r>
-              <a:rPr lang="en-US" sz="1600" b="1" dirty="0">
-                <a:solidFill>
-                  <a:schemeClr val="bg1"/>
-                </a:solidFill>
-              </a:rPr>
-              <a:t>1</a:t>
-            </a:r>
-            <a:endParaRPr lang="en-US" sz="1600" dirty="0"/>
-          </a:p>
-        </p:txBody>
-      </p:sp>
-      <p:sp>
-        <p:nvSpPr>
-          <p:cNvPr id="9" name="Text 6"/>
-          <p:cNvSpPr txBox="1"/>
-          <p:nvPr/>
-        </p:nvSpPr>
-        <p:spPr>
-          <a:xfrm>
-            <a:off x="1280160" y="1280160"/>
-            <a:ext cx="3886200" cy="868680"/>
-          </a:xfrm>
-          <a:prstGeom prst="rect">
-            <a:avLst/>
-          </a:prstGeom>
-          <a:noFill/>
-          <a:ln/>
-        </p:spPr>
-        <p:txBody>
-          <a:bodyPr wrap="square" lIns="0" tIns="0" rIns="0" bIns="0" rtlCol="0" anchor="ctr"/>
-          <a:lstStyle/>
-          <a:p>
-            <a:pPr marL="0" indent="0">
-              <a:buNone/>
-            </a:pPr>
-            <a:r>
-              <a:rPr lang="en-US" sz="1600" b="1" dirty="0">
-                <a:solidFill>
-                  <a:schemeClr val="tx2"/>
-                </a:solidFill>
-              </a:rPr>
-              <a:t>Probleem</a:t>
-            </a:r>
-            <a:endParaRPr lang="en-US" sz="1600" dirty="0"/>
-          </a:p>
-          <a:p>
-            <a:pPr marL="0" indent="0">
-              <a:buNone/>
-            </a:pPr>
-            <a:r>
-              <a:rPr lang="en-US" sz="1400" dirty="0">
-                <a:solidFill>
-                  <a:schemeClr val="tx1"/>
-                </a:solidFill>
-              </a:rPr>
-              <a:t>Kas keskmise palgaga töötaja jõuab kinnisvara hinnatõusuga sammu pidada?</a:t>
-            </a:r>
-            <a:endParaRPr lang="en-US" sz="1600" dirty="0"/>
-          </a:p>
-        </p:txBody>
-      </p:sp>
-      <p:sp>
-        <p:nvSpPr>
-          <p:cNvPr id="10" name="Kaart Hüpotees"/>
-          <p:cNvSpPr/>
-          <p:nvPr/>
-        </p:nvSpPr>
-        <p:spPr>
-          <a:xfrm>
-            <a:off x="457200" y="2331720"/>
-            <a:ext cx="4846320" cy="960120"/>
-          </a:xfrm>
-          <a:prstGeom prst="roundRect">
-            <a:avLst>
-              <a:gd name="adj" fmla="val 9524"/>
-            </a:avLst>
-          </a:prstGeom>
-          <a:solidFill>
-            <a:schemeClr val="bg2"/>
-          </a:solidFill>
-          <a:ln/>
-        </p:spPr>
-      </p:sp>
-      <p:sp>
-        <p:nvSpPr>
-          <p:cNvPr id="11" name="Shape 8"/>
-          <p:cNvSpPr/>
-          <p:nvPr/>
-        </p:nvSpPr>
-        <p:spPr>
-          <a:xfrm>
-            <a:off x="640080" y="2583180"/>
-            <a:ext cx="457200" cy="457200"/>
-          </a:xfrm>
-          <a:prstGeom prst="ellipse">
-            <a:avLst/>
-          </a:prstGeom>
-          <a:solidFill>
-            <a:schemeClr val="accent3"/>
-          </a:solidFill>
-          <a:ln/>
-        </p:spPr>
-      </p:sp>
-      <p:sp>
-        <p:nvSpPr>
-          <p:cNvPr id="12" name="Text 9"/>
-          <p:cNvSpPr txBox="1"/>
-          <p:nvPr/>
-        </p:nvSpPr>
-        <p:spPr>
-          <a:xfrm>
-            <a:off x="640080" y="2583180"/>
-            <a:ext cx="457200" cy="457200"/>
-          </a:xfrm>
-          <a:prstGeom prst="rect">
-            <a:avLst/>
-          </a:prstGeom>
-          <a:noFill/>
-          <a:ln/>
-        </p:spPr>
-        <p:txBody>
-          <a:bodyPr wrap="square" lIns="0" tIns="0" rIns="0" bIns="0" rtlCol="0" anchor="ctr"/>
-          <a:lstStyle/>
-          <a:p>
-            <a:pPr marL="0" indent="0" algn="ctr">
-              <a:buNone/>
-            </a:pPr>
-            <a:r>
-              <a:rPr lang="en-US" sz="1600" b="1" dirty="0">
-                <a:solidFill>
-                  <a:schemeClr val="bg1"/>
-                </a:solidFill>
-              </a:rPr>
-              <a:t>2</a:t>
-            </a:r>
-            <a:endParaRPr lang="en-US" sz="1600" dirty="0"/>
-          </a:p>
-        </p:txBody>
-      </p:sp>
-      <p:sp>
-        <p:nvSpPr>
-          <p:cNvPr id="13" name="Text 10"/>
-          <p:cNvSpPr txBox="1"/>
-          <p:nvPr/>
-        </p:nvSpPr>
-        <p:spPr>
-          <a:xfrm>
-            <a:off x="1280160" y="2377440"/>
-            <a:ext cx="3886200" cy="868680"/>
-          </a:xfrm>
-          <a:prstGeom prst="rect">
-            <a:avLst/>
-          </a:prstGeom>
-          <a:noFill/>
-          <a:ln/>
-        </p:spPr>
-        <p:txBody>
-          <a:bodyPr wrap="square" lIns="0" tIns="0" rIns="0" bIns="0" rtlCol="0" anchor="ctr"/>
-          <a:lstStyle/>
-          <a:p>
-            <a:pPr marL="0" indent="0">
-              <a:buNone/>
-            </a:pPr>
-            <a:r>
-              <a:rPr lang="en-US" sz="1600" b="1" dirty="0">
-                <a:solidFill>
-                  <a:schemeClr val="tx2"/>
-                </a:solidFill>
-              </a:rPr>
-              <a:t>Hüpotees</a:t>
-            </a:r>
-            <a:endParaRPr lang="en-US" sz="1600" dirty="0"/>
-          </a:p>
-          <a:p>
-            <a:pPr marL="0" indent="0">
-              <a:buNone/>
-            </a:pPr>
-            <a:r>
-              <a:rPr lang="en-US" sz="1400" dirty="0">
-                <a:solidFill>
-                  <a:schemeClr val="tx1"/>
-                </a:solidFill>
-              </a:rPr>
-              <a:t>Ostuvõime on inflatsiooni ja EURIBORi tõusu tõttu madalam kui eelmisel kümnendil.</a:t>
-            </a:r>
-            <a:endParaRPr lang="en-US" sz="1600" dirty="0"/>
-          </a:p>
-        </p:txBody>
-      </p:sp>
-      <p:sp>
-        <p:nvSpPr>
-          <p:cNvPr id="14" name="Kaart Sihtrühm ja väärtus"/>
-          <p:cNvSpPr/>
-          <p:nvPr/>
-        </p:nvSpPr>
-        <p:spPr>
-          <a:xfrm>
-            <a:off x="457200" y="3429000"/>
-            <a:ext cx="4846320" cy="960120"/>
-          </a:xfrm>
-          <a:prstGeom prst="roundRect">
-            <a:avLst>
-              <a:gd name="adj" fmla="val 9524"/>
-            </a:avLst>
-          </a:prstGeom>
-          <a:solidFill>
-            <a:schemeClr val="bg2"/>
-          </a:solidFill>
-          <a:ln/>
-        </p:spPr>
-      </p:sp>
-      <p:sp>
-        <p:nvSpPr>
-          <p:cNvPr id="15" name="Shape 12"/>
-          <p:cNvSpPr/>
-          <p:nvPr/>
-        </p:nvSpPr>
-        <p:spPr>
-          <a:xfrm>
-            <a:off x="640080" y="3680460"/>
-            <a:ext cx="457200" cy="457200"/>
-          </a:xfrm>
-          <a:prstGeom prst="ellipse">
-            <a:avLst/>
-          </a:prstGeom>
-          <a:solidFill>
-            <a:schemeClr val="accent4"/>
-          </a:solidFill>
-          <a:ln/>
-        </p:spPr>
-      </p:sp>
-      <p:sp>
-        <p:nvSpPr>
-          <p:cNvPr id="16" name="Text 13"/>
-          <p:cNvSpPr txBox="1"/>
-          <p:nvPr/>
-        </p:nvSpPr>
-        <p:spPr>
-          <a:xfrm>
-            <a:off x="640080" y="3680460"/>
-            <a:ext cx="457200" cy="457200"/>
-          </a:xfrm>
-          <a:prstGeom prst="rect">
-            <a:avLst/>
-          </a:prstGeom>
-          <a:noFill/>
-          <a:ln/>
-        </p:spPr>
-        <p:txBody>
-          <a:bodyPr wrap="square" lIns="0" tIns="0" rIns="0" bIns="0" rtlCol="0" anchor="ctr"/>
-          <a:lstStyle/>
-          <a:p>
-            <a:pPr marL="0" indent="0" algn="ctr">
-              <a:buNone/>
-            </a:pPr>
-            <a:r>
-              <a:rPr lang="en-US" sz="1600" b="1" dirty="0">
-                <a:solidFill>
-                  <a:schemeClr val="bg1"/>
-                </a:solidFill>
-              </a:rPr>
-              <a:t>3</a:t>
-            </a:r>
-            <a:endParaRPr lang="en-US" sz="1600" dirty="0"/>
-          </a:p>
-        </p:txBody>
-      </p:sp>
-      <p:sp>
-        <p:nvSpPr>
-          <p:cNvPr id="17" name="Text 14"/>
-          <p:cNvSpPr txBox="1"/>
-          <p:nvPr/>
-        </p:nvSpPr>
-        <p:spPr>
-          <a:xfrm>
-            <a:off x="1280160" y="3474720"/>
-            <a:ext cx="3886200" cy="868680"/>
-          </a:xfrm>
-          <a:prstGeom prst="rect">
-            <a:avLst/>
-          </a:prstGeom>
-          <a:noFill/>
-          <a:ln/>
-        </p:spPr>
-        <p:txBody>
-          <a:bodyPr wrap="square" lIns="0" tIns="0" rIns="0" bIns="0" rtlCol="0" anchor="ctr"/>
-          <a:lstStyle/>
-          <a:p>
-            <a:pPr marL="0" indent="0">
-              <a:buNone/>
-            </a:pPr>
-            <a:r>
-              <a:rPr lang="en-US" sz="1600" b="1" dirty="0">
-                <a:solidFill>
-                  <a:schemeClr val="tx2"/>
-                </a:solidFill>
-              </a:rPr>
-              <a:t>Sihtrühm ja väärtus</a:t>
-            </a:r>
-            <a:endParaRPr lang="en-US" sz="1600" dirty="0"/>
-          </a:p>
-          <a:p>
-            <a:pPr marL="0" indent="0">
-              <a:buNone/>
-            </a:pPr>
-            <a:r>
-              <a:rPr lang="en-US" sz="1400" dirty="0">
-                <a:solidFill>
-                  <a:schemeClr val="tx1"/>
-                </a:solidFill>
-              </a:rPr>
-              <a:t>Eraisikud ja koduostjad: kaalutletud otsus maakonniti.</a:t>
-            </a:r>
-            <a:endParaRPr lang="en-US" sz="1600" dirty="0"/>
-          </a:p>
-        </p:txBody>
-      </p:sp>
-      <p:sp>
-        <p:nvSpPr>
-          <p:cNvPr id="18" name="Statistika maakonda"/>
-          <p:cNvSpPr/>
-          <p:nvPr/>
-        </p:nvSpPr>
-        <p:spPr>
-          <a:xfrm>
-            <a:off x="5669280" y="1234440"/>
-            <a:ext cx="1463040" cy="1508760"/>
-          </a:xfrm>
-          <a:prstGeom prst="roundRect">
-            <a:avLst>
-              <a:gd name="adj" fmla="val 6250"/>
-            </a:avLst>
-          </a:prstGeom>
-          <a:solidFill>
-            <a:schemeClr val="accent1"/>
-          </a:solidFill>
-          <a:ln/>
-        </p:spPr>
-      </p:sp>
-      <p:sp>
-        <p:nvSpPr>
-          <p:cNvPr id="19" name="Text 16"/>
-          <p:cNvSpPr txBox="1"/>
-          <p:nvPr/>
-        </p:nvSpPr>
-        <p:spPr>
-          <a:xfrm>
-            <a:off x="5669280" y="1508760"/>
-            <a:ext cx="1463040" cy="548640"/>
-          </a:xfrm>
-          <a:prstGeom prst="rect">
-            <a:avLst/>
-          </a:prstGeom>
-          <a:noFill/>
-          <a:ln/>
-        </p:spPr>
-        <p:txBody>
-          <a:bodyPr wrap="square" lIns="0" tIns="0" rIns="0" bIns="0" rtlCol="0" anchor="ctr"/>
-          <a:lstStyle/>
-          <a:p>
-            <a:pPr marL="0" indent="0" algn="ctr">
-              <a:buNone/>
-            </a:pPr>
-            <a:r>
-              <a:rPr lang="en-US" sz="3400" b="1" dirty="0">
-                <a:solidFill>
-                  <a:schemeClr val="accent2"/>
-                </a:solidFill>
-                <a:latin typeface="Cambria" pitchFamily="34" charset="0"/>
-                <a:ea typeface="Cambria" pitchFamily="34" charset="-122"/>
-                <a:cs typeface="Cambria" pitchFamily="34" charset="-120"/>
-              </a:rPr>
-              <a:t>15</a:t>
-            </a:r>
-            <a:endParaRPr lang="en-US" sz="3400" dirty="0"/>
-          </a:p>
-        </p:txBody>
-      </p:sp>
-      <p:sp>
-        <p:nvSpPr>
-          <p:cNvPr id="20" name="Text 17"/>
-          <p:cNvSpPr txBox="1"/>
-          <p:nvPr/>
-        </p:nvSpPr>
-        <p:spPr>
-          <a:xfrm>
-            <a:off x="5669280" y="2103120"/>
-            <a:ext cx="1463040" cy="457200"/>
-          </a:xfrm>
-          <a:prstGeom prst="rect">
-            <a:avLst/>
-          </a:prstGeom>
-          <a:noFill/>
-          <a:ln/>
-        </p:spPr>
-        <p:txBody>
-          <a:bodyPr wrap="square" lIns="0" tIns="0" rIns="0" bIns="0" rtlCol="0" anchor="t"/>
-          <a:lstStyle/>
-          <a:p>
-            <a:pPr marL="0" indent="0" algn="ctr">
-              <a:buNone/>
-            </a:pPr>
-            <a:r>
-              <a:rPr lang="en-US" sz="1400" dirty="0">
-                <a:solidFill>
-                  <a:schemeClr val="bg1"/>
-                </a:solidFill>
-              </a:rPr>
-              <a:t>maakonda</a:t>
-            </a:r>
-            <a:endParaRPr lang="en-US" sz="1400" dirty="0"/>
-          </a:p>
-        </p:txBody>
-      </p:sp>
-      <p:sp>
-        <p:nvSpPr>
-          <p:cNvPr id="21" name="Statistika vaatlusperiood"/>
-          <p:cNvSpPr/>
-          <p:nvPr/>
-        </p:nvSpPr>
-        <p:spPr>
-          <a:xfrm>
-            <a:off x="7223760" y="1234440"/>
-            <a:ext cx="1463040" cy="1508760"/>
-          </a:xfrm>
-          <a:prstGeom prst="roundRect">
-            <a:avLst>
-              <a:gd name="adj" fmla="val 6250"/>
-            </a:avLst>
-          </a:prstGeom>
-          <a:solidFill>
-            <a:schemeClr val="accent1"/>
-          </a:solidFill>
-          <a:ln/>
-        </p:spPr>
-      </p:sp>
-      <p:sp>
-        <p:nvSpPr>
-          <p:cNvPr id="22" name="Text 19"/>
-          <p:cNvSpPr txBox="1"/>
-          <p:nvPr/>
-        </p:nvSpPr>
-        <p:spPr>
-          <a:xfrm>
-            <a:off x="7223760" y="1508760"/>
-            <a:ext cx="1463040" cy="548640"/>
-          </a:xfrm>
-          <a:prstGeom prst="rect">
-            <a:avLst/>
-          </a:prstGeom>
-          <a:noFill/>
-          <a:ln/>
-        </p:spPr>
-        <p:txBody>
-          <a:bodyPr wrap="square" lIns="0" tIns="0" rIns="0" bIns="0" rtlCol="0" anchor="ctr"/>
-          <a:lstStyle/>
-          <a:p>
-            <a:pPr marL="0" indent="0" algn="ctr">
-              <a:buNone/>
-            </a:pPr>
-            <a:r>
-              <a:rPr lang="en-US" sz="2000" b="1" dirty="0">
-                <a:solidFill>
-                  <a:schemeClr val="accent2"/>
-                </a:solidFill>
-                <a:latin typeface="Cambria" pitchFamily="34" charset="0"/>
-                <a:ea typeface="Cambria" pitchFamily="34" charset="-122"/>
-                <a:cs typeface="Cambria" pitchFamily="34" charset="-120"/>
-              </a:rPr>
-              <a:t>2005–2026</a:t>
-            </a:r>
-            <a:endParaRPr lang="en-US" sz="2000" dirty="0"/>
-          </a:p>
-        </p:txBody>
-      </p:sp>
-      <p:sp>
-        <p:nvSpPr>
-          <p:cNvPr id="23" name="Text 20"/>
-          <p:cNvSpPr txBox="1"/>
-          <p:nvPr/>
-        </p:nvSpPr>
-        <p:spPr>
-          <a:xfrm>
-            <a:off x="7223760" y="2103120"/>
-            <a:ext cx="1463040" cy="457200"/>
-          </a:xfrm>
-          <a:prstGeom prst="rect">
-            <a:avLst/>
-          </a:prstGeom>
-          <a:noFill/>
-          <a:ln/>
-        </p:spPr>
-        <p:txBody>
-          <a:bodyPr wrap="square" lIns="0" tIns="0" rIns="0" bIns="0" rtlCol="0" anchor="t"/>
-          <a:lstStyle/>
-          <a:p>
-            <a:pPr marL="0" indent="0" algn="ctr">
-              <a:buNone/>
-            </a:pPr>
-            <a:r>
-              <a:rPr lang="en-US" sz="1400" dirty="0">
-                <a:solidFill>
-                  <a:schemeClr val="bg1"/>
-                </a:solidFill>
-              </a:rPr>
-              <a:t>vaatlusperiood</a:t>
-            </a:r>
-            <a:endParaRPr lang="en-US" sz="1400" dirty="0"/>
-          </a:p>
-        </p:txBody>
-      </p:sp>
-      <p:sp>
-        <p:nvSpPr>
-          <p:cNvPr id="24" name="Statistika andmeallikat"/>
-          <p:cNvSpPr/>
-          <p:nvPr/>
-        </p:nvSpPr>
-        <p:spPr>
-          <a:xfrm>
-            <a:off x="5669280" y="2880360"/>
-            <a:ext cx="1463040" cy="1508760"/>
-          </a:xfrm>
-          <a:prstGeom prst="roundRect">
-            <a:avLst>
-              <a:gd name="adj" fmla="val 6250"/>
-            </a:avLst>
-          </a:prstGeom>
-          <a:solidFill>
-            <a:schemeClr val="accent1"/>
-          </a:solidFill>
-          <a:ln/>
-        </p:spPr>
-      </p:sp>
-      <p:sp>
-        <p:nvSpPr>
-          <p:cNvPr id="25" name="Text 22"/>
-          <p:cNvSpPr txBox="1"/>
-          <p:nvPr/>
-        </p:nvSpPr>
-        <p:spPr>
-          <a:xfrm>
-            <a:off x="5669280" y="3154680"/>
-            <a:ext cx="1463040" cy="548640"/>
-          </a:xfrm>
-          <a:prstGeom prst="rect">
-            <a:avLst/>
-          </a:prstGeom>
-          <a:noFill/>
-          <a:ln/>
-        </p:spPr>
-        <p:txBody>
-          <a:bodyPr wrap="square" lIns="0" tIns="0" rIns="0" bIns="0" rtlCol="0" anchor="ctr"/>
-          <a:lstStyle/>
-          <a:p>
-            <a:pPr marL="0" indent="0" algn="ctr">
-              <a:buNone/>
-            </a:pPr>
-            <a:r>
-              <a:rPr lang="en-US" sz="3400" b="1" dirty="0">
-                <a:solidFill>
-                  <a:schemeClr val="accent2"/>
-                </a:solidFill>
-                <a:latin typeface="Cambria" pitchFamily="34" charset="0"/>
-                <a:ea typeface="Cambria" pitchFamily="34" charset="-122"/>
-                <a:cs typeface="Cambria" pitchFamily="34" charset="-120"/>
-              </a:rPr>
-              <a:t>3</a:t>
-            </a:r>
-            <a:endParaRPr lang="en-US" sz="3400" dirty="0"/>
-          </a:p>
-        </p:txBody>
-      </p:sp>
-      <p:sp>
-        <p:nvSpPr>
-          <p:cNvPr id="26" name="Text 23"/>
-          <p:cNvSpPr txBox="1"/>
-          <p:nvPr/>
-        </p:nvSpPr>
-        <p:spPr>
-          <a:xfrm>
-            <a:off x="5669280" y="3749040"/>
-            <a:ext cx="1463040" cy="457200"/>
-          </a:xfrm>
-          <a:prstGeom prst="rect">
-            <a:avLst/>
-          </a:prstGeom>
-          <a:noFill/>
-          <a:ln/>
-        </p:spPr>
-        <p:txBody>
-          <a:bodyPr wrap="square" lIns="0" tIns="0" rIns="0" bIns="0" rtlCol="0" anchor="t"/>
-          <a:lstStyle/>
-          <a:p>
-            <a:pPr marL="0" indent="0" algn="ctr">
-              <a:buNone/>
-            </a:pPr>
-            <a:r>
-              <a:rPr lang="en-US" sz="1400" dirty="0">
-                <a:solidFill>
-                  <a:schemeClr val="bg1"/>
-                </a:solidFill>
-              </a:rPr>
-              <a:t>andmeallikat</a:t>
-            </a:r>
-            <a:endParaRPr lang="en-US" sz="1400" dirty="0"/>
-          </a:p>
-        </p:txBody>
-      </p:sp>
-      <p:sp>
-        <p:nvSpPr>
-          <p:cNvPr id="27" name="Statistika kasutajarakendust"/>
-          <p:cNvSpPr/>
-          <p:nvPr/>
-        </p:nvSpPr>
-        <p:spPr>
-          <a:xfrm>
-            <a:off x="7223760" y="2880360"/>
-            <a:ext cx="1463040" cy="1508760"/>
-          </a:xfrm>
-          <a:prstGeom prst="roundRect">
-            <a:avLst>
-              <a:gd name="adj" fmla="val 6250"/>
-            </a:avLst>
-          </a:prstGeom>
-          <a:solidFill>
-            <a:schemeClr val="accent1"/>
-          </a:solidFill>
-          <a:ln/>
-        </p:spPr>
-      </p:sp>
-      <p:sp>
-        <p:nvSpPr>
-          <p:cNvPr id="28" name="Text 25"/>
-          <p:cNvSpPr txBox="1"/>
-          <p:nvPr/>
-        </p:nvSpPr>
-        <p:spPr>
-          <a:xfrm>
-            <a:off x="7223760" y="3154680"/>
-            <a:ext cx="1463040" cy="548640"/>
-          </a:xfrm>
-          <a:prstGeom prst="rect">
-            <a:avLst/>
-          </a:prstGeom>
-          <a:noFill/>
-          <a:ln/>
-        </p:spPr>
-        <p:txBody>
-          <a:bodyPr wrap="square" lIns="0" tIns="0" rIns="0" bIns="0" rtlCol="0" anchor="ctr"/>
-          <a:lstStyle/>
-          <a:p>
-            <a:pPr marL="0" indent="0" algn="ctr">
-              <a:buNone/>
-            </a:pPr>
-            <a:r>
-              <a:rPr lang="en-US" sz="3400" b="1" dirty="0">
-                <a:solidFill>
-                  <a:schemeClr val="accent2"/>
-                </a:solidFill>
-                <a:latin typeface="Cambria" pitchFamily="34" charset="0"/>
-                <a:ea typeface="Cambria" pitchFamily="34" charset="-122"/>
-                <a:cs typeface="Cambria" pitchFamily="34" charset="-120"/>
-              </a:rPr>
-              <a:t>3</a:t>
-            </a:r>
-            <a:endParaRPr lang="en-US" sz="3400" dirty="0"/>
-          </a:p>
-        </p:txBody>
-      </p:sp>
-      <p:sp>
-        <p:nvSpPr>
-          <p:cNvPr id="29" name="Text 26"/>
-          <p:cNvSpPr txBox="1"/>
-          <p:nvPr/>
-        </p:nvSpPr>
-        <p:spPr>
-          <a:xfrm>
-            <a:off x="7223760" y="3749040"/>
-            <a:ext cx="1463040" cy="457200"/>
-          </a:xfrm>
-          <a:prstGeom prst="rect">
-            <a:avLst/>
-          </a:prstGeom>
-          <a:noFill/>
-          <a:ln/>
-        </p:spPr>
-        <p:txBody>
-          <a:bodyPr wrap="square" lIns="0" tIns="0" rIns="0" bIns="0" rtlCol="0" anchor="t"/>
-          <a:lstStyle/>
-          <a:p>
-            <a:pPr marL="0" indent="0" algn="ctr">
-              <a:buNone/>
-            </a:pPr>
-            <a:r>
-              <a:rPr lang="en-US" sz="1400" dirty="0">
-                <a:solidFill>
-                  <a:schemeClr val="bg1"/>
-                </a:solidFill>
-              </a:rPr>
-              <a:t>kasutajarakendust</a:t>
-            </a:r>
-            <a:endParaRPr lang="en-US" sz="1400" dirty="0"/>
-          </a:p>
-        </p:txBody>
-      </p:sp>
-      <p:sp>
-        <p:nvSpPr>
-          <p:cNvPr id="5" name="Slide Number Placeholder 0"/>
-          <p:cNvSpPr>
-            <a:spLocks noGrp="1"/>
-          </p:cNvSpPr>
-          <p:nvPr>
-            <p:ph type="sldNum" sz="quarter" idx="4294967295"/>
-          </p:nvPr>
-        </p:nvSpPr>
-        <p:spPr>
-          <a:xfrm>
-            <a:off x="8321040" y="4754880"/>
-            <a:ext cx="457200" cy="274320"/>
-          </a:xfrm>
-          <a:prstGeom prst="rect">
-            <a:avLst/>
-          </a:prstGeom>
           <a:extLst>
             <a:ext uri="{C572A759-6A51-4108-AA02-DFA0A04FC94B}">
-              <ma14:wrappingTextBoxFlag xmlns="" xmlns:ma14="http://schemas.microsoft.com/office/mac/drawingml/2011/main" val="0"/>
+              <ma14:wrappingTextBoxFlag xmlns:ma14="http://schemas.microsoft.com/office/mac/drawingml/2011/main" xmlns="" val="0"/>
             </a:ext>
           </a:extLst>
         </p:spPr>
@@ -2630,6 +6592,778 @@
               <a:t>2</a:t>
             </a:fld>
             <a:endParaRPr lang="en-US"/>
+          </a:p>
+        </p:txBody>
+      </p:sp>
+      <p:sp>
+        <p:nvSpPr>
+          <p:cNvPr id="6" name="Kaart Probleem"/>
+          <p:cNvSpPr/>
+          <p:nvPr/>
+        </p:nvSpPr>
+        <p:spPr>
+          <a:xfrm>
+            <a:off x="457200" y="1234440"/>
+            <a:ext cx="4846320" cy="960120"/>
+          </a:xfrm>
+          <a:prstGeom prst="roundRect">
+            <a:avLst>
+              <a:gd name="adj" fmla="val 9524"/>
+            </a:avLst>
+          </a:prstGeom>
+          <a:solidFill>
+            <a:schemeClr val="bg2"/>
+          </a:solidFill>
+          <a:ln/>
+        </p:spPr>
+      </p:sp>
+      <p:sp>
+        <p:nvSpPr>
+          <p:cNvPr id="7" name="Shape 4"/>
+          <p:cNvSpPr/>
+          <p:nvPr/>
+        </p:nvSpPr>
+        <p:spPr>
+          <a:xfrm>
+            <a:off x="640080" y="1485900"/>
+            <a:ext cx="457200" cy="457200"/>
+          </a:xfrm>
+          <a:prstGeom prst="ellipse">
+            <a:avLst/>
+          </a:prstGeom>
+          <a:solidFill>
+            <a:schemeClr val="accent1"/>
+          </a:solidFill>
+          <a:ln/>
+        </p:spPr>
+      </p:sp>
+      <p:sp>
+        <p:nvSpPr>
+          <p:cNvPr id="8" name="Text 5"/>
+          <p:cNvSpPr txBox="1"/>
+          <p:nvPr/>
+        </p:nvSpPr>
+        <p:spPr>
+          <a:xfrm>
+            <a:off x="640080" y="1485900"/>
+            <a:ext cx="457200" cy="457200"/>
+          </a:xfrm>
+          <a:prstGeom prst="rect">
+            <a:avLst/>
+          </a:prstGeom>
+          <a:noFill/>
+          <a:ln/>
+        </p:spPr>
+        <p:txBody>
+          <a:bodyPr wrap="square" lIns="0" tIns="0" rIns="0" bIns="0" rtlCol="0" anchor="ctr"/>
+          <a:lstStyle/>
+          <a:p>
+            <a:pPr marL="0" indent="0" algn="ctr">
+              <a:buNone/>
+            </a:pPr>
+            <a:r>
+              <a:rPr lang="en-US" sz="1600" b="1" dirty="0">
+                <a:solidFill>
+                  <a:schemeClr val="bg1"/>
+                </a:solidFill>
+              </a:rPr>
+              <a:t>1</a:t>
+            </a:r>
+            <a:endParaRPr lang="en-US" sz="1600" dirty="0"/>
+          </a:p>
+        </p:txBody>
+      </p:sp>
+      <p:sp>
+        <p:nvSpPr>
+          <p:cNvPr id="9" name="Text 6"/>
+          <p:cNvSpPr txBox="1"/>
+          <p:nvPr/>
+        </p:nvSpPr>
+        <p:spPr>
+          <a:xfrm>
+            <a:off x="1280160" y="1280160"/>
+            <a:ext cx="3886200" cy="868680"/>
+          </a:xfrm>
+          <a:prstGeom prst="rect">
+            <a:avLst/>
+          </a:prstGeom>
+          <a:noFill/>
+          <a:ln/>
+        </p:spPr>
+        <p:txBody>
+          <a:bodyPr wrap="square" lIns="0" tIns="0" rIns="0" bIns="0" rtlCol="0" anchor="ctr"/>
+          <a:lstStyle/>
+          <a:p>
+            <a:pPr marL="0" indent="0">
+              <a:buNone/>
+            </a:pPr>
+            <a:r>
+              <a:rPr lang="en-US" sz="1600" b="1" dirty="0">
+                <a:solidFill>
+                  <a:schemeClr val="tx2"/>
+                </a:solidFill>
+              </a:rPr>
+              <a:t>Probleem</a:t>
+            </a:r>
+            <a:endParaRPr lang="en-US" sz="1600" dirty="0"/>
+          </a:p>
+          <a:p>
+            <a:pPr marL="0" indent="0">
+              <a:buNone/>
+            </a:pPr>
+            <a:r>
+              <a:rPr lang="en-US" sz="1400" dirty="0">
+                <a:solidFill>
+                  <a:schemeClr val="tx1"/>
+                </a:solidFill>
+              </a:rPr>
+              <a:t>Kas keskmise palgaga töötaja jõuab kinnisvara hinnatõusuga sammu pidada?</a:t>
+            </a:r>
+            <a:endParaRPr lang="en-US" sz="1600" dirty="0"/>
+          </a:p>
+        </p:txBody>
+      </p:sp>
+      <p:sp>
+        <p:nvSpPr>
+          <p:cNvPr id="10" name="Kaart Hüpotees"/>
+          <p:cNvSpPr/>
+          <p:nvPr/>
+        </p:nvSpPr>
+        <p:spPr>
+          <a:xfrm>
+            <a:off x="457200" y="2331720"/>
+            <a:ext cx="4846320" cy="960120"/>
+          </a:xfrm>
+          <a:prstGeom prst="roundRect">
+            <a:avLst>
+              <a:gd name="adj" fmla="val 9524"/>
+            </a:avLst>
+          </a:prstGeom>
+          <a:solidFill>
+            <a:schemeClr val="bg2"/>
+          </a:solidFill>
+          <a:ln/>
+        </p:spPr>
+      </p:sp>
+      <p:sp>
+        <p:nvSpPr>
+          <p:cNvPr id="11" name="Shape 8"/>
+          <p:cNvSpPr/>
+          <p:nvPr/>
+        </p:nvSpPr>
+        <p:spPr>
+          <a:xfrm>
+            <a:off x="640080" y="2583180"/>
+            <a:ext cx="457200" cy="457200"/>
+          </a:xfrm>
+          <a:prstGeom prst="ellipse">
+            <a:avLst/>
+          </a:prstGeom>
+          <a:solidFill>
+            <a:schemeClr val="accent3"/>
+          </a:solidFill>
+          <a:ln/>
+        </p:spPr>
+      </p:sp>
+      <p:sp>
+        <p:nvSpPr>
+          <p:cNvPr id="12" name="Text 9"/>
+          <p:cNvSpPr txBox="1"/>
+          <p:nvPr/>
+        </p:nvSpPr>
+        <p:spPr>
+          <a:xfrm>
+            <a:off x="640080" y="2583180"/>
+            <a:ext cx="457200" cy="457200"/>
+          </a:xfrm>
+          <a:prstGeom prst="rect">
+            <a:avLst/>
+          </a:prstGeom>
+          <a:noFill/>
+          <a:ln/>
+        </p:spPr>
+        <p:txBody>
+          <a:bodyPr wrap="square" lIns="0" tIns="0" rIns="0" bIns="0" rtlCol="0" anchor="ctr"/>
+          <a:lstStyle/>
+          <a:p>
+            <a:pPr marL="0" indent="0" algn="ctr">
+              <a:buNone/>
+            </a:pPr>
+            <a:r>
+              <a:rPr lang="en-US" sz="1600" b="1" dirty="0">
+                <a:solidFill>
+                  <a:schemeClr val="bg1"/>
+                </a:solidFill>
+              </a:rPr>
+              <a:t>2</a:t>
+            </a:r>
+            <a:endParaRPr lang="en-US" sz="1600" dirty="0"/>
+          </a:p>
+        </p:txBody>
+      </p:sp>
+      <p:sp>
+        <p:nvSpPr>
+          <p:cNvPr id="13" name="Text 10"/>
+          <p:cNvSpPr txBox="1"/>
+          <p:nvPr/>
+        </p:nvSpPr>
+        <p:spPr>
+          <a:xfrm>
+            <a:off x="1280160" y="2377440"/>
+            <a:ext cx="3886200" cy="868680"/>
+          </a:xfrm>
+          <a:prstGeom prst="rect">
+            <a:avLst/>
+          </a:prstGeom>
+          <a:noFill/>
+          <a:ln/>
+        </p:spPr>
+        <p:txBody>
+          <a:bodyPr wrap="square" lIns="0" tIns="0" rIns="0" bIns="0" rtlCol="0" anchor="ctr"/>
+          <a:lstStyle/>
+          <a:p>
+            <a:pPr marL="0" indent="0">
+              <a:buNone/>
+            </a:pPr>
+            <a:r>
+              <a:rPr lang="en-US" sz="1600" b="1" dirty="0">
+                <a:solidFill>
+                  <a:schemeClr val="tx2"/>
+                </a:solidFill>
+              </a:rPr>
+              <a:t>Hüpotees</a:t>
+            </a:r>
+            <a:endParaRPr lang="en-US" sz="1600" dirty="0"/>
+          </a:p>
+          <a:p>
+            <a:pPr marL="0" indent="0">
+              <a:buNone/>
+            </a:pPr>
+            <a:r>
+              <a:rPr lang="en-US" sz="1400" dirty="0">
+                <a:solidFill>
+                  <a:schemeClr val="tx1"/>
+                </a:solidFill>
+              </a:rPr>
+              <a:t>Ostuvõime on inflatsiooni ja EURIBORi tõusu tõttu madalam kui eelmisel kümnendil.</a:t>
+            </a:r>
+            <a:endParaRPr lang="en-US" sz="1600" dirty="0"/>
+          </a:p>
+        </p:txBody>
+      </p:sp>
+      <p:sp>
+        <p:nvSpPr>
+          <p:cNvPr id="14" name="Kaart Sihtrühm ja väärtus"/>
+          <p:cNvSpPr/>
+          <p:nvPr/>
+        </p:nvSpPr>
+        <p:spPr>
+          <a:xfrm>
+            <a:off x="457200" y="3429000"/>
+            <a:ext cx="4846320" cy="960120"/>
+          </a:xfrm>
+          <a:prstGeom prst="roundRect">
+            <a:avLst>
+              <a:gd name="adj" fmla="val 9524"/>
+            </a:avLst>
+          </a:prstGeom>
+          <a:solidFill>
+            <a:schemeClr val="bg2"/>
+          </a:solidFill>
+          <a:ln/>
+        </p:spPr>
+      </p:sp>
+      <p:sp>
+        <p:nvSpPr>
+          <p:cNvPr id="15" name="Shape 12"/>
+          <p:cNvSpPr/>
+          <p:nvPr/>
+        </p:nvSpPr>
+        <p:spPr>
+          <a:xfrm>
+            <a:off x="640080" y="3680460"/>
+            <a:ext cx="457200" cy="457200"/>
+          </a:xfrm>
+          <a:prstGeom prst="ellipse">
+            <a:avLst/>
+          </a:prstGeom>
+          <a:solidFill>
+            <a:schemeClr val="accent4"/>
+          </a:solidFill>
+          <a:ln/>
+        </p:spPr>
+      </p:sp>
+      <p:sp>
+        <p:nvSpPr>
+          <p:cNvPr id="16" name="Text 13"/>
+          <p:cNvSpPr txBox="1"/>
+          <p:nvPr/>
+        </p:nvSpPr>
+        <p:spPr>
+          <a:xfrm>
+            <a:off x="640080" y="3680460"/>
+            <a:ext cx="457200" cy="457200"/>
+          </a:xfrm>
+          <a:prstGeom prst="rect">
+            <a:avLst/>
+          </a:prstGeom>
+          <a:noFill/>
+          <a:ln/>
+        </p:spPr>
+        <p:txBody>
+          <a:bodyPr wrap="square" lIns="0" tIns="0" rIns="0" bIns="0" rtlCol="0" anchor="ctr"/>
+          <a:lstStyle/>
+          <a:p>
+            <a:pPr marL="0" indent="0" algn="ctr">
+              <a:buNone/>
+            </a:pPr>
+            <a:r>
+              <a:rPr lang="en-US" sz="1600" b="1" dirty="0">
+                <a:solidFill>
+                  <a:schemeClr val="bg1"/>
+                </a:solidFill>
+              </a:rPr>
+              <a:t>3</a:t>
+            </a:r>
+            <a:endParaRPr lang="en-US" sz="1600" dirty="0"/>
+          </a:p>
+        </p:txBody>
+      </p:sp>
+      <p:sp>
+        <p:nvSpPr>
+          <p:cNvPr id="17" name="Text 14"/>
+          <p:cNvSpPr txBox="1"/>
+          <p:nvPr/>
+        </p:nvSpPr>
+        <p:spPr>
+          <a:xfrm>
+            <a:off x="1280160" y="3474720"/>
+            <a:ext cx="3886200" cy="868680"/>
+          </a:xfrm>
+          <a:prstGeom prst="rect">
+            <a:avLst/>
+          </a:prstGeom>
+          <a:noFill/>
+          <a:ln/>
+        </p:spPr>
+        <p:txBody>
+          <a:bodyPr wrap="square" lIns="0" tIns="0" rIns="0" bIns="0" rtlCol="0" anchor="ctr"/>
+          <a:lstStyle/>
+          <a:p>
+            <a:pPr marL="0" indent="0">
+              <a:buNone/>
+            </a:pPr>
+            <a:r>
+              <a:rPr lang="en-US" sz="1600" b="1" dirty="0">
+                <a:solidFill>
+                  <a:schemeClr val="tx2"/>
+                </a:solidFill>
+              </a:rPr>
+              <a:t>Sihtrühm ja väärtus</a:t>
+            </a:r>
+            <a:endParaRPr lang="en-US" sz="1600" dirty="0"/>
+          </a:p>
+          <a:p>
+            <a:pPr marL="0" indent="0">
+              <a:buNone/>
+            </a:pPr>
+            <a:r>
+              <a:rPr lang="en-US" sz="1400" dirty="0">
+                <a:solidFill>
+                  <a:schemeClr val="tx1"/>
+                </a:solidFill>
+              </a:rPr>
+              <a:t>Eraisikud ja koduostjad: kaalutletud otsus maakonniti.</a:t>
+            </a:r>
+            <a:endParaRPr lang="en-US" sz="1600" dirty="0"/>
+          </a:p>
+        </p:txBody>
+      </p:sp>
+      <p:sp>
+        <p:nvSpPr>
+          <p:cNvPr id="18" name="Statistika maakonda"/>
+          <p:cNvSpPr/>
+          <p:nvPr/>
+        </p:nvSpPr>
+        <p:spPr>
+          <a:xfrm>
+            <a:off x="5669280" y="1234440"/>
+            <a:ext cx="1463040" cy="1508760"/>
+          </a:xfrm>
+          <a:prstGeom prst="roundRect">
+            <a:avLst>
+              <a:gd name="adj" fmla="val 6250"/>
+            </a:avLst>
+          </a:prstGeom>
+          <a:solidFill>
+            <a:schemeClr val="accent1"/>
+          </a:solidFill>
+          <a:ln/>
+        </p:spPr>
+      </p:sp>
+      <p:sp>
+        <p:nvSpPr>
+          <p:cNvPr id="19" name="Text 16"/>
+          <p:cNvSpPr txBox="1"/>
+          <p:nvPr/>
+        </p:nvSpPr>
+        <p:spPr>
+          <a:xfrm>
+            <a:off x="5669280" y="1508760"/>
+            <a:ext cx="1463040" cy="548640"/>
+          </a:xfrm>
+          <a:prstGeom prst="rect">
+            <a:avLst/>
+          </a:prstGeom>
+          <a:noFill/>
+          <a:ln/>
+        </p:spPr>
+        <p:txBody>
+          <a:bodyPr wrap="square" lIns="0" tIns="0" rIns="0" bIns="0" rtlCol="0" anchor="ctr"/>
+          <a:lstStyle/>
+          <a:p>
+            <a:pPr marL="0" indent="0" algn="ctr">
+              <a:buNone/>
+            </a:pPr>
+            <a:r>
+              <a:rPr lang="en-US" sz="3400" b="1" dirty="0">
+                <a:solidFill>
+                  <a:schemeClr val="accent2"/>
+                </a:solidFill>
+                <a:latin typeface="Cambria" pitchFamily="34" charset="0"/>
+                <a:ea typeface="Cambria" pitchFamily="34" charset="-122"/>
+                <a:cs typeface="Cambria" pitchFamily="34" charset="-120"/>
+              </a:rPr>
+              <a:t>15</a:t>
+            </a:r>
+            <a:endParaRPr lang="en-US" sz="3400" dirty="0"/>
+          </a:p>
+        </p:txBody>
+      </p:sp>
+      <p:sp>
+        <p:nvSpPr>
+          <p:cNvPr id="20" name="Text 17"/>
+          <p:cNvSpPr txBox="1"/>
+          <p:nvPr/>
+        </p:nvSpPr>
+        <p:spPr>
+          <a:xfrm>
+            <a:off x="5669280" y="2103120"/>
+            <a:ext cx="1463040" cy="457200"/>
+          </a:xfrm>
+          <a:prstGeom prst="rect">
+            <a:avLst/>
+          </a:prstGeom>
+          <a:noFill/>
+          <a:ln/>
+        </p:spPr>
+        <p:txBody>
+          <a:bodyPr wrap="square" lIns="0" tIns="0" rIns="0" bIns="0" rtlCol="0" anchor="t"/>
+          <a:lstStyle/>
+          <a:p>
+            <a:pPr marL="0" indent="0" algn="ctr">
+              <a:buNone/>
+            </a:pPr>
+            <a:r>
+              <a:rPr lang="en-US" sz="1400" dirty="0">
+                <a:solidFill>
+                  <a:schemeClr val="bg1"/>
+                </a:solidFill>
+              </a:rPr>
+              <a:t>maakonda</a:t>
+            </a:r>
+            <a:endParaRPr lang="en-US" sz="1400" dirty="0"/>
+          </a:p>
+        </p:txBody>
+      </p:sp>
+      <p:sp>
+        <p:nvSpPr>
+          <p:cNvPr id="21" name="Statistika vaatlusperiood"/>
+          <p:cNvSpPr/>
+          <p:nvPr/>
+        </p:nvSpPr>
+        <p:spPr>
+          <a:xfrm>
+            <a:off x="7223760" y="1234440"/>
+            <a:ext cx="1463040" cy="1508760"/>
+          </a:xfrm>
+          <a:prstGeom prst="roundRect">
+            <a:avLst>
+              <a:gd name="adj" fmla="val 6250"/>
+            </a:avLst>
+          </a:prstGeom>
+          <a:solidFill>
+            <a:schemeClr val="accent1"/>
+          </a:solidFill>
+          <a:ln/>
+        </p:spPr>
+      </p:sp>
+      <p:sp>
+        <p:nvSpPr>
+          <p:cNvPr id="22" name="Text 19"/>
+          <p:cNvSpPr txBox="1"/>
+          <p:nvPr/>
+        </p:nvSpPr>
+        <p:spPr>
+          <a:xfrm>
+            <a:off x="7223760" y="1508760"/>
+            <a:ext cx="1463040" cy="548640"/>
+          </a:xfrm>
+          <a:prstGeom prst="rect">
+            <a:avLst/>
+          </a:prstGeom>
+          <a:noFill/>
+          <a:ln/>
+        </p:spPr>
+        <p:txBody>
+          <a:bodyPr wrap="square" lIns="0" tIns="0" rIns="0" bIns="0" rtlCol="0" anchor="ctr"/>
+          <a:lstStyle/>
+          <a:p>
+            <a:pPr marL="0" indent="0" algn="ctr">
+              <a:buNone/>
+            </a:pPr>
+            <a:r>
+              <a:rPr lang="en-US" sz="2000" b="1" dirty="0">
+                <a:solidFill>
+                  <a:schemeClr val="accent2"/>
+                </a:solidFill>
+                <a:latin typeface="Cambria" pitchFamily="34" charset="0"/>
+                <a:ea typeface="Cambria" pitchFamily="34" charset="-122"/>
+                <a:cs typeface="Cambria" pitchFamily="34" charset="-120"/>
+              </a:rPr>
+              <a:t>2005–2026</a:t>
+            </a:r>
+            <a:endParaRPr lang="en-US" sz="2000" dirty="0"/>
+          </a:p>
+        </p:txBody>
+      </p:sp>
+      <p:sp>
+        <p:nvSpPr>
+          <p:cNvPr id="23" name="Text 20"/>
+          <p:cNvSpPr txBox="1"/>
+          <p:nvPr/>
+        </p:nvSpPr>
+        <p:spPr>
+          <a:xfrm>
+            <a:off x="7223760" y="2103120"/>
+            <a:ext cx="1463040" cy="457200"/>
+          </a:xfrm>
+          <a:prstGeom prst="rect">
+            <a:avLst/>
+          </a:prstGeom>
+          <a:noFill/>
+          <a:ln/>
+        </p:spPr>
+        <p:txBody>
+          <a:bodyPr wrap="square" lIns="0" tIns="0" rIns="0" bIns="0" rtlCol="0" anchor="t"/>
+          <a:lstStyle/>
+          <a:p>
+            <a:pPr marL="0" indent="0" algn="ctr">
+              <a:buNone/>
+            </a:pPr>
+            <a:r>
+              <a:rPr lang="en-US" sz="1400" dirty="0">
+                <a:solidFill>
+                  <a:schemeClr val="bg1"/>
+                </a:solidFill>
+              </a:rPr>
+              <a:t>vaatlusperiood</a:t>
+            </a:r>
+            <a:endParaRPr lang="en-US" sz="1400" dirty="0"/>
+          </a:p>
+        </p:txBody>
+      </p:sp>
+      <p:sp>
+        <p:nvSpPr>
+          <p:cNvPr id="24" name="Statistika andmeallikat"/>
+          <p:cNvSpPr/>
+          <p:nvPr/>
+        </p:nvSpPr>
+        <p:spPr>
+          <a:xfrm>
+            <a:off x="5669280" y="2880360"/>
+            <a:ext cx="1463040" cy="1508760"/>
+          </a:xfrm>
+          <a:prstGeom prst="roundRect">
+            <a:avLst>
+              <a:gd name="adj" fmla="val 6250"/>
+            </a:avLst>
+          </a:prstGeom>
+          <a:solidFill>
+            <a:schemeClr val="accent1"/>
+          </a:solidFill>
+          <a:ln/>
+        </p:spPr>
+      </p:sp>
+      <p:sp>
+        <p:nvSpPr>
+          <p:cNvPr id="25" name="Text 22"/>
+          <p:cNvSpPr txBox="1"/>
+          <p:nvPr/>
+        </p:nvSpPr>
+        <p:spPr>
+          <a:xfrm>
+            <a:off x="5669280" y="3154680"/>
+            <a:ext cx="1463040" cy="548640"/>
+          </a:xfrm>
+          <a:prstGeom prst="rect">
+            <a:avLst/>
+          </a:prstGeom>
+          <a:noFill/>
+          <a:ln/>
+        </p:spPr>
+        <p:txBody>
+          <a:bodyPr wrap="square" lIns="0" tIns="0" rIns="0" bIns="0" rtlCol="0" anchor="ctr"/>
+          <a:lstStyle/>
+          <a:p>
+            <a:pPr marL="0" indent="0" algn="ctr">
+              <a:buNone/>
+            </a:pPr>
+            <a:r>
+              <a:rPr lang="en-US" sz="3400" b="1" dirty="0">
+                <a:solidFill>
+                  <a:schemeClr val="accent2"/>
+                </a:solidFill>
+                <a:latin typeface="Cambria" pitchFamily="34" charset="0"/>
+                <a:ea typeface="Cambria" pitchFamily="34" charset="-122"/>
+                <a:cs typeface="Cambria" pitchFamily="34" charset="-120"/>
+              </a:rPr>
+              <a:t>3</a:t>
+            </a:r>
+            <a:endParaRPr lang="en-US" sz="3400" dirty="0"/>
+          </a:p>
+        </p:txBody>
+      </p:sp>
+      <p:sp>
+        <p:nvSpPr>
+          <p:cNvPr id="26" name="Text 23"/>
+          <p:cNvSpPr txBox="1"/>
+          <p:nvPr/>
+        </p:nvSpPr>
+        <p:spPr>
+          <a:xfrm>
+            <a:off x="5669280" y="3749040"/>
+            <a:ext cx="1463040" cy="457200"/>
+          </a:xfrm>
+          <a:prstGeom prst="rect">
+            <a:avLst/>
+          </a:prstGeom>
+          <a:noFill/>
+          <a:ln/>
+        </p:spPr>
+        <p:txBody>
+          <a:bodyPr wrap="square" lIns="0" tIns="0" rIns="0" bIns="0" rtlCol="0" anchor="t"/>
+          <a:lstStyle/>
+          <a:p>
+            <a:pPr marL="0" indent="0" algn="ctr">
+              <a:buNone/>
+            </a:pPr>
+            <a:r>
+              <a:rPr lang="en-US" sz="1400" dirty="0">
+                <a:solidFill>
+                  <a:schemeClr val="bg1"/>
+                </a:solidFill>
+              </a:rPr>
+              <a:t>andmeallikat</a:t>
+            </a:r>
+            <a:endParaRPr lang="en-US" sz="1400" dirty="0"/>
+          </a:p>
+        </p:txBody>
+      </p:sp>
+      <p:sp>
+        <p:nvSpPr>
+          <p:cNvPr id="27" name="Statistika kasutajarakendust"/>
+          <p:cNvSpPr/>
+          <p:nvPr/>
+        </p:nvSpPr>
+        <p:spPr>
+          <a:xfrm>
+            <a:off x="7223760" y="2880360"/>
+            <a:ext cx="1463040" cy="1508760"/>
+          </a:xfrm>
+          <a:prstGeom prst="roundRect">
+            <a:avLst>
+              <a:gd name="adj" fmla="val 6250"/>
+            </a:avLst>
+          </a:prstGeom>
+          <a:solidFill>
+            <a:schemeClr val="accent1"/>
+          </a:solidFill>
+          <a:ln/>
+        </p:spPr>
+      </p:sp>
+      <p:sp>
+        <p:nvSpPr>
+          <p:cNvPr id="28" name="Text 25"/>
+          <p:cNvSpPr txBox="1"/>
+          <p:nvPr/>
+        </p:nvSpPr>
+        <p:spPr>
+          <a:xfrm>
+            <a:off x="7223760" y="3154680"/>
+            <a:ext cx="1463040" cy="548640"/>
+          </a:xfrm>
+          <a:prstGeom prst="rect">
+            <a:avLst/>
+          </a:prstGeom>
+          <a:noFill/>
+          <a:ln/>
+        </p:spPr>
+        <p:txBody>
+          <a:bodyPr wrap="square" lIns="0" tIns="0" rIns="0" bIns="0" rtlCol="0" anchor="ctr"/>
+          <a:lstStyle/>
+          <a:p>
+            <a:pPr marL="0" indent="0" algn="ctr">
+              <a:buNone/>
+            </a:pPr>
+            <a:r>
+              <a:rPr lang="en-US" sz="3400" b="1" dirty="0">
+                <a:solidFill>
+                  <a:schemeClr val="accent2"/>
+                </a:solidFill>
+                <a:latin typeface="Cambria" pitchFamily="34" charset="0"/>
+                <a:ea typeface="Cambria" pitchFamily="34" charset="-122"/>
+                <a:cs typeface="Cambria" pitchFamily="34" charset="-120"/>
+              </a:rPr>
+              <a:t>3</a:t>
+            </a:r>
+            <a:endParaRPr lang="en-US" sz="3400" dirty="0"/>
+          </a:p>
+        </p:txBody>
+      </p:sp>
+      <p:sp>
+        <p:nvSpPr>
+          <p:cNvPr id="29" name="Text 26"/>
+          <p:cNvSpPr txBox="1"/>
+          <p:nvPr/>
+        </p:nvSpPr>
+        <p:spPr>
+          <a:xfrm>
+            <a:off x="7223760" y="3749040"/>
+            <a:ext cx="1463040" cy="457200"/>
+          </a:xfrm>
+          <a:prstGeom prst="rect">
+            <a:avLst/>
+          </a:prstGeom>
+          <a:noFill/>
+          <a:ln/>
+        </p:spPr>
+        <p:txBody>
+          <a:bodyPr wrap="square" lIns="0" tIns="0" rIns="0" bIns="0" rtlCol="0" anchor="t"/>
+          <a:lstStyle/>
+          <a:p>
+            <a:pPr marL="0" indent="0" algn="ctr">
+              <a:buNone/>
+            </a:pPr>
+            <a:r>
+              <a:rPr lang="en-US" sz="1400" dirty="0">
+                <a:solidFill>
+                  <a:schemeClr val="bg1"/>
+                </a:solidFill>
+              </a:rPr>
+              <a:t>kasutajarakendust</a:t>
+            </a:r>
+            <a:endParaRPr lang="en-US" sz="1400" dirty="0"/>
           </a:p>
         </p:txBody>
       </p:sp>
@@ -2642,6 +7376,576 @@
 </file>
 
 <file path=ppt/slides/slide3.xml><?xml version="1.0" encoding="utf-8"?>
+<p:sld xmlns:a="http://schemas.openxmlformats.org/drawingml/2006/main" xmlns:r="http://schemas.openxmlformats.org/officeDocument/2006/relationships" xmlns:p="http://schemas.openxmlformats.org/presentationml/2006/main">
+  <p:cSld>
+    <p:spTree>
+      <p:nvGrpSpPr>
+        <p:cNvPr id="1" name=""/>
+        <p:cNvGrpSpPr/>
+        <p:nvPr/>
+      </p:nvGrpSpPr>
+      <p:grpSpPr>
+        <a:xfrm>
+          <a:off x="0" y="0"/>
+          <a:ext cx="0" cy="0"/>
+          <a:chOff x="0" y="0"/>
+          <a:chExt cx="0" cy="0"/>
+        </a:xfrm>
+      </p:grpSpPr>
+      <p:sp>
+        <p:nvSpPr>
+          <p:cNvPr id="2" name="Title 1">
+            <a:extLst>
+              <a:ext uri="{FF2B5EF4-FFF2-40B4-BE49-F238E27FC236}">
+                <a16:creationId xmlns:a16="http://schemas.microsoft.com/office/drawing/2014/main" id="{8DBDFD50-047E-BC20-8C0A-749C14233B9E}"/>
+              </a:ext>
+            </a:extLst>
+          </p:cNvPr>
+          <p:cNvSpPr>
+            <a:spLocks noGrp="1"/>
+          </p:cNvSpPr>
+          <p:nvPr>
+            <p:ph type="title" idx="100"/>
+          </p:nvPr>
+        </p:nvSpPr>
+        <p:spPr/>
+        <p:txBody>
+          <a:bodyPr/>
+          <a:lstStyle/>
+          <a:p>
+            <a:r>
+              <a:rPr lang="et-EE" dirty="0"/>
+              <a:t>Projekti tiim</a:t>
+            </a:r>
+          </a:p>
+        </p:txBody>
+      </p:sp>
+      <p:pic>
+        <p:nvPicPr>
+          <p:cNvPr id="1026" name="Picture 2" descr="Profile image">
+            <a:extLst>
+              <a:ext uri="{FF2B5EF4-FFF2-40B4-BE49-F238E27FC236}">
+                <a16:creationId xmlns:a16="http://schemas.microsoft.com/office/drawing/2014/main" id="{3B20104D-234E-5D4E-AB24-F8C14B91E3A6}"/>
+              </a:ext>
+            </a:extLst>
+          </p:cNvPr>
+          <p:cNvPicPr>
+            <a:picLocks noChangeAspect="1" noChangeArrowheads="1"/>
+          </p:cNvPicPr>
+          <p:nvPr/>
+        </p:nvPicPr>
+        <p:blipFill>
+          <a:blip r:embed="rId2">
+            <a:extLst>
+              <a:ext uri="{28A0092B-C50C-407E-A947-70E740481C1C}">
+                <a14:useLocalDpi xmlns:a14="http://schemas.microsoft.com/office/drawing/2010/main" val="0"/>
+              </a:ext>
+            </a:extLst>
+          </a:blip>
+          <a:srcRect/>
+          <a:stretch>
+            <a:fillRect/>
+          </a:stretch>
+        </p:blipFill>
+        <p:spPr bwMode="auto">
+          <a:xfrm>
+            <a:off x="457200" y="1005840"/>
+            <a:ext cx="1801041" cy="1801041"/>
+          </a:xfrm>
+          <a:prstGeom prst="rect">
+            <a:avLst/>
+          </a:prstGeom>
+          <a:noFill/>
+          <a:extLst>
+            <a:ext uri="{909E8E84-426E-40DD-AFC4-6F175D3DCCD1}">
+              <a14:hiddenFill xmlns:a14="http://schemas.microsoft.com/office/drawing/2010/main">
+                <a:solidFill>
+                  <a:srgbClr val="FFFFFF"/>
+                </a:solidFill>
+              </a14:hiddenFill>
+            </a:ext>
+          </a:extLst>
+        </p:spPr>
+      </p:pic>
+      <p:sp>
+        <p:nvSpPr>
+          <p:cNvPr id="4" name="TextBox 3">
+            <a:extLst>
+              <a:ext uri="{FF2B5EF4-FFF2-40B4-BE49-F238E27FC236}">
+                <a16:creationId xmlns:a16="http://schemas.microsoft.com/office/drawing/2014/main" id="{720569C2-F1FE-2797-9332-120E09168D2C}"/>
+              </a:ext>
+            </a:extLst>
+          </p:cNvPr>
+          <p:cNvSpPr txBox="1"/>
+          <p:nvPr/>
+        </p:nvSpPr>
+        <p:spPr>
+          <a:xfrm>
+            <a:off x="457201" y="2921027"/>
+            <a:ext cx="1801040" cy="1061829"/>
+          </a:xfrm>
+          <a:prstGeom prst="rect">
+            <a:avLst/>
+          </a:prstGeom>
+          <a:noFill/>
+        </p:spPr>
+        <p:txBody>
+          <a:bodyPr wrap="square">
+            <a:spAutoFit/>
+          </a:bodyPr>
+          <a:lstStyle/>
+          <a:p>
+            <a:pPr algn="l" fontAlgn="base"/>
+            <a:r>
+              <a:rPr lang="et-EE" b="1" i="0" dirty="0">
+                <a:effectLst/>
+                <a:latin typeface="system-ui"/>
+              </a:rPr>
+              <a:t>Kaidi Soiela</a:t>
+            </a:r>
+          </a:p>
+          <a:p>
+            <a:pPr algn="l" fontAlgn="base"/>
+            <a:r>
+              <a:rPr lang="en-US" sz="900" b="0" i="0" dirty="0">
+                <a:effectLst/>
+                <a:latin typeface="system-ui"/>
+              </a:rPr>
+              <a:t>Data Analyst | Power BI &amp; Alteryx Developer | SQL &amp; Python | Ex-PwC</a:t>
+            </a:r>
+            <a:endParaRPr lang="et-EE" sz="900" b="0" i="0" dirty="0">
+              <a:effectLst/>
+              <a:latin typeface="system-ui"/>
+            </a:endParaRPr>
+          </a:p>
+          <a:p>
+            <a:pPr algn="l" fontAlgn="base"/>
+            <a:endParaRPr lang="et-EE" sz="900" dirty="0">
+              <a:latin typeface="system-ui"/>
+            </a:endParaRPr>
+          </a:p>
+          <a:p>
+            <a:pPr algn="l" fontAlgn="base"/>
+            <a:r>
+              <a:rPr lang="et-EE" sz="900" dirty="0">
+                <a:hlinkClick r:id="rId3"/>
+              </a:rPr>
+              <a:t>Kaidi Soiela | LinkedIn</a:t>
+            </a:r>
+            <a:endParaRPr lang="et-EE" sz="900" b="1" i="0" dirty="0">
+              <a:effectLst/>
+              <a:latin typeface="system-ui"/>
+            </a:endParaRPr>
+          </a:p>
+        </p:txBody>
+      </p:sp>
+      <p:sp>
+        <p:nvSpPr>
+          <p:cNvPr id="7" name="TextBox 6">
+            <a:extLst>
+              <a:ext uri="{FF2B5EF4-FFF2-40B4-BE49-F238E27FC236}">
+                <a16:creationId xmlns:a16="http://schemas.microsoft.com/office/drawing/2014/main" id="{7D277688-E8D8-3EE8-5655-1D1D2271EE41}"/>
+              </a:ext>
+            </a:extLst>
+          </p:cNvPr>
+          <p:cNvSpPr txBox="1"/>
+          <p:nvPr/>
+        </p:nvSpPr>
+        <p:spPr>
+          <a:xfrm>
+            <a:off x="2487386" y="2942099"/>
+            <a:ext cx="1801040" cy="1061829"/>
+          </a:xfrm>
+          <a:prstGeom prst="rect">
+            <a:avLst/>
+          </a:prstGeom>
+          <a:noFill/>
+        </p:spPr>
+        <p:txBody>
+          <a:bodyPr wrap="square">
+            <a:spAutoFit/>
+          </a:bodyPr>
+          <a:lstStyle/>
+          <a:p>
+            <a:pPr algn="l" fontAlgn="base"/>
+            <a:r>
+              <a:rPr lang="et-EE" b="1" i="0" dirty="0">
+                <a:effectLst/>
+                <a:latin typeface="system-ui"/>
+              </a:rPr>
+              <a:t>Siret Laaneoks</a:t>
+            </a:r>
+          </a:p>
+          <a:p>
+            <a:pPr algn="l" fontAlgn="base"/>
+            <a:r>
+              <a:rPr lang="en-US" sz="900" b="0" i="0" dirty="0">
+                <a:effectLst/>
+                <a:latin typeface="system-ui"/>
+              </a:rPr>
+              <a:t>Banking and Product Management Professional</a:t>
+            </a:r>
+            <a:endParaRPr lang="et-EE" sz="900" b="0" i="0" dirty="0">
+              <a:effectLst/>
+              <a:latin typeface="system-ui"/>
+            </a:endParaRPr>
+          </a:p>
+          <a:p>
+            <a:pPr algn="l" fontAlgn="base"/>
+            <a:endParaRPr lang="et-EE" sz="900" dirty="0">
+              <a:latin typeface="system-ui"/>
+            </a:endParaRPr>
+          </a:p>
+          <a:p>
+            <a:pPr algn="l" fontAlgn="base"/>
+            <a:endParaRPr lang="et-EE" sz="900" dirty="0">
+              <a:latin typeface="system-ui"/>
+            </a:endParaRPr>
+          </a:p>
+          <a:p>
+            <a:pPr algn="l" fontAlgn="base"/>
+            <a:r>
+              <a:rPr lang="et-EE" sz="900" dirty="0">
+                <a:hlinkClick r:id="rId4"/>
+              </a:rPr>
+              <a:t>Siret Laaneoks | LinkedIn</a:t>
+            </a:r>
+            <a:endParaRPr lang="et-EE" sz="900" b="1" i="0" dirty="0">
+              <a:effectLst/>
+              <a:latin typeface="system-ui"/>
+            </a:endParaRPr>
+          </a:p>
+        </p:txBody>
+      </p:sp>
+      <p:sp>
+        <p:nvSpPr>
+          <p:cNvPr id="8" name="TextBox 7">
+            <a:extLst>
+              <a:ext uri="{FF2B5EF4-FFF2-40B4-BE49-F238E27FC236}">
+                <a16:creationId xmlns:a16="http://schemas.microsoft.com/office/drawing/2014/main" id="{796C4D57-D5CA-294F-C2BA-7911F4551A72}"/>
+              </a:ext>
+            </a:extLst>
+          </p:cNvPr>
+          <p:cNvSpPr txBox="1"/>
+          <p:nvPr/>
+        </p:nvSpPr>
+        <p:spPr>
+          <a:xfrm>
+            <a:off x="4229100" y="2963172"/>
+            <a:ext cx="1801040" cy="1061829"/>
+          </a:xfrm>
+          <a:prstGeom prst="rect">
+            <a:avLst/>
+          </a:prstGeom>
+          <a:noFill/>
+        </p:spPr>
+        <p:txBody>
+          <a:bodyPr wrap="square">
+            <a:spAutoFit/>
+          </a:bodyPr>
+          <a:lstStyle/>
+          <a:p>
+            <a:pPr algn="l" fontAlgn="base"/>
+            <a:r>
+              <a:rPr lang="et-EE" b="1" i="0" dirty="0">
+                <a:effectLst/>
+                <a:latin typeface="system-ui"/>
+              </a:rPr>
+              <a:t>Kristel Kuusik</a:t>
+            </a:r>
+          </a:p>
+          <a:p>
+            <a:pPr algn="l" fontAlgn="base"/>
+            <a:r>
+              <a:rPr lang="en-US" sz="900" b="0" i="0" dirty="0">
+                <a:effectLst/>
+                <a:latin typeface="system-ui"/>
+              </a:rPr>
+              <a:t>Aspiring Data Analyst | SQL, Power BI, Excel, SAP | Turning 5+ Years of Operations Data into Insights</a:t>
+            </a:r>
+            <a:endParaRPr lang="et-EE" sz="900" dirty="0">
+              <a:latin typeface="system-ui"/>
+            </a:endParaRPr>
+          </a:p>
+          <a:p>
+            <a:pPr algn="l" fontAlgn="base"/>
+            <a:r>
+              <a:rPr lang="et-EE" sz="900" dirty="0">
+                <a:hlinkClick r:id="rId5"/>
+              </a:rPr>
+              <a:t>Kristel Kuusik | LinkedIn</a:t>
+            </a:r>
+            <a:endParaRPr lang="et-EE" sz="900" b="1" i="0" dirty="0">
+              <a:effectLst/>
+              <a:latin typeface="system-ui"/>
+            </a:endParaRPr>
+          </a:p>
+        </p:txBody>
+      </p:sp>
+      <p:sp>
+        <p:nvSpPr>
+          <p:cNvPr id="9" name="TextBox 8">
+            <a:extLst>
+              <a:ext uri="{FF2B5EF4-FFF2-40B4-BE49-F238E27FC236}">
+                <a16:creationId xmlns:a16="http://schemas.microsoft.com/office/drawing/2014/main" id="{7057DACF-EA92-7E06-22F2-70A93C2FA98B}"/>
+              </a:ext>
+            </a:extLst>
+          </p:cNvPr>
+          <p:cNvSpPr txBox="1"/>
+          <p:nvPr/>
+        </p:nvSpPr>
+        <p:spPr>
+          <a:xfrm>
+            <a:off x="6113419" y="2942099"/>
+            <a:ext cx="1801040" cy="1061829"/>
+          </a:xfrm>
+          <a:prstGeom prst="rect">
+            <a:avLst/>
+          </a:prstGeom>
+          <a:noFill/>
+        </p:spPr>
+        <p:txBody>
+          <a:bodyPr wrap="square">
+            <a:spAutoFit/>
+          </a:bodyPr>
+          <a:lstStyle/>
+          <a:p>
+            <a:pPr algn="l" fontAlgn="base"/>
+            <a:r>
+              <a:rPr lang="et-EE" b="1" i="0" dirty="0">
+                <a:effectLst/>
+                <a:latin typeface="system-ui"/>
+              </a:rPr>
+              <a:t>Merje Nõmmik</a:t>
+            </a:r>
+          </a:p>
+          <a:p>
+            <a:pPr algn="l" fontAlgn="base"/>
+            <a:r>
+              <a:rPr lang="et-EE" sz="900" b="0" i="0" dirty="0" err="1">
+                <a:effectLst/>
+                <a:latin typeface="system-ui"/>
+              </a:rPr>
+              <a:t>Data</a:t>
+            </a:r>
+            <a:r>
+              <a:rPr lang="et-EE" sz="900" b="0" i="0" dirty="0">
+                <a:effectLst/>
+                <a:latin typeface="system-ui"/>
+              </a:rPr>
+              <a:t> &amp; Business </a:t>
+            </a:r>
+            <a:r>
+              <a:rPr lang="et-EE" sz="900" b="0" i="0" dirty="0" err="1">
+                <a:effectLst/>
+                <a:latin typeface="system-ui"/>
+              </a:rPr>
+              <a:t>Intelligence</a:t>
+            </a:r>
+            <a:r>
+              <a:rPr lang="et-EE" sz="900" b="0" i="0" dirty="0">
+                <a:effectLst/>
+                <a:latin typeface="system-ui"/>
+              </a:rPr>
+              <a:t> </a:t>
+            </a:r>
+            <a:r>
+              <a:rPr lang="et-EE" sz="900" b="0" i="0" dirty="0" err="1">
+                <a:effectLst/>
+                <a:latin typeface="system-ui"/>
+              </a:rPr>
+              <a:t>Analyst</a:t>
+            </a:r>
+            <a:r>
+              <a:rPr lang="et-EE" sz="900" b="0" i="0" dirty="0">
+                <a:effectLst/>
+                <a:latin typeface="system-ui"/>
+              </a:rPr>
+              <a:t> | Power BI · SQL · </a:t>
+            </a:r>
+            <a:r>
+              <a:rPr lang="et-EE" sz="900" b="0" i="0" dirty="0" err="1">
+                <a:effectLst/>
+                <a:latin typeface="system-ui"/>
+              </a:rPr>
+              <a:t>Python</a:t>
+            </a:r>
+            <a:r>
+              <a:rPr lang="et-EE" sz="900" b="0" i="0" dirty="0">
+                <a:effectLst/>
+                <a:latin typeface="system-ui"/>
+              </a:rPr>
+              <a:t> | </a:t>
+            </a:r>
+            <a:r>
+              <a:rPr lang="et-EE" sz="900" b="0" i="0" dirty="0" err="1">
+                <a:effectLst/>
+                <a:latin typeface="system-ui"/>
+              </a:rPr>
+              <a:t>Customer</a:t>
+            </a:r>
+            <a:r>
+              <a:rPr lang="et-EE" sz="900" b="0" i="0" dirty="0">
+                <a:effectLst/>
+                <a:latin typeface="system-ui"/>
+              </a:rPr>
+              <a:t> </a:t>
+            </a:r>
+            <a:r>
+              <a:rPr lang="et-EE" sz="900" b="0" i="0" dirty="0" err="1">
+                <a:effectLst/>
+                <a:latin typeface="system-ui"/>
+              </a:rPr>
+              <a:t>Experience</a:t>
+            </a:r>
+            <a:r>
+              <a:rPr lang="et-EE" sz="900" b="0" i="0" dirty="0">
+                <a:effectLst/>
+                <a:latin typeface="system-ui"/>
+              </a:rPr>
+              <a:t> &amp; </a:t>
+            </a:r>
+            <a:r>
+              <a:rPr lang="et-EE" sz="900" b="0" i="0" dirty="0" err="1">
+                <a:effectLst/>
+                <a:latin typeface="system-ui"/>
+              </a:rPr>
+              <a:t>Operations</a:t>
+            </a:r>
+            <a:r>
+              <a:rPr lang="et-EE" sz="900" b="0" i="0" dirty="0">
+                <a:effectLst/>
+                <a:latin typeface="system-ui"/>
+              </a:rPr>
+              <a:t> |</a:t>
+            </a:r>
+            <a:endParaRPr lang="et-EE" sz="900" dirty="0">
+              <a:latin typeface="system-ui"/>
+            </a:endParaRPr>
+          </a:p>
+          <a:p>
+            <a:pPr algn="l" fontAlgn="base"/>
+            <a:r>
+              <a:rPr lang="et-EE" sz="900" dirty="0">
+                <a:hlinkClick r:id="rId6"/>
+              </a:rPr>
+              <a:t>Merje Nõmmik | LinkedIn</a:t>
+            </a:r>
+            <a:endParaRPr lang="et-EE" sz="900" b="1" i="0" dirty="0">
+              <a:effectLst/>
+              <a:latin typeface="system-ui"/>
+            </a:endParaRPr>
+          </a:p>
+        </p:txBody>
+      </p:sp>
+      <p:pic>
+        <p:nvPicPr>
+          <p:cNvPr id="1032" name="Picture 8" descr="Profile image">
+            <a:extLst>
+              <a:ext uri="{FF2B5EF4-FFF2-40B4-BE49-F238E27FC236}">
+                <a16:creationId xmlns:a16="http://schemas.microsoft.com/office/drawing/2014/main" id="{706DFF08-EE88-A495-75AA-06942E520DA7}"/>
+              </a:ext>
+            </a:extLst>
+          </p:cNvPr>
+          <p:cNvPicPr>
+            <a:picLocks noChangeAspect="1" noChangeArrowheads="1"/>
+          </p:cNvPicPr>
+          <p:nvPr/>
+        </p:nvPicPr>
+        <p:blipFill>
+          <a:blip r:embed="rId7">
+            <a:extLst>
+              <a:ext uri="{28A0092B-C50C-407E-A947-70E740481C1C}">
+                <a14:useLocalDpi xmlns:a14="http://schemas.microsoft.com/office/drawing/2010/main" val="0"/>
+              </a:ext>
+            </a:extLst>
+          </a:blip>
+          <a:srcRect/>
+          <a:stretch>
+            <a:fillRect/>
+          </a:stretch>
+        </p:blipFill>
+        <p:spPr bwMode="auto">
+          <a:xfrm>
+            <a:off x="2428059" y="1005839"/>
+            <a:ext cx="1801041" cy="1801041"/>
+          </a:xfrm>
+          <a:prstGeom prst="rect">
+            <a:avLst/>
+          </a:prstGeom>
+          <a:noFill/>
+          <a:extLst>
+            <a:ext uri="{909E8E84-426E-40DD-AFC4-6F175D3DCCD1}">
+              <a14:hiddenFill xmlns:a14="http://schemas.microsoft.com/office/drawing/2010/main">
+                <a:solidFill>
+                  <a:srgbClr val="FFFFFF"/>
+                </a:solidFill>
+              </a14:hiddenFill>
+            </a:ext>
+          </a:extLst>
+        </p:spPr>
+      </p:pic>
+      <p:pic>
+        <p:nvPicPr>
+          <p:cNvPr id="1034" name="Picture 10" descr="Profile image">
+            <a:extLst>
+              <a:ext uri="{FF2B5EF4-FFF2-40B4-BE49-F238E27FC236}">
+                <a16:creationId xmlns:a16="http://schemas.microsoft.com/office/drawing/2014/main" id="{32CE22B2-0C84-A921-7B9F-A2E4D489C00A}"/>
+              </a:ext>
+            </a:extLst>
+          </p:cNvPr>
+          <p:cNvPicPr>
+            <a:picLocks noChangeAspect="1" noChangeArrowheads="1"/>
+          </p:cNvPicPr>
+          <p:nvPr/>
+        </p:nvPicPr>
+        <p:blipFill>
+          <a:blip r:embed="rId8">
+            <a:extLst>
+              <a:ext uri="{28A0092B-C50C-407E-A947-70E740481C1C}">
+                <a14:useLocalDpi xmlns:a14="http://schemas.microsoft.com/office/drawing/2010/main" val="0"/>
+              </a:ext>
+            </a:extLst>
+          </a:blip>
+          <a:srcRect/>
+          <a:stretch>
+            <a:fillRect/>
+          </a:stretch>
+        </p:blipFill>
+        <p:spPr bwMode="auto">
+          <a:xfrm>
+            <a:off x="4288426" y="1005159"/>
+            <a:ext cx="1801041" cy="1801041"/>
+          </a:xfrm>
+          <a:prstGeom prst="rect">
+            <a:avLst/>
+          </a:prstGeom>
+          <a:noFill/>
+          <a:extLst>
+            <a:ext uri="{909E8E84-426E-40DD-AFC4-6F175D3DCCD1}">
+              <a14:hiddenFill xmlns:a14="http://schemas.microsoft.com/office/drawing/2010/main">
+                <a:solidFill>
+                  <a:srgbClr val="FFFFFF"/>
+                </a:solidFill>
+              </a14:hiddenFill>
+            </a:ext>
+          </a:extLst>
+        </p:spPr>
+      </p:pic>
+    </p:spTree>
+    <p:extLst>
+      <p:ext uri="{BB962C8B-B14F-4D97-AF65-F5344CB8AC3E}">
+        <p14:creationId xmlns:p14="http://schemas.microsoft.com/office/powerpoint/2010/main" val="3201299870"/>
+      </p:ext>
+    </p:extLst>
+  </p:cSld>
+  <p:clrMapOvr>
+    <a:masterClrMapping/>
+  </p:clrMapOvr>
+</p:sld>
+</file>
+
+<file path=ppt/slides/slide4.xml><?xml version="1.0" encoding="utf-8"?>
 <p:sld xmlns:a="http://schemas.openxmlformats.org/drawingml/2006/main" xmlns:r="http://schemas.openxmlformats.org/officeDocument/2006/relationships" xmlns:p="http://schemas.openxmlformats.org/presentationml/2006/main">
   <p:cSld name="Slide 3">
     <p:spTree>
@@ -2665,14 +7969,10 @@
             <a:spLocks noGrp="1"/>
           </p:cNvSpPr>
           <p:nvPr>
-            <p:ph type="title" idx="100" hasCustomPrompt="1"/>
-          </p:nvPr>
-        </p:nvSpPr>
-        <p:spPr>
-          <a:xfrm>
-            <a:off x="457200" y="274320"/>
-            <a:ext cx="6949440" cy="731520"/>
-          </a:xfrm>
+            <p:ph type="title" idx="100"/>
+          </p:nvPr>
+        </p:nvSpPr>
+        <p:spPr>
           <a:prstGeom prst="rect">
             <a:avLst/>
           </a:prstGeom>
@@ -2680,7 +7980,9 @@
           <a:ln/>
         </p:spPr>
         <p:txBody>
-          <a:bodyPr wrap="square" lIns="0" tIns="0" rIns="0" bIns="0" rtlCol="0" anchor="ctr"/>
+          <a:bodyPr wrap="square" lIns="0" tIns="0" rIns="0" bIns="0" rtlCol="0" anchor="ctr">
+            <a:normAutofit/>
+          </a:bodyPr>
           <a:lstStyle/>
           <a:p>
             <a:pPr marL="0" indent="0" algn="l">
@@ -2695,6 +7997,51 @@
               <a:t>Andmevoog allikatest raportini</a:t>
             </a:r>
             <a:endParaRPr lang="en-US" sz="3000" dirty="0"/>
+          </a:p>
+        </p:txBody>
+      </p:sp>
+      <p:sp>
+        <p:nvSpPr>
+          <p:cNvPr id="25" name="Slide Number Placeholder 0"/>
+          <p:cNvSpPr>
+            <a:spLocks noGrp="1"/>
+          </p:cNvSpPr>
+          <p:nvPr>
+            <p:ph type="sldNum" sz="quarter" idx="4294967295"/>
+          </p:nvPr>
+        </p:nvSpPr>
+        <p:spPr>
+          <a:xfrm>
+            <a:off x="8321040" y="4754880"/>
+            <a:ext cx="457200" cy="274320"/>
+          </a:xfrm>
+          <a:prstGeom prst="rect">
+            <a:avLst/>
+          </a:prstGeom>
+          <a:extLst>
+            <a:ext uri="{C572A759-6A51-4108-AA02-DFA0A04FC94B}">
+              <ma14:wrappingTextBoxFlag xmlns:ma14="http://schemas.microsoft.com/office/mac/drawingml/2011/main" xmlns="" val="0"/>
+            </a:ext>
+          </a:extLst>
+        </p:spPr>
+        <p:txBody>
+          <a:bodyPr/>
+          <a:lstStyle>
+            <a:lvl1pPr>
+              <a:defRPr sz="1000">
+                <a:solidFill>
+                  <a:schemeClr val="accent5"/>
+                </a:solidFill>
+              </a:defRPr>
+            </a:lvl1pPr>
+          </a:lstStyle>
+          <a:p>
+            <a:pPr algn="r"/>
+            <a:fld id="{F7021451-1387-4CA6-816F-3879F97B5CBC}" type="slidenum">
+              <a:rPr lang="en-US" b="0"/>
+              <a:t>4</a:t>
+            </a:fld>
+            <a:endParaRPr lang="en-US"/>
           </a:p>
         </p:txBody>
       </p:sp>
@@ -3182,51 +8529,6 @@
           </a:p>
         </p:txBody>
       </p:sp>
-      <p:sp>
-        <p:nvSpPr>
-          <p:cNvPr id="25" name="Slide Number Placeholder 0"/>
-          <p:cNvSpPr>
-            <a:spLocks noGrp="1"/>
-          </p:cNvSpPr>
-          <p:nvPr>
-            <p:ph type="sldNum" sz="quarter" idx="4294967295"/>
-          </p:nvPr>
-        </p:nvSpPr>
-        <p:spPr>
-          <a:xfrm>
-            <a:off x="8321040" y="4754880"/>
-            <a:ext cx="457200" cy="274320"/>
-          </a:xfrm>
-          <a:prstGeom prst="rect">
-            <a:avLst/>
-          </a:prstGeom>
-          <a:extLst>
-            <a:ext uri="{C572A759-6A51-4108-AA02-DFA0A04FC94B}">
-              <ma14:wrappingTextBoxFlag xmlns="" xmlns:ma14="http://schemas.microsoft.com/office/mac/drawingml/2011/main" val="0"/>
-            </a:ext>
-          </a:extLst>
-        </p:spPr>
-        <p:txBody>
-          <a:bodyPr/>
-          <a:lstStyle>
-            <a:lvl1pPr>
-              <a:defRPr sz="1000">
-                <a:solidFill>
-                  <a:schemeClr val="accent5"/>
-                </a:solidFill>
-              </a:defRPr>
-            </a:lvl1pPr>
-          </a:lstStyle>
-          <a:p>
-            <a:pPr algn="r"/>
-            <a:fld id="{F7021451-1387-4CA6-816F-3879F97B5CBC}" type="slidenum">
-              <a:rPr lang="en-US" b="0"/>
-              <a:t>3</a:t>
-            </a:fld>
-            <a:endParaRPr lang="en-US"/>
-          </a:p>
-        </p:txBody>
-      </p:sp>
     </p:spTree>
   </p:cSld>
   <p:clrMapOvr>
@@ -3235,7 +8537,7 @@
 </p:sld>
 </file>
 
-<file path=ppt/slides/slide4.xml><?xml version="1.0" encoding="utf-8"?>
+<file path=ppt/slides/slide5.xml><?xml version="1.0" encoding="utf-8"?>
 <p:sld xmlns:a="http://schemas.openxmlformats.org/drawingml/2006/main" xmlns:r="http://schemas.openxmlformats.org/officeDocument/2006/relationships" xmlns:p="http://schemas.openxmlformats.org/presentationml/2006/main">
   <p:cSld name="Slide 4">
     <p:spTree>
@@ -3259,14 +8561,10 @@
             <a:spLocks noGrp="1"/>
           </p:cNvSpPr>
           <p:nvPr>
-            <p:ph type="title" idx="100" hasCustomPrompt="1"/>
-          </p:nvPr>
-        </p:nvSpPr>
-        <p:spPr>
-          <a:xfrm>
-            <a:off x="457200" y="274320"/>
-            <a:ext cx="6949440" cy="731520"/>
-          </a:xfrm>
+            <p:ph type="title" idx="100"/>
+          </p:nvPr>
+        </p:nvSpPr>
+        <p:spPr>
           <a:prstGeom prst="rect">
             <a:avLst/>
           </a:prstGeom>
@@ -3289,6 +8587,51 @@
               <a:t>Andmekvaliteedi väljakutsed</a:t>
             </a:r>
             <a:endParaRPr lang="en-US" sz="3000" dirty="0"/>
+          </a:p>
+        </p:txBody>
+      </p:sp>
+      <p:sp>
+        <p:nvSpPr>
+          <p:cNvPr id="25" name="Slide Number Placeholder 0"/>
+          <p:cNvSpPr>
+            <a:spLocks noGrp="1"/>
+          </p:cNvSpPr>
+          <p:nvPr>
+            <p:ph type="sldNum" sz="quarter" idx="4294967295"/>
+          </p:nvPr>
+        </p:nvSpPr>
+        <p:spPr>
+          <a:xfrm>
+            <a:off x="8321040" y="4754880"/>
+            <a:ext cx="457200" cy="274320"/>
+          </a:xfrm>
+          <a:prstGeom prst="rect">
+            <a:avLst/>
+          </a:prstGeom>
+          <a:extLst>
+            <a:ext uri="{C572A759-6A51-4108-AA02-DFA0A04FC94B}">
+              <ma14:wrappingTextBoxFlag xmlns:ma14="http://schemas.microsoft.com/office/mac/drawingml/2011/main" xmlns="" val="0"/>
+            </a:ext>
+          </a:extLst>
+        </p:spPr>
+        <p:txBody>
+          <a:bodyPr/>
+          <a:lstStyle>
+            <a:lvl1pPr>
+              <a:defRPr sz="1000">
+                <a:solidFill>
+                  <a:schemeClr val="accent5"/>
+                </a:solidFill>
+              </a:defRPr>
+            </a:lvl1pPr>
+          </a:lstStyle>
+          <a:p>
+            <a:pPr algn="r"/>
+            <a:fld id="{F7021451-1387-4CA6-816F-3879F97B5CBC}" type="slidenum">
+              <a:rPr lang="en-US" b="0"/>
+              <a:t>5</a:t>
+            </a:fld>
+            <a:endParaRPr lang="en-US"/>
           </a:p>
         </p:txBody>
       </p:sp>
@@ -3736,459 +9079,6 @@
           </a:p>
         </p:txBody>
       </p:sp>
-      <p:sp>
-        <p:nvSpPr>
-          <p:cNvPr id="25" name="Slide Number Placeholder 0"/>
-          <p:cNvSpPr>
-            <a:spLocks noGrp="1"/>
-          </p:cNvSpPr>
-          <p:nvPr>
-            <p:ph type="sldNum" sz="quarter" idx="4294967295"/>
-          </p:nvPr>
-        </p:nvSpPr>
-        <p:spPr>
-          <a:xfrm>
-            <a:off x="8321040" y="4754880"/>
-            <a:ext cx="457200" cy="274320"/>
-          </a:xfrm>
-          <a:prstGeom prst="rect">
-            <a:avLst/>
-          </a:prstGeom>
-          <a:extLst>
-            <a:ext uri="{C572A759-6A51-4108-AA02-DFA0A04FC94B}">
-              <ma14:wrappingTextBoxFlag xmlns="" xmlns:ma14="http://schemas.microsoft.com/office/mac/drawingml/2011/main" val="0"/>
-            </a:ext>
-          </a:extLst>
-        </p:spPr>
-        <p:txBody>
-          <a:bodyPr/>
-          <a:lstStyle>
-            <a:lvl1pPr>
-              <a:defRPr sz="1000">
-                <a:solidFill>
-                  <a:schemeClr val="accent5"/>
-                </a:solidFill>
-              </a:defRPr>
-            </a:lvl1pPr>
-          </a:lstStyle>
-          <a:p>
-            <a:pPr algn="r"/>
-            <a:fld id="{F7021451-1387-4CA6-816F-3879F97B5CBC}" type="slidenum">
-              <a:rPr lang="en-US" b="0"/>
-              <a:t>4</a:t>
-            </a:fld>
-            <a:endParaRPr lang="en-US"/>
-          </a:p>
-        </p:txBody>
-      </p:sp>
-    </p:spTree>
-  </p:cSld>
-  <p:clrMapOvr>
-    <a:masterClrMapping/>
-  </p:clrMapOvr>
-</p:sld>
-</file>
-
-<file path=ppt/slides/slide5.xml><?xml version="1.0" encoding="utf-8"?>
-<p:sld xmlns:a="http://schemas.openxmlformats.org/drawingml/2006/main" xmlns:r="http://schemas.openxmlformats.org/officeDocument/2006/relationships" xmlns:p="http://schemas.openxmlformats.org/presentationml/2006/main">
-  <p:cSld name="Slide 5">
-    <p:spTree>
-      <p:nvGrpSpPr>
-        <p:cNvPr id="1" name=""/>
-        <p:cNvGrpSpPr/>
-        <p:nvPr/>
-      </p:nvGrpSpPr>
-      <p:grpSpPr>
-        <a:xfrm>
-          <a:off x="0" y="0"/>
-          <a:ext cx="0" cy="0"/>
-          <a:chOff x="0" y="0"/>
-          <a:chExt cx="0" cy="0"/>
-        </a:xfrm>
-      </p:grpSpPr>
-      <p:sp>
-        <p:nvSpPr>
-          <p:cNvPr id="2" name="Text 0"/>
-          <p:cNvSpPr>
-            <a:spLocks noGrp="1"/>
-          </p:cNvSpPr>
-          <p:nvPr>
-            <p:ph type="title" idx="100" hasCustomPrompt="1"/>
-          </p:nvPr>
-        </p:nvSpPr>
-        <p:spPr>
-          <a:xfrm>
-            <a:off x="457200" y="274320"/>
-            <a:ext cx="6949440" cy="731520"/>
-          </a:xfrm>
-          <a:prstGeom prst="rect">
-            <a:avLst/>
-          </a:prstGeom>
-          <a:noFill/>
-          <a:ln/>
-        </p:spPr>
-        <p:txBody>
-          <a:bodyPr wrap="square" lIns="0" tIns="0" rIns="0" bIns="0" rtlCol="0" anchor="ctr"/>
-          <a:lstStyle/>
-          <a:p>
-            <a:pPr marL="0" indent="0" algn="l">
-              <a:buNone/>
-            </a:pPr>
-            <a:r>
-              <a:rPr lang="en-US" sz="3000" b="1" dirty="0">
-                <a:solidFill>
-                  <a:schemeClr val="tx2"/>
-                </a:solidFill>
-              </a:rPr>
-              <a:t>Stsenaarium 1: kus on käärid?</a:t>
-            </a:r>
-            <a:endParaRPr lang="en-US" sz="3000" dirty="0"/>
-          </a:p>
-        </p:txBody>
-      </p:sp>
-      <p:sp>
-        <p:nvSpPr>
-          <p:cNvPr id="6" name="Shape 3"/>
-          <p:cNvSpPr/>
-          <p:nvPr/>
-        </p:nvSpPr>
-        <p:spPr>
-          <a:xfrm>
-            <a:off x="457200" y="1188720"/>
-            <a:ext cx="5577840" cy="2238832"/>
-          </a:xfrm>
-          <a:prstGeom prst="roundRect">
-            <a:avLst>
-              <a:gd name="adj" fmla="val 2042"/>
-            </a:avLst>
-          </a:prstGeom>
-          <a:solidFill>
-            <a:schemeClr val="bg2"/>
-          </a:solidFill>
-          <a:ln/>
-        </p:spPr>
-      </p:sp>
-      <p:pic>
-        <p:nvPicPr>
-          <p:cNvPr id="7" name="Ekraanipilt" descr="Stsenaarium 1: kus on käärid?"/>
-          <p:cNvPicPr>
-            <a:picLocks noChangeAspect="1"/>
-          </p:cNvPicPr>
-          <p:nvPr/>
-        </p:nvPicPr>
-        <p:blipFill>
-          <a:blip r:embed="rId3"/>
-          <a:stretch>
-            <a:fillRect/>
-          </a:stretch>
-        </p:blipFill>
-        <p:spPr>
-          <a:xfrm>
-            <a:off x="502920" y="1234440"/>
-            <a:ext cx="5486400" cy="2147392"/>
-          </a:xfrm>
-          <a:prstGeom prst="rect">
-            <a:avLst/>
-          </a:prstGeom>
-        </p:spPr>
-      </p:pic>
-      <p:sp>
-        <p:nvSpPr>
-          <p:cNvPr id="8" name="Text 4"/>
-          <p:cNvSpPr txBox="1"/>
-          <p:nvPr/>
-        </p:nvSpPr>
-        <p:spPr>
-          <a:xfrm>
-            <a:off x="457200" y="3473272"/>
-            <a:ext cx="5577840" cy="274320"/>
-          </a:xfrm>
-          <a:prstGeom prst="rect">
-            <a:avLst/>
-          </a:prstGeom>
-          <a:noFill/>
-          <a:ln/>
-        </p:spPr>
-        <p:txBody>
-          <a:bodyPr wrap="square" lIns="0" tIns="0" rIns="0" bIns="0" rtlCol="0" anchor="ctr"/>
-          <a:lstStyle/>
-          <a:p>
-            <a:pPr marL="0" indent="0">
-              <a:buNone/>
-            </a:pPr>
-            <a:r>
-              <a:rPr lang="en-US" sz="1200" i="1" dirty="0">
-                <a:solidFill>
-                  <a:schemeClr val="accent5"/>
-                </a:solidFill>
-              </a:rPr>
-              <a:t>Ekraanipilt – näita live-demos või ekraanisalvestusena</a:t>
-            </a:r>
-            <a:endParaRPr lang="en-US" sz="1200" dirty="0"/>
-          </a:p>
-        </p:txBody>
-      </p:sp>
-      <p:sp>
-        <p:nvSpPr>
-          <p:cNvPr id="9" name="Shape 5"/>
-          <p:cNvSpPr/>
-          <p:nvPr/>
-        </p:nvSpPr>
-        <p:spPr>
-          <a:xfrm>
-            <a:off x="6309360" y="1188720"/>
-            <a:ext cx="2377440" cy="1005840"/>
-          </a:xfrm>
-          <a:prstGeom prst="roundRect">
-            <a:avLst>
-              <a:gd name="adj" fmla="val 9091"/>
-            </a:avLst>
-          </a:prstGeom>
-          <a:solidFill>
-            <a:schemeClr val="accent1"/>
-          </a:solidFill>
-          <a:ln/>
-        </p:spPr>
-      </p:sp>
-      <p:sp>
-        <p:nvSpPr>
-          <p:cNvPr id="10" name="Text 6"/>
-          <p:cNvSpPr txBox="1"/>
-          <p:nvPr/>
-        </p:nvSpPr>
-        <p:spPr>
-          <a:xfrm>
-            <a:off x="6446520" y="1234440"/>
-            <a:ext cx="2103120" cy="914400"/>
-          </a:xfrm>
-          <a:prstGeom prst="rect">
-            <a:avLst/>
-          </a:prstGeom>
-          <a:noFill/>
-          <a:ln/>
-        </p:spPr>
-        <p:txBody>
-          <a:bodyPr wrap="square" lIns="0" tIns="0" rIns="0" bIns="0" rtlCol="0" anchor="ctr"/>
-          <a:lstStyle/>
-          <a:p>
-            <a:pPr marL="0" indent="0">
-              <a:buNone/>
-            </a:pPr>
-            <a:r>
-              <a:rPr lang="en-US" sz="1400" b="1" dirty="0">
-                <a:solidFill>
-                  <a:schemeClr val="accent2"/>
-                </a:solidFill>
-              </a:rPr>
-              <a:t>Küsimus</a:t>
-            </a:r>
-            <a:endParaRPr lang="en-US" sz="1400" dirty="0"/>
-          </a:p>
-          <a:p>
-            <a:pPr marL="0" indent="0">
-              <a:buNone/>
-            </a:pPr>
-            <a:r>
-              <a:rPr lang="en-US" sz="1400" dirty="0">
-                <a:solidFill>
-                  <a:schemeClr val="bg1"/>
-                </a:solidFill>
-              </a:rPr>
-              <a:t>Millal ja kus lahknevad palk ja m² hind?</a:t>
-            </a:r>
-            <a:endParaRPr lang="en-US" sz="1400" dirty="0"/>
-          </a:p>
-        </p:txBody>
-      </p:sp>
-      <p:sp>
-        <p:nvSpPr>
-          <p:cNvPr id="11" name="Shape 7"/>
-          <p:cNvSpPr/>
-          <p:nvPr/>
-        </p:nvSpPr>
-        <p:spPr>
-          <a:xfrm>
-            <a:off x="6309360" y="2286000"/>
-            <a:ext cx="2377440" cy="1005840"/>
-          </a:xfrm>
-          <a:prstGeom prst="roundRect">
-            <a:avLst>
-              <a:gd name="adj" fmla="val 9091"/>
-            </a:avLst>
-          </a:prstGeom>
-          <a:solidFill>
-            <a:schemeClr val="accent3"/>
-          </a:solidFill>
-          <a:ln/>
-        </p:spPr>
-      </p:sp>
-      <p:sp>
-        <p:nvSpPr>
-          <p:cNvPr id="12" name="Text 8"/>
-          <p:cNvSpPr txBox="1"/>
-          <p:nvPr/>
-        </p:nvSpPr>
-        <p:spPr>
-          <a:xfrm>
-            <a:off x="6446520" y="2331720"/>
-            <a:ext cx="2103120" cy="914400"/>
-          </a:xfrm>
-          <a:prstGeom prst="rect">
-            <a:avLst/>
-          </a:prstGeom>
-          <a:noFill/>
-          <a:ln/>
-        </p:spPr>
-        <p:txBody>
-          <a:bodyPr wrap="square" lIns="0" tIns="0" rIns="0" bIns="0" rtlCol="0" anchor="ctr"/>
-          <a:lstStyle/>
-          <a:p>
-            <a:pPr marL="0" indent="0">
-              <a:buNone/>
-            </a:pPr>
-            <a:r>
-              <a:rPr lang="en-US" sz="1400" b="1" dirty="0">
-                <a:solidFill>
-                  <a:schemeClr val="accent2"/>
-                </a:solidFill>
-              </a:rPr>
-              <a:t>Tegevus</a:t>
-            </a:r>
-            <a:endParaRPr lang="en-US" sz="1400" dirty="0"/>
-          </a:p>
-          <a:p>
-            <a:pPr marL="0" indent="0">
-              <a:buNone/>
-            </a:pPr>
-            <a:r>
-              <a:rPr lang="en-US" sz="1400" dirty="0">
-                <a:solidFill>
-                  <a:schemeClr val="bg1"/>
-                </a:solidFill>
-              </a:rPr>
-              <a:t>Vali slicerist Eesti või maakond</a:t>
-            </a:r>
-            <a:endParaRPr lang="en-US" sz="1400" dirty="0"/>
-          </a:p>
-        </p:txBody>
-      </p:sp>
-      <p:sp>
-        <p:nvSpPr>
-          <p:cNvPr id="13" name="Shape 9"/>
-          <p:cNvSpPr/>
-          <p:nvPr/>
-        </p:nvSpPr>
-        <p:spPr>
-          <a:xfrm>
-            <a:off x="6309360" y="3383280"/>
-            <a:ext cx="2377440" cy="1005840"/>
-          </a:xfrm>
-          <a:prstGeom prst="roundRect">
-            <a:avLst>
-              <a:gd name="adj" fmla="val 9091"/>
-            </a:avLst>
-          </a:prstGeom>
-          <a:solidFill>
-            <a:schemeClr val="accent4"/>
-          </a:solidFill>
-          <a:ln/>
-        </p:spPr>
-      </p:sp>
-      <p:sp>
-        <p:nvSpPr>
-          <p:cNvPr id="14" name="Text 10"/>
-          <p:cNvSpPr txBox="1"/>
-          <p:nvPr/>
-        </p:nvSpPr>
-        <p:spPr>
-          <a:xfrm>
-            <a:off x="6446520" y="3429000"/>
-            <a:ext cx="2103120" cy="914400"/>
-          </a:xfrm>
-          <a:prstGeom prst="rect">
-            <a:avLst/>
-          </a:prstGeom>
-          <a:noFill/>
-          <a:ln/>
-        </p:spPr>
-        <p:txBody>
-          <a:bodyPr wrap="square" lIns="0" tIns="0" rIns="0" bIns="0" rtlCol="0" anchor="ctr"/>
-          <a:lstStyle/>
-          <a:p>
-            <a:pPr marL="0" indent="0">
-              <a:buNone/>
-            </a:pPr>
-            <a:r>
-              <a:rPr lang="en-US" sz="1400" b="1" dirty="0">
-                <a:solidFill>
-                  <a:schemeClr val="accent2"/>
-                </a:solidFill>
-              </a:rPr>
-              <a:t>Väärtus</a:t>
-            </a:r>
-            <a:endParaRPr lang="en-US" sz="1400" dirty="0"/>
-          </a:p>
-          <a:p>
-            <a:pPr marL="0" indent="0">
-              <a:buNone/>
-            </a:pPr>
-            <a:r>
-              <a:rPr lang="en-US" sz="1400" dirty="0">
-                <a:solidFill>
-                  <a:schemeClr val="bg1"/>
-                </a:solidFill>
-              </a:rPr>
-              <a:t>Näed, millal „käärid“ suurimaks lähevad</a:t>
-            </a:r>
-            <a:endParaRPr lang="en-US" sz="1400" dirty="0"/>
-          </a:p>
-        </p:txBody>
-      </p:sp>
-      <p:sp>
-        <p:nvSpPr>
-          <p:cNvPr id="25" name="Slide Number Placeholder 0"/>
-          <p:cNvSpPr>
-            <a:spLocks noGrp="1"/>
-          </p:cNvSpPr>
-          <p:nvPr>
-            <p:ph type="sldNum" sz="quarter" idx="4294967295"/>
-          </p:nvPr>
-        </p:nvSpPr>
-        <p:spPr>
-          <a:xfrm>
-            <a:off x="8321040" y="4754880"/>
-            <a:ext cx="457200" cy="274320"/>
-          </a:xfrm>
-          <a:prstGeom prst="rect">
-            <a:avLst/>
-          </a:prstGeom>
-          <a:extLst>
-            <a:ext uri="{C572A759-6A51-4108-AA02-DFA0A04FC94B}">
-              <ma14:wrappingTextBoxFlag xmlns="" xmlns:ma14="http://schemas.microsoft.com/office/mac/drawingml/2011/main" val="0"/>
-            </a:ext>
-          </a:extLst>
-        </p:spPr>
-        <p:txBody>
-          <a:bodyPr/>
-          <a:lstStyle>
-            <a:lvl1pPr>
-              <a:defRPr sz="1000">
-                <a:solidFill>
-                  <a:schemeClr val="accent5"/>
-                </a:solidFill>
-              </a:defRPr>
-            </a:lvl1pPr>
-          </a:lstStyle>
-          <a:p>
-            <a:pPr algn="r"/>
-            <a:fld id="{F7021451-1387-4CA6-816F-3879F97B5CBC}" type="slidenum">
-              <a:rPr lang="en-US" b="0"/>
-              <a:t>5</a:t>
-            </a:fld>
-            <a:endParaRPr lang="en-US"/>
-          </a:p>
-        </p:txBody>
-      </p:sp>
     </p:spTree>
   </p:cSld>
   <p:clrMapOvr>
@@ -4198,414 +9088,6 @@
 </file>
 
 <file path=ppt/slides/slide6.xml><?xml version="1.0" encoding="utf-8"?>
-<p:sld xmlns:a="http://schemas.openxmlformats.org/drawingml/2006/main" xmlns:r="http://schemas.openxmlformats.org/officeDocument/2006/relationships" xmlns:p="http://schemas.openxmlformats.org/presentationml/2006/main">
-  <p:cSld name="Slide 6">
-    <p:spTree>
-      <p:nvGrpSpPr>
-        <p:cNvPr id="1" name=""/>
-        <p:cNvGrpSpPr/>
-        <p:nvPr/>
-      </p:nvGrpSpPr>
-      <p:grpSpPr>
-        <a:xfrm>
-          <a:off x="0" y="0"/>
-          <a:ext cx="0" cy="0"/>
-          <a:chOff x="0" y="0"/>
-          <a:chExt cx="0" cy="0"/>
-        </a:xfrm>
-      </p:grpSpPr>
-      <p:sp>
-        <p:nvSpPr>
-          <p:cNvPr id="2" name="Text 0"/>
-          <p:cNvSpPr>
-            <a:spLocks noGrp="1"/>
-          </p:cNvSpPr>
-          <p:nvPr>
-            <p:ph type="title" idx="100" hasCustomPrompt="1"/>
-          </p:nvPr>
-        </p:nvSpPr>
-        <p:spPr>
-          <a:xfrm>
-            <a:off x="457200" y="274320"/>
-            <a:ext cx="6949440" cy="731520"/>
-          </a:xfrm>
-          <a:prstGeom prst="rect">
-            <a:avLst/>
-          </a:prstGeom>
-          <a:noFill/>
-          <a:ln/>
-        </p:spPr>
-        <p:txBody>
-          <a:bodyPr wrap="square" lIns="0" tIns="0" rIns="0" bIns="0" rtlCol="0" anchor="ctr"/>
-          <a:lstStyle/>
-          <a:p>
-            <a:pPr marL="0" indent="0" algn="l">
-              <a:buNone/>
-            </a:pPr>
-            <a:r>
-              <a:rPr lang="en-US" sz="3000" b="1" dirty="0">
-                <a:solidFill>
-                  <a:schemeClr val="tx2"/>
-                </a:solidFill>
-              </a:rPr>
-              <a:t>Stsenaarium 2: kus on ostujõud?</a:t>
-            </a:r>
-            <a:endParaRPr lang="en-US" sz="3000" dirty="0"/>
-          </a:p>
-        </p:txBody>
-      </p:sp>
-      <p:sp>
-        <p:nvSpPr>
-          <p:cNvPr id="6" name="Shape 3"/>
-          <p:cNvSpPr/>
-          <p:nvPr/>
-        </p:nvSpPr>
-        <p:spPr>
-          <a:xfrm>
-            <a:off x="457200" y="1188720"/>
-            <a:ext cx="5577840" cy="2364258"/>
-          </a:xfrm>
-          <a:prstGeom prst="roundRect">
-            <a:avLst>
-              <a:gd name="adj" fmla="val 1934"/>
-            </a:avLst>
-          </a:prstGeom>
-          <a:solidFill>
-            <a:schemeClr val="bg2"/>
-          </a:solidFill>
-          <a:ln/>
-        </p:spPr>
-      </p:sp>
-      <p:pic>
-        <p:nvPicPr>
-          <p:cNvPr id="7" name="Ekraanipilt" descr="Stsenaarium 2: kus on ostujõud?"/>
-          <p:cNvPicPr>
-            <a:picLocks noChangeAspect="1"/>
-          </p:cNvPicPr>
-          <p:nvPr/>
-        </p:nvPicPr>
-        <p:blipFill>
-          <a:blip r:embed="rId3"/>
-          <a:stretch>
-            <a:fillRect/>
-          </a:stretch>
-        </p:blipFill>
-        <p:spPr>
-          <a:xfrm>
-            <a:off x="502920" y="1234440"/>
-            <a:ext cx="5486400" cy="2272818"/>
-          </a:xfrm>
-          <a:prstGeom prst="rect">
-            <a:avLst/>
-          </a:prstGeom>
-        </p:spPr>
-      </p:pic>
-      <p:sp>
-        <p:nvSpPr>
-          <p:cNvPr id="8" name="Text 4"/>
-          <p:cNvSpPr txBox="1"/>
-          <p:nvPr/>
-        </p:nvSpPr>
-        <p:spPr>
-          <a:xfrm>
-            <a:off x="457200" y="3598698"/>
-            <a:ext cx="5577840" cy="274320"/>
-          </a:xfrm>
-          <a:prstGeom prst="rect">
-            <a:avLst/>
-          </a:prstGeom>
-          <a:noFill/>
-          <a:ln/>
-        </p:spPr>
-        <p:txBody>
-          <a:bodyPr wrap="square" lIns="0" tIns="0" rIns="0" bIns="0" rtlCol="0" anchor="ctr"/>
-          <a:lstStyle/>
-          <a:p>
-            <a:pPr marL="0" indent="0">
-              <a:buNone/>
-            </a:pPr>
-            <a:r>
-              <a:rPr lang="en-US" sz="1200" i="1" dirty="0">
-                <a:solidFill>
-                  <a:schemeClr val="accent5"/>
-                </a:solidFill>
-              </a:rPr>
-              <a:t>Ekraanipilt – näita live-demos või ekraanisalvestusena</a:t>
-            </a:r>
-            <a:endParaRPr lang="en-US" sz="1200" dirty="0"/>
-          </a:p>
-        </p:txBody>
-      </p:sp>
-      <p:sp>
-        <p:nvSpPr>
-          <p:cNvPr id="9" name="Shape 5"/>
-          <p:cNvSpPr/>
-          <p:nvPr/>
-        </p:nvSpPr>
-        <p:spPr>
-          <a:xfrm>
-            <a:off x="6309360" y="1188720"/>
-            <a:ext cx="2377440" cy="1005840"/>
-          </a:xfrm>
-          <a:prstGeom prst="roundRect">
-            <a:avLst>
-              <a:gd name="adj" fmla="val 9091"/>
-            </a:avLst>
-          </a:prstGeom>
-          <a:solidFill>
-            <a:schemeClr val="accent1"/>
-          </a:solidFill>
-          <a:ln/>
-        </p:spPr>
-      </p:sp>
-      <p:sp>
-        <p:nvSpPr>
-          <p:cNvPr id="10" name="Text 6"/>
-          <p:cNvSpPr txBox="1"/>
-          <p:nvPr/>
-        </p:nvSpPr>
-        <p:spPr>
-          <a:xfrm>
-            <a:off x="6446520" y="1234440"/>
-            <a:ext cx="2103120" cy="914400"/>
-          </a:xfrm>
-          <a:prstGeom prst="rect">
-            <a:avLst/>
-          </a:prstGeom>
-          <a:noFill/>
-          <a:ln/>
-        </p:spPr>
-        <p:txBody>
-          <a:bodyPr wrap="square" lIns="0" tIns="0" rIns="0" bIns="0" rtlCol="0" anchor="ctr"/>
-          <a:lstStyle/>
-          <a:p>
-            <a:pPr marL="0" indent="0">
-              <a:buNone/>
-            </a:pPr>
-            <a:r>
-              <a:rPr lang="en-US" sz="1400" b="1" dirty="0">
-                <a:solidFill>
-                  <a:schemeClr val="accent2"/>
-                </a:solidFill>
-              </a:rPr>
-              <a:t>Küsimus</a:t>
-            </a:r>
-            <a:endParaRPr lang="en-US" sz="1400" dirty="0"/>
-          </a:p>
-          <a:p>
-            <a:pPr marL="0" indent="0">
-              <a:buNone/>
-            </a:pPr>
-            <a:r>
-              <a:rPr lang="en-US" sz="1400" dirty="0">
-                <a:solidFill>
-                  <a:schemeClr val="bg1"/>
-                </a:solidFill>
-              </a:rPr>
-              <a:t>Millises maakonnas on palk hinnaga kõige paremas suhtes?</a:t>
-            </a:r>
-            <a:endParaRPr lang="en-US" sz="1400" dirty="0"/>
-          </a:p>
-        </p:txBody>
-      </p:sp>
-      <p:sp>
-        <p:nvSpPr>
-          <p:cNvPr id="11" name="Shape 7"/>
-          <p:cNvSpPr/>
-          <p:nvPr/>
-        </p:nvSpPr>
-        <p:spPr>
-          <a:xfrm>
-            <a:off x="6309360" y="2286000"/>
-            <a:ext cx="2377440" cy="1005840"/>
-          </a:xfrm>
-          <a:prstGeom prst="roundRect">
-            <a:avLst>
-              <a:gd name="adj" fmla="val 9091"/>
-            </a:avLst>
-          </a:prstGeom>
-          <a:solidFill>
-            <a:schemeClr val="accent3"/>
-          </a:solidFill>
-          <a:ln/>
-        </p:spPr>
-      </p:sp>
-      <p:sp>
-        <p:nvSpPr>
-          <p:cNvPr id="12" name="Text 8"/>
-          <p:cNvSpPr txBox="1"/>
-          <p:nvPr/>
-        </p:nvSpPr>
-        <p:spPr>
-          <a:xfrm>
-            <a:off x="6446520" y="2331720"/>
-            <a:ext cx="2103120" cy="914400"/>
-          </a:xfrm>
-          <a:prstGeom prst="rect">
-            <a:avLst/>
-          </a:prstGeom>
-          <a:noFill/>
-          <a:ln/>
-        </p:spPr>
-        <p:txBody>
-          <a:bodyPr wrap="square" lIns="0" tIns="0" rIns="0" bIns="0" rtlCol="0" anchor="ctr"/>
-          <a:lstStyle/>
-          <a:p>
-            <a:pPr marL="0" indent="0">
-              <a:buNone/>
-            </a:pPr>
-            <a:r>
-              <a:rPr lang="en-US" sz="1400" b="1" dirty="0">
-                <a:solidFill>
-                  <a:schemeClr val="accent2"/>
-                </a:solidFill>
-              </a:rPr>
-              <a:t>Tegevus</a:t>
-            </a:r>
-            <a:endParaRPr lang="en-US" sz="1400" dirty="0"/>
-          </a:p>
-          <a:p>
-            <a:pPr marL="0" indent="0">
-              <a:buNone/>
-            </a:pPr>
-            <a:r>
-              <a:rPr lang="en-US" sz="1400" dirty="0">
-                <a:solidFill>
-                  <a:schemeClr val="bg1"/>
-                </a:solidFill>
-              </a:rPr>
-              <a:t>Võrdle trajektoore, mulli suurus = tehingud</a:t>
-            </a:r>
-            <a:endParaRPr lang="en-US" sz="1400" dirty="0"/>
-          </a:p>
-        </p:txBody>
-      </p:sp>
-      <p:sp>
-        <p:nvSpPr>
-          <p:cNvPr id="13" name="Shape 9"/>
-          <p:cNvSpPr/>
-          <p:nvPr/>
-        </p:nvSpPr>
-        <p:spPr>
-          <a:xfrm>
-            <a:off x="6309360" y="3383280"/>
-            <a:ext cx="2377440" cy="1005840"/>
-          </a:xfrm>
-          <a:prstGeom prst="roundRect">
-            <a:avLst>
-              <a:gd name="adj" fmla="val 9091"/>
-            </a:avLst>
-          </a:prstGeom>
-          <a:solidFill>
-            <a:schemeClr val="accent4"/>
-          </a:solidFill>
-          <a:ln/>
-        </p:spPr>
-      </p:sp>
-      <p:sp>
-        <p:nvSpPr>
-          <p:cNvPr id="14" name="Text 10"/>
-          <p:cNvSpPr txBox="1"/>
-          <p:nvPr/>
-        </p:nvSpPr>
-        <p:spPr>
-          <a:xfrm>
-            <a:off x="6446520" y="3429000"/>
-            <a:ext cx="2103120" cy="914400"/>
-          </a:xfrm>
-          <a:prstGeom prst="rect">
-            <a:avLst/>
-          </a:prstGeom>
-          <a:noFill/>
-          <a:ln/>
-        </p:spPr>
-        <p:txBody>
-          <a:bodyPr wrap="square" lIns="0" tIns="0" rIns="0" bIns="0" rtlCol="0" anchor="ctr"/>
-          <a:lstStyle/>
-          <a:p>
-            <a:pPr marL="0" indent="0">
-              <a:buNone/>
-            </a:pPr>
-            <a:r>
-              <a:rPr lang="en-US" sz="1400" b="1" dirty="0">
-                <a:solidFill>
-                  <a:schemeClr val="accent2"/>
-                </a:solidFill>
-              </a:rPr>
-              <a:t>Väärtus</a:t>
-            </a:r>
-            <a:endParaRPr lang="en-US" sz="1400" dirty="0"/>
-          </a:p>
-          <a:p>
-            <a:pPr marL="0" indent="0">
-              <a:buNone/>
-            </a:pPr>
-            <a:r>
-              <a:rPr lang="en-US" sz="1400" dirty="0">
-                <a:solidFill>
-                  <a:schemeClr val="bg1"/>
-                </a:solidFill>
-              </a:rPr>
-              <a:t>Näed, kus ostujõud on madalam või kõrgem</a:t>
-            </a:r>
-            <a:endParaRPr lang="en-US" sz="1400" dirty="0"/>
-          </a:p>
-        </p:txBody>
-      </p:sp>
-      <p:sp>
-        <p:nvSpPr>
-          <p:cNvPr id="25" name="Slide Number Placeholder 0"/>
-          <p:cNvSpPr>
-            <a:spLocks noGrp="1"/>
-          </p:cNvSpPr>
-          <p:nvPr>
-            <p:ph type="sldNum" sz="quarter" idx="4294967295"/>
-          </p:nvPr>
-        </p:nvSpPr>
-        <p:spPr>
-          <a:xfrm>
-            <a:off x="8321040" y="4754880"/>
-            <a:ext cx="457200" cy="274320"/>
-          </a:xfrm>
-          <a:prstGeom prst="rect">
-            <a:avLst/>
-          </a:prstGeom>
-          <a:extLst>
-            <a:ext uri="{C572A759-6A51-4108-AA02-DFA0A04FC94B}">
-              <ma14:wrappingTextBoxFlag xmlns="" xmlns:ma14="http://schemas.microsoft.com/office/mac/drawingml/2011/main" val="0"/>
-            </a:ext>
-          </a:extLst>
-        </p:spPr>
-        <p:txBody>
-          <a:bodyPr/>
-          <a:lstStyle>
-            <a:lvl1pPr>
-              <a:defRPr sz="1000">
-                <a:solidFill>
-                  <a:schemeClr val="accent5"/>
-                </a:solidFill>
-              </a:defRPr>
-            </a:lvl1pPr>
-          </a:lstStyle>
-          <a:p>
-            <a:pPr algn="r"/>
-            <a:fld id="{F7021451-1387-4CA6-816F-3879F97B5CBC}" type="slidenum">
-              <a:rPr lang="en-US" b="0"/>
-              <a:t>6</a:t>
-            </a:fld>
-            <a:endParaRPr lang="en-US"/>
-          </a:p>
-        </p:txBody>
-      </p:sp>
-    </p:spTree>
-  </p:cSld>
-  <p:clrMapOvr>
-    <a:masterClrMapping/>
-  </p:clrMapOvr>
-</p:sld>
-</file>
-
-<file path=ppt/slides/slide7.xml><?xml version="1.0" encoding="utf-8"?>
 <p:sld xmlns:a="http://schemas.openxmlformats.org/drawingml/2006/main" xmlns:r="http://schemas.openxmlformats.org/officeDocument/2006/relationships" xmlns:p="http://schemas.openxmlformats.org/presentationml/2006/main">
   <p:cSld name="Slide 7">
     <p:spTree>
@@ -4629,14 +9111,10 @@
             <a:spLocks noGrp="1"/>
           </p:cNvSpPr>
           <p:nvPr>
-            <p:ph type="title" idx="100" hasCustomPrompt="1"/>
-          </p:nvPr>
-        </p:nvSpPr>
-        <p:spPr>
-          <a:xfrm>
-            <a:off x="457200" y="274320"/>
-            <a:ext cx="6949440" cy="731520"/>
-          </a:xfrm>
+            <p:ph type="title" idx="100"/>
+          </p:nvPr>
+        </p:nvSpPr>
+        <p:spPr>
           <a:prstGeom prst="rect">
             <a:avLst/>
           </a:prstGeom>
@@ -4659,6 +9137,51 @@
               <a:t>Dokumentatsioon ja tiim</a:t>
             </a:r>
             <a:endParaRPr lang="en-US" sz="3000" dirty="0"/>
+          </a:p>
+        </p:txBody>
+      </p:sp>
+      <p:sp>
+        <p:nvSpPr>
+          <p:cNvPr id="25" name="Slide Number Placeholder 0"/>
+          <p:cNvSpPr>
+            <a:spLocks noGrp="1"/>
+          </p:cNvSpPr>
+          <p:nvPr>
+            <p:ph type="sldNum" sz="quarter" idx="4294967295"/>
+          </p:nvPr>
+        </p:nvSpPr>
+        <p:spPr>
+          <a:xfrm>
+            <a:off x="8321040" y="4754880"/>
+            <a:ext cx="457200" cy="274320"/>
+          </a:xfrm>
+          <a:prstGeom prst="rect">
+            <a:avLst/>
+          </a:prstGeom>
+          <a:extLst>
+            <a:ext uri="{C572A759-6A51-4108-AA02-DFA0A04FC94B}">
+              <ma14:wrappingTextBoxFlag xmlns:ma14="http://schemas.microsoft.com/office/mac/drawingml/2011/main" xmlns="" val="0"/>
+            </a:ext>
+          </a:extLst>
+        </p:spPr>
+        <p:txBody>
+          <a:bodyPr/>
+          <a:lstStyle>
+            <a:lvl1pPr>
+              <a:defRPr sz="1000">
+                <a:solidFill>
+                  <a:schemeClr val="accent5"/>
+                </a:solidFill>
+              </a:defRPr>
+            </a:lvl1pPr>
+          </a:lstStyle>
+          <a:p>
+            <a:pPr algn="r"/>
+            <a:fld id="{F7021451-1387-4CA6-816F-3879F97B5CBC}" type="slidenum">
+              <a:rPr lang="en-US" b="0"/>
+              <a:t>6</a:t>
+            </a:fld>
+            <a:endParaRPr lang="en-US"/>
           </a:p>
         </p:txBody>
       </p:sp>
@@ -5126,15 +9649,7 @@
                   <a:schemeClr val="bg1"/>
                 </a:solidFill>
               </a:rPr>
-              <a:t>Kaidi </a:t>
-            </a:r>
-            <a:r>
-              <a:rPr lang="et-EE" sz="1600" b="1" dirty="0" err="1">
-                <a:solidFill>
-                  <a:schemeClr val="bg1"/>
-                </a:solidFill>
-              </a:rPr>
-              <a:t>Soiela</a:t>
+              <a:t>Kaidi Soiela</a:t>
             </a:r>
             <a:endParaRPr lang="en-US" sz="1600" dirty="0"/>
           </a:p>
@@ -5311,51 +9826,6 @@
               <a:buNone/>
             </a:pPr>
             <a:endParaRPr lang="en-US" sz="1600" dirty="0"/>
-          </a:p>
-        </p:txBody>
-      </p:sp>
-      <p:sp>
-        <p:nvSpPr>
-          <p:cNvPr id="25" name="Slide Number Placeholder 0"/>
-          <p:cNvSpPr>
-            <a:spLocks noGrp="1"/>
-          </p:cNvSpPr>
-          <p:nvPr>
-            <p:ph type="sldNum" sz="quarter" idx="4294967295"/>
-          </p:nvPr>
-        </p:nvSpPr>
-        <p:spPr>
-          <a:xfrm>
-            <a:off x="8321040" y="4754880"/>
-            <a:ext cx="457200" cy="274320"/>
-          </a:xfrm>
-          <a:prstGeom prst="rect">
-            <a:avLst/>
-          </a:prstGeom>
-          <a:extLst>
-            <a:ext uri="{C572A759-6A51-4108-AA02-DFA0A04FC94B}">
-              <ma14:wrappingTextBoxFlag xmlns="" xmlns:ma14="http://schemas.microsoft.com/office/mac/drawingml/2011/main" val="0"/>
-            </a:ext>
-          </a:extLst>
-        </p:spPr>
-        <p:txBody>
-          <a:bodyPr/>
-          <a:lstStyle>
-            <a:lvl1pPr>
-              <a:defRPr sz="1000">
-                <a:solidFill>
-                  <a:schemeClr val="accent5"/>
-                </a:solidFill>
-              </a:defRPr>
-            </a:lvl1pPr>
-          </a:lstStyle>
-          <a:p>
-            <a:pPr algn="r"/>
-            <a:fld id="{F7021451-1387-4CA6-816F-3879F97B5CBC}" type="slidenum">
-              <a:rPr lang="en-US" b="0"/>
-              <a:t>7</a:t>
-            </a:fld>
-            <a:endParaRPr lang="en-US"/>
           </a:p>
         </p:txBody>
       </p:sp>
@@ -5469,7 +9939,7 @@
 </p:sld>
 </file>
 
-<file path=ppt/slides/slide8.xml><?xml version="1.0" encoding="utf-8"?>
+<file path=ppt/slides/slide7.xml><?xml version="1.0" encoding="utf-8"?>
 <p:sld xmlns:a="http://schemas.openxmlformats.org/drawingml/2006/main" xmlns:r="http://schemas.openxmlformats.org/officeDocument/2006/relationships" xmlns:p="http://schemas.openxmlformats.org/presentationml/2006/main">
   <p:cSld name="Slide 8">
     <p:spTree>
@@ -5493,14 +9963,10 @@
             <a:spLocks noGrp="1"/>
           </p:cNvSpPr>
           <p:nvPr>
-            <p:ph type="title" idx="100" hasCustomPrompt="1"/>
-          </p:nvPr>
-        </p:nvSpPr>
-        <p:spPr>
-          <a:xfrm>
-            <a:off x="457200" y="274320"/>
-            <a:ext cx="6949440" cy="731520"/>
-          </a:xfrm>
+            <p:ph type="title" idx="100"/>
+          </p:nvPr>
+        </p:nvSpPr>
+        <p:spPr>
           <a:prstGeom prst="rect">
             <a:avLst/>
           </a:prstGeom>
@@ -5523,6 +9989,51 @@
               <a:t>Õppetunnid ja kokkuvõte</a:t>
             </a:r>
             <a:endParaRPr lang="en-US" sz="3000" dirty="0"/>
+          </a:p>
+        </p:txBody>
+      </p:sp>
+      <p:sp>
+        <p:nvSpPr>
+          <p:cNvPr id="25" name="Slide Number Placeholder 0"/>
+          <p:cNvSpPr>
+            <a:spLocks noGrp="1"/>
+          </p:cNvSpPr>
+          <p:nvPr>
+            <p:ph type="sldNum" sz="quarter" idx="4294967295"/>
+          </p:nvPr>
+        </p:nvSpPr>
+        <p:spPr>
+          <a:xfrm>
+            <a:off x="8321040" y="4754880"/>
+            <a:ext cx="457200" cy="274320"/>
+          </a:xfrm>
+          <a:prstGeom prst="rect">
+            <a:avLst/>
+          </a:prstGeom>
+          <a:extLst>
+            <a:ext uri="{C572A759-6A51-4108-AA02-DFA0A04FC94B}">
+              <ma14:wrappingTextBoxFlag xmlns:ma14="http://schemas.microsoft.com/office/mac/drawingml/2011/main" xmlns="" val="0"/>
+            </a:ext>
+          </a:extLst>
+        </p:spPr>
+        <p:txBody>
+          <a:bodyPr/>
+          <a:lstStyle>
+            <a:lvl1pPr>
+              <a:defRPr sz="1000">
+                <a:solidFill>
+                  <a:schemeClr val="accent5"/>
+                </a:solidFill>
+              </a:defRPr>
+            </a:lvl1pPr>
+          </a:lstStyle>
+          <a:p>
+            <a:pPr algn="r"/>
+            <a:fld id="{F7021451-1387-4CA6-816F-3879F97B5CBC}" type="slidenum">
+              <a:rPr lang="en-US" b="0"/>
+              <a:t>7</a:t>
+            </a:fld>
+            <a:endParaRPr lang="en-US"/>
           </a:p>
         </p:txBody>
       </p:sp>
@@ -6049,51 +10560,6 @@
               <a:t>Jaga tööd ja ajakava varem</a:t>
             </a:r>
             <a:endParaRPr lang="en-US" sz="1400" dirty="0"/>
-          </a:p>
-        </p:txBody>
-      </p:sp>
-      <p:sp>
-        <p:nvSpPr>
-          <p:cNvPr id="25" name="Slide Number Placeholder 0"/>
-          <p:cNvSpPr>
-            <a:spLocks noGrp="1"/>
-          </p:cNvSpPr>
-          <p:nvPr>
-            <p:ph type="sldNum" sz="quarter" idx="4294967295"/>
-          </p:nvPr>
-        </p:nvSpPr>
-        <p:spPr>
-          <a:xfrm>
-            <a:off x="8321040" y="4754880"/>
-            <a:ext cx="457200" cy="274320"/>
-          </a:xfrm>
-          <a:prstGeom prst="rect">
-            <a:avLst/>
-          </a:prstGeom>
-          <a:extLst>
-            <a:ext uri="{C572A759-6A51-4108-AA02-DFA0A04FC94B}">
-              <ma14:wrappingTextBoxFlag xmlns="" xmlns:ma14="http://schemas.microsoft.com/office/mac/drawingml/2011/main" val="0"/>
-            </a:ext>
-          </a:extLst>
-        </p:spPr>
-        <p:txBody>
-          <a:bodyPr/>
-          <a:lstStyle>
-            <a:lvl1pPr>
-              <a:defRPr sz="1000">
-                <a:solidFill>
-                  <a:schemeClr val="accent5"/>
-                </a:solidFill>
-              </a:defRPr>
-            </a:lvl1pPr>
-          </a:lstStyle>
-          <a:p>
-            <a:pPr algn="r"/>
-            <a:fld id="{F7021451-1387-4CA6-816F-3879F97B5CBC}" type="slidenum">
-              <a:rPr lang="en-US" b="0"/>
-              <a:t>8</a:t>
-            </a:fld>
-            <a:endParaRPr lang="en-US"/>
           </a:p>
         </p:txBody>
       </p:sp>
@@ -6105,7 +10571,7 @@
 </p:sld>
 </file>
 
-<file path=ppt/slides/slide9.xml><?xml version="1.0" encoding="utf-8"?>
+<file path=ppt/slides/slide8.xml><?xml version="1.0" encoding="utf-8"?>
 <p:sld xmlns:a="http://schemas.openxmlformats.org/drawingml/2006/main" xmlns:r="http://schemas.openxmlformats.org/officeDocument/2006/relationships" xmlns:p="http://schemas.openxmlformats.org/presentationml/2006/main">
   <p:cSld name="Slide 9">
     <p:spTree>
@@ -6129,14 +10595,10 @@
             <a:spLocks noGrp="1"/>
           </p:cNvSpPr>
           <p:nvPr>
-            <p:ph type="title" idx="102" hasCustomPrompt="1"/>
-          </p:nvPr>
-        </p:nvSpPr>
-        <p:spPr>
-          <a:xfrm>
-            <a:off x="548640" y="1280160"/>
-            <a:ext cx="6035040" cy="1554480"/>
-          </a:xfrm>
+            <p:ph type="title" idx="102"/>
+          </p:nvPr>
+        </p:nvSpPr>
+        <p:spPr>
           <a:prstGeom prst="rect">
             <a:avLst/>
           </a:prstGeom>
@@ -6304,110 +10766,58 @@
 </file>
 
 <file path=ppt/theme/theme1.xml><?xml version="1.0" encoding="utf-8"?>
-<a:theme xmlns:a="http://schemas.openxmlformats.org/drawingml/2006/main" name="Palk vs kinnisvara">
+<a:theme xmlns:a="http://schemas.openxmlformats.org/drawingml/2006/main" name="Slice">
   <a:themeElements>
-    <a:clrScheme name="Palk vs kinnisvara">
+    <a:clrScheme name="Slice">
       <a:dk1>
-        <a:srgbClr val="14232B"/>
+        <a:sysClr val="windowText" lastClr="000000"/>
       </a:dk1>
       <a:lt1>
-        <a:srgbClr val="FFFFFF"/>
+        <a:sysClr val="window" lastClr="FFFFFF"/>
       </a:lt1>
       <a:dk2>
-        <a:srgbClr val="0B4F5C"/>
+        <a:srgbClr val="146194"/>
       </a:dk2>
       <a:lt2>
-        <a:srgbClr val="EEF3F4"/>
+        <a:srgbClr val="76DBF4"/>
       </a:lt2>
       <a:accent1>
-        <a:srgbClr val="0B4F5C"/>
+        <a:srgbClr val="052F61"/>
       </a:accent1>
       <a:accent2>
-        <a:srgbClr val="E8A33D"/>
+        <a:srgbClr val="A50E82"/>
       </a:accent2>
       <a:accent3>
-        <a:srgbClr val="2E8B8B"/>
+        <a:srgbClr val="14967C"/>
       </a:accent3>
       <a:accent4>
-        <a:srgbClr val="C4572B"/>
+        <a:srgbClr val="6A9E1F"/>
       </a:accent4>
       <a:accent5>
-        <a:srgbClr val="6B7F86"/>
+        <a:srgbClr val="E87D37"/>
       </a:accent5>
       <a:accent6>
-        <a:srgbClr val="A9C7CB"/>
+        <a:srgbClr val="C62324"/>
       </a:accent6>
       <a:hlink>
-        <a:srgbClr val="0B4F5C"/>
+        <a:srgbClr val="0D2E46"/>
       </a:hlink>
       <a:folHlink>
-        <a:srgbClr val="6B7F86"/>
+        <a:srgbClr val="356A95"/>
       </a:folHlink>
     </a:clrScheme>
-    <a:fontScheme name="Palk vs kinnisvara">
+    <a:fontScheme name="Slice">
       <a:majorFont>
-        <a:latin typeface="Cambria"/>
+        <a:latin typeface="Century Gothic" panose="020B0502020202020204"/>
         <a:ea typeface=""/>
         <a:cs typeface=""/>
-        <a:font script="Jpan" typeface="游ゴシック Light"/>
-        <a:font script="Hang" typeface="맑은 고딕"/>
-        <a:font script="Hans" typeface="等线 Light"/>
-        <a:font script="Hant" typeface="新細明體"/>
-        <a:font script="Arab" typeface="Times New Roman"/>
-        <a:font script="Hebr" typeface="Times New Roman"/>
-        <a:font script="Thai" typeface="Angsana New"/>
-        <a:font script="Ethi" typeface="Nyala"/>
-        <a:font script="Beng" typeface="Vrinda"/>
-        <a:font script="Gujr" typeface="Shruti"/>
-        <a:font script="Khmr" typeface="MoolBoran"/>
-        <a:font script="Knda" typeface="Tunga"/>
-        <a:font script="Guru" typeface="Raavi"/>
-        <a:font script="Cans" typeface="Euphemia"/>
-        <a:font script="Cher" typeface="Plantagenet Cherokee"/>
-        <a:font script="Yiii" typeface="Microsoft Yi Baiti"/>
-        <a:font script="Tibt" typeface="Microsoft Himalaya"/>
-        <a:font script="Thaa" typeface="MV Boli"/>
-        <a:font script="Deva" typeface="Mangal"/>
-        <a:font script="Telu" typeface="Gautami"/>
-        <a:font script="Taml" typeface="Latha"/>
-        <a:font script="Syrc" typeface="Estrangelo Edessa"/>
-        <a:font script="Orya" typeface="Kalinga"/>
-        <a:font script="Mlym" typeface="Kartika"/>
-        <a:font script="Laoo" typeface="DokChampa"/>
-        <a:font script="Sinh" typeface="Iskoola Pota"/>
-        <a:font script="Mong" typeface="Mongolian Baiti"/>
-        <a:font script="Viet" typeface="Times New Roman"/>
-        <a:font script="Uigh" typeface="Microsoft Uighur"/>
-        <a:font script="Geor" typeface="Sylfaen"/>
-        <a:font script="Armn" typeface="Arial"/>
-        <a:font script="Bugi" typeface="Leelawadee UI"/>
-        <a:font script="Bopo" typeface="Microsoft JhengHei"/>
-        <a:font script="Java" typeface="Javanese Text"/>
-        <a:font script="Lisu" typeface="Segoe UI"/>
-        <a:font script="Mymr" typeface="Myanmar Text"/>
-        <a:font script="Nkoo" typeface="Ebrima"/>
-        <a:font script="Olck" typeface="Nirmala UI"/>
-        <a:font script="Osma" typeface="Ebrima"/>
-        <a:font script="Phag" typeface="Phagspa"/>
-        <a:font script="Syrn" typeface="Estrangelo Edessa"/>
-        <a:font script="Syrj" typeface="Estrangelo Edessa"/>
-        <a:font script="Syre" typeface="Estrangelo Edessa"/>
-        <a:font script="Sora" typeface="Nirmala UI"/>
-        <a:font script="Tale" typeface="Microsoft Tai Le"/>
-        <a:font script="Talu" typeface="Microsoft New Tai Lue"/>
-        <a:font script="Tfng" typeface="Ebrima"/>
-      </a:majorFont>
-      <a:minorFont>
-        <a:latin typeface="Calibri"/>
-        <a:ea typeface=""/>
-        <a:cs typeface=""/>
-        <a:font script="Jpan" typeface="游ゴシック"/>
-        <a:font script="Hang" typeface="맑은 고딕"/>
-        <a:font script="Hans" typeface="等线"/>
-        <a:font script="Hant" typeface="新細明體"/>
-        <a:font script="Arab" typeface="Arial"/>
-        <a:font script="Hebr" typeface="Arial"/>
-        <a:font script="Thai" typeface="Cordia New"/>
+        <a:font script="Jpan" typeface="メイリオ"/>
+        <a:font script="Hang" typeface="HY중고딕"/>
+        <a:font script="Hans" typeface="幼圆"/>
+        <a:font script="Hant" typeface="微軟正黑體"/>
+        <a:font script="Arab" typeface="Tahoma"/>
+        <a:font script="Hebr" typeface="Gisha"/>
+        <a:font script="Thai" typeface="DilleniaUPC"/>
         <a:font script="Ethi" typeface="Nyala"/>
         <a:font script="Beng" typeface="Vrinda"/>
         <a:font script="Gujr" typeface="Shruti"/>
@@ -6428,29 +10838,47 @@
         <a:font script="Laoo" typeface="DokChampa"/>
         <a:font script="Sinh" typeface="Iskoola Pota"/>
         <a:font script="Mong" typeface="Mongolian Baiti"/>
-        <a:font script="Viet" typeface="Arial"/>
+        <a:font script="Viet" typeface="Tahoma"/>
         <a:font script="Uigh" typeface="Microsoft Uighur"/>
         <a:font script="Geor" typeface="Sylfaen"/>
-        <a:font script="Armn" typeface="Arial"/>
-        <a:font script="Bugi" typeface="Leelawadee UI"/>
-        <a:font script="Bopo" typeface="Microsoft JhengHei"/>
-        <a:font script="Java" typeface="Javanese Text"/>
-        <a:font script="Lisu" typeface="Segoe UI"/>
-        <a:font script="Mymr" typeface="Myanmar Text"/>
-        <a:font script="Nkoo" typeface="Ebrima"/>
-        <a:font script="Olck" typeface="Nirmala UI"/>
-        <a:font script="Osma" typeface="Ebrima"/>
-        <a:font script="Phag" typeface="Phagspa"/>
-        <a:font script="Syrn" typeface="Estrangelo Edessa"/>
-        <a:font script="Syrj" typeface="Estrangelo Edessa"/>
-        <a:font script="Syre" typeface="Estrangelo Edessa"/>
-        <a:font script="Sora" typeface="Nirmala UI"/>
-        <a:font script="Tale" typeface="Microsoft Tai Le"/>
-        <a:font script="Talu" typeface="Microsoft New Tai Lue"/>
-        <a:font script="Tfng" typeface="Ebrima"/>
+      </a:majorFont>
+      <a:minorFont>
+        <a:latin typeface="Century Gothic" panose="020B0502020202020204"/>
+        <a:ea typeface=""/>
+        <a:cs typeface=""/>
+        <a:font script="Jpan" typeface="メイリオ"/>
+        <a:font script="Hang" typeface="HY중고딕"/>
+        <a:font script="Hans" typeface="幼圆"/>
+        <a:font script="Hant" typeface="微軟正黑體"/>
+        <a:font script="Arab" typeface="Tahoma"/>
+        <a:font script="Hebr" typeface="Gisha"/>
+        <a:font script="Thai" typeface="DilleniaUPC"/>
+        <a:font script="Ethi" typeface="Nyala"/>
+        <a:font script="Beng" typeface="Vrinda"/>
+        <a:font script="Gujr" typeface="Shruti"/>
+        <a:font script="Khmr" typeface="DaunPenh"/>
+        <a:font script="Knda" typeface="Tunga"/>
+        <a:font script="Guru" typeface="Raavi"/>
+        <a:font script="Cans" typeface="Euphemia"/>
+        <a:font script="Cher" typeface="Plantagenet Cherokee"/>
+        <a:font script="Yiii" typeface="Microsoft Yi Baiti"/>
+        <a:font script="Tibt" typeface="Microsoft Himalaya"/>
+        <a:font script="Thaa" typeface="MV Boli"/>
+        <a:font script="Deva" typeface="Mangal"/>
+        <a:font script="Telu" typeface="Gautami"/>
+        <a:font script="Taml" typeface="Latha"/>
+        <a:font script="Syrc" typeface="Estrangelo Edessa"/>
+        <a:font script="Orya" typeface="Kalinga"/>
+        <a:font script="Mlym" typeface="Kartika"/>
+        <a:font script="Laoo" typeface="DokChampa"/>
+        <a:font script="Sinh" typeface="Iskoola Pota"/>
+        <a:font script="Mong" typeface="Mongolian Baiti"/>
+        <a:font script="Viet" typeface="Tahoma"/>
+        <a:font script="Uigh" typeface="Microsoft Uighur"/>
+        <a:font script="Geor" typeface="Sylfaen"/>
       </a:minorFont>
     </a:fontScheme>
-    <a:fmtScheme name="Office">
+    <a:fmtScheme name="Slice">
       <a:fillStyleLst>
         <a:solidFill>
           <a:schemeClr val="phClr"/>
@@ -6459,23 +10887,16 @@
           <a:gsLst>
             <a:gs pos="0">
               <a:schemeClr val="phClr">
+                <a:tint val="62000"/>
+                <a:hueMod val="94000"/>
+                <a:satMod val="140000"/>
                 <a:lumMod val="110000"/>
-                <a:satMod val="105000"/>
-                <a:tint val="67000"/>
-              </a:schemeClr>
-            </a:gs>
-            <a:gs pos="50000">
-              <a:schemeClr val="phClr">
-                <a:lumMod val="105000"/>
-                <a:satMod val="103000"/>
-                <a:tint val="73000"/>
               </a:schemeClr>
             </a:gs>
             <a:gs pos="100000">
               <a:schemeClr val="phClr">
-                <a:lumMod val="105000"/>
-                <a:satMod val="109000"/>
-                <a:tint val="81000"/>
+                <a:tint val="84000"/>
+                <a:satMod val="160000"/>
               </a:schemeClr>
             </a:gs>
           </a:gsLst>
@@ -6485,23 +10906,16 @@
           <a:gsLst>
             <a:gs pos="0">
               <a:schemeClr val="phClr">
-                <a:satMod val="103000"/>
-                <a:lumMod val="102000"/>
-                <a:tint val="94000"/>
-              </a:schemeClr>
-            </a:gs>
-            <a:gs pos="50000">
-              <a:schemeClr val="phClr">
-                <a:satMod val="110000"/>
-                <a:lumMod val="100000"/>
-                <a:shade val="100000"/>
+                <a:tint val="98000"/>
+                <a:hueMod val="94000"/>
+                <a:satMod val="130000"/>
+                <a:lumMod val="128000"/>
               </a:schemeClr>
             </a:gs>
             <a:gs pos="100000">
               <a:schemeClr val="phClr">
-                <a:lumMod val="99000"/>
-                <a:satMod val="120000"/>
-                <a:shade val="78000"/>
+                <a:shade val="94000"/>
+                <a:lumMod val="88000"/>
               </a:schemeClr>
             </a:gs>
           </a:gsLst>
@@ -6509,26 +10923,29 @@
         </a:gradFill>
       </a:fillStyleLst>
       <a:lnStyleLst>
-        <a:ln w="6350" cap="flat" cmpd="sng" algn="ctr">
+        <a:ln w="9525" cap="rnd" cmpd="sng" algn="ctr">
+          <a:solidFill>
+            <a:schemeClr val="phClr">
+              <a:tint val="76000"/>
+              <a:alpha val="60000"/>
+              <a:hueMod val="94000"/>
+            </a:schemeClr>
+          </a:solidFill>
+          <a:prstDash val="solid"/>
+        </a:ln>
+        <a:ln w="15875" cap="rnd" cmpd="sng" algn="ctr">
+          <a:solidFill>
+            <a:schemeClr val="phClr">
+              <a:hueMod val="94000"/>
+            </a:schemeClr>
+          </a:solidFill>
+          <a:prstDash val="solid"/>
+        </a:ln>
+        <a:ln w="28575" cap="rnd" cmpd="sng" algn="ctr">
           <a:solidFill>
             <a:schemeClr val="phClr"/>
           </a:solidFill>
           <a:prstDash val="solid"/>
-          <a:miter lim="800000"/>
-        </a:ln>
-        <a:ln w="12700" cap="flat" cmpd="sng" algn="ctr">
-          <a:solidFill>
-            <a:schemeClr val="phClr"/>
-          </a:solidFill>
-          <a:prstDash val="solid"/>
-          <a:miter lim="800000"/>
-        </a:ln>
-        <a:ln w="19050" cap="flat" cmpd="sng" algn="ctr">
-          <a:solidFill>
-            <a:schemeClr val="phClr"/>
-          </a:solidFill>
-          <a:prstDash val="solid"/>
-          <a:miter lim="800000"/>
         </a:ln>
       </a:lnStyleLst>
       <a:effectStyleLst>
@@ -6536,54 +10953,78 @@
           <a:effectLst/>
         </a:effectStyle>
         <a:effectStyle>
-          <a:effectLst/>
+          <a:effectLst>
+            <a:innerShdw blurRad="25400" dist="12700" dir="13500000">
+              <a:srgbClr val="000000">
+                <a:alpha val="45000"/>
+              </a:srgbClr>
+            </a:innerShdw>
+          </a:effectLst>
         </a:effectStyle>
         <a:effectStyle>
           <a:effectLst>
-            <a:outerShdw blurRad="57150" dist="19050" dir="5400000" algn="ctr" rotWithShape="0">
+            <a:outerShdw blurRad="50800" dist="38100" dir="5400000" rotWithShape="0">
               <a:srgbClr val="000000">
-                <a:alpha val="63000"/>
+                <a:alpha val="46000"/>
               </a:srgbClr>
             </a:outerShdw>
           </a:effectLst>
+          <a:scene3d>
+            <a:camera prst="orthographicFront">
+              <a:rot lat="0" lon="0" rev="0"/>
+            </a:camera>
+            <a:lightRig rig="threePt" dir="t"/>
+          </a:scene3d>
+          <a:sp3d prstMaterial="plastic">
+            <a:bevelT w="25400" h="25400"/>
+          </a:sp3d>
         </a:effectStyle>
       </a:effectStyleLst>
       <a:bgFillStyleLst>
         <a:solidFill>
           <a:schemeClr val="phClr"/>
         </a:solidFill>
-        <a:solidFill>
-          <a:schemeClr val="phClr">
-            <a:tint val="95000"/>
-            <a:satMod val="170000"/>
-          </a:schemeClr>
-        </a:solidFill>
+        <a:gradFill rotWithShape="1">
+          <a:gsLst>
+            <a:gs pos="10000">
+              <a:schemeClr val="phClr">
+                <a:tint val="97000"/>
+                <a:hueMod val="92000"/>
+                <a:satMod val="169000"/>
+                <a:lumMod val="164000"/>
+              </a:schemeClr>
+            </a:gs>
+            <a:gs pos="100000">
+              <a:schemeClr val="phClr">
+                <a:shade val="96000"/>
+                <a:satMod val="120000"/>
+                <a:lumMod val="90000"/>
+              </a:schemeClr>
+            </a:gs>
+          </a:gsLst>
+          <a:lin ang="6120000" scaled="1"/>
+        </a:gradFill>
         <a:gradFill rotWithShape="1">
           <a:gsLst>
             <a:gs pos="0">
               <a:schemeClr val="phClr">
-                <a:tint val="93000"/>
-                <a:satMod val="150000"/>
-                <a:shade val="98000"/>
-                <a:lumMod val="102000"/>
-              </a:schemeClr>
-            </a:gs>
-            <a:gs pos="50000">
-              <a:schemeClr val="phClr">
-                <a:tint val="98000"/>
-                <a:satMod val="130000"/>
-                <a:shade val="90000"/>
-                <a:lumMod val="103000"/>
+                <a:tint val="97000"/>
+                <a:hueMod val="92000"/>
+                <a:satMod val="169000"/>
+                <a:lumMod val="164000"/>
               </a:schemeClr>
             </a:gs>
             <a:gs pos="100000">
               <a:schemeClr val="phClr">
-                <a:shade val="63000"/>
+                <a:shade val="96000"/>
                 <a:satMod val="120000"/>
+                <a:lumMod val="90000"/>
               </a:schemeClr>
             </a:gs>
           </a:gsLst>
-          <a:lin ang="5400000" scaled="0"/>
+          <a:path path="circle">
+            <a:fillToRect b="100000"/>
+          </a:path>
         </a:gradFill>
       </a:bgFillStyleLst>
     </a:fmtScheme>
@@ -6592,7 +11033,7 @@
   <a:extraClrSchemeLst/>
   <a:extLst>
     <a:ext uri="{05A4C25C-085E-4340-85A3-A5531E510DB2}">
-      <thm15:themeFamily xmlns:thm15="http://schemas.microsoft.com/office/thememl/2012/main" name="Office Theme" id="{62F939B6-93AF-4DB8-9C6B-D6C7DFDC589F}" vid="{4A3C46E8-61CC-4603-A589-7422A47A8E4A}"/>
+      <thm15:themeFamily xmlns:thm15="http://schemas.microsoft.com/office/thememl/2012/main" name="Slice" id="{0507925B-6AC9-4358-8E18-C330545D08F8}" vid="{13FEC7C6-62A9-40C4-99D2-581AACACAA2F}"/>
     </a:ext>
   </a:extLst>
 </a:theme>

--- a/Eesti_kinnisvaraturu_ja_ostujõu_analüüs_esitlus.pptx
+++ b/Eesti_kinnisvaraturu_ja_ostujõu_analüüs_esitlus.pptx
@@ -1082,7 +1082,7 @@
           <a:p>
             <a:fld id="{6AD6EE87-EBD5-4F12-A48A-63ACA297AC8F}" type="datetimeFigureOut">
               <a:rPr lang="en-US" smtClean="0"/>
-              <a:t>10/6/2026</a:t>
+              <a:t>10/7/2026</a:t>
             </a:fld>
             <a:endParaRPr lang="en-US" dirty="0"/>
           </a:p>
@@ -1521,7 +1521,7 @@
             <a:fld id="{90298CD5-6C1E-4009-B41F-6DF62E31D3BE}" type="datetimeFigureOut">
               <a:rPr lang="en-US" smtClean="0"/>
               <a:pPr/>
-              <a:t>10/6/2026</a:t>
+              <a:t>10/7/2026</a:t>
             </a:fld>
             <a:endParaRPr lang="en-US" dirty="0"/>
           </a:p>
@@ -1774,7 +1774,7 @@
             <a:fld id="{90298CD5-6C1E-4009-B41F-6DF62E31D3BE}" type="datetimeFigureOut">
               <a:rPr lang="en-US" smtClean="0"/>
               <a:pPr/>
-              <a:t>10/6/2026</a:t>
+              <a:t>10/7/2026</a:t>
             </a:fld>
             <a:endParaRPr lang="en-US" dirty="0"/>
           </a:p>
@@ -2085,7 +2085,7 @@
             <a:fld id="{90298CD5-6C1E-4009-B41F-6DF62E31D3BE}" type="datetimeFigureOut">
               <a:rPr lang="en-US" smtClean="0"/>
               <a:pPr/>
-              <a:t>10/6/2026</a:t>
+              <a:t>10/7/2026</a:t>
             </a:fld>
             <a:endParaRPr lang="en-US" dirty="0"/>
           </a:p>
@@ -2406,7 +2406,7 @@
             <a:fld id="{90298CD5-6C1E-4009-B41F-6DF62E31D3BE}" type="datetimeFigureOut">
               <a:rPr lang="en-US" smtClean="0"/>
               <a:pPr/>
-              <a:t>10/6/2026</a:t>
+              <a:t>10/7/2026</a:t>
             </a:fld>
             <a:endParaRPr lang="en-US" dirty="0"/>
           </a:p>
@@ -2711,7 +2711,7 @@
             <a:fld id="{90298CD5-6C1E-4009-B41F-6DF62E31D3BE}" type="datetimeFigureOut">
               <a:rPr lang="en-US" smtClean="0"/>
               <a:pPr/>
-              <a:t>10/6/2026</a:t>
+              <a:t>10/7/2026</a:t>
             </a:fld>
             <a:endParaRPr lang="en-US" dirty="0"/>
           </a:p>
@@ -3081,7 +3081,7 @@
             <a:fld id="{90298CD5-6C1E-4009-B41F-6DF62E31D3BE}" type="datetimeFigureOut">
               <a:rPr lang="en-US" smtClean="0"/>
               <a:pPr/>
-              <a:t>10/6/2026</a:t>
+              <a:t>10/7/2026</a:t>
             </a:fld>
             <a:endParaRPr lang="en-US" dirty="0"/>
           </a:p>
@@ -3258,7 +3258,7 @@
             <a:fld id="{90298CD5-6C1E-4009-B41F-6DF62E31D3BE}" type="datetimeFigureOut">
               <a:rPr lang="en-US" smtClean="0"/>
               <a:pPr/>
-              <a:t>10/6/2026</a:t>
+              <a:t>10/7/2026</a:t>
             </a:fld>
             <a:endParaRPr lang="en-US" dirty="0"/>
           </a:p>
@@ -3441,7 +3441,7 @@
             <a:fld id="{90298CD5-6C1E-4009-B41F-6DF62E31D3BE}" type="datetimeFigureOut">
               <a:rPr lang="en-US" smtClean="0"/>
               <a:pPr/>
-              <a:t>10/6/2026</a:t>
+              <a:t>10/7/2026</a:t>
             </a:fld>
             <a:endParaRPr lang="en-US" dirty="0"/>
           </a:p>
@@ -3669,7 +3669,7 @@
           </a:prstGeom>
           <a:extLst>
             <a:ext uri="{C572A759-6A51-4108-AA02-DFA0A04FC94B}">
-              <ma14:wrappingTextBoxFlag xmlns:ma14="http://schemas.microsoft.com/office/mac/drawingml/2011/main" xmlns="" val="0"/>
+              <ma14:wrappingTextBoxFlag xmlns="" xmlns:ma14="http://schemas.microsoft.com/office/mac/drawingml/2011/main" val="0"/>
             </a:ext>
           </a:extLst>
         </p:spPr>
@@ -3817,7 +3817,7 @@
             <a:fld id="{90298CD5-6C1E-4009-B41F-6DF62E31D3BE}" type="datetimeFigureOut">
               <a:rPr lang="en-US" smtClean="0"/>
               <a:pPr/>
-              <a:t>10/6/2026</a:t>
+              <a:t>10/7/2026</a:t>
             </a:fld>
             <a:endParaRPr lang="en-US" dirty="0"/>
           </a:p>
@@ -4069,7 +4069,7 @@
           <a:p>
             <a:fld id="{5A61015F-7CC6-4D0A-9D87-873EA4C304CC}" type="datetimeFigureOut">
               <a:rPr lang="en-US" smtClean="0"/>
-              <a:t>10/6/2026</a:t>
+              <a:t>10/7/2026</a:t>
             </a:fld>
             <a:endParaRPr lang="en-US" dirty="0"/>
           </a:p>
@@ -4308,7 +4308,7 @@
             <a:fld id="{90298CD5-6C1E-4009-B41F-6DF62E31D3BE}" type="datetimeFigureOut">
               <a:rPr lang="en-US" smtClean="0"/>
               <a:pPr/>
-              <a:t>10/6/2026</a:t>
+              <a:t>10/7/2026</a:t>
             </a:fld>
             <a:endParaRPr lang="en-US" dirty="0"/>
           </a:p>
@@ -4693,7 +4693,7 @@
             <a:fld id="{90298CD5-6C1E-4009-B41F-6DF62E31D3BE}" type="datetimeFigureOut">
               <a:rPr lang="en-US" smtClean="0"/>
               <a:pPr/>
-              <a:t>10/6/2026</a:t>
+              <a:t>10/7/2026</a:t>
             </a:fld>
             <a:endParaRPr lang="en-US" dirty="0"/>
           </a:p>
@@ -4813,7 +4813,7 @@
           <a:p>
             <a:fld id="{67EF4D4C-5367-4C26-9E2B-D8088D7FCA81}" type="datetimeFigureOut">
               <a:rPr lang="en-US" smtClean="0"/>
-              <a:t>10/6/2026</a:t>
+              <a:t>10/7/2026</a:t>
             </a:fld>
             <a:endParaRPr lang="en-US" dirty="0"/>
           </a:p>
@@ -4910,7 +4910,7 @@
           <a:p>
             <a:fld id="{56E91E96-98B0-4413-9547-46F3504108EF}" type="datetimeFigureOut">
               <a:rPr lang="en-US" smtClean="0"/>
-              <a:t>10/6/2026</a:t>
+              <a:t>10/7/2026</a:t>
             </a:fld>
             <a:endParaRPr lang="en-US" dirty="0"/>
           </a:p>
@@ -5168,7 +5168,7 @@
             <a:fld id="{90298CD5-6C1E-4009-B41F-6DF62E31D3BE}" type="datetimeFigureOut">
               <a:rPr lang="en-US" smtClean="0"/>
               <a:pPr/>
-              <a:t>10/6/2026</a:t>
+              <a:t>10/7/2026</a:t>
             </a:fld>
             <a:endParaRPr lang="en-US" dirty="0"/>
           </a:p>
@@ -5453,7 +5453,7 @@
           <a:p>
             <a:fld id="{C7616CA0-919D-4A49-9C8A-62FDFB3A5183}" type="datetimeFigureOut">
               <a:rPr lang="en-US" smtClean="0"/>
-              <a:t>10/6/2026</a:t>
+              <a:t>10/7/2026</a:t>
             </a:fld>
             <a:endParaRPr lang="en-US" dirty="0"/>
           </a:p>
@@ -5862,7 +5862,7 @@
             <a:fld id="{90298CD5-6C1E-4009-B41F-6DF62E31D3BE}" type="datetimeFigureOut">
               <a:rPr lang="en-US" smtClean="0"/>
               <a:pPr/>
-              <a:t>10/6/2026</a:t>
+              <a:t>10/7/2026</a:t>
             </a:fld>
             <a:endParaRPr lang="en-US" dirty="0"/>
           </a:p>
@@ -6570,7 +6570,7 @@
           </a:prstGeom>
           <a:extLst>
             <a:ext uri="{C572A759-6A51-4108-AA02-DFA0A04FC94B}">
-              <ma14:wrappingTextBoxFlag xmlns:ma14="http://schemas.microsoft.com/office/mac/drawingml/2011/main" xmlns="" val="0"/>
+              <ma14:wrappingTextBoxFlag xmlns="" xmlns:ma14="http://schemas.microsoft.com/office/mac/drawingml/2011/main" val="0"/>
             </a:ext>
           </a:extLst>
         </p:spPr>
@@ -8020,7 +8020,7 @@
           </a:prstGeom>
           <a:extLst>
             <a:ext uri="{C572A759-6A51-4108-AA02-DFA0A04FC94B}">
-              <ma14:wrappingTextBoxFlag xmlns:ma14="http://schemas.microsoft.com/office/mac/drawingml/2011/main" xmlns="" val="0"/>
+              <ma14:wrappingTextBoxFlag xmlns="" xmlns:ma14="http://schemas.microsoft.com/office/mac/drawingml/2011/main" val="0"/>
             </a:ext>
           </a:extLst>
         </p:spPr>
@@ -8045,9 +8045,475 @@
           </a:p>
         </p:txBody>
       </p:sp>
+      <p:sp>
+        <p:nvSpPr>
+          <p:cNvPr id="7" name="Text 3"/>
+          <p:cNvSpPr txBox="1"/>
+          <p:nvPr/>
+        </p:nvSpPr>
+        <p:spPr>
+          <a:xfrm>
+            <a:off x="457200" y="4114800"/>
+            <a:ext cx="5669280" cy="320040"/>
+          </a:xfrm>
+          <a:prstGeom prst="rect">
+            <a:avLst/>
+          </a:prstGeom>
+          <a:noFill/>
+          <a:ln/>
+        </p:spPr>
+        <p:txBody>
+          <a:bodyPr wrap="square" lIns="0" tIns="0" rIns="0" bIns="0" rtlCol="0" anchor="ctr"/>
+          <a:lstStyle/>
+          <a:p>
+            <a:pPr marL="0" indent="0">
+              <a:buNone/>
+            </a:pPr>
+            <a:r>
+              <a:rPr lang="en-US" sz="1200" i="1" dirty="0">
+                <a:solidFill>
+                  <a:schemeClr val="accent5"/>
+                </a:solidFill>
+              </a:rPr>
+              <a:t>Kolm avalikku allikat → üks andmebaas → üks raport</a:t>
+            </a:r>
+            <a:endParaRPr lang="en-US" sz="1200" dirty="0"/>
+          </a:p>
+        </p:txBody>
+      </p:sp>
+      <p:sp>
+        <p:nvSpPr>
+          <p:cNvPr id="8" name="Shape 4"/>
+          <p:cNvSpPr/>
+          <p:nvPr/>
+        </p:nvSpPr>
+        <p:spPr>
+          <a:xfrm>
+            <a:off x="6400800" y="1234440"/>
+            <a:ext cx="411480" cy="411480"/>
+          </a:xfrm>
+          <a:prstGeom prst="ellipse">
+            <a:avLst/>
+          </a:prstGeom>
+          <a:solidFill>
+            <a:schemeClr val="accent1"/>
+          </a:solidFill>
+          <a:ln/>
+        </p:spPr>
+      </p:sp>
+      <p:sp>
+        <p:nvSpPr>
+          <p:cNvPr id="9" name="Text 5"/>
+          <p:cNvSpPr txBox="1"/>
+          <p:nvPr/>
+        </p:nvSpPr>
+        <p:spPr>
+          <a:xfrm>
+            <a:off x="6400800" y="1234440"/>
+            <a:ext cx="411480" cy="411480"/>
+          </a:xfrm>
+          <a:prstGeom prst="rect">
+            <a:avLst/>
+          </a:prstGeom>
+          <a:noFill/>
+          <a:ln/>
+        </p:spPr>
+        <p:txBody>
+          <a:bodyPr wrap="square" lIns="0" tIns="0" rIns="0" bIns="0" rtlCol="0" anchor="ctr"/>
+          <a:lstStyle/>
+          <a:p>
+            <a:pPr marL="0" indent="0" algn="ctr">
+              <a:buNone/>
+            </a:pPr>
+            <a:r>
+              <a:rPr lang="en-US" sz="1400" b="1" dirty="0">
+                <a:solidFill>
+                  <a:schemeClr val="bg1"/>
+                </a:solidFill>
+              </a:rPr>
+              <a:t>1</a:t>
+            </a:r>
+            <a:endParaRPr lang="en-US" sz="1400" dirty="0"/>
+          </a:p>
+        </p:txBody>
+      </p:sp>
+      <p:sp>
+        <p:nvSpPr>
+          <p:cNvPr id="10" name="Text 6"/>
+          <p:cNvSpPr txBox="1"/>
+          <p:nvPr/>
+        </p:nvSpPr>
+        <p:spPr>
+          <a:xfrm>
+            <a:off x="6949440" y="1188720"/>
+            <a:ext cx="1783080" cy="777240"/>
+          </a:xfrm>
+          <a:prstGeom prst="rect">
+            <a:avLst/>
+          </a:prstGeom>
+          <a:noFill/>
+          <a:ln/>
+        </p:spPr>
+        <p:txBody>
+          <a:bodyPr wrap="square" lIns="0" tIns="0" rIns="0" bIns="0" rtlCol="0" anchor="t"/>
+          <a:lstStyle/>
+          <a:p>
+            <a:pPr marL="0" indent="0">
+              <a:buNone/>
+            </a:pPr>
+            <a:r>
+              <a:rPr lang="en-US" sz="1600" b="1" dirty="0">
+                <a:solidFill>
+                  <a:schemeClr val="tx2"/>
+                </a:solidFill>
+              </a:rPr>
+              <a:t>Kogu</a:t>
+            </a:r>
+            <a:endParaRPr lang="en-US" sz="1600" dirty="0"/>
+          </a:p>
+          <a:p>
+            <a:pPr marL="0" indent="0">
+              <a:buNone/>
+            </a:pPr>
+            <a:r>
+              <a:rPr lang="en-US" sz="1400" dirty="0">
+                <a:solidFill>
+                  <a:schemeClr val="tx1"/>
+                </a:solidFill>
+              </a:rPr>
+              <a:t>CSV-failid kolmest avalikust allikast</a:t>
+            </a:r>
+            <a:endParaRPr lang="en-US" sz="1600" dirty="0"/>
+          </a:p>
+        </p:txBody>
+      </p:sp>
+      <p:sp>
+        <p:nvSpPr>
+          <p:cNvPr id="11" name="Shape 7"/>
+          <p:cNvSpPr/>
+          <p:nvPr/>
+        </p:nvSpPr>
+        <p:spPr>
+          <a:xfrm>
+            <a:off x="6400800" y="2057400"/>
+            <a:ext cx="411480" cy="411480"/>
+          </a:xfrm>
+          <a:prstGeom prst="ellipse">
+            <a:avLst/>
+          </a:prstGeom>
+          <a:solidFill>
+            <a:schemeClr val="accent3"/>
+          </a:solidFill>
+          <a:ln/>
+        </p:spPr>
+      </p:sp>
+      <p:sp>
+        <p:nvSpPr>
+          <p:cNvPr id="12" name="Text 8"/>
+          <p:cNvSpPr txBox="1"/>
+          <p:nvPr/>
+        </p:nvSpPr>
+        <p:spPr>
+          <a:xfrm>
+            <a:off x="6400800" y="2057400"/>
+            <a:ext cx="411480" cy="411480"/>
+          </a:xfrm>
+          <a:prstGeom prst="rect">
+            <a:avLst/>
+          </a:prstGeom>
+          <a:noFill/>
+          <a:ln/>
+        </p:spPr>
+        <p:txBody>
+          <a:bodyPr wrap="square" lIns="0" tIns="0" rIns="0" bIns="0" rtlCol="0" anchor="ctr"/>
+          <a:lstStyle/>
+          <a:p>
+            <a:pPr marL="0" indent="0" algn="ctr">
+              <a:buNone/>
+            </a:pPr>
+            <a:r>
+              <a:rPr lang="en-US" sz="1400" b="1" dirty="0">
+                <a:solidFill>
+                  <a:schemeClr val="bg1"/>
+                </a:solidFill>
+              </a:rPr>
+              <a:t>2</a:t>
+            </a:r>
+            <a:endParaRPr lang="en-US" sz="1400" dirty="0"/>
+          </a:p>
+        </p:txBody>
+      </p:sp>
+      <p:sp>
+        <p:nvSpPr>
+          <p:cNvPr id="13" name="Text 9"/>
+          <p:cNvSpPr txBox="1"/>
+          <p:nvPr/>
+        </p:nvSpPr>
+        <p:spPr>
+          <a:xfrm>
+            <a:off x="6949440" y="2011680"/>
+            <a:ext cx="1783080" cy="777240"/>
+          </a:xfrm>
+          <a:prstGeom prst="rect">
+            <a:avLst/>
+          </a:prstGeom>
+          <a:noFill/>
+          <a:ln/>
+        </p:spPr>
+        <p:txBody>
+          <a:bodyPr wrap="square" lIns="0" tIns="0" rIns="0" bIns="0" rtlCol="0" anchor="t"/>
+          <a:lstStyle/>
+          <a:p>
+            <a:pPr marL="0" indent="0">
+              <a:buNone/>
+            </a:pPr>
+            <a:r>
+              <a:rPr lang="en-US" sz="1600" b="1" dirty="0">
+                <a:solidFill>
+                  <a:schemeClr val="tx2"/>
+                </a:solidFill>
+              </a:rPr>
+              <a:t>Puhasta</a:t>
+            </a:r>
+            <a:endParaRPr lang="en-US" sz="1600" dirty="0"/>
+          </a:p>
+          <a:p>
+            <a:pPr marL="0" indent="0">
+              <a:buNone/>
+            </a:pPr>
+            <a:r>
+              <a:rPr lang="en-US" sz="1400" dirty="0">
+                <a:solidFill>
+                  <a:schemeClr val="tx1"/>
+                </a:solidFill>
+              </a:rPr>
+              <a:t>Python ühtlustab ja liidab tabelid</a:t>
+            </a:r>
+            <a:endParaRPr lang="en-US" sz="1600" dirty="0"/>
+          </a:p>
+        </p:txBody>
+      </p:sp>
+      <p:sp>
+        <p:nvSpPr>
+          <p:cNvPr id="14" name="Shape 10"/>
+          <p:cNvSpPr/>
+          <p:nvPr/>
+        </p:nvSpPr>
+        <p:spPr>
+          <a:xfrm>
+            <a:off x="6400800" y="2880360"/>
+            <a:ext cx="411480" cy="411480"/>
+          </a:xfrm>
+          <a:prstGeom prst="ellipse">
+            <a:avLst/>
+          </a:prstGeom>
+          <a:solidFill>
+            <a:schemeClr val="accent4"/>
+          </a:solidFill>
+          <a:ln/>
+        </p:spPr>
+      </p:sp>
+      <p:sp>
+        <p:nvSpPr>
+          <p:cNvPr id="15" name="Text 11"/>
+          <p:cNvSpPr txBox="1"/>
+          <p:nvPr/>
+        </p:nvSpPr>
+        <p:spPr>
+          <a:xfrm>
+            <a:off x="6400800" y="2880360"/>
+            <a:ext cx="411480" cy="411480"/>
+          </a:xfrm>
+          <a:prstGeom prst="rect">
+            <a:avLst/>
+          </a:prstGeom>
+          <a:noFill/>
+          <a:ln/>
+        </p:spPr>
+        <p:txBody>
+          <a:bodyPr wrap="square" lIns="0" tIns="0" rIns="0" bIns="0" rtlCol="0" anchor="ctr"/>
+          <a:lstStyle/>
+          <a:p>
+            <a:pPr marL="0" indent="0" algn="ctr">
+              <a:buNone/>
+            </a:pPr>
+            <a:r>
+              <a:rPr lang="en-US" sz="1400" b="1" dirty="0">
+                <a:solidFill>
+                  <a:schemeClr val="bg1"/>
+                </a:solidFill>
+              </a:rPr>
+              <a:t>3</a:t>
+            </a:r>
+            <a:endParaRPr lang="en-US" sz="1400" dirty="0"/>
+          </a:p>
+        </p:txBody>
+      </p:sp>
+      <p:sp>
+        <p:nvSpPr>
+          <p:cNvPr id="16" name="Text 12"/>
+          <p:cNvSpPr txBox="1"/>
+          <p:nvPr/>
+        </p:nvSpPr>
+        <p:spPr>
+          <a:xfrm>
+            <a:off x="6949440" y="2834640"/>
+            <a:ext cx="1783080" cy="777240"/>
+          </a:xfrm>
+          <a:prstGeom prst="rect">
+            <a:avLst/>
+          </a:prstGeom>
+          <a:noFill/>
+          <a:ln/>
+        </p:spPr>
+        <p:txBody>
+          <a:bodyPr wrap="square" lIns="0" tIns="0" rIns="0" bIns="0" rtlCol="0" anchor="t"/>
+          <a:lstStyle/>
+          <a:p>
+            <a:pPr marL="0" indent="0">
+              <a:buNone/>
+            </a:pPr>
+            <a:r>
+              <a:rPr lang="en-US" sz="1600" b="1" dirty="0">
+                <a:solidFill>
+                  <a:schemeClr val="tx2"/>
+                </a:solidFill>
+              </a:rPr>
+              <a:t>Modelleeri</a:t>
+            </a:r>
+            <a:endParaRPr lang="en-US" sz="1600" dirty="0"/>
+          </a:p>
+          <a:p>
+            <a:pPr marL="0" indent="0">
+              <a:buNone/>
+            </a:pPr>
+            <a:r>
+              <a:rPr lang="en-US" sz="1400" dirty="0">
+                <a:solidFill>
+                  <a:schemeClr val="tx1"/>
+                </a:solidFill>
+              </a:rPr>
+              <a:t>PostgreSQL tähtskeem andmemudelina</a:t>
+            </a:r>
+            <a:endParaRPr lang="en-US" sz="1600" dirty="0"/>
+          </a:p>
+        </p:txBody>
+      </p:sp>
+      <p:sp>
+        <p:nvSpPr>
+          <p:cNvPr id="17" name="Shape 13"/>
+          <p:cNvSpPr/>
+          <p:nvPr/>
+        </p:nvSpPr>
+        <p:spPr>
+          <a:xfrm>
+            <a:off x="6400800" y="3703320"/>
+            <a:ext cx="411480" cy="411480"/>
+          </a:xfrm>
+          <a:prstGeom prst="ellipse">
+            <a:avLst/>
+          </a:prstGeom>
+          <a:solidFill>
+            <a:schemeClr val="accent2"/>
+          </a:solidFill>
+          <a:ln/>
+        </p:spPr>
+      </p:sp>
+      <p:sp>
+        <p:nvSpPr>
+          <p:cNvPr id="18" name="Text 14"/>
+          <p:cNvSpPr txBox="1"/>
+          <p:nvPr/>
+        </p:nvSpPr>
+        <p:spPr>
+          <a:xfrm>
+            <a:off x="6400800" y="3703320"/>
+            <a:ext cx="411480" cy="411480"/>
+          </a:xfrm>
+          <a:prstGeom prst="rect">
+            <a:avLst/>
+          </a:prstGeom>
+          <a:noFill/>
+          <a:ln/>
+        </p:spPr>
+        <p:txBody>
+          <a:bodyPr wrap="square" lIns="0" tIns="0" rIns="0" bIns="0" rtlCol="0" anchor="ctr"/>
+          <a:lstStyle/>
+          <a:p>
+            <a:pPr marL="0" indent="0" algn="ctr">
+              <a:buNone/>
+            </a:pPr>
+            <a:r>
+              <a:rPr lang="en-US" sz="1400" b="1" dirty="0">
+                <a:solidFill>
+                  <a:schemeClr val="tx1"/>
+                </a:solidFill>
+              </a:rPr>
+              <a:t>4</a:t>
+            </a:r>
+            <a:endParaRPr lang="en-US" sz="1400" dirty="0"/>
+          </a:p>
+        </p:txBody>
+      </p:sp>
+      <p:sp>
+        <p:nvSpPr>
+          <p:cNvPr id="19" name="Text 15"/>
+          <p:cNvSpPr txBox="1"/>
+          <p:nvPr/>
+        </p:nvSpPr>
+        <p:spPr>
+          <a:xfrm>
+            <a:off x="6949440" y="3657600"/>
+            <a:ext cx="1783080" cy="777240"/>
+          </a:xfrm>
+          <a:prstGeom prst="rect">
+            <a:avLst/>
+          </a:prstGeom>
+          <a:noFill/>
+          <a:ln/>
+        </p:spPr>
+        <p:txBody>
+          <a:bodyPr wrap="square" lIns="0" tIns="0" rIns="0" bIns="0" rtlCol="0" anchor="t"/>
+          <a:lstStyle/>
+          <a:p>
+            <a:pPr marL="0" indent="0">
+              <a:buNone/>
+            </a:pPr>
+            <a:r>
+              <a:rPr lang="et-EE" sz="1600" b="1" dirty="0">
+                <a:solidFill>
+                  <a:schemeClr val="tx2"/>
+                </a:solidFill>
+              </a:rPr>
+              <a:t>Visualiseeri</a:t>
+            </a:r>
+            <a:endParaRPr lang="en-US" sz="1600" dirty="0"/>
+          </a:p>
+          <a:p>
+            <a:pPr marL="0" indent="0">
+              <a:buNone/>
+            </a:pPr>
+            <a:r>
+              <a:rPr lang="en-US" sz="1400" dirty="0">
+                <a:solidFill>
+                  <a:schemeClr val="tx1"/>
+                </a:solidFill>
+              </a:rPr>
+              <a:t>Power BI aruanded ja 3 äppi</a:t>
+            </a:r>
+            <a:endParaRPr lang="en-US" sz="1600" dirty="0"/>
+          </a:p>
+        </p:txBody>
+      </p:sp>
       <p:pic>
         <p:nvPicPr>
-          <p:cNvPr id="6" name="Arhitektuuri plokkskeem" descr="Andmevoo plokkskeem: allikad, Python/Pandas, PostgreSQL, Power BI"/>
+          <p:cNvPr id="4" name="Picture 3">
+            <a:extLst>
+              <a:ext uri="{FF2B5EF4-FFF2-40B4-BE49-F238E27FC236}">
+                <a16:creationId xmlns:a16="http://schemas.microsoft.com/office/drawing/2014/main" id="{1CA8D0A2-0C76-8AE8-A52C-E69490A799EE}"/>
+              </a:ext>
+            </a:extLst>
+          </p:cNvPr>
           <p:cNvPicPr>
             <a:picLocks noChangeAspect="1"/>
           </p:cNvPicPr>
@@ -8061,474 +8527,14 @@
         </p:blipFill>
         <p:spPr>
           <a:xfrm>
-            <a:off x="457200" y="1188720"/>
-            <a:ext cx="5669280" cy="2831897"/>
+            <a:off x="535798" y="1205083"/>
+            <a:ext cx="5512083" cy="2863997"/>
           </a:xfrm>
           <a:prstGeom prst="rect">
             <a:avLst/>
           </a:prstGeom>
         </p:spPr>
       </p:pic>
-      <p:sp>
-        <p:nvSpPr>
-          <p:cNvPr id="7" name="Text 3"/>
-          <p:cNvSpPr txBox="1"/>
-          <p:nvPr/>
-        </p:nvSpPr>
-        <p:spPr>
-          <a:xfrm>
-            <a:off x="457200" y="4114800"/>
-            <a:ext cx="5669280" cy="320040"/>
-          </a:xfrm>
-          <a:prstGeom prst="rect">
-            <a:avLst/>
-          </a:prstGeom>
-          <a:noFill/>
-          <a:ln/>
-        </p:spPr>
-        <p:txBody>
-          <a:bodyPr wrap="square" lIns="0" tIns="0" rIns="0" bIns="0" rtlCol="0" anchor="ctr"/>
-          <a:lstStyle/>
-          <a:p>
-            <a:pPr marL="0" indent="0">
-              <a:buNone/>
-            </a:pPr>
-            <a:r>
-              <a:rPr lang="en-US" sz="1200" i="1" dirty="0">
-                <a:solidFill>
-                  <a:schemeClr val="accent5"/>
-                </a:solidFill>
-              </a:rPr>
-              <a:t>Kolm avalikku allikat → üks andmebaas → üks raport</a:t>
-            </a:r>
-            <a:endParaRPr lang="en-US" sz="1200" dirty="0"/>
-          </a:p>
-        </p:txBody>
-      </p:sp>
-      <p:sp>
-        <p:nvSpPr>
-          <p:cNvPr id="8" name="Shape 4"/>
-          <p:cNvSpPr/>
-          <p:nvPr/>
-        </p:nvSpPr>
-        <p:spPr>
-          <a:xfrm>
-            <a:off x="6400800" y="1234440"/>
-            <a:ext cx="411480" cy="411480"/>
-          </a:xfrm>
-          <a:prstGeom prst="ellipse">
-            <a:avLst/>
-          </a:prstGeom>
-          <a:solidFill>
-            <a:schemeClr val="accent1"/>
-          </a:solidFill>
-          <a:ln/>
-        </p:spPr>
-      </p:sp>
-      <p:sp>
-        <p:nvSpPr>
-          <p:cNvPr id="9" name="Text 5"/>
-          <p:cNvSpPr txBox="1"/>
-          <p:nvPr/>
-        </p:nvSpPr>
-        <p:spPr>
-          <a:xfrm>
-            <a:off x="6400800" y="1234440"/>
-            <a:ext cx="411480" cy="411480"/>
-          </a:xfrm>
-          <a:prstGeom prst="rect">
-            <a:avLst/>
-          </a:prstGeom>
-          <a:noFill/>
-          <a:ln/>
-        </p:spPr>
-        <p:txBody>
-          <a:bodyPr wrap="square" lIns="0" tIns="0" rIns="0" bIns="0" rtlCol="0" anchor="ctr"/>
-          <a:lstStyle/>
-          <a:p>
-            <a:pPr marL="0" indent="0" algn="ctr">
-              <a:buNone/>
-            </a:pPr>
-            <a:r>
-              <a:rPr lang="en-US" sz="1400" b="1" dirty="0">
-                <a:solidFill>
-                  <a:schemeClr val="bg1"/>
-                </a:solidFill>
-              </a:rPr>
-              <a:t>1</a:t>
-            </a:r>
-            <a:endParaRPr lang="en-US" sz="1400" dirty="0"/>
-          </a:p>
-        </p:txBody>
-      </p:sp>
-      <p:sp>
-        <p:nvSpPr>
-          <p:cNvPr id="10" name="Text 6"/>
-          <p:cNvSpPr txBox="1"/>
-          <p:nvPr/>
-        </p:nvSpPr>
-        <p:spPr>
-          <a:xfrm>
-            <a:off x="6949440" y="1188720"/>
-            <a:ext cx="1783080" cy="777240"/>
-          </a:xfrm>
-          <a:prstGeom prst="rect">
-            <a:avLst/>
-          </a:prstGeom>
-          <a:noFill/>
-          <a:ln/>
-        </p:spPr>
-        <p:txBody>
-          <a:bodyPr wrap="square" lIns="0" tIns="0" rIns="0" bIns="0" rtlCol="0" anchor="t"/>
-          <a:lstStyle/>
-          <a:p>
-            <a:pPr marL="0" indent="0">
-              <a:buNone/>
-            </a:pPr>
-            <a:r>
-              <a:rPr lang="en-US" sz="1600" b="1" dirty="0">
-                <a:solidFill>
-                  <a:schemeClr val="tx2"/>
-                </a:solidFill>
-              </a:rPr>
-              <a:t>Kogu</a:t>
-            </a:r>
-            <a:endParaRPr lang="en-US" sz="1600" dirty="0"/>
-          </a:p>
-          <a:p>
-            <a:pPr marL="0" indent="0">
-              <a:buNone/>
-            </a:pPr>
-            <a:r>
-              <a:rPr lang="en-US" sz="1400" dirty="0">
-                <a:solidFill>
-                  <a:schemeClr val="tx1"/>
-                </a:solidFill>
-              </a:rPr>
-              <a:t>CSV-failid kolmest avalikust allikast</a:t>
-            </a:r>
-            <a:endParaRPr lang="en-US" sz="1600" dirty="0"/>
-          </a:p>
-        </p:txBody>
-      </p:sp>
-      <p:sp>
-        <p:nvSpPr>
-          <p:cNvPr id="11" name="Shape 7"/>
-          <p:cNvSpPr/>
-          <p:nvPr/>
-        </p:nvSpPr>
-        <p:spPr>
-          <a:xfrm>
-            <a:off x="6400800" y="2057400"/>
-            <a:ext cx="411480" cy="411480"/>
-          </a:xfrm>
-          <a:prstGeom prst="ellipse">
-            <a:avLst/>
-          </a:prstGeom>
-          <a:solidFill>
-            <a:schemeClr val="accent3"/>
-          </a:solidFill>
-          <a:ln/>
-        </p:spPr>
-      </p:sp>
-      <p:sp>
-        <p:nvSpPr>
-          <p:cNvPr id="12" name="Text 8"/>
-          <p:cNvSpPr txBox="1"/>
-          <p:nvPr/>
-        </p:nvSpPr>
-        <p:spPr>
-          <a:xfrm>
-            <a:off x="6400800" y="2057400"/>
-            <a:ext cx="411480" cy="411480"/>
-          </a:xfrm>
-          <a:prstGeom prst="rect">
-            <a:avLst/>
-          </a:prstGeom>
-          <a:noFill/>
-          <a:ln/>
-        </p:spPr>
-        <p:txBody>
-          <a:bodyPr wrap="square" lIns="0" tIns="0" rIns="0" bIns="0" rtlCol="0" anchor="ctr"/>
-          <a:lstStyle/>
-          <a:p>
-            <a:pPr marL="0" indent="0" algn="ctr">
-              <a:buNone/>
-            </a:pPr>
-            <a:r>
-              <a:rPr lang="en-US" sz="1400" b="1" dirty="0">
-                <a:solidFill>
-                  <a:schemeClr val="bg1"/>
-                </a:solidFill>
-              </a:rPr>
-              <a:t>2</a:t>
-            </a:r>
-            <a:endParaRPr lang="en-US" sz="1400" dirty="0"/>
-          </a:p>
-        </p:txBody>
-      </p:sp>
-      <p:sp>
-        <p:nvSpPr>
-          <p:cNvPr id="13" name="Text 9"/>
-          <p:cNvSpPr txBox="1"/>
-          <p:nvPr/>
-        </p:nvSpPr>
-        <p:spPr>
-          <a:xfrm>
-            <a:off x="6949440" y="2011680"/>
-            <a:ext cx="1783080" cy="777240"/>
-          </a:xfrm>
-          <a:prstGeom prst="rect">
-            <a:avLst/>
-          </a:prstGeom>
-          <a:noFill/>
-          <a:ln/>
-        </p:spPr>
-        <p:txBody>
-          <a:bodyPr wrap="square" lIns="0" tIns="0" rIns="0" bIns="0" rtlCol="0" anchor="t"/>
-          <a:lstStyle/>
-          <a:p>
-            <a:pPr marL="0" indent="0">
-              <a:buNone/>
-            </a:pPr>
-            <a:r>
-              <a:rPr lang="en-US" sz="1600" b="1" dirty="0">
-                <a:solidFill>
-                  <a:schemeClr val="tx2"/>
-                </a:solidFill>
-              </a:rPr>
-              <a:t>Puhasta</a:t>
-            </a:r>
-            <a:endParaRPr lang="en-US" sz="1600" dirty="0"/>
-          </a:p>
-          <a:p>
-            <a:pPr marL="0" indent="0">
-              <a:buNone/>
-            </a:pPr>
-            <a:r>
-              <a:rPr lang="en-US" sz="1400" dirty="0">
-                <a:solidFill>
-                  <a:schemeClr val="tx1"/>
-                </a:solidFill>
-              </a:rPr>
-              <a:t>Python ühtlustab ja liidab tabelid</a:t>
-            </a:r>
-            <a:endParaRPr lang="en-US" sz="1600" dirty="0"/>
-          </a:p>
-        </p:txBody>
-      </p:sp>
-      <p:sp>
-        <p:nvSpPr>
-          <p:cNvPr id="14" name="Shape 10"/>
-          <p:cNvSpPr/>
-          <p:nvPr/>
-        </p:nvSpPr>
-        <p:spPr>
-          <a:xfrm>
-            <a:off x="6400800" y="2880360"/>
-            <a:ext cx="411480" cy="411480"/>
-          </a:xfrm>
-          <a:prstGeom prst="ellipse">
-            <a:avLst/>
-          </a:prstGeom>
-          <a:solidFill>
-            <a:schemeClr val="accent4"/>
-          </a:solidFill>
-          <a:ln/>
-        </p:spPr>
-      </p:sp>
-      <p:sp>
-        <p:nvSpPr>
-          <p:cNvPr id="15" name="Text 11"/>
-          <p:cNvSpPr txBox="1"/>
-          <p:nvPr/>
-        </p:nvSpPr>
-        <p:spPr>
-          <a:xfrm>
-            <a:off x="6400800" y="2880360"/>
-            <a:ext cx="411480" cy="411480"/>
-          </a:xfrm>
-          <a:prstGeom prst="rect">
-            <a:avLst/>
-          </a:prstGeom>
-          <a:noFill/>
-          <a:ln/>
-        </p:spPr>
-        <p:txBody>
-          <a:bodyPr wrap="square" lIns="0" tIns="0" rIns="0" bIns="0" rtlCol="0" anchor="ctr"/>
-          <a:lstStyle/>
-          <a:p>
-            <a:pPr marL="0" indent="0" algn="ctr">
-              <a:buNone/>
-            </a:pPr>
-            <a:r>
-              <a:rPr lang="en-US" sz="1400" b="1" dirty="0">
-                <a:solidFill>
-                  <a:schemeClr val="bg1"/>
-                </a:solidFill>
-              </a:rPr>
-              <a:t>3</a:t>
-            </a:r>
-            <a:endParaRPr lang="en-US" sz="1400" dirty="0"/>
-          </a:p>
-        </p:txBody>
-      </p:sp>
-      <p:sp>
-        <p:nvSpPr>
-          <p:cNvPr id="16" name="Text 12"/>
-          <p:cNvSpPr txBox="1"/>
-          <p:nvPr/>
-        </p:nvSpPr>
-        <p:spPr>
-          <a:xfrm>
-            <a:off x="6949440" y="2834640"/>
-            <a:ext cx="1783080" cy="777240"/>
-          </a:xfrm>
-          <a:prstGeom prst="rect">
-            <a:avLst/>
-          </a:prstGeom>
-          <a:noFill/>
-          <a:ln/>
-        </p:spPr>
-        <p:txBody>
-          <a:bodyPr wrap="square" lIns="0" tIns="0" rIns="0" bIns="0" rtlCol="0" anchor="t"/>
-          <a:lstStyle/>
-          <a:p>
-            <a:pPr marL="0" indent="0">
-              <a:buNone/>
-            </a:pPr>
-            <a:r>
-              <a:rPr lang="en-US" sz="1600" b="1" dirty="0">
-                <a:solidFill>
-                  <a:schemeClr val="tx2"/>
-                </a:solidFill>
-              </a:rPr>
-              <a:t>Modelleeri</a:t>
-            </a:r>
-            <a:endParaRPr lang="en-US" sz="1600" dirty="0"/>
-          </a:p>
-          <a:p>
-            <a:pPr marL="0" indent="0">
-              <a:buNone/>
-            </a:pPr>
-            <a:r>
-              <a:rPr lang="en-US" sz="1400" dirty="0">
-                <a:solidFill>
-                  <a:schemeClr val="tx1"/>
-                </a:solidFill>
-              </a:rPr>
-              <a:t>PostgreSQL tähtskeem andmemudelina</a:t>
-            </a:r>
-            <a:endParaRPr lang="en-US" sz="1600" dirty="0"/>
-          </a:p>
-        </p:txBody>
-      </p:sp>
-      <p:sp>
-        <p:nvSpPr>
-          <p:cNvPr id="17" name="Shape 13"/>
-          <p:cNvSpPr/>
-          <p:nvPr/>
-        </p:nvSpPr>
-        <p:spPr>
-          <a:xfrm>
-            <a:off x="6400800" y="3703320"/>
-            <a:ext cx="411480" cy="411480"/>
-          </a:xfrm>
-          <a:prstGeom prst="ellipse">
-            <a:avLst/>
-          </a:prstGeom>
-          <a:solidFill>
-            <a:schemeClr val="accent2"/>
-          </a:solidFill>
-          <a:ln/>
-        </p:spPr>
-      </p:sp>
-      <p:sp>
-        <p:nvSpPr>
-          <p:cNvPr id="18" name="Text 14"/>
-          <p:cNvSpPr txBox="1"/>
-          <p:nvPr/>
-        </p:nvSpPr>
-        <p:spPr>
-          <a:xfrm>
-            <a:off x="6400800" y="3703320"/>
-            <a:ext cx="411480" cy="411480"/>
-          </a:xfrm>
-          <a:prstGeom prst="rect">
-            <a:avLst/>
-          </a:prstGeom>
-          <a:noFill/>
-          <a:ln/>
-        </p:spPr>
-        <p:txBody>
-          <a:bodyPr wrap="square" lIns="0" tIns="0" rIns="0" bIns="0" rtlCol="0" anchor="ctr"/>
-          <a:lstStyle/>
-          <a:p>
-            <a:pPr marL="0" indent="0" algn="ctr">
-              <a:buNone/>
-            </a:pPr>
-            <a:r>
-              <a:rPr lang="en-US" sz="1400" b="1" dirty="0">
-                <a:solidFill>
-                  <a:schemeClr val="tx1"/>
-                </a:solidFill>
-              </a:rPr>
-              <a:t>4</a:t>
-            </a:r>
-            <a:endParaRPr lang="en-US" sz="1400" dirty="0"/>
-          </a:p>
-        </p:txBody>
-      </p:sp>
-      <p:sp>
-        <p:nvSpPr>
-          <p:cNvPr id="19" name="Text 15"/>
-          <p:cNvSpPr txBox="1"/>
-          <p:nvPr/>
-        </p:nvSpPr>
-        <p:spPr>
-          <a:xfrm>
-            <a:off x="6949440" y="3657600"/>
-            <a:ext cx="1783080" cy="777240"/>
-          </a:xfrm>
-          <a:prstGeom prst="rect">
-            <a:avLst/>
-          </a:prstGeom>
-          <a:noFill/>
-          <a:ln/>
-        </p:spPr>
-        <p:txBody>
-          <a:bodyPr wrap="square" lIns="0" tIns="0" rIns="0" bIns="0" rtlCol="0" anchor="t"/>
-          <a:lstStyle/>
-          <a:p>
-            <a:pPr marL="0" indent="0">
-              <a:buNone/>
-            </a:pPr>
-            <a:r>
-              <a:rPr lang="et-EE" sz="1600" b="1" dirty="0">
-                <a:solidFill>
-                  <a:schemeClr val="tx2"/>
-                </a:solidFill>
-              </a:rPr>
-              <a:t>Visualiseeri</a:t>
-            </a:r>
-            <a:endParaRPr lang="en-US" sz="1600" dirty="0"/>
-          </a:p>
-          <a:p>
-            <a:pPr marL="0" indent="0">
-              <a:buNone/>
-            </a:pPr>
-            <a:r>
-              <a:rPr lang="en-US" sz="1400" dirty="0">
-                <a:solidFill>
-                  <a:schemeClr val="tx1"/>
-                </a:solidFill>
-              </a:rPr>
-              <a:t>Power BI aruanded ja 3 äppi</a:t>
-            </a:r>
-            <a:endParaRPr lang="en-US" sz="1600" dirty="0"/>
-          </a:p>
-        </p:txBody>
-      </p:sp>
     </p:spTree>
   </p:cSld>
   <p:clrMapOvr>
@@ -8610,7 +8616,7 @@
           </a:prstGeom>
           <a:extLst>
             <a:ext uri="{C572A759-6A51-4108-AA02-DFA0A04FC94B}">
-              <ma14:wrappingTextBoxFlag xmlns:ma14="http://schemas.microsoft.com/office/mac/drawingml/2011/main" xmlns="" val="0"/>
+              <ma14:wrappingTextBoxFlag xmlns="" xmlns:ma14="http://schemas.microsoft.com/office/mac/drawingml/2011/main" val="0"/>
             </a:ext>
           </a:extLst>
         </p:spPr>
@@ -8644,7 +8650,7 @@
         <p:spPr>
           <a:xfrm>
             <a:off x="457200" y="1188720"/>
-            <a:ext cx="4663440" cy="1005840"/>
+            <a:ext cx="4114800" cy="1005840"/>
           </a:xfrm>
           <a:prstGeom prst="roundRect">
             <a:avLst>
@@ -8772,7 +8778,7 @@
         <p:spPr>
           <a:xfrm>
             <a:off x="457200" y="2331720"/>
-            <a:ext cx="4663440" cy="1005840"/>
+            <a:ext cx="4114800" cy="1005840"/>
           </a:xfrm>
           <a:prstGeom prst="roundRect">
             <a:avLst>
@@ -8850,7 +8856,7 @@
         <p:spPr>
           <a:xfrm>
             <a:off x="1280160" y="2377440"/>
-            <a:ext cx="3703320" cy="914400"/>
+            <a:ext cx="3177540" cy="914400"/>
           </a:xfrm>
           <a:prstGeom prst="rect">
             <a:avLst/>
@@ -8900,7 +8906,7 @@
         <p:spPr>
           <a:xfrm>
             <a:off x="457200" y="3474720"/>
-            <a:ext cx="4663440" cy="1005840"/>
+            <a:ext cx="4114800" cy="1005840"/>
           </a:xfrm>
           <a:prstGeom prst="roundRect">
             <a:avLst>
@@ -8978,7 +8984,7 @@
         <p:spPr>
           <a:xfrm>
             <a:off x="1280160" y="3520440"/>
-            <a:ext cx="3703320" cy="914400"/>
+            <a:ext cx="3291840" cy="914400"/>
           </a:xfrm>
           <a:prstGeom prst="rect">
             <a:avLst/>
@@ -9019,9 +9025,51 @@
           </a:p>
         </p:txBody>
       </p:sp>
+      <p:sp>
+        <p:nvSpPr>
+          <p:cNvPr id="19" name="Text 15"/>
+          <p:cNvSpPr txBox="1"/>
+          <p:nvPr/>
+        </p:nvSpPr>
+        <p:spPr>
+          <a:xfrm>
+            <a:off x="5486400" y="3840480"/>
+            <a:ext cx="3200400" cy="320040"/>
+          </a:xfrm>
+          <a:prstGeom prst="rect">
+            <a:avLst/>
+          </a:prstGeom>
+          <a:noFill/>
+          <a:ln/>
+        </p:spPr>
+        <p:txBody>
+          <a:bodyPr wrap="square" lIns="0" tIns="0" rIns="0" bIns="0" rtlCol="0" anchor="ctr"/>
+          <a:lstStyle/>
+          <a:p>
+            <a:pPr marL="0" indent="0">
+              <a:buNone/>
+            </a:pPr>
+            <a:r>
+              <a:rPr lang="en-US" sz="1200" i="1" dirty="0">
+                <a:solidFill>
+                  <a:schemeClr val="accent5"/>
+                </a:solidFill>
+              </a:rPr>
+              <a:t>Tähtskeem: 4 faktitabelit, 2 dimensiooni</a:t>
+            </a:r>
+            <a:endParaRPr lang="en-US" sz="1200" dirty="0"/>
+          </a:p>
+        </p:txBody>
+      </p:sp>
       <p:pic>
         <p:nvPicPr>
-          <p:cNvPr id="18" name="Tähtskeem" descr="PostgreSQL tähtskeem"/>
+          <p:cNvPr id="20" name="Picture 19">
+            <a:extLst>
+              <a:ext uri="{FF2B5EF4-FFF2-40B4-BE49-F238E27FC236}">
+                <a16:creationId xmlns:a16="http://schemas.microsoft.com/office/drawing/2014/main" id="{FAB2BA91-E95E-480F-D85F-4E174F184D41}"/>
+              </a:ext>
+            </a:extLst>
+          </p:cNvPr>
           <p:cNvPicPr>
             <a:picLocks noChangeAspect="1"/>
           </p:cNvPicPr>
@@ -9035,50 +9083,14 @@
         </p:blipFill>
         <p:spPr>
           <a:xfrm>
-            <a:off x="5486400" y="1188720"/>
-            <a:ext cx="3200400" cy="2388413"/>
+            <a:off x="4754880" y="998541"/>
+            <a:ext cx="4167435" cy="2757797"/>
           </a:xfrm>
           <a:prstGeom prst="rect">
             <a:avLst/>
           </a:prstGeom>
         </p:spPr>
       </p:pic>
-      <p:sp>
-        <p:nvSpPr>
-          <p:cNvPr id="19" name="Text 15"/>
-          <p:cNvSpPr txBox="1"/>
-          <p:nvPr/>
-        </p:nvSpPr>
-        <p:spPr>
-          <a:xfrm>
-            <a:off x="5486400" y="3840480"/>
-            <a:ext cx="3200400" cy="320040"/>
-          </a:xfrm>
-          <a:prstGeom prst="rect">
-            <a:avLst/>
-          </a:prstGeom>
-          <a:noFill/>
-          <a:ln/>
-        </p:spPr>
-        <p:txBody>
-          <a:bodyPr wrap="square" lIns="0" tIns="0" rIns="0" bIns="0" rtlCol="0" anchor="ctr"/>
-          <a:lstStyle/>
-          <a:p>
-            <a:pPr marL="0" indent="0">
-              <a:buNone/>
-            </a:pPr>
-            <a:r>
-              <a:rPr lang="en-US" sz="1200" i="1" dirty="0">
-                <a:solidFill>
-                  <a:schemeClr val="accent5"/>
-                </a:solidFill>
-              </a:rPr>
-              <a:t>Tähtskeem: 4 faktitabelit, 2 dimensiooni</a:t>
-            </a:r>
-            <a:endParaRPr lang="en-US" sz="1200" dirty="0"/>
-          </a:p>
-        </p:txBody>
-      </p:sp>
     </p:spTree>
   </p:cSld>
   <p:clrMapOvr>
@@ -9160,7 +9172,7 @@
           </a:prstGeom>
           <a:extLst>
             <a:ext uri="{C572A759-6A51-4108-AA02-DFA0A04FC94B}">
-              <ma14:wrappingTextBoxFlag xmlns:ma14="http://schemas.microsoft.com/office/mac/drawingml/2011/main" xmlns="" val="0"/>
+              <ma14:wrappingTextBoxFlag xmlns="" xmlns:ma14="http://schemas.microsoft.com/office/mac/drawingml/2011/main" val="0"/>
             </a:ext>
           </a:extLst>
         </p:spPr>
@@ -10012,7 +10024,7 @@
           </a:prstGeom>
           <a:extLst>
             <a:ext uri="{C572A759-6A51-4108-AA02-DFA0A04FC94B}">
-              <ma14:wrappingTextBoxFlag xmlns:ma14="http://schemas.microsoft.com/office/mac/drawingml/2011/main" xmlns="" val="0"/>
+              <ma14:wrappingTextBoxFlag xmlns="" xmlns:ma14="http://schemas.microsoft.com/office/mac/drawingml/2011/main" val="0"/>
             </a:ext>
           </a:extLst>
         </p:spPr>
